--- a/athr-pitch-ar.pptx
+++ b/athr-pitch-ar.pptx
@@ -3275,11 +3275,11 @@
         <p:spPr>
           <a:xfrm>
             <a:off x="5440680" y="1371600"/>
-            <a:ext cx="6080760" cy="3977640"/>
+            <a:ext cx="6080760" cy="4389120"/>
           </a:xfrm>
           <a:prstGeom prst="roundRect">
             <a:avLst>
-              <a:gd name="adj" fmla="val 2759"/>
+              <a:gd name="adj" fmla="val 2500"/>
             </a:avLst>
           </a:prstGeom>
           <a:solidFill>
@@ -3467,11 +3467,11 @@
         <p:spPr>
           <a:xfrm>
             <a:off x="640080" y="1371600"/>
-            <a:ext cx="4572000" cy="896112"/>
+            <a:ext cx="4572000" cy="978408"/>
           </a:xfrm>
           <a:prstGeom prst="roundRect">
             <a:avLst>
-              <a:gd name="adj" fmla="val 12245"/>
+              <a:gd name="adj" fmla="val 11215"/>
             </a:avLst>
           </a:prstGeom>
           <a:solidFill>
@@ -3493,7 +3493,46 @@
         </p:nvSpPr>
         <p:spPr>
           <a:xfrm>
-            <a:off x="914400" y="1472184"/>
+            <a:off x="914400" y="1499616"/>
+            <a:ext cx="4023360" cy="365760"/>
+          </a:xfrm>
+          <a:prstGeom prst="rect">
+            <a:avLst/>
+          </a:prstGeom>
+          <a:noFill/>
+          <a:ln/>
+        </p:spPr>
+        <p:txBody>
+          <a:bodyPr wrap="square" lIns="0" tIns="0" rIns="0" bIns="0" rtlCol="0" anchor="ctr"/>
+          <a:lstStyle/>
+          <a:p>
+            <a:pPr rtl="1" algn="r" indent="0" marL="0">
+              <a:buNone/>
+            </a:pPr>
+            <a:r>
+              <a:rPr lang="en-US" sz="1600" b="1" dirty="0">
+                <a:solidFill>
+                  <a:srgbClr val="EFAE6E"/>
+                </a:solidFill>
+                <a:latin typeface="Arial" pitchFamily="34" charset="0"/>
+                <a:ea typeface="Arial" pitchFamily="34" charset="-122"/>
+                <a:cs typeface="Arial" pitchFamily="34" charset="-120"/>
+              </a:rPr>
+              <a:t>يميّز الأمثلة</a:t>
+            </a:r>
+            <a:endParaRPr lang="en-US" sz="1600" dirty="0"/>
+          </a:p>
+        </p:txBody>
+      </p:sp>
+      <p:sp>
+        <p:nvSpPr>
+          <p:cNvPr id="10" name="Text 8"/>
+          <p:cNvSpPr/>
+          <p:nvPr/>
+        </p:nvSpPr>
+        <p:spPr>
+          <a:xfrm>
+            <a:off x="914400" y="1901952"/>
             <a:ext cx="4023360" cy="347472"/>
           </a:xfrm>
           <a:prstGeom prst="rect">
@@ -3510,45 +3549,6 @@
               <a:buNone/>
             </a:pPr>
             <a:r>
-              <a:rPr lang="en-US" sz="1600" b="1" dirty="0">
-                <a:solidFill>
-                  <a:srgbClr val="EFAE6E"/>
-                </a:solidFill>
-                <a:latin typeface="Arial" pitchFamily="34" charset="0"/>
-                <a:ea typeface="Arial" pitchFamily="34" charset="-122"/>
-                <a:cs typeface="Arial" pitchFamily="34" charset="-120"/>
-              </a:rPr>
-              <a:t>يميّز الأمثلة</a:t>
-            </a:r>
-            <a:endParaRPr lang="en-US" sz="1600" dirty="0"/>
-          </a:p>
-        </p:txBody>
-      </p:sp>
-      <p:sp>
-        <p:nvSpPr>
-          <p:cNvPr id="10" name="Text 8"/>
-          <p:cNvSpPr/>
-          <p:nvPr/>
-        </p:nvSpPr>
-        <p:spPr>
-          <a:xfrm>
-            <a:off x="914400" y="1847088"/>
-            <a:ext cx="4023360" cy="329184"/>
-          </a:xfrm>
-          <a:prstGeom prst="rect">
-            <a:avLst/>
-          </a:prstGeom>
-          <a:noFill/>
-          <a:ln/>
-        </p:spPr>
-        <p:txBody>
-          <a:bodyPr wrap="square" lIns="0" tIns="0" rIns="0" bIns="0" rtlCol="0" anchor="ctr"/>
-          <a:lstStyle/>
-          <a:p>
-            <a:pPr rtl="1" algn="r" indent="0" marL="0">
-              <a:buNone/>
-            </a:pPr>
-            <a:r>
               <a:rPr lang="en-US" sz="1250" dirty="0">
                 <a:solidFill>
                   <a:srgbClr val="A2977F"/>
@@ -3571,12 +3571,12 @@
         </p:nvSpPr>
         <p:spPr>
           <a:xfrm>
-            <a:off x="640080" y="2395728"/>
-            <a:ext cx="4572000" cy="896112"/>
+            <a:off x="640080" y="2478024"/>
+            <a:ext cx="4572000" cy="978408"/>
           </a:xfrm>
           <a:prstGeom prst="roundRect">
             <a:avLst>
-              <a:gd name="adj" fmla="val 12245"/>
+              <a:gd name="adj" fmla="val 11215"/>
             </a:avLst>
           </a:prstGeom>
           <a:solidFill>
@@ -3598,7 +3598,46 @@
         </p:nvSpPr>
         <p:spPr>
           <a:xfrm>
-            <a:off x="914400" y="2496312"/>
+            <a:off x="914400" y="2606040"/>
+            <a:ext cx="4023360" cy="365760"/>
+          </a:xfrm>
+          <a:prstGeom prst="rect">
+            <a:avLst/>
+          </a:prstGeom>
+          <a:noFill/>
+          <a:ln/>
+        </p:spPr>
+        <p:txBody>
+          <a:bodyPr wrap="square" lIns="0" tIns="0" rIns="0" bIns="0" rtlCol="0" anchor="ctr"/>
+          <a:lstStyle/>
+          <a:p>
+            <a:pPr rtl="1" algn="r" indent="0" marL="0">
+              <a:buNone/>
+            </a:pPr>
+            <a:r>
+              <a:rPr lang="en-US" sz="1600" b="1" dirty="0">
+                <a:solidFill>
+                  <a:srgbClr val="EFAE6E"/>
+                </a:solidFill>
+                <a:latin typeface="Arial" pitchFamily="34" charset="0"/>
+                <a:ea typeface="Arial" pitchFamily="34" charset="-122"/>
+                <a:cs typeface="Arial" pitchFamily="34" charset="-120"/>
+              </a:rPr>
+              <a:t>بلا تسميات</a:t>
+            </a:r>
+            <a:endParaRPr lang="en-US" sz="1600" dirty="0"/>
+          </a:p>
+        </p:txBody>
+      </p:sp>
+      <p:sp>
+        <p:nvSpPr>
+          <p:cNvPr id="13" name="Text 11"/>
+          <p:cNvSpPr/>
+          <p:nvPr/>
+        </p:nvSpPr>
+        <p:spPr>
+          <a:xfrm>
+            <a:off x="914400" y="3008376"/>
             <a:ext cx="4023360" cy="347472"/>
           </a:xfrm>
           <a:prstGeom prst="rect">
@@ -3615,45 +3654,6 @@
               <a:buNone/>
             </a:pPr>
             <a:r>
-              <a:rPr lang="en-US" sz="1600" b="1" dirty="0">
-                <a:solidFill>
-                  <a:srgbClr val="EFAE6E"/>
-                </a:solidFill>
-                <a:latin typeface="Arial" pitchFamily="34" charset="0"/>
-                <a:ea typeface="Arial" pitchFamily="34" charset="-122"/>
-                <a:cs typeface="Arial" pitchFamily="34" charset="-120"/>
-              </a:rPr>
-              <a:t>بلا تسميات</a:t>
-            </a:r>
-            <a:endParaRPr lang="en-US" sz="1600" dirty="0"/>
-          </a:p>
-        </p:txBody>
-      </p:sp>
-      <p:sp>
-        <p:nvSpPr>
-          <p:cNvPr id="13" name="Text 11"/>
-          <p:cNvSpPr/>
-          <p:nvPr/>
-        </p:nvSpPr>
-        <p:spPr>
-          <a:xfrm>
-            <a:off x="914400" y="2871216"/>
-            <a:ext cx="4023360" cy="329184"/>
-          </a:xfrm>
-          <a:prstGeom prst="rect">
-            <a:avLst/>
-          </a:prstGeom>
-          <a:noFill/>
-          <a:ln/>
-        </p:spPr>
-        <p:txBody>
-          <a:bodyPr wrap="square" lIns="0" tIns="0" rIns="0" bIns="0" rtlCol="0" anchor="ctr"/>
-          <a:lstStyle/>
-          <a:p>
-            <a:pPr rtl="1" algn="r" indent="0" marL="0">
-              <a:buNone/>
-            </a:pPr>
-            <a:r>
               <a:rPr lang="en-US" sz="1250" dirty="0">
                 <a:solidFill>
                   <a:srgbClr val="A2977F"/>
@@ -3676,12 +3676,12 @@
         </p:nvSpPr>
         <p:spPr>
           <a:xfrm>
-            <a:off x="640080" y="3419856"/>
-            <a:ext cx="4572000" cy="896112"/>
+            <a:off x="640080" y="3584448"/>
+            <a:ext cx="4572000" cy="978408"/>
           </a:xfrm>
           <a:prstGeom prst="roundRect">
             <a:avLst>
-              <a:gd name="adj" fmla="val 12245"/>
+              <a:gd name="adj" fmla="val 11215"/>
             </a:avLst>
           </a:prstGeom>
           <a:solidFill>
@@ -3703,7 +3703,46 @@
         </p:nvSpPr>
         <p:spPr>
           <a:xfrm>
-            <a:off x="914400" y="3520440"/>
+            <a:off x="914400" y="3712464"/>
+            <a:ext cx="4023360" cy="365760"/>
+          </a:xfrm>
+          <a:prstGeom prst="rect">
+            <a:avLst/>
+          </a:prstGeom>
+          <a:noFill/>
+          <a:ln/>
+        </p:spPr>
+        <p:txBody>
+          <a:bodyPr wrap="square" lIns="0" tIns="0" rIns="0" bIns="0" rtlCol="0" anchor="ctr"/>
+          <a:lstStyle/>
+          <a:p>
+            <a:pPr rtl="1" algn="r" indent="0" marL="0">
+              <a:buNone/>
+            </a:pPr>
+            <a:r>
+              <a:rPr lang="en-US" sz="1600" b="1" dirty="0">
+                <a:solidFill>
+                  <a:srgbClr val="EFAE6E"/>
+                </a:solidFill>
+                <a:latin typeface="Arial" pitchFamily="34" charset="0"/>
+                <a:ea typeface="Arial" pitchFamily="34" charset="-122"/>
+                <a:cs typeface="Arial" pitchFamily="34" charset="-120"/>
+              </a:rPr>
+              <a:t>٢١ مليون معامل</a:t>
+            </a:r>
+            <a:endParaRPr lang="en-US" sz="1600" dirty="0"/>
+          </a:p>
+        </p:txBody>
+      </p:sp>
+      <p:sp>
+        <p:nvSpPr>
+          <p:cNvPr id="16" name="Text 14"/>
+          <p:cNvSpPr/>
+          <p:nvPr/>
+        </p:nvSpPr>
+        <p:spPr>
+          <a:xfrm>
+            <a:off x="914400" y="4114800"/>
             <a:ext cx="4023360" cy="347472"/>
           </a:xfrm>
           <a:prstGeom prst="rect">
@@ -3720,45 +3759,6 @@
               <a:buNone/>
             </a:pPr>
             <a:r>
-              <a:rPr lang="en-US" sz="1600" b="1" dirty="0">
-                <a:solidFill>
-                  <a:srgbClr val="EFAE6E"/>
-                </a:solidFill>
-                <a:latin typeface="Arial" pitchFamily="34" charset="0"/>
-                <a:ea typeface="Arial" pitchFamily="34" charset="-122"/>
-                <a:cs typeface="Arial" pitchFamily="34" charset="-120"/>
-              </a:rPr>
-              <a:t>٢١ مليون معامل</a:t>
-            </a:r>
-            <a:endParaRPr lang="en-US" sz="1600" dirty="0"/>
-          </a:p>
-        </p:txBody>
-      </p:sp>
-      <p:sp>
-        <p:nvSpPr>
-          <p:cNvPr id="16" name="Text 14"/>
-          <p:cNvSpPr/>
-          <p:nvPr/>
-        </p:nvSpPr>
-        <p:spPr>
-          <a:xfrm>
-            <a:off x="914400" y="3895344"/>
-            <a:ext cx="4023360" cy="329184"/>
-          </a:xfrm>
-          <a:prstGeom prst="rect">
-            <a:avLst/>
-          </a:prstGeom>
-          <a:noFill/>
-          <a:ln/>
-        </p:spPr>
-        <p:txBody>
-          <a:bodyPr wrap="square" lIns="0" tIns="0" rIns="0" bIns="0" rtlCol="0" anchor="ctr"/>
-          <a:lstStyle/>
-          <a:p>
-            <a:pPr rtl="1" algn="r" indent="0" marL="0">
-              <a:buNone/>
-            </a:pPr>
-            <a:r>
               <a:rPr lang="en-US" sz="1250" dirty="0">
                 <a:solidFill>
                   <a:srgbClr val="A2977F"/>
@@ -3781,12 +3781,12 @@
         </p:nvSpPr>
         <p:spPr>
           <a:xfrm>
-            <a:off x="640080" y="4443984"/>
-            <a:ext cx="4572000" cy="896112"/>
+            <a:off x="640080" y="4690872"/>
+            <a:ext cx="4572000" cy="978408"/>
           </a:xfrm>
           <a:prstGeom prst="roundRect">
             <a:avLst>
-              <a:gd name="adj" fmla="val 12245"/>
+              <a:gd name="adj" fmla="val 11215"/>
             </a:avLst>
           </a:prstGeom>
           <a:solidFill>
@@ -3808,47 +3808,47 @@
         </p:nvSpPr>
         <p:spPr>
           <a:xfrm>
-            <a:off x="914400" y="4544568"/>
+            <a:off x="914400" y="4818888"/>
+            <a:ext cx="4023360" cy="365760"/>
+          </a:xfrm>
+          <a:prstGeom prst="rect">
+            <a:avLst/>
+          </a:prstGeom>
+          <a:noFill/>
+          <a:ln/>
+        </p:spPr>
+        <p:txBody>
+          <a:bodyPr wrap="square" lIns="0" tIns="0" rIns="0" bIns="0" rtlCol="0" anchor="ctr"/>
+          <a:lstStyle/>
+          <a:p>
+            <a:pPr rtl="1" algn="r" indent="0" marL="0">
+              <a:buNone/>
+            </a:pPr>
+            <a:r>
+              <a:rPr lang="en-US" sz="1600" b="1" dirty="0">
+                <a:solidFill>
+                  <a:srgbClr val="EFAE6E"/>
+                </a:solidFill>
+                <a:latin typeface="Arial" pitchFamily="34" charset="0"/>
+                <a:ea typeface="Arial" pitchFamily="34" charset="-122"/>
+                <a:cs typeface="Arial" pitchFamily="34" charset="-120"/>
+              </a:rPr>
+              <a:t>يعمل بلا ضبط</a:t>
+            </a:r>
+            <a:endParaRPr lang="en-US" sz="1600" dirty="0"/>
+          </a:p>
+        </p:txBody>
+      </p:sp>
+      <p:sp>
+        <p:nvSpPr>
+          <p:cNvPr id="19" name="Text 17"/>
+          <p:cNvSpPr/>
+          <p:nvPr/>
+        </p:nvSpPr>
+        <p:spPr>
+          <a:xfrm>
+            <a:off x="914400" y="5221224"/>
             <a:ext cx="4023360" cy="347472"/>
-          </a:xfrm>
-          <a:prstGeom prst="rect">
-            <a:avLst/>
-          </a:prstGeom>
-          <a:noFill/>
-          <a:ln/>
-        </p:spPr>
-        <p:txBody>
-          <a:bodyPr wrap="square" lIns="0" tIns="0" rIns="0" bIns="0" rtlCol="0" anchor="ctr"/>
-          <a:lstStyle/>
-          <a:p>
-            <a:pPr rtl="1" algn="r" indent="0" marL="0">
-              <a:buNone/>
-            </a:pPr>
-            <a:r>
-              <a:rPr lang="en-US" sz="1600" b="1" dirty="0">
-                <a:solidFill>
-                  <a:srgbClr val="EFAE6E"/>
-                </a:solidFill>
-                <a:latin typeface="Arial" pitchFamily="34" charset="0"/>
-                <a:ea typeface="Arial" pitchFamily="34" charset="-122"/>
-                <a:cs typeface="Arial" pitchFamily="34" charset="-120"/>
-              </a:rPr>
-              <a:t>يعمل بلا ضبط</a:t>
-            </a:r>
-            <a:endParaRPr lang="en-US" sz="1600" dirty="0"/>
-          </a:p>
-        </p:txBody>
-      </p:sp>
-      <p:sp>
-        <p:nvSpPr>
-          <p:cNvPr id="19" name="Text 17"/>
-          <p:cNvSpPr/>
-          <p:nvPr/>
-        </p:nvSpPr>
-        <p:spPr>
-          <a:xfrm>
-            <a:off x="914400" y="4919472"/>
-            <a:ext cx="4023360" cy="329184"/>
           </a:xfrm>
           <a:prstGeom prst="rect">
             <a:avLst/>
@@ -4761,46 +4761,7 @@
       </p:sp>
       <p:sp>
         <p:nvSpPr>
-          <p:cNvPr id="9" name="Text 7"/>
-          <p:cNvSpPr/>
-          <p:nvPr/>
-        </p:nvSpPr>
-        <p:spPr>
-          <a:xfrm>
-            <a:off x="8643823" y="2514600"/>
-            <a:ext cx="256032" cy="365760"/>
-          </a:xfrm>
-          <a:prstGeom prst="rect">
-            <a:avLst/>
-          </a:prstGeom>
-          <a:noFill/>
-          <a:ln/>
-        </p:spPr>
-        <p:txBody>
-          <a:bodyPr wrap="square" lIns="0" tIns="0" rIns="0" bIns="0" rtlCol="0" anchor="ctr"/>
-          <a:lstStyle/>
-          <a:p>
-            <a:pPr algn="ctr" indent="0" marL="0">
-              <a:buNone/>
-            </a:pPr>
-            <a:r>
-              <a:rPr lang="en-US" sz="2000" dirty="0">
-                <a:solidFill>
-                  <a:srgbClr val="C97A4A"/>
-                </a:solidFill>
-                <a:latin typeface="Calibri" pitchFamily="34" charset="0"/>
-                <a:ea typeface="Calibri" pitchFamily="34" charset="-122"/>
-                <a:cs typeface="Calibri" pitchFamily="34" charset="-120"/>
-              </a:rPr>
-              <a:t>←</a:t>
-            </a:r>
-            <a:endParaRPr lang="en-US" sz="2000" dirty="0"/>
-          </a:p>
-        </p:txBody>
-      </p:sp>
-      <p:sp>
-        <p:nvSpPr>
-          <p:cNvPr id="10" name="Shape 8"/>
+          <p:cNvPr id="9" name="Shape 7"/>
           <p:cNvSpPr/>
           <p:nvPr/>
         </p:nvSpPr>
@@ -4827,7 +4788,7 @@
       </p:sp>
       <p:sp>
         <p:nvSpPr>
-          <p:cNvPr id="11" name="Shape 9"/>
+          <p:cNvPr id="10" name="Shape 8"/>
           <p:cNvSpPr/>
           <p:nvPr/>
         </p:nvSpPr>
@@ -4852,7 +4813,7 @@
       </p:sp>
       <p:sp>
         <p:nvSpPr>
-          <p:cNvPr id="12" name="Text 10"/>
+          <p:cNvPr id="11" name="Text 9"/>
           <p:cNvSpPr/>
           <p:nvPr/>
         </p:nvSpPr>
@@ -4891,7 +4852,7 @@
       </p:sp>
       <p:sp>
         <p:nvSpPr>
-          <p:cNvPr id="13" name="Text 11"/>
+          <p:cNvPr id="12" name="Text 10"/>
           <p:cNvSpPr/>
           <p:nvPr/>
         </p:nvSpPr>
@@ -4930,7 +4891,7 @@
       </p:sp>
       <p:sp>
         <p:nvSpPr>
-          <p:cNvPr id="14" name="Text 12"/>
+          <p:cNvPr id="13" name="Text 11"/>
           <p:cNvSpPr/>
           <p:nvPr/>
         </p:nvSpPr>
@@ -4972,46 +4933,7 @@
       </p:sp>
       <p:sp>
         <p:nvSpPr>
-          <p:cNvPr id="15" name="Text 13"/>
-          <p:cNvSpPr/>
-          <p:nvPr/>
-        </p:nvSpPr>
-        <p:spPr>
-          <a:xfrm>
-            <a:off x="5873191" y="2514600"/>
-            <a:ext cx="256032" cy="365760"/>
-          </a:xfrm>
-          <a:prstGeom prst="rect">
-            <a:avLst/>
-          </a:prstGeom>
-          <a:noFill/>
-          <a:ln/>
-        </p:spPr>
-        <p:txBody>
-          <a:bodyPr wrap="square" lIns="0" tIns="0" rIns="0" bIns="0" rtlCol="0" anchor="ctr"/>
-          <a:lstStyle/>
-          <a:p>
-            <a:pPr algn="ctr" indent="0" marL="0">
-              <a:buNone/>
-            </a:pPr>
-            <a:r>
-              <a:rPr lang="en-US" sz="2000" dirty="0">
-                <a:solidFill>
-                  <a:srgbClr val="C97A4A"/>
-                </a:solidFill>
-                <a:latin typeface="Calibri" pitchFamily="34" charset="0"/>
-                <a:ea typeface="Calibri" pitchFamily="34" charset="-122"/>
-                <a:cs typeface="Calibri" pitchFamily="34" charset="-120"/>
-              </a:rPr>
-              <a:t>←</a:t>
-            </a:r>
-            <a:endParaRPr lang="en-US" sz="2000" dirty="0"/>
-          </a:p>
-        </p:txBody>
-      </p:sp>
-      <p:sp>
-        <p:nvSpPr>
-          <p:cNvPr id="16" name="Shape 14"/>
+          <p:cNvPr id="14" name="Shape 12"/>
           <p:cNvSpPr/>
           <p:nvPr/>
         </p:nvSpPr>
@@ -5038,7 +4960,7 @@
       </p:sp>
       <p:sp>
         <p:nvSpPr>
-          <p:cNvPr id="17" name="Shape 15"/>
+          <p:cNvPr id="15" name="Shape 13"/>
           <p:cNvSpPr/>
           <p:nvPr/>
         </p:nvSpPr>
@@ -5063,7 +4985,7 @@
       </p:sp>
       <p:sp>
         <p:nvSpPr>
-          <p:cNvPr id="18" name="Text 16"/>
+          <p:cNvPr id="16" name="Text 14"/>
           <p:cNvSpPr/>
           <p:nvPr/>
         </p:nvSpPr>
@@ -5102,7 +5024,7 @@
       </p:sp>
       <p:sp>
         <p:nvSpPr>
-          <p:cNvPr id="19" name="Text 17"/>
+          <p:cNvPr id="17" name="Text 15"/>
           <p:cNvSpPr/>
           <p:nvPr/>
         </p:nvSpPr>
@@ -5141,7 +5063,7 @@
       </p:sp>
       <p:sp>
         <p:nvSpPr>
-          <p:cNvPr id="20" name="Text 18"/>
+          <p:cNvPr id="18" name="Text 16"/>
           <p:cNvSpPr/>
           <p:nvPr/>
         </p:nvSpPr>
@@ -5183,46 +5105,7 @@
       </p:sp>
       <p:sp>
         <p:nvSpPr>
-          <p:cNvPr id="21" name="Text 19"/>
-          <p:cNvSpPr/>
-          <p:nvPr/>
-        </p:nvSpPr>
-        <p:spPr>
-          <a:xfrm>
-            <a:off x="3102559" y="2514600"/>
-            <a:ext cx="256032" cy="365760"/>
-          </a:xfrm>
-          <a:prstGeom prst="rect">
-            <a:avLst/>
-          </a:prstGeom>
-          <a:noFill/>
-          <a:ln/>
-        </p:spPr>
-        <p:txBody>
-          <a:bodyPr wrap="square" lIns="0" tIns="0" rIns="0" bIns="0" rtlCol="0" anchor="ctr"/>
-          <a:lstStyle/>
-          <a:p>
-            <a:pPr algn="ctr" indent="0" marL="0">
-              <a:buNone/>
-            </a:pPr>
-            <a:r>
-              <a:rPr lang="en-US" sz="2000" dirty="0">
-                <a:solidFill>
-                  <a:srgbClr val="C97A4A"/>
-                </a:solidFill>
-                <a:latin typeface="Calibri" pitchFamily="34" charset="0"/>
-                <a:ea typeface="Calibri" pitchFamily="34" charset="-122"/>
-                <a:cs typeface="Calibri" pitchFamily="34" charset="-120"/>
-              </a:rPr>
-              <a:t>←</a:t>
-            </a:r>
-            <a:endParaRPr lang="en-US" sz="2000" dirty="0"/>
-          </a:p>
-        </p:txBody>
-      </p:sp>
-      <p:sp>
-        <p:nvSpPr>
-          <p:cNvPr id="22" name="Shape 20"/>
+          <p:cNvPr id="19" name="Shape 17"/>
           <p:cNvSpPr/>
           <p:nvPr/>
         </p:nvSpPr>
@@ -5249,7 +5132,7 @@
       </p:sp>
       <p:sp>
         <p:nvSpPr>
-          <p:cNvPr id="23" name="Shape 21"/>
+          <p:cNvPr id="20" name="Shape 18"/>
           <p:cNvSpPr/>
           <p:nvPr/>
         </p:nvSpPr>
@@ -5274,7 +5157,7 @@
       </p:sp>
       <p:sp>
         <p:nvSpPr>
-          <p:cNvPr id="24" name="Text 22"/>
+          <p:cNvPr id="21" name="Text 19"/>
           <p:cNvSpPr/>
           <p:nvPr/>
         </p:nvSpPr>
@@ -5313,7 +5196,7 @@
       </p:sp>
       <p:sp>
         <p:nvSpPr>
-          <p:cNvPr id="25" name="Text 23"/>
+          <p:cNvPr id="22" name="Text 20"/>
           <p:cNvSpPr/>
           <p:nvPr/>
         </p:nvSpPr>
@@ -5352,7 +5235,7 @@
       </p:sp>
       <p:sp>
         <p:nvSpPr>
-          <p:cNvPr id="26" name="Text 24"/>
+          <p:cNvPr id="23" name="Text 21"/>
           <p:cNvSpPr/>
           <p:nvPr/>
         </p:nvSpPr>
@@ -5394,18 +5277,18 @@
       </p:sp>
       <p:sp>
         <p:nvSpPr>
-          <p:cNvPr id="27" name="Shape 25"/>
-          <p:cNvSpPr/>
-          <p:nvPr/>
-        </p:nvSpPr>
-        <p:spPr>
-          <a:xfrm>
-            <a:off x="6355080" y="3931920"/>
-            <a:ext cx="5166360" cy="1600200"/>
+          <p:cNvPr id="24" name="Shape 22"/>
+          <p:cNvSpPr/>
+          <p:nvPr/>
+        </p:nvSpPr>
+        <p:spPr>
+          <a:xfrm>
+            <a:off x="6355080" y="3977640"/>
+            <a:ext cx="5166360" cy="1920240"/>
           </a:xfrm>
           <a:prstGeom prst="roundRect">
             <a:avLst>
-              <a:gd name="adj" fmla="val 6857"/>
+              <a:gd name="adj" fmla="val 5714"/>
             </a:avLst>
           </a:prstGeom>
           <a:solidFill>
@@ -5421,14 +5304,14 @@
       </p:sp>
       <p:sp>
         <p:nvSpPr>
-          <p:cNvPr id="28" name="Text 26"/>
-          <p:cNvSpPr/>
-          <p:nvPr/>
-        </p:nvSpPr>
-        <p:spPr>
-          <a:xfrm>
-            <a:off x="6675120" y="4133088"/>
-            <a:ext cx="4526280" cy="365760"/>
+          <p:cNvPr id="25" name="Text 23"/>
+          <p:cNvSpPr/>
+          <p:nvPr/>
+        </p:nvSpPr>
+        <p:spPr>
+          <a:xfrm>
+            <a:off x="6675120" y="4206240"/>
+            <a:ext cx="4526280" cy="384048"/>
           </a:xfrm>
           <a:prstGeom prst="rect">
             <a:avLst/>
@@ -5460,14 +5343,14 @@
       </p:sp>
       <p:sp>
         <p:nvSpPr>
-          <p:cNvPr id="29" name="Text 27"/>
-          <p:cNvSpPr/>
-          <p:nvPr/>
-        </p:nvSpPr>
-        <p:spPr>
-          <a:xfrm>
-            <a:off x="6675120" y="4553712"/>
-            <a:ext cx="4526280" cy="868680"/>
+          <p:cNvPr id="26" name="Text 24"/>
+          <p:cNvSpPr/>
+          <p:nvPr/>
+        </p:nvSpPr>
+        <p:spPr>
+          <a:xfrm>
+            <a:off x="6675120" y="4681728"/>
+            <a:ext cx="4526280" cy="1097280"/>
           </a:xfrm>
           <a:prstGeom prst="rect">
             <a:avLst/>
@@ -5481,12 +5364,12 @@
           <a:p>
             <a:pPr rtl="1" algn="r" indent="0" marL="0">
               <a:lnSpc>
-                <a:spcPts val="2000"/>
+                <a:spcPts val="2100"/>
               </a:lnSpc>
               <a:buNone/>
             </a:pPr>
             <a:r>
-              <a:rPr lang="en-US" sz="1300" dirty="0">
+              <a:rPr lang="en-US" sz="1350" dirty="0">
                 <a:solidFill>
                   <a:srgbClr val="A2977F"/>
                 </a:solidFill>
@@ -5496,24 +5379,24 @@
               </a:rPr>
               <a:t>كلّ الصور المرجعية من زيارةٍ ميدانية واحدة: يومٌ واحد وجوّالٌ واحد وإضاءةٌ واحدة. وتصحيحُ الزائر صورةٌ من يومٍ آخر وجهازٍ آخر — وهو ما ينقص الفهرس.</a:t>
             </a:r>
-            <a:endParaRPr lang="en-US" sz="1300" dirty="0"/>
-          </a:p>
-        </p:txBody>
-      </p:sp>
-      <p:sp>
-        <p:nvSpPr>
-          <p:cNvPr id="30" name="Shape 28"/>
-          <p:cNvSpPr/>
-          <p:nvPr/>
-        </p:nvSpPr>
-        <p:spPr>
-          <a:xfrm>
-            <a:off x="640080" y="3931920"/>
-            <a:ext cx="5166360" cy="1600200"/>
+            <a:endParaRPr lang="en-US" sz="1350" dirty="0"/>
+          </a:p>
+        </p:txBody>
+      </p:sp>
+      <p:sp>
+        <p:nvSpPr>
+          <p:cNvPr id="27" name="Shape 25"/>
+          <p:cNvSpPr/>
+          <p:nvPr/>
+        </p:nvSpPr>
+        <p:spPr>
+          <a:xfrm>
+            <a:off x="640080" y="3977640"/>
+            <a:ext cx="5166360" cy="1920240"/>
           </a:xfrm>
           <a:prstGeom prst="roundRect">
             <a:avLst>
-              <a:gd name="adj" fmla="val 6857"/>
+              <a:gd name="adj" fmla="val 5714"/>
             </a:avLst>
           </a:prstGeom>
           <a:solidFill>
@@ -5529,14 +5412,14 @@
       </p:sp>
       <p:sp>
         <p:nvSpPr>
-          <p:cNvPr id="31" name="Text 29"/>
-          <p:cNvSpPr/>
-          <p:nvPr/>
-        </p:nvSpPr>
-        <p:spPr>
-          <a:xfrm>
-            <a:off x="960120" y="4133088"/>
-            <a:ext cx="4526280" cy="365760"/>
+          <p:cNvPr id="28" name="Text 26"/>
+          <p:cNvSpPr/>
+          <p:nvPr/>
+        </p:nvSpPr>
+        <p:spPr>
+          <a:xfrm>
+            <a:off x="960120" y="4206240"/>
+            <a:ext cx="4526280" cy="384048"/>
           </a:xfrm>
           <a:prstGeom prst="rect">
             <a:avLst/>
@@ -5568,14 +5451,14 @@
       </p:sp>
       <p:sp>
         <p:nvSpPr>
-          <p:cNvPr id="32" name="Text 30"/>
-          <p:cNvSpPr/>
-          <p:nvPr/>
-        </p:nvSpPr>
-        <p:spPr>
-          <a:xfrm>
-            <a:off x="960120" y="4553712"/>
-            <a:ext cx="4526280" cy="868680"/>
+          <p:cNvPr id="29" name="Text 27"/>
+          <p:cNvSpPr/>
+          <p:nvPr/>
+        </p:nvSpPr>
+        <p:spPr>
+          <a:xfrm>
+            <a:off x="960120" y="4681728"/>
+            <a:ext cx="4526280" cy="1097280"/>
           </a:xfrm>
           <a:prstGeom prst="rect">
             <a:avLst/>
@@ -5589,12 +5472,12 @@
           <a:p>
             <a:pPr rtl="1" algn="r" indent="0" marL="0">
               <a:lnSpc>
-                <a:spcPts val="2000"/>
+                <a:spcPts val="2100"/>
               </a:lnSpc>
               <a:buNone/>
             </a:pPr>
             <a:r>
-              <a:rPr lang="en-US" sz="1300" dirty="0">
+              <a:rPr lang="en-US" sz="1350" dirty="0">
                 <a:solidFill>
                   <a:srgbClr val="A2977F"/>
                 </a:solidFill>
@@ -5604,7 +5487,7 @@
               </a:rPr>
               <a:t>صوّب على حاسوبك واضغط «ليست نقشًا أصلًا». فيصير الرفضُ جوابًا تعلّمه النظام من إنسان، لا عجزًا عن بلوغ عتبة.</a:t>
             </a:r>
-            <a:endParaRPr lang="en-US" sz="1300" dirty="0"/>
+            <a:endParaRPr lang="en-US" sz="1350" dirty="0"/>
           </a:p>
         </p:txBody>
       </p:sp>
@@ -5727,11 +5610,11 @@
         <p:spPr>
           <a:xfrm>
             <a:off x="5349240" y="1874520"/>
-            <a:ext cx="6172200" cy="2834640"/>
+            <a:ext cx="6172200" cy="3246120"/>
           </a:xfrm>
           <a:prstGeom prst="roundRect">
             <a:avLst>
-              <a:gd name="adj" fmla="val 3871"/>
+              <a:gd name="adj" fmla="val 3380"/>
             </a:avLst>
           </a:prstGeom>
           <a:solidFill>
@@ -5792,7 +5675,7 @@
         </p:nvSpPr>
         <p:spPr>
           <a:xfrm>
-            <a:off x="7863840" y="2651760"/>
+            <a:off x="7863840" y="2743200"/>
             <a:ext cx="3337560" cy="320040"/>
           </a:xfrm>
           <a:prstGeom prst="rect">
@@ -5831,7 +5714,7 @@
         </p:nvSpPr>
         <p:spPr>
           <a:xfrm>
-            <a:off x="5669280" y="2999232"/>
+            <a:off x="5669280" y="3090672"/>
             <a:ext cx="5029200" cy="274320"/>
           </a:xfrm>
           <a:prstGeom prst="roundRect">
@@ -5858,7 +5741,7 @@
         </p:nvSpPr>
         <p:spPr>
           <a:xfrm>
-            <a:off x="5845302" y="2999232"/>
+            <a:off x="5845302" y="3090672"/>
             <a:ext cx="4853178" cy="274320"/>
           </a:xfrm>
           <a:prstGeom prst="roundRect">
@@ -5885,7 +5768,7 @@
         </p:nvSpPr>
         <p:spPr>
           <a:xfrm>
-            <a:off x="5669280" y="2651760"/>
+            <a:off x="5669280" y="2743200"/>
             <a:ext cx="1463040" cy="320040"/>
           </a:xfrm>
           <a:prstGeom prst="rect">
@@ -5924,7 +5807,7 @@
         </p:nvSpPr>
         <p:spPr>
           <a:xfrm>
-            <a:off x="7863840" y="3547872"/>
+            <a:off x="7863840" y="3794760"/>
             <a:ext cx="3337560" cy="320040"/>
           </a:xfrm>
           <a:prstGeom prst="rect">
@@ -5963,7 +5846,7 @@
         </p:nvSpPr>
         <p:spPr>
           <a:xfrm>
-            <a:off x="5669280" y="3895344"/>
+            <a:off x="5669280" y="4142232"/>
             <a:ext cx="5029200" cy="274320"/>
           </a:xfrm>
           <a:prstGeom prst="roundRect">
@@ -5990,7 +5873,7 @@
         </p:nvSpPr>
         <p:spPr>
           <a:xfrm>
-            <a:off x="6710324" y="3895344"/>
+            <a:off x="6710324" y="4142232"/>
             <a:ext cx="3988156" cy="274320"/>
           </a:xfrm>
           <a:prstGeom prst="roundRect">
@@ -6017,7 +5900,7 @@
         </p:nvSpPr>
         <p:spPr>
           <a:xfrm>
-            <a:off x="5669280" y="3547872"/>
+            <a:off x="5669280" y="3794760"/>
             <a:ext cx="1463040" cy="320040"/>
           </a:xfrm>
           <a:prstGeom prst="rect">
@@ -6057,11 +5940,11 @@
         <p:spPr>
           <a:xfrm>
             <a:off x="640080" y="1874520"/>
-            <a:ext cx="4572000" cy="2834640"/>
+            <a:ext cx="4572000" cy="3246120"/>
           </a:xfrm>
           <a:prstGeom prst="roundRect">
             <a:avLst>
-              <a:gd name="adj" fmla="val 3871"/>
+              <a:gd name="adj" fmla="val 3380"/>
             </a:avLst>
           </a:prstGeom>
           <a:solidFill>
@@ -6122,8 +6005,8 @@
         </p:nvSpPr>
         <p:spPr>
           <a:xfrm>
-            <a:off x="914400" y="2560320"/>
-            <a:ext cx="4023360" cy="1920240"/>
+            <a:off x="914400" y="2606040"/>
+            <a:ext cx="4023360" cy="2286000"/>
           </a:xfrm>
           <a:prstGeom prst="rect">
             <a:avLst/>
@@ -6137,12 +6020,12 @@
           <a:p>
             <a:pPr rtl="1" algn="r" indent="0" marL="0">
               <a:lnSpc>
-                <a:spcPts val="2000"/>
+                <a:spcPts val="2100"/>
               </a:lnSpc>
               <a:buNone/>
             </a:pPr>
             <a:r>
-              <a:rPr lang="en-US" sz="1300" dirty="0">
+              <a:rPr lang="en-US" sz="1350" dirty="0">
                 <a:solidFill>
                   <a:srgbClr val="A2977F"/>
                 </a:solidFill>
@@ -6152,26 +6035,26 @@
               </a:rPr>
               <a:t>الصور المرجعية كلّها من زيارةٍ واحدة، فالمتتابعتان شبه متطابقتين. فكان الاختبار يسأل: هل تطابق الصورةُ أختَها الملتقطة قبل ثانيتين؟</a:t>
             </a:r>
-            <a:endParaRPr lang="en-US" sz="1300" dirty="0"/>
+            <a:endParaRPr lang="en-US" sz="1350" dirty="0"/>
           </a:p>
           <a:p>
             <a:pPr rtl="1" algn="r" indent="0" marL="0">
               <a:lnSpc>
-                <a:spcPts val="2000"/>
+                <a:spcPts val="2100"/>
               </a:lnSpc>
               <a:buNone/>
             </a:pPr>
-            <a:endParaRPr lang="en-US" sz="1300" dirty="0"/>
+            <a:endParaRPr lang="en-US" sz="1350" dirty="0"/>
           </a:p>
           <a:p>
             <a:pPr rtl="1" algn="r" indent="0" marL="0">
               <a:lnSpc>
-                <a:spcPts val="2000"/>
+                <a:spcPts val="2100"/>
               </a:lnSpc>
               <a:buNone/>
             </a:pPr>
             <a:r>
-              <a:rPr lang="en-US" sz="1300" dirty="0">
+              <a:rPr lang="en-US" sz="1350" dirty="0">
                 <a:solidFill>
                   <a:srgbClr val="A2977F"/>
                 </a:solidFill>
@@ -6181,7 +6064,7 @@
               </a:rPr>
               <a:t>وذاك تسرّبُ بيانات. فأعدنا بناء طبقة القرار على الرقم الصادق.</a:t>
             </a:r>
-            <a:endParaRPr lang="en-US" sz="1300" dirty="0"/>
+            <a:endParaRPr lang="en-US" sz="1350" dirty="0"/>
           </a:p>
         </p:txBody>
       </p:sp>
@@ -6193,7 +6076,7 @@
         </p:nvSpPr>
         <p:spPr>
           <a:xfrm>
-            <a:off x="640080" y="4983480"/>
+            <a:off x="640080" y="5440680"/>
             <a:ext cx="10911535" cy="457200"/>
           </a:xfrm>
           <a:prstGeom prst="rect">
@@ -6264,8 +6147,8 @@
         </p:nvSpPr>
         <p:spPr>
           <a:xfrm>
-            <a:off x="6400800" y="1005840"/>
-            <a:ext cx="5120640" cy="1143000"/>
+            <a:off x="6400800" y="960120"/>
+            <a:ext cx="5148072" cy="1143000"/>
           </a:xfrm>
           <a:prstGeom prst="rect">
             <a:avLst/>
@@ -6303,8 +6186,8 @@
         </p:nvSpPr>
         <p:spPr>
           <a:xfrm>
-            <a:off x="5486400" y="2240280"/>
-            <a:ext cx="6035040" cy="594360"/>
+            <a:off x="4480560" y="2194560"/>
+            <a:ext cx="7068312" cy="594360"/>
           </a:xfrm>
           <a:prstGeom prst="rect">
             <a:avLst/>
@@ -6342,8 +6225,8 @@
         </p:nvSpPr>
         <p:spPr>
           <a:xfrm>
-            <a:off x="5486400" y="2926080"/>
-            <a:ext cx="6035040" cy="457200"/>
+            <a:off x="4480560" y="2880360"/>
+            <a:ext cx="7068312" cy="457200"/>
           </a:xfrm>
           <a:prstGeom prst="rect">
             <a:avLst/>
@@ -6381,8 +6264,8 @@
         </p:nvSpPr>
         <p:spPr>
           <a:xfrm>
-            <a:off x="5486400" y="3456432"/>
-            <a:ext cx="6035040" cy="457200"/>
+            <a:off x="4480560" y="3401568"/>
+            <a:ext cx="7068312" cy="457200"/>
           </a:xfrm>
           <a:prstGeom prst="rect">
             <a:avLst/>
@@ -6420,12 +6303,12 @@
         </p:nvSpPr>
         <p:spPr>
           <a:xfrm>
-            <a:off x="8899855" y="4114800"/>
-            <a:ext cx="2651760" cy="1097280"/>
+            <a:off x="9311335" y="4114800"/>
+            <a:ext cx="2240280" cy="1188720"/>
           </a:xfrm>
           <a:prstGeom prst="roundRect">
             <a:avLst>
-              <a:gd name="adj" fmla="val 10000"/>
+              <a:gd name="adj" fmla="val 9231"/>
             </a:avLst>
           </a:prstGeom>
           <a:solidFill>
@@ -6447,8 +6330,8 @@
         </p:nvSpPr>
         <p:spPr>
           <a:xfrm>
-            <a:off x="9128455" y="4279392"/>
-            <a:ext cx="2194560" cy="384048"/>
+            <a:off x="9512503" y="4279392"/>
+            <a:ext cx="1828800" cy="384048"/>
           </a:xfrm>
           <a:prstGeom prst="rect">
             <a:avLst/>
@@ -6464,7 +6347,7 @@
               <a:buNone/>
             </a:pPr>
             <a:r>
-              <a:rPr lang="en-US" sz="1700" b="1" dirty="0">
+              <a:rPr lang="en-US" sz="1600" b="1" dirty="0">
                 <a:solidFill>
                   <a:srgbClr val="DD8C58"/>
                 </a:solidFill>
@@ -6474,7 +6357,7 @@
               </a:rPr>
               <a:t>بلا إنترنت</a:t>
             </a:r>
-            <a:endParaRPr lang="en-US" sz="1700" dirty="0"/>
+            <a:endParaRPr lang="en-US" sz="1600" dirty="0"/>
           </a:p>
         </p:txBody>
       </p:sp>
@@ -6486,8 +6369,8 @@
         </p:nvSpPr>
         <p:spPr>
           <a:xfrm>
-            <a:off x="9128455" y="4681728"/>
-            <a:ext cx="2194560" cy="365760"/>
+            <a:off x="9512503" y="4700016"/>
+            <a:ext cx="1828800" cy="457200"/>
           </a:xfrm>
           <a:prstGeom prst="rect">
             <a:avLst/>
@@ -6500,10 +6383,13 @@
           <a:lstStyle/>
           <a:p>
             <a:pPr rtl="1" algn="r" indent="0" marL="0">
-              <a:buNone/>
-            </a:pPr>
-            <a:r>
-              <a:rPr lang="en-US" sz="1250" dirty="0">
+              <a:lnSpc>
+                <a:spcPts val="1600"/>
+              </a:lnSpc>
+              <a:buNone/>
+            </a:pPr>
+            <a:r>
+              <a:rPr lang="en-US" sz="1200" dirty="0">
                 <a:solidFill>
                   <a:srgbClr val="A2977F"/>
                 </a:solidFill>
@@ -6513,7 +6399,7 @@
               </a:rPr>
               <a:t>النموذج داخل الجوّال</a:t>
             </a:r>
-            <a:endParaRPr lang="en-US" sz="1250" dirty="0"/>
+            <a:endParaRPr lang="en-US" sz="1200" dirty="0"/>
           </a:p>
         </p:txBody>
       </p:sp>
@@ -6525,12 +6411,12 @@
         </p:nvSpPr>
         <p:spPr>
           <a:xfrm>
-            <a:off x="6129223" y="4114800"/>
-            <a:ext cx="2651760" cy="1097280"/>
+            <a:off x="6897319" y="4114800"/>
+            <a:ext cx="2240280" cy="1188720"/>
           </a:xfrm>
           <a:prstGeom prst="roundRect">
             <a:avLst>
-              <a:gd name="adj" fmla="val 10000"/>
+              <a:gd name="adj" fmla="val 9231"/>
             </a:avLst>
           </a:prstGeom>
           <a:solidFill>
@@ -6552,8 +6438,8 @@
         </p:nvSpPr>
         <p:spPr>
           <a:xfrm>
-            <a:off x="6357823" y="4279392"/>
-            <a:ext cx="2194560" cy="384048"/>
+            <a:off x="7098487" y="4279392"/>
+            <a:ext cx="1828800" cy="384048"/>
           </a:xfrm>
           <a:prstGeom prst="rect">
             <a:avLst/>
@@ -6569,7 +6455,7 @@
               <a:buNone/>
             </a:pPr>
             <a:r>
-              <a:rPr lang="en-US" sz="1700" b="1" dirty="0">
+              <a:rPr lang="en-US" sz="1600" b="1" dirty="0">
                 <a:solidFill>
                   <a:srgbClr val="DD8C58"/>
                 </a:solidFill>
@@ -6579,7 +6465,7 @@
               </a:rPr>
               <a:t>٢٩ لغة</a:t>
             </a:r>
-            <a:endParaRPr lang="en-US" sz="1700" dirty="0"/>
+            <a:endParaRPr lang="en-US" sz="1600" dirty="0"/>
           </a:p>
         </p:txBody>
       </p:sp>
@@ -6591,8 +6477,8 @@
         </p:nvSpPr>
         <p:spPr>
           <a:xfrm>
-            <a:off x="6357823" y="4681728"/>
-            <a:ext cx="2194560" cy="365760"/>
+            <a:off x="7098487" y="4700016"/>
+            <a:ext cx="1828800" cy="457200"/>
           </a:xfrm>
           <a:prstGeom prst="rect">
             <a:avLst/>
@@ -6605,10 +6491,13 @@
           <a:lstStyle/>
           <a:p>
             <a:pPr rtl="1" algn="r" indent="0" marL="0">
-              <a:buNone/>
-            </a:pPr>
-            <a:r>
-              <a:rPr lang="en-US" sz="1250" dirty="0">
+              <a:lnSpc>
+                <a:spcPts val="1600"/>
+              </a:lnSpc>
+              <a:buNone/>
+            </a:pPr>
+            <a:r>
+              <a:rPr lang="en-US" sz="1200" dirty="0">
                 <a:solidFill>
                   <a:srgbClr val="A2977F"/>
                 </a:solidFill>
@@ -6618,7 +6507,7 @@
               </a:rPr>
               <a:t>لكلّ زائرٍ لسانه</a:t>
             </a:r>
-            <a:endParaRPr lang="en-US" sz="1250" dirty="0"/>
+            <a:endParaRPr lang="en-US" sz="1200" dirty="0"/>
           </a:p>
         </p:txBody>
       </p:sp>
@@ -6630,12 +6519,12 @@
         </p:nvSpPr>
         <p:spPr>
           <a:xfrm>
-            <a:off x="3358591" y="4114800"/>
-            <a:ext cx="2651760" cy="1097280"/>
+            <a:off x="4483303" y="4114800"/>
+            <a:ext cx="2240280" cy="1188720"/>
           </a:xfrm>
           <a:prstGeom prst="roundRect">
             <a:avLst>
-              <a:gd name="adj" fmla="val 10000"/>
+              <a:gd name="adj" fmla="val 9231"/>
             </a:avLst>
           </a:prstGeom>
           <a:solidFill>
@@ -6657,8 +6546,8 @@
         </p:nvSpPr>
         <p:spPr>
           <a:xfrm>
-            <a:off x="3587191" y="4279392"/>
-            <a:ext cx="2194560" cy="384048"/>
+            <a:off x="4684471" y="4279392"/>
+            <a:ext cx="1828800" cy="384048"/>
           </a:xfrm>
           <a:prstGeom prst="rect">
             <a:avLst/>
@@ -6674,7 +6563,7 @@
               <a:buNone/>
             </a:pPr>
             <a:r>
-              <a:rPr lang="en-US" sz="1700" b="1" dirty="0">
+              <a:rPr lang="en-US" sz="1600" b="1" dirty="0">
                 <a:solidFill>
                   <a:srgbClr val="DD8C58"/>
                 </a:solidFill>
@@ -6684,7 +6573,7 @@
               </a:rPr>
               <a:t>يتعلّم</a:t>
             </a:r>
-            <a:endParaRPr lang="en-US" sz="1700" dirty="0"/>
+            <a:endParaRPr lang="en-US" sz="1600" dirty="0"/>
           </a:p>
         </p:txBody>
       </p:sp>
@@ -6696,8 +6585,8 @@
         </p:nvSpPr>
         <p:spPr>
           <a:xfrm>
-            <a:off x="3587191" y="4681728"/>
-            <a:ext cx="2194560" cy="365760"/>
+            <a:off x="4684471" y="4700016"/>
+            <a:ext cx="1828800" cy="457200"/>
           </a:xfrm>
           <a:prstGeom prst="rect">
             <a:avLst/>
@@ -6710,10 +6599,13 @@
           <a:lstStyle/>
           <a:p>
             <a:pPr rtl="1" algn="r" indent="0" marL="0">
-              <a:buNone/>
-            </a:pPr>
-            <a:r>
-              <a:rPr lang="en-US" sz="1250" dirty="0">
+              <a:lnSpc>
+                <a:spcPts val="1600"/>
+              </a:lnSpc>
+              <a:buNone/>
+            </a:pPr>
+            <a:r>
+              <a:rPr lang="en-US" sz="1200" dirty="0">
                 <a:solidFill>
                   <a:srgbClr val="A2977F"/>
                 </a:solidFill>
@@ -6723,7 +6615,7 @@
               </a:rPr>
               <a:t>يقوى بكلّ تصحيح</a:t>
             </a:r>
-            <a:endParaRPr lang="en-US" sz="1250" dirty="0"/>
+            <a:endParaRPr lang="en-US" sz="1200" dirty="0"/>
           </a:p>
         </p:txBody>
       </p:sp>
@@ -6735,12 +6627,12 @@
         </p:nvSpPr>
         <p:spPr>
           <a:xfrm>
-            <a:off x="640080" y="1234440"/>
-            <a:ext cx="4114800" cy="4114800"/>
+            <a:off x="640080" y="1325880"/>
+            <a:ext cx="3383280" cy="3383280"/>
           </a:xfrm>
           <a:prstGeom prst="roundRect">
             <a:avLst>
-              <a:gd name="adj" fmla="val 2667"/>
+              <a:gd name="adj" fmla="val 3243"/>
             </a:avLst>
           </a:prstGeom>
           <a:solidFill>
@@ -6770,8 +6662,8 @@
         </p:blipFill>
         <p:spPr>
           <a:xfrm>
-            <a:off x="1024128" y="1618488"/>
-            <a:ext cx="3346704" cy="3346704"/>
+            <a:off x="960120" y="1645920"/>
+            <a:ext cx="2743200" cy="2743200"/>
           </a:xfrm>
           <a:prstGeom prst="rect">
             <a:avLst/>
@@ -6786,8 +6678,8 @@
         </p:nvSpPr>
         <p:spPr>
           <a:xfrm>
-            <a:off x="640080" y="5486400"/>
-            <a:ext cx="4114800" cy="365760"/>
+            <a:off x="640080" y="4800600"/>
+            <a:ext cx="3383280" cy="365760"/>
           </a:xfrm>
           <a:prstGeom prst="rect">
             <a:avLst/>
@@ -6825,8 +6717,8 @@
         </p:nvSpPr>
         <p:spPr>
           <a:xfrm>
-            <a:off x="5486400" y="5897880"/>
-            <a:ext cx="6035040" cy="365760"/>
+            <a:off x="4480560" y="5806440"/>
+            <a:ext cx="7068312" cy="365760"/>
           </a:xfrm>
           <a:prstGeom prst="rect">
             <a:avLst/>

--- a/athr-pitch-ar.pptx
+++ b/athr-pitch-ar.pptx
@@ -685,7 +685,7 @@
           <a:p>
             <a:r>
               <a:rPr lang="en-US" dirty="0"/>
-              <a:t>اعرض هنا مباشرةً. امسح لوحةً أمامهم، ولا تشرح البنية أثناء العرض — دعهم يرونه يعمل.</a:t>
+              <a:t>اعرض هنا مباشرةً على جوّالك. ولا تشرح البنية أثناء العرض — دعهم يرونه يعمل.</a:t>
             </a:r>
             <a:endParaRPr lang="en-US" dirty="0"/>
           </a:p>
@@ -949,7 +949,7 @@
           <a:p>
             <a:r>
               <a:rPr lang="en-US" dirty="0"/>
-              <a:t>اعرضه حيًّا: امسح، صحّح، امسح ثانيةً. عشر ثوانٍ يرون فيها التعلّم يقع أمامهم. وإن سُئلت: النموذج غير بارامتري (k-NN)، وأوزان الشبكة لا تتغيّر — الذي يتغيّر هو ما يعرفه عن لوحات جبة.</a:t>
+              <a:t>اعرضه حيًّا: امسح، صحّح، امسح ثانيةً. عشر ثوانٍ يرون فيها التعلّم يقع. وإن سُئلت: النموذج غير بارامتري (k-NN)، وأوزان الشبكة لا تتغيّر — الذي يتغيّر هو ما يعرفه عن لوحات جبة.</a:t>
             </a:r>
             <a:endParaRPr lang="en-US" dirty="0"/>
           </a:p>
@@ -1500,30 +1500,30 @@
       </p:grpSpPr>
       <p:sp>
         <p:nvSpPr>
-          <p:cNvPr id="2" name="Text 0"/>
-          <p:cNvSpPr/>
-          <p:nvPr/>
-        </p:nvSpPr>
-        <p:spPr>
-          <a:xfrm>
-            <a:off x="5852160" y="1325880"/>
-            <a:ext cx="5669280" cy="1463040"/>
-          </a:xfrm>
-          <a:prstGeom prst="rect">
-            <a:avLst/>
-          </a:prstGeom>
-          <a:noFill/>
-          <a:ln/>
-        </p:spPr>
-        <p:txBody>
-          <a:bodyPr wrap="square" lIns="0" tIns="0" rIns="0" bIns="0" rtlCol="0" anchor="ctr"/>
-          <a:lstStyle/>
-          <a:p>
-            <a:pPr rtl="1" algn="r" indent="0" marL="0">
-              <a:buNone/>
-            </a:pPr>
-            <a:r>
-              <a:rPr lang="en-US" sz="9200" b="1" dirty="0">
+          <p:cNvPr id="2" name="!!wordmark"/>
+          <p:cNvSpPr/>
+          <p:nvPr/>
+        </p:nvSpPr>
+        <p:spPr>
+          <a:xfrm>
+            <a:off x="5394960" y="1417320"/>
+            <a:ext cx="6126480" cy="1691640"/>
+          </a:xfrm>
+          <a:prstGeom prst="rect">
+            <a:avLst/>
+          </a:prstGeom>
+          <a:noFill/>
+          <a:ln/>
+        </p:spPr>
+        <p:txBody>
+          <a:bodyPr wrap="square" lIns="0" tIns="0" rIns="0" bIns="0" rtlCol="0" anchor="ctr"/>
+          <a:lstStyle/>
+          <a:p>
+            <a:pPr rtl="1" algn="r" indent="0" marL="0">
+              <a:buNone/>
+            </a:pPr>
+            <a:r>
+              <a:rPr lang="en-US" sz="9600" b="1" dirty="0">
                 <a:solidFill>
                   <a:srgbClr val="C97A4A"/>
                 </a:solidFill>
@@ -1533,7 +1533,7 @@
               </a:rPr>
               <a:t>أثر</a:t>
             </a:r>
-            <a:endParaRPr lang="en-US" sz="9200" dirty="0"/>
+            <a:endParaRPr lang="en-US" sz="9600" dirty="0"/>
           </a:p>
         </p:txBody>
       </p:sp>
@@ -1545,24 +1545,24 @@
         </p:nvSpPr>
         <p:spPr>
           <a:xfrm>
-            <a:off x="4754880" y="2834640"/>
-            <a:ext cx="6766560" cy="594360"/>
-          </a:xfrm>
-          <a:prstGeom prst="rect">
-            <a:avLst/>
-          </a:prstGeom>
-          <a:noFill/>
-          <a:ln/>
-        </p:spPr>
-        <p:txBody>
-          <a:bodyPr wrap="square" lIns="0" tIns="0" rIns="0" bIns="0" rtlCol="0" anchor="ctr"/>
-          <a:lstStyle/>
-          <a:p>
-            <a:pPr rtl="1" algn="r" indent="0" marL="0">
-              <a:buNone/>
-            </a:pPr>
-            <a:r>
-              <a:rPr lang="en-US" sz="2600" b="1" dirty="0">
+            <a:off x="4206240" y="3200400"/>
+            <a:ext cx="7315200" cy="640080"/>
+          </a:xfrm>
+          <a:prstGeom prst="rect">
+            <a:avLst/>
+          </a:prstGeom>
+          <a:noFill/>
+          <a:ln/>
+        </p:spPr>
+        <p:txBody>
+          <a:bodyPr wrap="square" lIns="0" tIns="0" rIns="0" bIns="0" rtlCol="0" anchor="ctr"/>
+          <a:lstStyle/>
+          <a:p>
+            <a:pPr rtl="1" algn="r" indent="0" marL="0">
+              <a:buNone/>
+            </a:pPr>
+            <a:r>
+              <a:rPr lang="en-US" sz="2800" b="1" dirty="0">
                 <a:solidFill>
                   <a:srgbClr val="E8DCC8"/>
                 </a:solidFill>
@@ -1572,7 +1572,7 @@
               </a:rPr>
               <a:t>دليلٌ تراثيّ يعمل حيث يقع التراث</a:t>
             </a:r>
-            <a:endParaRPr lang="en-US" sz="2600" dirty="0"/>
+            <a:endParaRPr lang="en-US" sz="2800" dirty="0"/>
           </a:p>
         </p:txBody>
       </p:sp>
@@ -1584,8 +1584,8 @@
         </p:nvSpPr>
         <p:spPr>
           <a:xfrm>
-            <a:off x="4754880" y="3520440"/>
-            <a:ext cx="6766560" cy="457200"/>
+            <a:off x="4206240" y="3931920"/>
+            <a:ext cx="7315200" cy="457200"/>
           </a:xfrm>
           <a:prstGeom prst="rect">
             <a:avLst/>
@@ -1623,8 +1623,8 @@
         </p:nvSpPr>
         <p:spPr>
           <a:xfrm>
-            <a:off x="4754880" y="5760720"/>
-            <a:ext cx="6766560" cy="365760"/>
+            <a:off x="4206240" y="5806440"/>
+            <a:ext cx="7315200" cy="365760"/>
           </a:xfrm>
           <a:prstGeom prst="rect">
             <a:avLst/>
@@ -1642,187 +1642,59 @@
             <a:r>
               <a:rPr lang="en-US" sz="1300" dirty="0">
                 <a:solidFill>
-                  <a:srgbClr val="A2977F"/>
-                </a:solidFill>
-                <a:latin typeface="Arial" pitchFamily="34" charset="0"/>
-                <a:ea typeface="Arial" pitchFamily="34" charset="-122"/>
-                <a:cs typeface="Arial" pitchFamily="34" charset="-120"/>
-              </a:rPr>
-              <a:t>هاكاثون أجا للذكاء الاصطناعي  ·  حائل</a:t>
+                  <a:srgbClr val="6E6757"/>
+                </a:solidFill>
+                <a:latin typeface="Arial" pitchFamily="34" charset="0"/>
+                <a:ea typeface="Arial" pitchFamily="34" charset="-122"/>
+                <a:cs typeface="Arial" pitchFamily="34" charset="-120"/>
+              </a:rPr>
+              <a:t>هاكاثون أجا للذكاء الاصطناعي   ·   حائل</a:t>
             </a:r>
             <a:endParaRPr lang="en-US" sz="1300" dirty="0"/>
           </a:p>
         </p:txBody>
       </p:sp>
-      <p:sp>
-        <p:nvSpPr>
-          <p:cNvPr id="6" name="Shape 4"/>
-          <p:cNvSpPr/>
-          <p:nvPr/>
-        </p:nvSpPr>
-        <p:spPr>
-          <a:xfrm>
-            <a:off x="640080" y="1325880"/>
-            <a:ext cx="3749040" cy="4069080"/>
-          </a:xfrm>
-          <a:prstGeom prst="roundRect">
-            <a:avLst>
-              <a:gd name="adj" fmla="val 2927"/>
-            </a:avLst>
-          </a:prstGeom>
-          <a:solidFill>
-            <a:srgbClr val="1A2233"/>
-          </a:solidFill>
-          <a:ln w="12700">
-            <a:solidFill>
-              <a:srgbClr val="232D42"/>
-            </a:solidFill>
-            <a:prstDash val="solid"/>
-          </a:ln>
-        </p:spPr>
-      </p:sp>
-      <p:sp>
-        <p:nvSpPr>
-          <p:cNvPr id="7" name="Text 5"/>
-          <p:cNvSpPr/>
-          <p:nvPr/>
-        </p:nvSpPr>
-        <p:spPr>
-          <a:xfrm>
-            <a:off x="640080" y="1828800"/>
-            <a:ext cx="3749040" cy="1463040"/>
-          </a:xfrm>
-          <a:prstGeom prst="rect">
-            <a:avLst/>
-          </a:prstGeom>
-          <a:noFill/>
-          <a:ln/>
-        </p:spPr>
-        <p:txBody>
-          <a:bodyPr wrap="square" lIns="0" tIns="0" rIns="0" bIns="0" rtlCol="0" anchor="ctr"/>
-          <a:lstStyle/>
-          <a:p>
-            <a:pPr algn="ctr" indent="0" marL="0">
-              <a:buNone/>
-            </a:pPr>
-            <a:r>
-              <a:rPr lang="en-US" sz="7000" dirty="0">
-                <a:solidFill>
-                  <a:srgbClr val="000000"/>
-                </a:solidFill>
-              </a:rPr>
-              <a:t>🐐</a:t>
-            </a:r>
-            <a:endParaRPr lang="en-US" sz="7000" dirty="0"/>
-          </a:p>
-        </p:txBody>
-      </p:sp>
-      <p:sp>
-        <p:nvSpPr>
-          <p:cNvPr id="8" name="Text 6"/>
-          <p:cNvSpPr/>
-          <p:nvPr/>
-        </p:nvSpPr>
-        <p:spPr>
-          <a:xfrm>
-            <a:off x="640080" y="3474720"/>
-            <a:ext cx="3749040" cy="502920"/>
-          </a:xfrm>
-          <a:prstGeom prst="rect">
-            <a:avLst/>
-          </a:prstGeom>
-          <a:noFill/>
-          <a:ln/>
-        </p:spPr>
-        <p:txBody>
-          <a:bodyPr wrap="square" lIns="0" tIns="0" rIns="0" bIns="0" rtlCol="0" anchor="ctr"/>
-          <a:lstStyle/>
-          <a:p>
-            <a:pPr rtl="1" algn="ctr" indent="0" marL="0">
-              <a:buNone/>
-            </a:pPr>
-            <a:r>
-              <a:rPr lang="en-US" sz="2300" b="1" dirty="0">
-                <a:solidFill>
-                  <a:srgbClr val="EFAE6E"/>
-                </a:solidFill>
-                <a:latin typeface="Arial" pitchFamily="34" charset="0"/>
-                <a:ea typeface="Arial" pitchFamily="34" charset="-122"/>
-                <a:cs typeface="Arial" pitchFamily="34" charset="-120"/>
-              </a:rPr>
-              <a:t>عشرة آلاف سنة</a:t>
-            </a:r>
-            <a:endParaRPr lang="en-US" sz="2300" dirty="0"/>
-          </a:p>
-        </p:txBody>
-      </p:sp>
-      <p:sp>
-        <p:nvSpPr>
-          <p:cNvPr id="9" name="Text 7"/>
-          <p:cNvSpPr/>
-          <p:nvPr/>
-        </p:nvSpPr>
-        <p:spPr>
-          <a:xfrm>
-            <a:off x="640080" y="4069080"/>
-            <a:ext cx="3749040" cy="868680"/>
-          </a:xfrm>
-          <a:prstGeom prst="rect">
-            <a:avLst/>
-          </a:prstGeom>
-          <a:noFill/>
-          <a:ln/>
-        </p:spPr>
-        <p:txBody>
-          <a:bodyPr wrap="square" lIns="0" tIns="0" rIns="0" bIns="0" rtlCol="0" anchor="ctr"/>
-          <a:lstStyle/>
-          <a:p>
-            <a:pPr rtl="1" algn="ctr" indent="0" marL="0">
-              <a:lnSpc>
-                <a:spcPts val="2100"/>
-              </a:lnSpc>
-              <a:buNone/>
-            </a:pPr>
-            <a:r>
-              <a:rPr lang="en-US" sz="1300" dirty="0">
-                <a:solidFill>
-                  <a:srgbClr val="A2977F"/>
-                </a:solidFill>
-                <a:latin typeface="Arial" pitchFamily="34" charset="0"/>
-                <a:ea typeface="Arial" pitchFamily="34" charset="-122"/>
-                <a:cs typeface="Arial" pitchFamily="34" charset="-120"/>
-              </a:rPr>
-              <a:t>من النقوش الصخرية في جبة</a:t>
-            </a:r>
-            <a:endParaRPr lang="en-US" sz="1300" dirty="0"/>
-          </a:p>
-          <a:p>
-            <a:pPr rtl="1" algn="ctr" indent="0" marL="0">
-              <a:lnSpc>
-                <a:spcPts val="2100"/>
-              </a:lnSpc>
-              <a:buNone/>
-            </a:pPr>
-            <a:r>
-              <a:rPr lang="en-US" sz="1300" dirty="0">
-                <a:solidFill>
-                  <a:srgbClr val="A2977F"/>
-                </a:solidFill>
-                <a:latin typeface="Arial" pitchFamily="34" charset="0"/>
-                <a:ea typeface="Arial" pitchFamily="34" charset="-122"/>
-                <a:cs typeface="Arial" pitchFamily="34" charset="-120"/>
-              </a:rPr>
-              <a:t>موقع تراثٍ عالميّ — اليونسكو</a:t>
-            </a:r>
-            <a:endParaRPr lang="en-US" sz="1300" dirty="0"/>
-          </a:p>
-        </p:txBody>
-      </p:sp>
+      <p:pic>
+        <p:nvPicPr>
+          <p:cNvPr id="6" name="Image 0" descr="preencoded.png">    </p:cNvPr>
+          <p:cNvPicPr>
+            <a:picLocks noChangeAspect="1"/>
+          </p:cNvPicPr>
+          <p:nvPr/>
+        </p:nvPicPr>
+        <p:blipFill>
+          <a:blip r:embed="rId1"/>
+          <a:stretch>
+            <a:fillRect/>
+          </a:stretch>
+        </p:blipFill>
+        <p:spPr>
+          <a:xfrm>
+            <a:off x="548640" y="2240280"/>
+            <a:ext cx="4206240" cy="2670048"/>
+          </a:xfrm>
+          <a:prstGeom prst="rect">
+            <a:avLst/>
+          </a:prstGeom>
+        </p:spPr>
+      </p:pic>
     </p:spTree>
   </p:cSld>
   <p:clrMapOvr>
     <a:masterClrMapping/>
   </p:clrMapOvr>
+  <mc:AlternateContent xmlns:mc="http://schemas.openxmlformats.org/markup-compatibility/2006">
+    <mc:Choice xmlns:p159="http://schemas.microsoft.com/office/powerpoint/2015/09/main" Requires="p159">
+      <p:transition xmlns:p14="http://schemas.microsoft.com/office/powerpoint/2010/main" spd="slow" p14:dur="900">
+        <p159:morph option="byObject"/>
+      </p:transition>
+    </mc:Choice>
+    <mc:Fallback>
+      <p:transition xmlns:p14="http://schemas.microsoft.com/office/powerpoint/2010/main" spd="slow" p14:dur="900">
+        <p:fade/>
+      </p:transition>
+    </mc:Fallback>
+  </mc:AlternateContent>
 </p:sld>
 </file>
 
@@ -1852,30 +1724,30 @@
       </p:grpSpPr>
       <p:sp>
         <p:nvSpPr>
-          <p:cNvPr id="2" name="Text 0"/>
-          <p:cNvSpPr/>
-          <p:nvPr/>
-        </p:nvSpPr>
-        <p:spPr>
-          <a:xfrm>
-            <a:off x="640080" y="457200"/>
-            <a:ext cx="10911535" cy="777240"/>
-          </a:xfrm>
-          <a:prstGeom prst="rect">
-            <a:avLst/>
-          </a:prstGeom>
-          <a:noFill/>
-          <a:ln/>
-        </p:spPr>
-        <p:txBody>
-          <a:bodyPr wrap="square" lIns="0" tIns="0" rIns="0" bIns="0" rtlCol="0" anchor="ctr"/>
-          <a:lstStyle/>
-          <a:p>
-            <a:pPr rtl="1" algn="r" indent="0" marL="0">
-              <a:buNone/>
-            </a:pPr>
-            <a:r>
-              <a:rPr lang="en-US" sz="3600" b="1" dirty="0">
+          <p:cNvPr id="2" name="!!title"/>
+          <p:cNvSpPr/>
+          <p:nvPr/>
+        </p:nvSpPr>
+        <p:spPr>
+          <a:xfrm>
+            <a:off x="685800" y="502920"/>
+            <a:ext cx="10820095" cy="868680"/>
+          </a:xfrm>
+          <a:prstGeom prst="rect">
+            <a:avLst/>
+          </a:prstGeom>
+          <a:noFill/>
+          <a:ln/>
+        </p:spPr>
+        <p:txBody>
+          <a:bodyPr wrap="square" lIns="0" tIns="0" rIns="0" bIns="0" rtlCol="0" anchor="ctr"/>
+          <a:lstStyle/>
+          <a:p>
+            <a:pPr rtl="1" algn="r" indent="0" marL="0">
+              <a:buNone/>
+            </a:pPr>
+            <a:r>
+              <a:rPr lang="en-US" sz="4000" b="1" dirty="0">
                 <a:solidFill>
                   <a:srgbClr val="E8DCC8"/>
                 </a:solidFill>
@@ -1885,7 +1757,7 @@
               </a:rPr>
               <a:t>زائرٌ يقف أمام نقش</a:t>
             </a:r>
-            <a:endParaRPr lang="en-US" sz="3600" dirty="0"/>
+            <a:endParaRPr lang="en-US" sz="4000" dirty="0"/>
           </a:p>
         </p:txBody>
       </p:sp>
@@ -1897,24 +1769,24 @@
         </p:nvSpPr>
         <p:spPr>
           <a:xfrm>
-            <a:off x="640080" y="1234440"/>
-            <a:ext cx="10911535" cy="457200"/>
-          </a:xfrm>
-          <a:prstGeom prst="rect">
-            <a:avLst/>
-          </a:prstGeom>
-          <a:noFill/>
-          <a:ln/>
-        </p:spPr>
-        <p:txBody>
-          <a:bodyPr wrap="square" lIns="0" tIns="0" rIns="0" bIns="0" rtlCol="0" anchor="ctr"/>
-          <a:lstStyle/>
-          <a:p>
-            <a:pPr rtl="1" algn="r" indent="0" marL="0">
-              <a:buNone/>
-            </a:pPr>
-            <a:r>
-              <a:rPr lang="en-US" sz="1800" dirty="0">
+            <a:off x="685800" y="1371600"/>
+            <a:ext cx="10820095" cy="457200"/>
+          </a:xfrm>
+          <a:prstGeom prst="rect">
+            <a:avLst/>
+          </a:prstGeom>
+          <a:noFill/>
+          <a:ln/>
+        </p:spPr>
+        <p:txBody>
+          <a:bodyPr wrap="square" lIns="0" tIns="0" rIns="0" bIns="0" rtlCol="0" anchor="ctr"/>
+          <a:lstStyle/>
+          <a:p>
+            <a:pPr rtl="1" algn="r" indent="0" marL="0">
+              <a:buNone/>
+            </a:pPr>
+            <a:r>
+              <a:rPr lang="en-US" sz="1900" dirty="0">
                 <a:solidFill>
                   <a:srgbClr val="A2977F"/>
                 </a:solidFill>
@@ -1924,7 +1796,7 @@
               </a:rPr>
               <a:t>ولا شيء يقول له ما هو.</a:t>
             </a:r>
-            <a:endParaRPr lang="en-US" sz="1800" dirty="0"/>
+            <a:endParaRPr lang="en-US" sz="1900" dirty="0"/>
           </a:p>
         </p:txBody>
       </p:sp>
@@ -1936,16 +1808,16 @@
         </p:nvSpPr>
         <p:spPr>
           <a:xfrm>
-            <a:off x="8031175" y="2057400"/>
-            <a:ext cx="3520440" cy="2697480"/>
+            <a:off x="7939735" y="2240280"/>
+            <a:ext cx="3566160" cy="2514600"/>
           </a:xfrm>
           <a:prstGeom prst="roundRect">
             <a:avLst>
-              <a:gd name="adj" fmla="val 4068"/>
+              <a:gd name="adj" fmla="val 3636"/>
             </a:avLst>
           </a:prstGeom>
           <a:solidFill>
-            <a:srgbClr val="1A2233"/>
+            <a:srgbClr val="151D2C"/>
           </a:solidFill>
           <a:ln w="12700">
             <a:solidFill>
@@ -1957,28 +1829,42 @@
       </p:sp>
       <p:sp>
         <p:nvSpPr>
-          <p:cNvPr id="5" name="Shape 3"/>
-          <p:cNvSpPr/>
-          <p:nvPr/>
-        </p:nvSpPr>
-        <p:spPr>
-          <a:xfrm>
-            <a:off x="10682935" y="2377440"/>
-            <a:ext cx="548640" cy="548640"/>
-          </a:xfrm>
-          <a:prstGeom prst="ellipse">
-            <a:avLst/>
-          </a:prstGeom>
-          <a:solidFill>
-            <a:srgbClr val="C97A4A"/>
-          </a:solidFill>
-          <a:ln w="12700">
-            <a:solidFill>
-              <a:srgbClr val="333333"/>
-            </a:solidFill>
-            <a:prstDash val="solid"/>
-          </a:ln>
-        </p:spPr>
+          <p:cNvPr id="5" name="Text 3"/>
+          <p:cNvSpPr/>
+          <p:nvPr/>
+        </p:nvSpPr>
+        <p:spPr>
+          <a:xfrm>
+            <a:off x="8305495" y="2606040"/>
+            <a:ext cx="2834640" cy="502920"/>
+          </a:xfrm>
+          <a:prstGeom prst="rect">
+            <a:avLst/>
+          </a:prstGeom>
+          <a:noFill/>
+          <a:ln/>
+        </p:spPr>
+        <p:txBody>
+          <a:bodyPr wrap="square" lIns="0" tIns="0" rIns="0" bIns="0" rtlCol="0" anchor="ctr"/>
+          <a:lstStyle/>
+          <a:p>
+            <a:pPr rtl="1" algn="r" indent="0" marL="0">
+              <a:buNone/>
+            </a:pPr>
+            <a:r>
+              <a:rPr lang="en-US" sz="2400" b="1" dirty="0">
+                <a:solidFill>
+                  <a:srgbClr val="DD8C58"/>
+                </a:solidFill>
+                <a:latin typeface="Arial" pitchFamily="34" charset="0"/>
+                <a:ea typeface="Arial" pitchFamily="34" charset="-122"/>
+                <a:cs typeface="Arial" pitchFamily="34" charset="-120"/>
+              </a:rPr>
+              <a:t>لا لافتة</a:t>
+            </a:r>
+            <a:endParaRPr lang="en-US" sz="2400" dirty="0"/>
+          </a:p>
+        </p:txBody>
       </p:sp>
       <p:sp>
         <p:nvSpPr>
@@ -1988,86 +1874,8 @@
         </p:nvSpPr>
         <p:spPr>
           <a:xfrm>
-            <a:off x="10682935" y="2377440"/>
-            <a:ext cx="548640" cy="548640"/>
-          </a:xfrm>
-          <a:prstGeom prst="rect">
-            <a:avLst/>
-          </a:prstGeom>
-          <a:noFill/>
-          <a:ln/>
-        </p:spPr>
-        <p:txBody>
-          <a:bodyPr wrap="square" lIns="0" tIns="0" rIns="0" bIns="0" rtlCol="0" anchor="ctr"/>
-          <a:lstStyle/>
-          <a:p>
-            <a:pPr algn="ctr" indent="0" marL="0">
-              <a:buNone/>
-            </a:pPr>
-            <a:r>
-              <a:rPr lang="en-US" sz="1900" b="1" dirty="0">
-                <a:solidFill>
-                  <a:srgbClr val="0B0F17"/>
-                </a:solidFill>
-                <a:latin typeface="Calibri" pitchFamily="34" charset="0"/>
-                <a:ea typeface="Calibri" pitchFamily="34" charset="-122"/>
-                <a:cs typeface="Calibri" pitchFamily="34" charset="-120"/>
-              </a:rPr>
-              <a:t>1</a:t>
-            </a:r>
-            <a:endParaRPr lang="en-US" sz="1900" dirty="0"/>
-          </a:p>
-        </p:txBody>
-      </p:sp>
-      <p:sp>
-        <p:nvSpPr>
-          <p:cNvPr id="7" name="Text 5"/>
-          <p:cNvSpPr/>
-          <p:nvPr/>
-        </p:nvSpPr>
-        <p:spPr>
-          <a:xfrm>
-            <a:off x="8351215" y="3108960"/>
-            <a:ext cx="2880360" cy="457200"/>
-          </a:xfrm>
-          <a:prstGeom prst="rect">
-            <a:avLst/>
-          </a:prstGeom>
-          <a:noFill/>
-          <a:ln/>
-        </p:spPr>
-        <p:txBody>
-          <a:bodyPr wrap="square" lIns="0" tIns="0" rIns="0" bIns="0" rtlCol="0" anchor="ctr"/>
-          <a:lstStyle/>
-          <a:p>
-            <a:pPr rtl="1" algn="r" indent="0" marL="0">
-              <a:buNone/>
-            </a:pPr>
-            <a:r>
-              <a:rPr lang="en-US" sz="2100" b="1" dirty="0">
-                <a:solidFill>
-                  <a:srgbClr val="E8DCC8"/>
-                </a:solidFill>
-                <a:latin typeface="Arial" pitchFamily="34" charset="0"/>
-                <a:ea typeface="Arial" pitchFamily="34" charset="-122"/>
-                <a:cs typeface="Arial" pitchFamily="34" charset="-120"/>
-              </a:rPr>
-              <a:t>لا لافتة</a:t>
-            </a:r>
-            <a:endParaRPr lang="en-US" sz="2100" dirty="0"/>
-          </a:p>
-        </p:txBody>
-      </p:sp>
-      <p:sp>
-        <p:nvSpPr>
-          <p:cNvPr id="8" name="Text 6"/>
-          <p:cNvSpPr/>
-          <p:nvPr/>
-        </p:nvSpPr>
-        <p:spPr>
-          <a:xfrm>
-            <a:off x="8351215" y="3611880"/>
-            <a:ext cx="2880360" cy="960120"/>
+            <a:off x="8305495" y="3246120"/>
+            <a:ext cx="2834640" cy="1188720"/>
           </a:xfrm>
           <a:prstGeom prst="rect">
             <a:avLst/>
@@ -2081,12 +1889,12 @@
           <a:p>
             <a:pPr rtl="1" algn="r" indent="0" marL="0">
               <a:lnSpc>
-                <a:spcPts val="2200"/>
+                <a:spcPts val="2400"/>
               </a:lnSpc>
               <a:buNone/>
             </a:pPr>
             <a:r>
-              <a:rPr lang="en-US" sz="1400" dirty="0">
+              <a:rPr lang="en-US" sz="1450" dirty="0">
                 <a:solidFill>
                   <a:srgbClr val="A2977F"/>
                 </a:solidFill>
@@ -2096,28 +1904,28 @@
               </a:rPr>
               <a:t>أكثر اللوحات بلا تعريف، والصخرة لا تشرح نفسها.</a:t>
             </a:r>
-            <a:endParaRPr lang="en-US" sz="1400" dirty="0"/>
-          </a:p>
-        </p:txBody>
-      </p:sp>
-      <p:sp>
-        <p:nvSpPr>
-          <p:cNvPr id="9" name="Shape 7"/>
-          <p:cNvSpPr/>
-          <p:nvPr/>
-        </p:nvSpPr>
-        <p:spPr>
-          <a:xfrm>
-            <a:off x="4318711" y="2057400"/>
-            <a:ext cx="3520440" cy="2697480"/>
+            <a:endParaRPr lang="en-US" sz="1450" dirty="0"/>
+          </a:p>
+        </p:txBody>
+      </p:sp>
+      <p:sp>
+        <p:nvSpPr>
+          <p:cNvPr id="7" name="Shape 5"/>
+          <p:cNvSpPr/>
+          <p:nvPr/>
+        </p:nvSpPr>
+        <p:spPr>
+          <a:xfrm>
+            <a:off x="4236415" y="2240280"/>
+            <a:ext cx="3566160" cy="2514600"/>
           </a:xfrm>
           <a:prstGeom prst="roundRect">
             <a:avLst>
-              <a:gd name="adj" fmla="val 4068"/>
+              <a:gd name="adj" fmla="val 3636"/>
             </a:avLst>
           </a:prstGeom>
           <a:solidFill>
-            <a:srgbClr val="1A2233"/>
+            <a:srgbClr val="151D2C"/>
           </a:solidFill>
           <a:ln w="12700">
             <a:solidFill>
@@ -2129,167 +1937,103 @@
       </p:sp>
       <p:sp>
         <p:nvSpPr>
+          <p:cNvPr id="8" name="Text 6"/>
+          <p:cNvSpPr/>
+          <p:nvPr/>
+        </p:nvSpPr>
+        <p:spPr>
+          <a:xfrm>
+            <a:off x="4602175" y="2606040"/>
+            <a:ext cx="2834640" cy="502920"/>
+          </a:xfrm>
+          <a:prstGeom prst="rect">
+            <a:avLst/>
+          </a:prstGeom>
+          <a:noFill/>
+          <a:ln/>
+        </p:spPr>
+        <p:txBody>
+          <a:bodyPr wrap="square" lIns="0" tIns="0" rIns="0" bIns="0" rtlCol="0" anchor="ctr"/>
+          <a:lstStyle/>
+          <a:p>
+            <a:pPr rtl="1" algn="r" indent="0" marL="0">
+              <a:buNone/>
+            </a:pPr>
+            <a:r>
+              <a:rPr lang="en-US" sz="2400" b="1" dirty="0">
+                <a:solidFill>
+                  <a:srgbClr val="DD8C58"/>
+                </a:solidFill>
+                <a:latin typeface="Arial" pitchFamily="34" charset="0"/>
+                <a:ea typeface="Arial" pitchFamily="34" charset="-122"/>
+                <a:cs typeface="Arial" pitchFamily="34" charset="-120"/>
+              </a:rPr>
+              <a:t>لا مرشد</a:t>
+            </a:r>
+            <a:endParaRPr lang="en-US" sz="2400" dirty="0"/>
+          </a:p>
+        </p:txBody>
+      </p:sp>
+      <p:sp>
+        <p:nvSpPr>
+          <p:cNvPr id="9" name="Text 7"/>
+          <p:cNvSpPr/>
+          <p:nvPr/>
+        </p:nvSpPr>
+        <p:spPr>
+          <a:xfrm>
+            <a:off x="4602175" y="3246120"/>
+            <a:ext cx="2834640" cy="1188720"/>
+          </a:xfrm>
+          <a:prstGeom prst="rect">
+            <a:avLst/>
+          </a:prstGeom>
+          <a:noFill/>
+          <a:ln/>
+        </p:spPr>
+        <p:txBody>
+          <a:bodyPr wrap="square" lIns="0" tIns="0" rIns="0" bIns="0" rtlCol="0" anchor="ctr"/>
+          <a:lstStyle/>
+          <a:p>
+            <a:pPr rtl="1" algn="r" indent="0" marL="0">
+              <a:lnSpc>
+                <a:spcPts val="2400"/>
+              </a:lnSpc>
+              <a:buNone/>
+            </a:pPr>
+            <a:r>
+              <a:rPr lang="en-US" sz="1450" dirty="0">
+                <a:solidFill>
+                  <a:srgbClr val="A2977F"/>
+                </a:solidFill>
+                <a:latin typeface="Arial" pitchFamily="34" charset="0"/>
+                <a:ea typeface="Arial" pitchFamily="34" charset="-122"/>
+                <a:cs typeface="Arial" pitchFamily="34" charset="-120"/>
+              </a:rPr>
+              <a:t>المرشدون قليل، ولا أحد منهم يتكلّم لغة كلّ زائر.</a:t>
+            </a:r>
+            <a:endParaRPr lang="en-US" sz="1450" dirty="0"/>
+          </a:p>
+        </p:txBody>
+      </p:sp>
+      <p:sp>
+        <p:nvSpPr>
           <p:cNvPr id="10" name="Shape 8"/>
           <p:cNvSpPr/>
           <p:nvPr/>
         </p:nvSpPr>
         <p:spPr>
           <a:xfrm>
-            <a:off x="6970471" y="2377440"/>
-            <a:ext cx="548640" cy="548640"/>
-          </a:xfrm>
-          <a:prstGeom prst="ellipse">
-            <a:avLst/>
-          </a:prstGeom>
-          <a:solidFill>
-            <a:srgbClr val="C97A4A"/>
-          </a:solidFill>
-          <a:ln w="12700">
-            <a:solidFill>
-              <a:srgbClr val="333333"/>
-            </a:solidFill>
-            <a:prstDash val="solid"/>
-          </a:ln>
-        </p:spPr>
-      </p:sp>
-      <p:sp>
-        <p:nvSpPr>
-          <p:cNvPr id="11" name="Text 9"/>
-          <p:cNvSpPr/>
-          <p:nvPr/>
-        </p:nvSpPr>
-        <p:spPr>
-          <a:xfrm>
-            <a:off x="6970471" y="2377440"/>
-            <a:ext cx="548640" cy="548640"/>
-          </a:xfrm>
-          <a:prstGeom prst="rect">
-            <a:avLst/>
-          </a:prstGeom>
-          <a:noFill/>
-          <a:ln/>
-        </p:spPr>
-        <p:txBody>
-          <a:bodyPr wrap="square" lIns="0" tIns="0" rIns="0" bIns="0" rtlCol="0" anchor="ctr"/>
-          <a:lstStyle/>
-          <a:p>
-            <a:pPr algn="ctr" indent="0" marL="0">
-              <a:buNone/>
-            </a:pPr>
-            <a:r>
-              <a:rPr lang="en-US" sz="1900" b="1" dirty="0">
-                <a:solidFill>
-                  <a:srgbClr val="0B0F17"/>
-                </a:solidFill>
-                <a:latin typeface="Calibri" pitchFamily="34" charset="0"/>
-                <a:ea typeface="Calibri" pitchFamily="34" charset="-122"/>
-                <a:cs typeface="Calibri" pitchFamily="34" charset="-120"/>
-              </a:rPr>
-              <a:t>2</a:t>
-            </a:r>
-            <a:endParaRPr lang="en-US" sz="1900" dirty="0"/>
-          </a:p>
-        </p:txBody>
-      </p:sp>
-      <p:sp>
-        <p:nvSpPr>
-          <p:cNvPr id="12" name="Text 10"/>
-          <p:cNvSpPr/>
-          <p:nvPr/>
-        </p:nvSpPr>
-        <p:spPr>
-          <a:xfrm>
-            <a:off x="4638751" y="3108960"/>
-            <a:ext cx="2880360" cy="457200"/>
-          </a:xfrm>
-          <a:prstGeom prst="rect">
-            <a:avLst/>
-          </a:prstGeom>
-          <a:noFill/>
-          <a:ln/>
-        </p:spPr>
-        <p:txBody>
-          <a:bodyPr wrap="square" lIns="0" tIns="0" rIns="0" bIns="0" rtlCol="0" anchor="ctr"/>
-          <a:lstStyle/>
-          <a:p>
-            <a:pPr rtl="1" algn="r" indent="0" marL="0">
-              <a:buNone/>
-            </a:pPr>
-            <a:r>
-              <a:rPr lang="en-US" sz="2100" b="1" dirty="0">
-                <a:solidFill>
-                  <a:srgbClr val="E8DCC8"/>
-                </a:solidFill>
-                <a:latin typeface="Arial" pitchFamily="34" charset="0"/>
-                <a:ea typeface="Arial" pitchFamily="34" charset="-122"/>
-                <a:cs typeface="Arial" pitchFamily="34" charset="-120"/>
-              </a:rPr>
-              <a:t>لا مرشد</a:t>
-            </a:r>
-            <a:endParaRPr lang="en-US" sz="2100" dirty="0"/>
-          </a:p>
-        </p:txBody>
-      </p:sp>
-      <p:sp>
-        <p:nvSpPr>
-          <p:cNvPr id="13" name="Text 11"/>
-          <p:cNvSpPr/>
-          <p:nvPr/>
-        </p:nvSpPr>
-        <p:spPr>
-          <a:xfrm>
-            <a:off x="4638751" y="3611880"/>
-            <a:ext cx="2880360" cy="960120"/>
-          </a:xfrm>
-          <a:prstGeom prst="rect">
-            <a:avLst/>
-          </a:prstGeom>
-          <a:noFill/>
-          <a:ln/>
-        </p:spPr>
-        <p:txBody>
-          <a:bodyPr wrap="square" lIns="0" tIns="0" rIns="0" bIns="0" rtlCol="0" anchor="ctr"/>
-          <a:lstStyle/>
-          <a:p>
-            <a:pPr rtl="1" algn="r" indent="0" marL="0">
-              <a:lnSpc>
-                <a:spcPts val="2200"/>
-              </a:lnSpc>
-              <a:buNone/>
-            </a:pPr>
-            <a:r>
-              <a:rPr lang="en-US" sz="1400" dirty="0">
-                <a:solidFill>
-                  <a:srgbClr val="A2977F"/>
-                </a:solidFill>
-                <a:latin typeface="Arial" pitchFamily="34" charset="0"/>
-                <a:ea typeface="Arial" pitchFamily="34" charset="-122"/>
-                <a:cs typeface="Arial" pitchFamily="34" charset="-120"/>
-              </a:rPr>
-              <a:t>المرشدون قليل، ولا أحد منهم يتكلّم لغة كلّ زائر.</a:t>
-            </a:r>
-            <a:endParaRPr lang="en-US" sz="1400" dirty="0"/>
-          </a:p>
-        </p:txBody>
-      </p:sp>
-      <p:sp>
-        <p:nvSpPr>
-          <p:cNvPr id="14" name="Shape 12"/>
-          <p:cNvSpPr/>
-          <p:nvPr/>
-        </p:nvSpPr>
-        <p:spPr>
-          <a:xfrm>
-            <a:off x="606247" y="2057400"/>
-            <a:ext cx="3520440" cy="2697480"/>
+            <a:off x="533095" y="2240280"/>
+            <a:ext cx="3566160" cy="2514600"/>
           </a:xfrm>
           <a:prstGeom prst="roundRect">
             <a:avLst>
-              <a:gd name="adj" fmla="val 4068"/>
+              <a:gd name="adj" fmla="val 3636"/>
             </a:avLst>
           </a:prstGeom>
           <a:solidFill>
-            <a:srgbClr val="1A2233"/>
+            <a:srgbClr val="151D2C"/>
           </a:solidFill>
           <a:ln w="12700">
             <a:solidFill>
@@ -2301,96 +2045,32 @@
       </p:sp>
       <p:sp>
         <p:nvSpPr>
-          <p:cNvPr id="15" name="Shape 13"/>
-          <p:cNvSpPr/>
-          <p:nvPr/>
-        </p:nvSpPr>
-        <p:spPr>
-          <a:xfrm>
-            <a:off x="3258007" y="2377440"/>
-            <a:ext cx="548640" cy="548640"/>
-          </a:xfrm>
-          <a:prstGeom prst="ellipse">
-            <a:avLst/>
-          </a:prstGeom>
-          <a:solidFill>
-            <a:srgbClr val="C97A4A"/>
-          </a:solidFill>
-          <a:ln w="12700">
-            <a:solidFill>
-              <a:srgbClr val="333333"/>
-            </a:solidFill>
-            <a:prstDash val="solid"/>
-          </a:ln>
-        </p:spPr>
-      </p:sp>
-      <p:sp>
-        <p:nvSpPr>
-          <p:cNvPr id="16" name="Text 14"/>
-          <p:cNvSpPr/>
-          <p:nvPr/>
-        </p:nvSpPr>
-        <p:spPr>
-          <a:xfrm>
-            <a:off x="3258007" y="2377440"/>
-            <a:ext cx="548640" cy="548640"/>
-          </a:xfrm>
-          <a:prstGeom prst="rect">
-            <a:avLst/>
-          </a:prstGeom>
-          <a:noFill/>
-          <a:ln/>
-        </p:spPr>
-        <p:txBody>
-          <a:bodyPr wrap="square" lIns="0" tIns="0" rIns="0" bIns="0" rtlCol="0" anchor="ctr"/>
-          <a:lstStyle/>
-          <a:p>
-            <a:pPr algn="ctr" indent="0" marL="0">
-              <a:buNone/>
-            </a:pPr>
-            <a:r>
-              <a:rPr lang="en-US" sz="1900" b="1" dirty="0">
-                <a:solidFill>
-                  <a:srgbClr val="0B0F17"/>
-                </a:solidFill>
-                <a:latin typeface="Calibri" pitchFamily="34" charset="0"/>
-                <a:ea typeface="Calibri" pitchFamily="34" charset="-122"/>
-                <a:cs typeface="Calibri" pitchFamily="34" charset="-120"/>
-              </a:rPr>
-              <a:t>3</a:t>
-            </a:r>
-            <a:endParaRPr lang="en-US" sz="1900" dirty="0"/>
-          </a:p>
-        </p:txBody>
-      </p:sp>
-      <p:sp>
-        <p:nvSpPr>
-          <p:cNvPr id="17" name="Text 15"/>
-          <p:cNvSpPr/>
-          <p:nvPr/>
-        </p:nvSpPr>
-        <p:spPr>
-          <a:xfrm>
-            <a:off x="926287" y="3108960"/>
-            <a:ext cx="2880360" cy="457200"/>
-          </a:xfrm>
-          <a:prstGeom prst="rect">
-            <a:avLst/>
-          </a:prstGeom>
-          <a:noFill/>
-          <a:ln/>
-        </p:spPr>
-        <p:txBody>
-          <a:bodyPr wrap="square" lIns="0" tIns="0" rIns="0" bIns="0" rtlCol="0" anchor="ctr"/>
-          <a:lstStyle/>
-          <a:p>
-            <a:pPr rtl="1" algn="r" indent="0" marL="0">
-              <a:buNone/>
-            </a:pPr>
-            <a:r>
-              <a:rPr lang="en-US" sz="2100" b="1" dirty="0">
-                <a:solidFill>
-                  <a:srgbClr val="E8DCC8"/>
+          <p:cNvPr id="11" name="Text 9"/>
+          <p:cNvSpPr/>
+          <p:nvPr/>
+        </p:nvSpPr>
+        <p:spPr>
+          <a:xfrm>
+            <a:off x="898855" y="2606040"/>
+            <a:ext cx="2834640" cy="502920"/>
+          </a:xfrm>
+          <a:prstGeom prst="rect">
+            <a:avLst/>
+          </a:prstGeom>
+          <a:noFill/>
+          <a:ln/>
+        </p:spPr>
+        <p:txBody>
+          <a:bodyPr wrap="square" lIns="0" tIns="0" rIns="0" bIns="0" rtlCol="0" anchor="ctr"/>
+          <a:lstStyle/>
+          <a:p>
+            <a:pPr rtl="1" algn="r" indent="0" marL="0">
+              <a:buNone/>
+            </a:pPr>
+            <a:r>
+              <a:rPr lang="en-US" sz="2400" b="1" dirty="0">
+                <a:solidFill>
+                  <a:srgbClr val="DD8C58"/>
                 </a:solidFill>
                 <a:latin typeface="Arial" pitchFamily="34" charset="0"/>
                 <a:ea typeface="Arial" pitchFamily="34" charset="-122"/>
@@ -2398,20 +2078,20 @@
               </a:rPr>
               <a:t>لا شبكة</a:t>
             </a:r>
-            <a:endParaRPr lang="en-US" sz="2100" dirty="0"/>
-          </a:p>
-        </p:txBody>
-      </p:sp>
-      <p:sp>
-        <p:nvSpPr>
-          <p:cNvPr id="18" name="Text 16"/>
-          <p:cNvSpPr/>
-          <p:nvPr/>
-        </p:nvSpPr>
-        <p:spPr>
-          <a:xfrm>
-            <a:off x="926287" y="3611880"/>
-            <a:ext cx="2880360" cy="960120"/>
+            <a:endParaRPr lang="en-US" sz="2400" dirty="0"/>
+          </a:p>
+        </p:txBody>
+      </p:sp>
+      <p:sp>
+        <p:nvSpPr>
+          <p:cNvPr id="12" name="Text 10"/>
+          <p:cNvSpPr/>
+          <p:nvPr/>
+        </p:nvSpPr>
+        <p:spPr>
+          <a:xfrm>
+            <a:off x="898855" y="3246120"/>
+            <a:ext cx="2834640" cy="1188720"/>
           </a:xfrm>
           <a:prstGeom prst="rect">
             <a:avLst/>
@@ -2425,12 +2105,12 @@
           <a:p>
             <a:pPr rtl="1" algn="r" indent="0" marL="0">
               <a:lnSpc>
-                <a:spcPts val="2200"/>
+                <a:spcPts val="2400"/>
               </a:lnSpc>
               <a:buNone/>
             </a:pPr>
             <a:r>
-              <a:rPr lang="en-US" sz="1400" dirty="0">
+              <a:rPr lang="en-US" sz="1450" dirty="0">
                 <a:solidFill>
                   <a:srgbClr val="A2977F"/>
                 </a:solidFill>
@@ -2440,36 +2120,36 @@
               </a:rPr>
               <a:t>الموقع في الصحراء المفتوحة، فكلّ ما يعتمد على السحابة يسقط.</a:t>
             </a:r>
-            <a:endParaRPr lang="en-US" sz="1400" dirty="0"/>
-          </a:p>
-        </p:txBody>
-      </p:sp>
-      <p:sp>
-        <p:nvSpPr>
-          <p:cNvPr id="19" name="Text 17"/>
-          <p:cNvSpPr/>
-          <p:nvPr/>
-        </p:nvSpPr>
-        <p:spPr>
-          <a:xfrm>
-            <a:off x="640080" y="5120640"/>
-            <a:ext cx="10911535" cy="457200"/>
-          </a:xfrm>
-          <a:prstGeom prst="rect">
-            <a:avLst/>
-          </a:prstGeom>
-          <a:noFill/>
-          <a:ln/>
-        </p:spPr>
-        <p:txBody>
-          <a:bodyPr wrap="square" lIns="0" tIns="0" rIns="0" bIns="0" rtlCol="0" anchor="ctr"/>
-          <a:lstStyle/>
-          <a:p>
-            <a:pPr rtl="1" algn="r" indent="0" marL="0">
-              <a:buNone/>
-            </a:pPr>
-            <a:r>
-              <a:rPr lang="en-US" sz="1600" i="1" dirty="0">
+            <a:endParaRPr lang="en-US" sz="1450" dirty="0"/>
+          </a:p>
+        </p:txBody>
+      </p:sp>
+      <p:sp>
+        <p:nvSpPr>
+          <p:cNvPr id="13" name="Text 11"/>
+          <p:cNvSpPr/>
+          <p:nvPr/>
+        </p:nvSpPr>
+        <p:spPr>
+          <a:xfrm>
+            <a:off x="685800" y="5257800"/>
+            <a:ext cx="10820095" cy="457200"/>
+          </a:xfrm>
+          <a:prstGeom prst="rect">
+            <a:avLst/>
+          </a:prstGeom>
+          <a:noFill/>
+          <a:ln/>
+        </p:spPr>
+        <p:txBody>
+          <a:bodyPr wrap="square" lIns="0" tIns="0" rIns="0" bIns="0" rtlCol="0" anchor="ctr"/>
+          <a:lstStyle/>
+          <a:p>
+            <a:pPr rtl="1" algn="r" indent="0" marL="0">
+              <a:buNone/>
+            </a:pPr>
+            <a:r>
+              <a:rPr lang="en-US" sz="1700" i="1" dirty="0">
                 <a:solidFill>
                   <a:srgbClr val="EFAE6E"/>
                 </a:solidFill>
@@ -2479,7 +2159,7 @@
               </a:rPr>
               <a:t>الحلّ السحابيّ هو الجواب البديهيّ — وهو الجواب الذي لا يعمل هنا.</a:t>
             </a:r>
-            <a:endParaRPr lang="en-US" sz="1600" dirty="0"/>
+            <a:endParaRPr lang="en-US" sz="1700" dirty="0"/>
           </a:p>
         </p:txBody>
       </p:sp>
@@ -2488,6 +2168,18 @@
   <p:clrMapOvr>
     <a:masterClrMapping/>
   </p:clrMapOvr>
+  <mc:AlternateContent xmlns:mc="http://schemas.openxmlformats.org/markup-compatibility/2006">
+    <mc:Choice xmlns:p159="http://schemas.microsoft.com/office/powerpoint/2015/09/main" Requires="p159">
+      <p:transition xmlns:p14="http://schemas.microsoft.com/office/powerpoint/2010/main" spd="slow" p14:dur="900">
+        <p159:morph option="byObject"/>
+      </p:transition>
+    </mc:Choice>
+    <mc:Fallback>
+      <p:transition xmlns:p14="http://schemas.microsoft.com/office/powerpoint/2010/main" spd="slow" p14:dur="900">
+        <p:fade/>
+      </p:transition>
+    </mc:Fallback>
+  </mc:AlternateContent>
 </p:sld>
 </file>
 
@@ -2517,30 +2209,30 @@
       </p:grpSpPr>
       <p:sp>
         <p:nvSpPr>
-          <p:cNvPr id="2" name="Text 0"/>
-          <p:cNvSpPr/>
-          <p:nvPr/>
-        </p:nvSpPr>
-        <p:spPr>
-          <a:xfrm>
-            <a:off x="640080" y="457200"/>
-            <a:ext cx="10911535" cy="777240"/>
-          </a:xfrm>
-          <a:prstGeom prst="rect">
-            <a:avLst/>
-          </a:prstGeom>
-          <a:noFill/>
-          <a:ln/>
-        </p:spPr>
-        <p:txBody>
-          <a:bodyPr wrap="square" lIns="0" tIns="0" rIns="0" bIns="0" rtlCol="0" anchor="ctr"/>
-          <a:lstStyle/>
-          <a:p>
-            <a:pPr rtl="1" algn="r" indent="0" marL="0">
-              <a:buNone/>
-            </a:pPr>
-            <a:r>
-              <a:rPr lang="en-US" sz="3600" b="1" dirty="0">
+          <p:cNvPr id="2" name="!!title"/>
+          <p:cNvSpPr/>
+          <p:nvPr/>
+        </p:nvSpPr>
+        <p:spPr>
+          <a:xfrm>
+            <a:off x="685800" y="502920"/>
+            <a:ext cx="10820095" cy="868680"/>
+          </a:xfrm>
+          <a:prstGeom prst="rect">
+            <a:avLst/>
+          </a:prstGeom>
+          <a:noFill/>
+          <a:ln/>
+        </p:spPr>
+        <p:txBody>
+          <a:bodyPr wrap="square" lIns="0" tIns="0" rIns="0" bIns="0" rtlCol="0" anchor="ctr"/>
+          <a:lstStyle/>
+          <a:p>
+            <a:pPr rtl="1" algn="r" indent="0" marL="0">
+              <a:buNone/>
+            </a:pPr>
+            <a:r>
+              <a:rPr lang="en-US" sz="4000" b="1" dirty="0">
                 <a:solidFill>
                   <a:srgbClr val="E8DCC8"/>
                 </a:solidFill>
@@ -2550,7 +2242,7 @@
               </a:rPr>
               <a:t>وجّه الكاميرا. واسمع القصّة.</a:t>
             </a:r>
-            <a:endParaRPr lang="en-US" sz="3600" dirty="0"/>
+            <a:endParaRPr lang="en-US" sz="4000" dirty="0"/>
           </a:p>
         </p:txBody>
       </p:sp>
@@ -2562,14 +2254,16 @@
         </p:nvSpPr>
         <p:spPr>
           <a:xfrm>
-            <a:off x="11002975" y="1536192"/>
-            <a:ext cx="548640" cy="548640"/>
-          </a:xfrm>
-          <a:prstGeom prst="ellipse">
-            <a:avLst/>
+            <a:off x="621792" y="1536192"/>
+            <a:ext cx="2121195" cy="4288536"/>
+          </a:xfrm>
+          <a:prstGeom prst="roundRect">
+            <a:avLst>
+              <a:gd name="adj" fmla="val 5173"/>
+            </a:avLst>
           </a:prstGeom>
           <a:solidFill>
-            <a:srgbClr val="C97A4A"/>
+            <a:srgbClr val="2A3244"/>
           </a:solidFill>
           <a:ln w="12700">
             <a:solidFill>
@@ -2577,144 +2271,57 @@
             </a:solidFill>
             <a:prstDash val="solid"/>
           </a:ln>
-        </p:spPr>
-      </p:sp>
-      <p:sp>
-        <p:nvSpPr>
-          <p:cNvPr id="4" name="Text 2"/>
-          <p:cNvSpPr/>
-          <p:nvPr/>
-        </p:nvSpPr>
-        <p:spPr>
-          <a:xfrm>
-            <a:off x="11002975" y="1536192"/>
-            <a:ext cx="548640" cy="548640"/>
-          </a:xfrm>
-          <a:prstGeom prst="rect">
-            <a:avLst/>
-          </a:prstGeom>
-          <a:noFill/>
-          <a:ln/>
-        </p:spPr>
-        <p:txBody>
-          <a:bodyPr wrap="square" lIns="0" tIns="0" rIns="0" bIns="0" rtlCol="0" anchor="ctr"/>
-          <a:lstStyle/>
-          <a:p>
-            <a:pPr algn="ctr" indent="0" marL="0">
-              <a:buNone/>
-            </a:pPr>
-            <a:r>
-              <a:rPr lang="en-US" sz="1900" b="1" dirty="0">
-                <a:solidFill>
-                  <a:srgbClr val="0B0F17"/>
-                </a:solidFill>
-                <a:latin typeface="Calibri" pitchFamily="34" charset="0"/>
-                <a:ea typeface="Calibri" pitchFamily="34" charset="-122"/>
-                <a:cs typeface="Calibri" pitchFamily="34" charset="-120"/>
-              </a:rPr>
-              <a:t>1</a:t>
-            </a:r>
-            <a:endParaRPr lang="en-US" sz="1900" dirty="0"/>
-          </a:p>
-        </p:txBody>
-      </p:sp>
-      <p:sp>
-        <p:nvSpPr>
-          <p:cNvPr id="5" name="Text 3"/>
-          <p:cNvSpPr/>
-          <p:nvPr/>
-        </p:nvSpPr>
-        <p:spPr>
-          <a:xfrm>
-            <a:off x="8808415" y="1463040"/>
-            <a:ext cx="2057400" cy="457200"/>
-          </a:xfrm>
-          <a:prstGeom prst="rect">
-            <a:avLst/>
-          </a:prstGeom>
-          <a:noFill/>
-          <a:ln/>
-        </p:spPr>
-        <p:txBody>
-          <a:bodyPr wrap="square" lIns="0" tIns="0" rIns="0" bIns="0" rtlCol="0" anchor="ctr"/>
-          <a:lstStyle/>
-          <a:p>
-            <a:pPr rtl="1" algn="r" indent="0" marL="0">
-              <a:buNone/>
-            </a:pPr>
-            <a:r>
-              <a:rPr lang="en-US" sz="2300" b="1" dirty="0">
-                <a:solidFill>
-                  <a:srgbClr val="DD8C58"/>
-                </a:solidFill>
-                <a:latin typeface="Arial" pitchFamily="34" charset="0"/>
-                <a:ea typeface="Arial" pitchFamily="34" charset="-122"/>
-                <a:cs typeface="Arial" pitchFamily="34" charset="-120"/>
-              </a:rPr>
-              <a:t>وجّه</a:t>
-            </a:r>
-            <a:endParaRPr lang="en-US" sz="2300" dirty="0"/>
-          </a:p>
-        </p:txBody>
-      </p:sp>
-      <p:sp>
-        <p:nvSpPr>
-          <p:cNvPr id="6" name="Text 4"/>
-          <p:cNvSpPr/>
-          <p:nvPr/>
-        </p:nvSpPr>
-        <p:spPr>
-          <a:xfrm>
-            <a:off x="4160520" y="1508760"/>
-            <a:ext cx="5120640" cy="822960"/>
-          </a:xfrm>
-          <a:prstGeom prst="rect">
-            <a:avLst/>
-          </a:prstGeom>
-          <a:noFill/>
-          <a:ln/>
-        </p:spPr>
-        <p:txBody>
-          <a:bodyPr wrap="square" lIns="0" tIns="0" rIns="0" bIns="0" rtlCol="0" anchor="ctr"/>
-          <a:lstStyle/>
-          <a:p>
-            <a:pPr rtl="1" algn="r" indent="0" marL="0">
-              <a:lnSpc>
-                <a:spcPts val="2200"/>
-              </a:lnSpc>
-              <a:buNone/>
-            </a:pPr>
-            <a:r>
-              <a:rPr lang="en-US" sz="1450" dirty="0">
-                <a:solidFill>
-                  <a:srgbClr val="A2977F"/>
-                </a:solidFill>
-                <a:latin typeface="Arial" pitchFamily="34" charset="0"/>
-                <a:ea typeface="Arial" pitchFamily="34" charset="-122"/>
-                <a:cs typeface="Arial" pitchFamily="34" charset="-120"/>
-              </a:rPr>
-              <a:t>الكاميرا تمسح باستمرار وأنت تحرّك يدك — لا تحتاج لقطةً واحدة مثالية.</a:t>
-            </a:r>
-            <a:endParaRPr lang="en-US" sz="1450" dirty="0"/>
-          </a:p>
-        </p:txBody>
-      </p:sp>
-      <p:sp>
-        <p:nvSpPr>
-          <p:cNvPr id="7" name="Shape 5"/>
-          <p:cNvSpPr/>
-          <p:nvPr/>
-        </p:nvSpPr>
-        <p:spPr>
-          <a:xfrm>
-            <a:off x="11002975" y="2724912"/>
-            <a:ext cx="548640" cy="548640"/>
-          </a:xfrm>
-          <a:prstGeom prst="ellipse">
-            <a:avLst/>
+          <a:effectLst>
+            <a:outerShdw sx="100000" sy="100000" kx="0" ky="0" algn="bl" rotWithShape="0" blurRad="279400" dist="76200" dir="5400000">
+              <a:srgbClr val="000000">
+                <a:alpha val="60000"/>
+              </a:srgbClr>
+            </a:outerShdw>
+          </a:effectLst>
+        </p:spPr>
+      </p:sp>
+      <p:pic>
+        <p:nvPicPr>
+          <p:cNvPr id="4" name="Image 0" descr="preencoded.png">    </p:cNvPr>
+          <p:cNvPicPr>
+            <a:picLocks noChangeAspect="1"/>
+          </p:cNvPicPr>
+          <p:nvPr/>
+        </p:nvPicPr>
+        <p:blipFill>
+          <a:blip r:embed="rId1"/>
+          <a:stretch>
+            <a:fillRect/>
+          </a:stretch>
+        </p:blipFill>
+        <p:spPr>
+          <a:xfrm>
+            <a:off x="685800" y="1600200"/>
+            <a:ext cx="1993179" cy="4160520"/>
+          </a:xfrm>
+          <a:prstGeom prst="rect">
+            <a:avLst/>
+          </a:prstGeom>
+        </p:spPr>
+      </p:pic>
+      <p:sp>
+        <p:nvSpPr>
+          <p:cNvPr id="5" name="Shape 2"/>
+          <p:cNvSpPr/>
+          <p:nvPr/>
+        </p:nvSpPr>
+        <p:spPr>
+          <a:xfrm>
+            <a:off x="2999232" y="1536192"/>
+            <a:ext cx="2121195" cy="4288536"/>
+          </a:xfrm>
+          <a:prstGeom prst="roundRect">
+            <a:avLst>
+              <a:gd name="adj" fmla="val 5173"/>
+            </a:avLst>
           </a:prstGeom>
           <a:solidFill>
-            <a:srgbClr val="C97A4A"/>
+            <a:srgbClr val="2A3244"/>
           </a:solidFill>
           <a:ln w="12700">
             <a:solidFill>
@@ -2722,73 +2329,65 @@
             </a:solidFill>
             <a:prstDash val="solid"/>
           </a:ln>
-        </p:spPr>
-      </p:sp>
-      <p:sp>
-        <p:nvSpPr>
-          <p:cNvPr id="8" name="Text 6"/>
-          <p:cNvSpPr/>
-          <p:nvPr/>
-        </p:nvSpPr>
-        <p:spPr>
-          <a:xfrm>
-            <a:off x="11002975" y="2724912"/>
-            <a:ext cx="548640" cy="548640"/>
-          </a:xfrm>
-          <a:prstGeom prst="rect">
-            <a:avLst/>
-          </a:prstGeom>
-          <a:noFill/>
-          <a:ln/>
-        </p:spPr>
-        <p:txBody>
-          <a:bodyPr wrap="square" lIns="0" tIns="0" rIns="0" bIns="0" rtlCol="0" anchor="ctr"/>
-          <a:lstStyle/>
-          <a:p>
-            <a:pPr algn="ctr" indent="0" marL="0">
-              <a:buNone/>
-            </a:pPr>
-            <a:r>
-              <a:rPr lang="en-US" sz="1900" b="1" dirty="0">
-                <a:solidFill>
-                  <a:srgbClr val="0B0F17"/>
-                </a:solidFill>
-                <a:latin typeface="Calibri" pitchFamily="34" charset="0"/>
-                <a:ea typeface="Calibri" pitchFamily="34" charset="-122"/>
-                <a:cs typeface="Calibri" pitchFamily="34" charset="-120"/>
-              </a:rPr>
-              <a:t>2</a:t>
-            </a:r>
-            <a:endParaRPr lang="en-US" sz="1900" dirty="0"/>
-          </a:p>
-        </p:txBody>
-      </p:sp>
-      <p:sp>
-        <p:nvSpPr>
-          <p:cNvPr id="9" name="Text 7"/>
-          <p:cNvSpPr/>
-          <p:nvPr/>
-        </p:nvSpPr>
-        <p:spPr>
-          <a:xfrm>
-            <a:off x="8808415" y="2651760"/>
-            <a:ext cx="2057400" cy="457200"/>
-          </a:xfrm>
-          <a:prstGeom prst="rect">
-            <a:avLst/>
-          </a:prstGeom>
-          <a:noFill/>
-          <a:ln/>
-        </p:spPr>
-        <p:txBody>
-          <a:bodyPr wrap="square" lIns="0" tIns="0" rIns="0" bIns="0" rtlCol="0" anchor="ctr"/>
-          <a:lstStyle/>
-          <a:p>
-            <a:pPr rtl="1" algn="r" indent="0" marL="0">
-              <a:buNone/>
-            </a:pPr>
-            <a:r>
-              <a:rPr lang="en-US" sz="2300" b="1" dirty="0">
+          <a:effectLst>
+            <a:outerShdw sx="100000" sy="100000" kx="0" ky="0" algn="bl" rotWithShape="0" blurRad="279400" dist="76200" dir="5400000">
+              <a:srgbClr val="000000">
+                <a:alpha val="60000"/>
+              </a:srgbClr>
+            </a:outerShdw>
+          </a:effectLst>
+        </p:spPr>
+      </p:sp>
+      <p:pic>
+        <p:nvPicPr>
+          <p:cNvPr id="6" name="Image 1" descr="preencoded.png">    </p:cNvPr>
+          <p:cNvPicPr>
+            <a:picLocks noChangeAspect="1"/>
+          </p:cNvPicPr>
+          <p:nvPr/>
+        </p:nvPicPr>
+        <p:blipFill>
+          <a:blip r:embed="rId2"/>
+          <a:stretch>
+            <a:fillRect/>
+          </a:stretch>
+        </p:blipFill>
+        <p:spPr>
+          <a:xfrm>
+            <a:off x="3063240" y="1600200"/>
+            <a:ext cx="1993179" cy="4160520"/>
+          </a:xfrm>
+          <a:prstGeom prst="rect">
+            <a:avLst/>
+          </a:prstGeom>
+        </p:spPr>
+      </p:pic>
+      <p:sp>
+        <p:nvSpPr>
+          <p:cNvPr id="7" name="Text 3"/>
+          <p:cNvSpPr/>
+          <p:nvPr/>
+        </p:nvSpPr>
+        <p:spPr>
+          <a:xfrm>
+            <a:off x="5760720" y="1645920"/>
+            <a:ext cx="5760720" cy="384048"/>
+          </a:xfrm>
+          <a:prstGeom prst="rect">
+            <a:avLst/>
+          </a:prstGeom>
+          <a:noFill/>
+          <a:ln/>
+        </p:spPr>
+        <p:txBody>
+          <a:bodyPr wrap="square" lIns="0" tIns="0" rIns="0" bIns="0" rtlCol="0" anchor="ctr"/>
+          <a:lstStyle/>
+          <a:p>
+            <a:pPr rtl="1" algn="r" indent="0" marL="0">
+              <a:buNone/>
+            </a:pPr>
+            <a:r>
+              <a:rPr lang="en-US" sz="2200" b="1" dirty="0">
                 <a:solidFill>
                   <a:srgbClr val="DD8C58"/>
                 </a:solidFill>
@@ -2796,22 +2395,103 @@
                 <a:ea typeface="Arial" pitchFamily="34" charset="-122"/>
                 <a:cs typeface="Arial" pitchFamily="34" charset="-120"/>
               </a:rPr>
+              <a:t>وجّه</a:t>
+            </a:r>
+            <a:endParaRPr lang="en-US" sz="2200" dirty="0"/>
+          </a:p>
+        </p:txBody>
+      </p:sp>
+      <p:sp>
+        <p:nvSpPr>
+          <p:cNvPr id="8" name="Text 4"/>
+          <p:cNvSpPr/>
+          <p:nvPr/>
+        </p:nvSpPr>
+        <p:spPr>
+          <a:xfrm>
+            <a:off x="5760720" y="2066544"/>
+            <a:ext cx="5760720" cy="594360"/>
+          </a:xfrm>
+          <a:prstGeom prst="rect">
+            <a:avLst/>
+          </a:prstGeom>
+          <a:noFill/>
+          <a:ln/>
+        </p:spPr>
+        <p:txBody>
+          <a:bodyPr wrap="square" lIns="0" tIns="0" rIns="0" bIns="0" rtlCol="0" anchor="ctr"/>
+          <a:lstStyle/>
+          <a:p>
+            <a:pPr rtl="1" algn="r" indent="0" marL="0">
+              <a:lnSpc>
+                <a:spcPts val="2100"/>
+              </a:lnSpc>
+              <a:buNone/>
+            </a:pPr>
+            <a:r>
+              <a:rPr lang="en-US" sz="1350" dirty="0">
+                <a:solidFill>
+                  <a:srgbClr val="A2977F"/>
+                </a:solidFill>
+                <a:latin typeface="Arial" pitchFamily="34" charset="0"/>
+                <a:ea typeface="Arial" pitchFamily="34" charset="-122"/>
+                <a:cs typeface="Arial" pitchFamily="34" charset="-120"/>
+              </a:rPr>
+              <a:t>الكاميرا تمسح باستمرار وأنت تحرّك يدك — لا تحتاج لقطةً مثالية.</a:t>
+            </a:r>
+            <a:endParaRPr lang="en-US" sz="1350" dirty="0"/>
+          </a:p>
+        </p:txBody>
+      </p:sp>
+      <p:sp>
+        <p:nvSpPr>
+          <p:cNvPr id="9" name="Text 5"/>
+          <p:cNvSpPr/>
+          <p:nvPr/>
+        </p:nvSpPr>
+        <p:spPr>
+          <a:xfrm>
+            <a:off x="5760720" y="2724912"/>
+            <a:ext cx="5760720" cy="384048"/>
+          </a:xfrm>
+          <a:prstGeom prst="rect">
+            <a:avLst/>
+          </a:prstGeom>
+          <a:noFill/>
+          <a:ln/>
+        </p:spPr>
+        <p:txBody>
+          <a:bodyPr wrap="square" lIns="0" tIns="0" rIns="0" bIns="0" rtlCol="0" anchor="ctr"/>
+          <a:lstStyle/>
+          <a:p>
+            <a:pPr rtl="1" algn="r" indent="0" marL="0">
+              <a:buNone/>
+            </a:pPr>
+            <a:r>
+              <a:rPr lang="en-US" sz="2200" b="1" dirty="0">
+                <a:solidFill>
+                  <a:srgbClr val="DD8C58"/>
+                </a:solidFill>
+                <a:latin typeface="Arial" pitchFamily="34" charset="0"/>
+                <a:ea typeface="Arial" pitchFamily="34" charset="-122"/>
+                <a:cs typeface="Arial" pitchFamily="34" charset="-120"/>
+              </a:rPr>
               <a:t>يتعرّف</a:t>
             </a:r>
-            <a:endParaRPr lang="en-US" sz="2300" dirty="0"/>
-          </a:p>
-        </p:txBody>
-      </p:sp>
-      <p:sp>
-        <p:nvSpPr>
-          <p:cNvPr id="10" name="Text 8"/>
-          <p:cNvSpPr/>
-          <p:nvPr/>
-        </p:nvSpPr>
-        <p:spPr>
-          <a:xfrm>
-            <a:off x="4160520" y="2697480"/>
-            <a:ext cx="5120640" cy="822960"/>
+            <a:endParaRPr lang="en-US" sz="2200" dirty="0"/>
+          </a:p>
+        </p:txBody>
+      </p:sp>
+      <p:sp>
+        <p:nvSpPr>
+          <p:cNvPr id="10" name="Text 6"/>
+          <p:cNvSpPr/>
+          <p:nvPr/>
+        </p:nvSpPr>
+        <p:spPr>
+          <a:xfrm>
+            <a:off x="5760720" y="3145536"/>
+            <a:ext cx="5760720" cy="594360"/>
           </a:xfrm>
           <a:prstGeom prst="rect">
             <a:avLst/>
@@ -2825,12 +2505,12 @@
           <a:p>
             <a:pPr rtl="1" algn="r" indent="0" marL="0">
               <a:lnSpc>
-                <a:spcPts val="2200"/>
+                <a:spcPts val="2100"/>
               </a:lnSpc>
               <a:buNone/>
             </a:pPr>
             <a:r>
-              <a:rPr lang="en-US" sz="1450" dirty="0">
+              <a:rPr lang="en-US" sz="1350" dirty="0">
                 <a:solidFill>
                   <a:srgbClr val="A2977F"/>
                 </a:solidFill>
@@ -2840,100 +2520,36 @@
               </a:rPr>
               <a:t>يسمّي اللوحة التي أمامك بعينها، لا «نقوشًا صخرية» فحسب.</a:t>
             </a:r>
-            <a:endParaRPr lang="en-US" sz="1450" dirty="0"/>
-          </a:p>
-        </p:txBody>
-      </p:sp>
-      <p:sp>
-        <p:nvSpPr>
-          <p:cNvPr id="11" name="Shape 9"/>
-          <p:cNvSpPr/>
-          <p:nvPr/>
-        </p:nvSpPr>
-        <p:spPr>
-          <a:xfrm>
-            <a:off x="11002975" y="3913632"/>
-            <a:ext cx="548640" cy="548640"/>
-          </a:xfrm>
-          <a:prstGeom prst="ellipse">
-            <a:avLst/>
-          </a:prstGeom>
-          <a:solidFill>
-            <a:srgbClr val="C97A4A"/>
-          </a:solidFill>
-          <a:ln w="12700">
-            <a:solidFill>
-              <a:srgbClr val="333333"/>
-            </a:solidFill>
-            <a:prstDash val="solid"/>
-          </a:ln>
-        </p:spPr>
-      </p:sp>
-      <p:sp>
-        <p:nvSpPr>
-          <p:cNvPr id="12" name="Text 10"/>
-          <p:cNvSpPr/>
-          <p:nvPr/>
-        </p:nvSpPr>
-        <p:spPr>
-          <a:xfrm>
-            <a:off x="11002975" y="3913632"/>
-            <a:ext cx="548640" cy="548640"/>
-          </a:xfrm>
-          <a:prstGeom prst="rect">
-            <a:avLst/>
-          </a:prstGeom>
-          <a:noFill/>
-          <a:ln/>
-        </p:spPr>
-        <p:txBody>
-          <a:bodyPr wrap="square" lIns="0" tIns="0" rIns="0" bIns="0" rtlCol="0" anchor="ctr"/>
-          <a:lstStyle/>
-          <a:p>
-            <a:pPr algn="ctr" indent="0" marL="0">
-              <a:buNone/>
-            </a:pPr>
-            <a:r>
-              <a:rPr lang="en-US" sz="1900" b="1" dirty="0">
-                <a:solidFill>
-                  <a:srgbClr val="0B0F17"/>
-                </a:solidFill>
-                <a:latin typeface="Calibri" pitchFamily="34" charset="0"/>
-                <a:ea typeface="Calibri" pitchFamily="34" charset="-122"/>
-                <a:cs typeface="Calibri" pitchFamily="34" charset="-120"/>
-              </a:rPr>
-              <a:t>3</a:t>
-            </a:r>
-            <a:endParaRPr lang="en-US" sz="1900" dirty="0"/>
-          </a:p>
-        </p:txBody>
-      </p:sp>
-      <p:sp>
-        <p:nvSpPr>
-          <p:cNvPr id="13" name="Text 11"/>
-          <p:cNvSpPr/>
-          <p:nvPr/>
-        </p:nvSpPr>
-        <p:spPr>
-          <a:xfrm>
-            <a:off x="8808415" y="3840480"/>
-            <a:ext cx="2057400" cy="457200"/>
-          </a:xfrm>
-          <a:prstGeom prst="rect">
-            <a:avLst/>
-          </a:prstGeom>
-          <a:noFill/>
-          <a:ln/>
-        </p:spPr>
-        <p:txBody>
-          <a:bodyPr wrap="square" lIns="0" tIns="0" rIns="0" bIns="0" rtlCol="0" anchor="ctr"/>
-          <a:lstStyle/>
-          <a:p>
-            <a:pPr rtl="1" algn="r" indent="0" marL="0">
-              <a:buNone/>
-            </a:pPr>
-            <a:r>
-              <a:rPr lang="en-US" sz="2300" b="1" dirty="0">
+            <a:endParaRPr lang="en-US" sz="1350" dirty="0"/>
+          </a:p>
+        </p:txBody>
+      </p:sp>
+      <p:sp>
+        <p:nvSpPr>
+          <p:cNvPr id="11" name="Text 7"/>
+          <p:cNvSpPr/>
+          <p:nvPr/>
+        </p:nvSpPr>
+        <p:spPr>
+          <a:xfrm>
+            <a:off x="5760720" y="3803904"/>
+            <a:ext cx="5760720" cy="384048"/>
+          </a:xfrm>
+          <a:prstGeom prst="rect">
+            <a:avLst/>
+          </a:prstGeom>
+          <a:noFill/>
+          <a:ln/>
+        </p:spPr>
+        <p:txBody>
+          <a:bodyPr wrap="square" lIns="0" tIns="0" rIns="0" bIns="0" rtlCol="0" anchor="ctr"/>
+          <a:lstStyle/>
+          <a:p>
+            <a:pPr rtl="1" algn="r" indent="0" marL="0">
+              <a:buNone/>
+            </a:pPr>
+            <a:r>
+              <a:rPr lang="en-US" sz="2200" b="1" dirty="0">
                 <a:solidFill>
                   <a:srgbClr val="DD8C58"/>
                 </a:solidFill>
@@ -2943,20 +2559,20 @@
               </a:rPr>
               <a:t>اسمع</a:t>
             </a:r>
-            <a:endParaRPr lang="en-US" sz="2300" dirty="0"/>
-          </a:p>
-        </p:txBody>
-      </p:sp>
-      <p:sp>
-        <p:nvSpPr>
-          <p:cNvPr id="14" name="Text 12"/>
-          <p:cNvSpPr/>
-          <p:nvPr/>
-        </p:nvSpPr>
-        <p:spPr>
-          <a:xfrm>
-            <a:off x="4160520" y="3886200"/>
-            <a:ext cx="5120640" cy="822960"/>
+            <a:endParaRPr lang="en-US" sz="2200" dirty="0"/>
+          </a:p>
+        </p:txBody>
+      </p:sp>
+      <p:sp>
+        <p:nvSpPr>
+          <p:cNvPr id="12" name="Text 8"/>
+          <p:cNvSpPr/>
+          <p:nvPr/>
+        </p:nvSpPr>
+        <p:spPr>
+          <a:xfrm>
+            <a:off x="5760720" y="4224528"/>
+            <a:ext cx="5760720" cy="594360"/>
           </a:xfrm>
           <a:prstGeom prst="rect">
             <a:avLst/>
@@ -2970,12 +2586,12 @@
           <a:p>
             <a:pPr rtl="1" algn="r" indent="0" marL="0">
               <a:lnSpc>
-                <a:spcPts val="2200"/>
+                <a:spcPts val="2100"/>
               </a:lnSpc>
               <a:buNone/>
             </a:pPr>
             <a:r>
-              <a:rPr lang="en-US" sz="1450" dirty="0">
+              <a:rPr lang="en-US" sz="1350" dirty="0">
                 <a:solidFill>
                   <a:srgbClr val="A2977F"/>
                 </a:solidFill>
@@ -2985,28 +2601,28 @@
               </a:rPr>
               <a:t>تُروى القصّة بلغتك، مسموعةً، ومعها تاريخ الموقع.</a:t>
             </a:r>
-            <a:endParaRPr lang="en-US" sz="1450" dirty="0"/>
-          </a:p>
-        </p:txBody>
-      </p:sp>
-      <p:sp>
-        <p:nvSpPr>
-          <p:cNvPr id="15" name="Shape 13"/>
-          <p:cNvSpPr/>
-          <p:nvPr/>
-        </p:nvSpPr>
-        <p:spPr>
-          <a:xfrm>
-            <a:off x="640080" y="1417320"/>
-            <a:ext cx="3200400" cy="3611880"/>
+            <a:endParaRPr lang="en-US" sz="1350" dirty="0"/>
+          </a:p>
+        </p:txBody>
+      </p:sp>
+      <p:sp>
+        <p:nvSpPr>
+          <p:cNvPr id="13" name="Shape 9"/>
+          <p:cNvSpPr/>
+          <p:nvPr/>
+        </p:nvSpPr>
+        <p:spPr>
+          <a:xfrm>
+            <a:off x="5760720" y="4892040"/>
+            <a:ext cx="5760720" cy="1143000"/>
           </a:xfrm>
           <a:prstGeom prst="roundRect">
             <a:avLst>
-              <a:gd name="adj" fmla="val 3429"/>
+              <a:gd name="adj" fmla="val 8000"/>
             </a:avLst>
           </a:prstGeom>
           <a:solidFill>
-            <a:srgbClr val="1A2233"/>
+            <a:srgbClr val="151D2C"/>
           </a:solidFill>
           <a:ln w="12700">
             <a:solidFill>
@@ -3018,14 +2634,14 @@
       </p:sp>
       <p:sp>
         <p:nvSpPr>
-          <p:cNvPr id="16" name="Text 14"/>
-          <p:cNvSpPr/>
-          <p:nvPr/>
-        </p:nvSpPr>
-        <p:spPr>
-          <a:xfrm>
-            <a:off x="640080" y="1737360"/>
-            <a:ext cx="3200400" cy="960120"/>
+          <p:cNvPr id="14" name="Text 10"/>
+          <p:cNvSpPr/>
+          <p:nvPr/>
+        </p:nvSpPr>
+        <p:spPr>
+          <a:xfrm>
+            <a:off x="10241280" y="5074920"/>
+            <a:ext cx="1097280" cy="777240"/>
           </a:xfrm>
           <a:prstGeom prst="rect">
             <a:avLst/>
@@ -3041,7 +2657,7 @@
               <a:buNone/>
             </a:pPr>
             <a:r>
-              <a:rPr lang="en-US" sz="6200" b="1" dirty="0">
+              <a:rPr lang="en-US" sz="3800" b="1" dirty="0">
                 <a:solidFill>
                   <a:srgbClr val="DD8C58"/>
                 </a:solidFill>
@@ -3051,38 +2667,38 @@
               </a:rPr>
               <a:t>٢٩</a:t>
             </a:r>
-            <a:endParaRPr lang="en-US" sz="6200" dirty="0"/>
-          </a:p>
-        </p:txBody>
-      </p:sp>
-      <p:sp>
-        <p:nvSpPr>
-          <p:cNvPr id="17" name="Text 15"/>
-          <p:cNvSpPr/>
-          <p:nvPr/>
-        </p:nvSpPr>
-        <p:spPr>
-          <a:xfrm>
-            <a:off x="640080" y="2724912"/>
-            <a:ext cx="3200400" cy="365760"/>
-          </a:xfrm>
-          <a:prstGeom prst="rect">
-            <a:avLst/>
-          </a:prstGeom>
-          <a:noFill/>
-          <a:ln/>
-        </p:spPr>
-        <p:txBody>
-          <a:bodyPr wrap="square" lIns="0" tIns="0" rIns="0" bIns="0" rtlCol="0" anchor="ctr"/>
-          <a:lstStyle/>
-          <a:p>
-            <a:pPr rtl="1" algn="ctr" indent="0" marL="0">
+            <a:endParaRPr lang="en-US" sz="3800" dirty="0"/>
+          </a:p>
+        </p:txBody>
+      </p:sp>
+      <p:sp>
+        <p:nvSpPr>
+          <p:cNvPr id="15" name="Text 11"/>
+          <p:cNvSpPr/>
+          <p:nvPr/>
+        </p:nvSpPr>
+        <p:spPr>
+          <a:xfrm>
+            <a:off x="9006840" y="5285232"/>
+            <a:ext cx="1051560" cy="365760"/>
+          </a:xfrm>
+          <a:prstGeom prst="rect">
+            <a:avLst/>
+          </a:prstGeom>
+          <a:noFill/>
+          <a:ln/>
+        </p:spPr>
+        <p:txBody>
+          <a:bodyPr wrap="square" lIns="0" tIns="0" rIns="0" bIns="0" rtlCol="0" anchor="ctr"/>
+          <a:lstStyle/>
+          <a:p>
+            <a:pPr rtl="1" algn="r" indent="0" marL="0">
               <a:buNone/>
             </a:pPr>
             <a:r>
               <a:rPr lang="en-US" sz="1500" dirty="0">
                 <a:solidFill>
-                  <a:srgbClr val="E8DCC8"/>
+                  <a:srgbClr val="A2977F"/>
                 </a:solidFill>
                 <a:latin typeface="Arial" pitchFamily="34" charset="0"/>
                 <a:ea typeface="Arial" pitchFamily="34" charset="-122"/>
@@ -3096,14 +2712,14 @@
       </p:sp>
       <p:sp>
         <p:nvSpPr>
-          <p:cNvPr id="18" name="Text 16"/>
-          <p:cNvSpPr/>
-          <p:nvPr/>
-        </p:nvSpPr>
-        <p:spPr>
-          <a:xfrm>
-            <a:off x="640080" y="3291840"/>
-            <a:ext cx="3200400" cy="777240"/>
+          <p:cNvPr id="16" name="Text 12"/>
+          <p:cNvSpPr/>
+          <p:nvPr/>
+        </p:nvSpPr>
+        <p:spPr>
+          <a:xfrm>
+            <a:off x="7772400" y="5074920"/>
+            <a:ext cx="1097280" cy="777240"/>
           </a:xfrm>
           <a:prstGeom prst="rect">
             <a:avLst/>
@@ -3119,7 +2735,7 @@
               <a:buNone/>
             </a:pPr>
             <a:r>
-              <a:rPr lang="en-US" sz="4600" b="1" dirty="0">
+              <a:rPr lang="en-US" sz="3800" b="1" dirty="0">
                 <a:solidFill>
                   <a:srgbClr val="EFAE6E"/>
                 </a:solidFill>
@@ -3129,35 +2745,32 @@
               </a:rPr>
               <a:t>١٠</a:t>
             </a:r>
-            <a:endParaRPr lang="en-US" sz="4600" dirty="0"/>
-          </a:p>
-        </p:txBody>
-      </p:sp>
-      <p:sp>
-        <p:nvSpPr>
-          <p:cNvPr id="19" name="Text 17"/>
-          <p:cNvSpPr/>
-          <p:nvPr/>
-        </p:nvSpPr>
-        <p:spPr>
-          <a:xfrm>
-            <a:off x="640080" y="4069080"/>
-            <a:ext cx="3200400" cy="777240"/>
-          </a:xfrm>
-          <a:prstGeom prst="rect">
-            <a:avLst/>
-          </a:prstGeom>
-          <a:noFill/>
-          <a:ln/>
-        </p:spPr>
-        <p:txBody>
-          <a:bodyPr wrap="square" lIns="0" tIns="0" rIns="0" bIns="0" rtlCol="0" anchor="ctr"/>
-          <a:lstStyle/>
-          <a:p>
-            <a:pPr rtl="1" algn="ctr" indent="0" marL="0">
-              <a:lnSpc>
-                <a:spcPts val="2000"/>
-              </a:lnSpc>
+            <a:endParaRPr lang="en-US" sz="3800" dirty="0"/>
+          </a:p>
+        </p:txBody>
+      </p:sp>
+      <p:sp>
+        <p:nvSpPr>
+          <p:cNvPr id="17" name="Text 13"/>
+          <p:cNvSpPr/>
+          <p:nvPr/>
+        </p:nvSpPr>
+        <p:spPr>
+          <a:xfrm>
+            <a:off x="6035040" y="5285232"/>
+            <a:ext cx="1600200" cy="365760"/>
+          </a:xfrm>
+          <a:prstGeom prst="rect">
+            <a:avLst/>
+          </a:prstGeom>
+          <a:noFill/>
+          <a:ln/>
+        </p:spPr>
+        <p:txBody>
+          <a:bodyPr wrap="square" lIns="0" tIns="0" rIns="0" bIns="0" rtlCol="0" anchor="ctr"/>
+          <a:lstStyle/>
+          <a:p>
+            <a:pPr rtl="1" algn="r" indent="0" marL="0">
               <a:buNone/>
             </a:pPr>
             <a:r>
@@ -3170,26 +2783,6 @@
                 <a:cs typeface="Arial" pitchFamily="34" charset="-120"/>
               </a:rPr>
               <a:t>لوحات موثّقة</a:t>
-            </a:r>
-            <a:endParaRPr lang="en-US" sz="1300" dirty="0"/>
-          </a:p>
-          <a:p>
-            <a:pPr rtl="1" algn="ctr" indent="0" marL="0">
-              <a:lnSpc>
-                <a:spcPts val="2000"/>
-              </a:lnSpc>
-              <a:buNone/>
-            </a:pPr>
-            <a:r>
-              <a:rPr lang="en-US" sz="1300" dirty="0">
-                <a:solidFill>
-                  <a:srgbClr val="A2977F"/>
-                </a:solidFill>
-                <a:latin typeface="Arial" pitchFamily="34" charset="0"/>
-                <a:ea typeface="Arial" pitchFamily="34" charset="-122"/>
-                <a:cs typeface="Arial" pitchFamily="34" charset="-120"/>
-              </a:rPr>
-              <a:t>في جبل أُمّ سِنمان</a:t>
             </a:r>
             <a:endParaRPr lang="en-US" sz="1300" dirty="0"/>
           </a:p>
@@ -3200,6 +2793,18 @@
   <p:clrMapOvr>
     <a:masterClrMapping/>
   </p:clrMapOvr>
+  <mc:AlternateContent xmlns:mc="http://schemas.openxmlformats.org/markup-compatibility/2006">
+    <mc:Choice xmlns:p159="http://schemas.microsoft.com/office/powerpoint/2015/09/main" Requires="p159">
+      <p:transition xmlns:p14="http://schemas.microsoft.com/office/powerpoint/2010/main" spd="slow" p14:dur="900">
+        <p159:morph option="byObject"/>
+      </p:transition>
+    </mc:Choice>
+    <mc:Fallback>
+      <p:transition xmlns:p14="http://schemas.microsoft.com/office/powerpoint/2010/main" spd="slow" p14:dur="900">
+        <p:fade/>
+      </p:transition>
+    </mc:Fallback>
+  </mc:AlternateContent>
 </p:sld>
 </file>
 
@@ -3229,30 +2834,30 @@
       </p:grpSpPr>
       <p:sp>
         <p:nvSpPr>
-          <p:cNvPr id="2" name="Text 0"/>
-          <p:cNvSpPr/>
-          <p:nvPr/>
-        </p:nvSpPr>
-        <p:spPr>
-          <a:xfrm>
-            <a:off x="640080" y="457200"/>
-            <a:ext cx="10911535" cy="777240"/>
-          </a:xfrm>
-          <a:prstGeom prst="rect">
-            <a:avLst/>
-          </a:prstGeom>
-          <a:noFill/>
-          <a:ln/>
-        </p:spPr>
-        <p:txBody>
-          <a:bodyPr wrap="square" lIns="0" tIns="0" rIns="0" bIns="0" rtlCol="0" anchor="ctr"/>
-          <a:lstStyle/>
-          <a:p>
-            <a:pPr rtl="1" algn="r" indent="0" marL="0">
-              <a:buNone/>
-            </a:pPr>
-            <a:r>
-              <a:rPr lang="en-US" sz="3600" b="1" dirty="0">
+          <p:cNvPr id="2" name="!!title"/>
+          <p:cNvSpPr/>
+          <p:nvPr/>
+        </p:nvSpPr>
+        <p:spPr>
+          <a:xfrm>
+            <a:off x="685800" y="502920"/>
+            <a:ext cx="10820095" cy="868680"/>
+          </a:xfrm>
+          <a:prstGeom prst="rect">
+            <a:avLst/>
+          </a:prstGeom>
+          <a:noFill/>
+          <a:ln/>
+        </p:spPr>
+        <p:txBody>
+          <a:bodyPr wrap="square" lIns="0" tIns="0" rIns="0" bIns="0" rtlCol="0" anchor="ctr"/>
+          <a:lstStyle/>
+          <a:p>
+            <a:pPr rtl="1" algn="r" indent="0" marL="0">
+              <a:buNone/>
+            </a:pPr>
+            <a:r>
+              <a:rPr lang="en-US" sz="4000" b="1" dirty="0">
                 <a:solidFill>
                   <a:srgbClr val="E8DCC8"/>
                 </a:solidFill>
@@ -3262,7 +2867,7 @@
               </a:rPr>
               <a:t>النموذج: DINOv3</a:t>
             </a:r>
-            <a:endParaRPr lang="en-US" sz="3600" dirty="0"/>
+            <a:endParaRPr lang="en-US" sz="4000" dirty="0"/>
           </a:p>
         </p:txBody>
       </p:sp>
@@ -3274,16 +2879,16 @@
         </p:nvSpPr>
         <p:spPr>
           <a:xfrm>
-            <a:off x="5440680" y="1371600"/>
-            <a:ext cx="6080760" cy="4389120"/>
+            <a:off x="5349240" y="1600200"/>
+            <a:ext cx="6172200" cy="4160520"/>
           </a:xfrm>
           <a:prstGeom prst="roundRect">
             <a:avLst>
-              <a:gd name="adj" fmla="val 2500"/>
+              <a:gd name="adj" fmla="val 2198"/>
             </a:avLst>
           </a:prstGeom>
           <a:solidFill>
-            <a:srgbClr val="1A2233"/>
+            <a:srgbClr val="151D2C"/>
           </a:solidFill>
           <a:ln w="12700">
             <a:solidFill>
@@ -3301,8 +2906,8 @@
         </p:nvSpPr>
         <p:spPr>
           <a:xfrm>
-            <a:off x="5806440" y="1691640"/>
-            <a:ext cx="5349240" cy="457200"/>
+            <a:off x="5715000" y="1920240"/>
+            <a:ext cx="5440680" cy="502920"/>
           </a:xfrm>
           <a:prstGeom prst="rect">
             <a:avLst/>
@@ -3318,7 +2923,7 @@
               <a:buNone/>
             </a:pPr>
             <a:r>
-              <a:rPr lang="en-US" sz="2500" b="1" dirty="0">
+              <a:rPr lang="en-US" sz="2700" b="1" dirty="0">
                 <a:solidFill>
                   <a:srgbClr val="DD8C58"/>
                 </a:solidFill>
@@ -3328,7 +2933,7 @@
               </a:rPr>
               <a:t>DINOv3  ViT-S/16</a:t>
             </a:r>
-            <a:endParaRPr lang="en-US" sz="2500" dirty="0"/>
+            <a:endParaRPr lang="en-US" sz="2700" dirty="0"/>
           </a:p>
         </p:txBody>
       </p:sp>
@@ -3340,8 +2945,92 @@
         </p:nvSpPr>
         <p:spPr>
           <a:xfrm>
-            <a:off x="5806440" y="2240280"/>
-            <a:ext cx="5349240" cy="914400"/>
+            <a:off x="5715000" y="2560320"/>
+            <a:ext cx="5440680" cy="914400"/>
+          </a:xfrm>
+          <a:prstGeom prst="rect">
+            <a:avLst/>
+          </a:prstGeom>
+          <a:noFill/>
+          <a:ln/>
+        </p:spPr>
+        <p:txBody>
+          <a:bodyPr wrap="square" lIns="0" tIns="0" rIns="0" bIns="0" rtlCol="0" anchor="ctr"/>
+          <a:lstStyle/>
+          <a:p>
+            <a:pPr rtl="1" algn="r" indent="0" marL="0">
+              <a:lnSpc>
+                <a:spcPts val="2500"/>
+              </a:lnSpc>
+              <a:buNone/>
+            </a:pPr>
+            <a:r>
+              <a:rPr lang="en-US" sz="1550" dirty="0">
+                <a:solidFill>
+                  <a:srgbClr val="A2977F"/>
+                </a:solidFill>
+                <a:latin typeface="Arial" pitchFamily="34" charset="0"/>
+                <a:ea typeface="Arial" pitchFamily="34" charset="-122"/>
+                <a:cs typeface="Arial" pitchFamily="34" charset="-120"/>
+              </a:rPr>
+              <a:t>محوّلٌ بصريّ من Meta، دُرّب تدريبًا ذاتيَّ الإشراف على نحو مليارٍ وسبعمئة مليون صورة — بلا تسميةٍ بشرية واحدة.</a:t>
+            </a:r>
+            <a:endParaRPr lang="en-US" sz="1550" dirty="0"/>
+          </a:p>
+        </p:txBody>
+      </p:sp>
+      <p:sp>
+        <p:nvSpPr>
+          <p:cNvPr id="6" name="Text 4"/>
+          <p:cNvSpPr/>
+          <p:nvPr/>
+        </p:nvSpPr>
+        <p:spPr>
+          <a:xfrm>
+            <a:off x="5715000" y="3611880"/>
+            <a:ext cx="5440680" cy="731520"/>
+          </a:xfrm>
+          <a:prstGeom prst="rect">
+            <a:avLst/>
+          </a:prstGeom>
+          <a:noFill/>
+          <a:ln/>
+        </p:spPr>
+        <p:txBody>
+          <a:bodyPr wrap="square" lIns="0" tIns="0" rIns="0" bIns="0" rtlCol="0" anchor="ctr"/>
+          <a:lstStyle/>
+          <a:p>
+            <a:pPr rtl="1" algn="r" indent="0" marL="0">
+              <a:lnSpc>
+                <a:spcPts val="2500"/>
+              </a:lnSpc>
+              <a:buNone/>
+            </a:pPr>
+            <a:r>
+              <a:rPr lang="en-US" sz="1550" dirty="0">
+                <a:solidFill>
+                  <a:srgbClr val="E8DCC8"/>
+                </a:solidFill>
+                <a:latin typeface="Arial" pitchFamily="34" charset="0"/>
+                <a:ea typeface="Arial" pitchFamily="34" charset="-122"/>
+                <a:cs typeface="Arial" pitchFamily="34" charset="-120"/>
+              </a:rPr>
+              <a:t>ويحوّل أيّ صورة إلى ٣٨٤ رقمًا — بصمةٌ عددية تتقارب فيها المتشابهات.</a:t>
+            </a:r>
+            <a:endParaRPr lang="en-US" sz="1550" dirty="0"/>
+          </a:p>
+        </p:txBody>
+      </p:sp>
+      <p:sp>
+        <p:nvSpPr>
+          <p:cNvPr id="7" name="Text 5"/>
+          <p:cNvSpPr/>
+          <p:nvPr/>
+        </p:nvSpPr>
+        <p:spPr>
+          <a:xfrm>
+            <a:off x="5715000" y="4480560"/>
+            <a:ext cx="5440680" cy="1005840"/>
           </a:xfrm>
           <a:prstGeom prst="rect">
             <a:avLst/>
@@ -3360,7 +3049,7 @@
               <a:buNone/>
             </a:pPr>
             <a:r>
-              <a:rPr lang="en-US" sz="1500" dirty="0">
+              <a:rPr lang="en-US" sz="1400" dirty="0">
                 <a:solidFill>
                   <a:srgbClr val="A2977F"/>
                 </a:solidFill>
@@ -3368,90 +3057,6 @@
                 <a:ea typeface="Arial" pitchFamily="34" charset="-122"/>
                 <a:cs typeface="Arial" pitchFamily="34" charset="-120"/>
               </a:rPr>
-              <a:t>محوّلٌ بصريّ من Meta، دُرّب تدريبًا ذاتيَّ الإشراف على مليارٍ وسبعمئة مليون صورة تقريبًا — بلا تسميةٍ بشرية واحدة.</a:t>
-            </a:r>
-            <a:endParaRPr lang="en-US" sz="1500" dirty="0"/>
-          </a:p>
-        </p:txBody>
-      </p:sp>
-      <p:sp>
-        <p:nvSpPr>
-          <p:cNvPr id="6" name="Text 4"/>
-          <p:cNvSpPr/>
-          <p:nvPr/>
-        </p:nvSpPr>
-        <p:spPr>
-          <a:xfrm>
-            <a:off x="5806440" y="3200400"/>
-            <a:ext cx="5349240" cy="685800"/>
-          </a:xfrm>
-          <a:prstGeom prst="rect">
-            <a:avLst/>
-          </a:prstGeom>
-          <a:noFill/>
-          <a:ln/>
-        </p:spPr>
-        <p:txBody>
-          <a:bodyPr wrap="square" lIns="0" tIns="0" rIns="0" bIns="0" rtlCol="0" anchor="ctr"/>
-          <a:lstStyle/>
-          <a:p>
-            <a:pPr rtl="1" algn="r" indent="0" marL="0">
-              <a:lnSpc>
-                <a:spcPts val="2300"/>
-              </a:lnSpc>
-              <a:buNone/>
-            </a:pPr>
-            <a:r>
-              <a:rPr lang="en-US" sz="1500" dirty="0">
-                <a:solidFill>
-                  <a:srgbClr val="E8DCC8"/>
-                </a:solidFill>
-                <a:latin typeface="Arial" pitchFamily="34" charset="0"/>
-                <a:ea typeface="Arial" pitchFamily="34" charset="-122"/>
-                <a:cs typeface="Arial" pitchFamily="34" charset="-120"/>
-              </a:rPr>
-              <a:t>ويحوّل أيّ صورة إلى ٣٨٤ رقمًا — بصمةٌ عددية تتقارب فيها المتشابهات.</a:t>
-            </a:r>
-            <a:endParaRPr lang="en-US" sz="1500" dirty="0"/>
-          </a:p>
-        </p:txBody>
-      </p:sp>
-      <p:sp>
-        <p:nvSpPr>
-          <p:cNvPr id="7" name="Text 5"/>
-          <p:cNvSpPr/>
-          <p:nvPr/>
-        </p:nvSpPr>
-        <p:spPr>
-          <a:xfrm>
-            <a:off x="5806440" y="3977640"/>
-            <a:ext cx="5349240" cy="960120"/>
-          </a:xfrm>
-          <a:prstGeom prst="rect">
-            <a:avLst/>
-          </a:prstGeom>
-          <a:noFill/>
-          <a:ln/>
-        </p:spPr>
-        <p:txBody>
-          <a:bodyPr wrap="square" lIns="0" tIns="0" rIns="0" bIns="0" rtlCol="0" anchor="ctr"/>
-          <a:lstStyle/>
-          <a:p>
-            <a:pPr rtl="1" algn="r" indent="0" marL="0">
-              <a:lnSpc>
-                <a:spcPts val="2200"/>
-              </a:lnSpc>
-              <a:buNone/>
-            </a:pPr>
-            <a:r>
-              <a:rPr lang="en-US" sz="1400" dirty="0">
-                <a:solidFill>
-                  <a:srgbClr val="A2977F"/>
-                </a:solidFill>
-                <a:latin typeface="Arial" pitchFamily="34" charset="0"/>
-                <a:ea typeface="Arial" pitchFamily="34" charset="-122"/>
-                <a:cs typeface="Arial" pitchFamily="34" charset="-120"/>
-              </a:rPr>
               <a:t>ونحن نستعمل تمثيلاته كما هي: نخزّن بصمات ٢٠١ صورةٍ مرجعية من تصويرنا الميداني، ونبحث عن أقربها.</a:t>
             </a:r>
             <a:endParaRPr lang="en-US" sz="1400" dirty="0"/>
@@ -3466,12 +3071,12 @@
         </p:nvSpPr>
         <p:spPr>
           <a:xfrm>
-            <a:off x="640080" y="1371600"/>
-            <a:ext cx="4572000" cy="978408"/>
+            <a:off x="685800" y="1600200"/>
+            <a:ext cx="4434840" cy="950976"/>
           </a:xfrm>
           <a:prstGeom prst="roundRect">
             <a:avLst>
-              <a:gd name="adj" fmla="val 11215"/>
+              <a:gd name="adj" fmla="val 9615"/>
             </a:avLst>
           </a:prstGeom>
           <a:solidFill>
@@ -3493,24 +3098,24 @@
         </p:nvSpPr>
         <p:spPr>
           <a:xfrm>
-            <a:off x="914400" y="1499616"/>
-            <a:ext cx="4023360" cy="365760"/>
-          </a:xfrm>
-          <a:prstGeom prst="rect">
-            <a:avLst/>
-          </a:prstGeom>
-          <a:noFill/>
-          <a:ln/>
-        </p:spPr>
-        <p:txBody>
-          <a:bodyPr wrap="square" lIns="0" tIns="0" rIns="0" bIns="0" rtlCol="0" anchor="ctr"/>
-          <a:lstStyle/>
-          <a:p>
-            <a:pPr rtl="1" algn="r" indent="0" marL="0">
-              <a:buNone/>
-            </a:pPr>
-            <a:r>
-              <a:rPr lang="en-US" sz="1600" b="1" dirty="0">
+            <a:off x="960120" y="1719072"/>
+            <a:ext cx="3886200" cy="365760"/>
+          </a:xfrm>
+          <a:prstGeom prst="rect">
+            <a:avLst/>
+          </a:prstGeom>
+          <a:noFill/>
+          <a:ln/>
+        </p:spPr>
+        <p:txBody>
+          <a:bodyPr wrap="square" lIns="0" tIns="0" rIns="0" bIns="0" rtlCol="0" anchor="ctr"/>
+          <a:lstStyle/>
+          <a:p>
+            <a:pPr rtl="1" algn="r" indent="0" marL="0">
+              <a:buNone/>
+            </a:pPr>
+            <a:r>
+              <a:rPr lang="en-US" sz="1650" b="1" dirty="0">
                 <a:solidFill>
                   <a:srgbClr val="EFAE6E"/>
                 </a:solidFill>
@@ -3520,7 +3125,7 @@
               </a:rPr>
               <a:t>يميّز الأمثلة</a:t>
             </a:r>
-            <a:endParaRPr lang="en-US" sz="1600" dirty="0"/>
+            <a:endParaRPr lang="en-US" sz="1650" dirty="0"/>
           </a:p>
         </p:txBody>
       </p:sp>
@@ -3532,8 +3137,8 @@
         </p:nvSpPr>
         <p:spPr>
           <a:xfrm>
-            <a:off x="914400" y="1901952"/>
-            <a:ext cx="4023360" cy="347472"/>
+            <a:off x="960120" y="2121408"/>
+            <a:ext cx="3886200" cy="347472"/>
           </a:xfrm>
           <a:prstGeom prst="rect">
             <a:avLst/>
@@ -3571,12 +3176,12 @@
         </p:nvSpPr>
         <p:spPr>
           <a:xfrm>
-            <a:off x="640080" y="2478024"/>
-            <a:ext cx="4572000" cy="978408"/>
+            <a:off x="685800" y="2679192"/>
+            <a:ext cx="4434840" cy="950976"/>
           </a:xfrm>
           <a:prstGeom prst="roundRect">
             <a:avLst>
-              <a:gd name="adj" fmla="val 11215"/>
+              <a:gd name="adj" fmla="val 9615"/>
             </a:avLst>
           </a:prstGeom>
           <a:solidFill>
@@ -3598,24 +3203,24 @@
         </p:nvSpPr>
         <p:spPr>
           <a:xfrm>
-            <a:off x="914400" y="2606040"/>
-            <a:ext cx="4023360" cy="365760"/>
-          </a:xfrm>
-          <a:prstGeom prst="rect">
-            <a:avLst/>
-          </a:prstGeom>
-          <a:noFill/>
-          <a:ln/>
-        </p:spPr>
-        <p:txBody>
-          <a:bodyPr wrap="square" lIns="0" tIns="0" rIns="0" bIns="0" rtlCol="0" anchor="ctr"/>
-          <a:lstStyle/>
-          <a:p>
-            <a:pPr rtl="1" algn="r" indent="0" marL="0">
-              <a:buNone/>
-            </a:pPr>
-            <a:r>
-              <a:rPr lang="en-US" sz="1600" b="1" dirty="0">
+            <a:off x="960120" y="2798064"/>
+            <a:ext cx="3886200" cy="365760"/>
+          </a:xfrm>
+          <a:prstGeom prst="rect">
+            <a:avLst/>
+          </a:prstGeom>
+          <a:noFill/>
+          <a:ln/>
+        </p:spPr>
+        <p:txBody>
+          <a:bodyPr wrap="square" lIns="0" tIns="0" rIns="0" bIns="0" rtlCol="0" anchor="ctr"/>
+          <a:lstStyle/>
+          <a:p>
+            <a:pPr rtl="1" algn="r" indent="0" marL="0">
+              <a:buNone/>
+            </a:pPr>
+            <a:r>
+              <a:rPr lang="en-US" sz="1650" b="1" dirty="0">
                 <a:solidFill>
                   <a:srgbClr val="EFAE6E"/>
                 </a:solidFill>
@@ -3625,7 +3230,7 @@
               </a:rPr>
               <a:t>بلا تسميات</a:t>
             </a:r>
-            <a:endParaRPr lang="en-US" sz="1600" dirty="0"/>
+            <a:endParaRPr lang="en-US" sz="1650" dirty="0"/>
           </a:p>
         </p:txBody>
       </p:sp>
@@ -3637,8 +3242,8 @@
         </p:nvSpPr>
         <p:spPr>
           <a:xfrm>
-            <a:off x="914400" y="3008376"/>
-            <a:ext cx="4023360" cy="347472"/>
+            <a:off x="960120" y="3200400"/>
+            <a:ext cx="3886200" cy="347472"/>
           </a:xfrm>
           <a:prstGeom prst="rect">
             <a:avLst/>
@@ -3676,12 +3281,12 @@
         </p:nvSpPr>
         <p:spPr>
           <a:xfrm>
-            <a:off x="640080" y="3584448"/>
-            <a:ext cx="4572000" cy="978408"/>
+            <a:off x="685800" y="3758184"/>
+            <a:ext cx="4434840" cy="950976"/>
           </a:xfrm>
           <a:prstGeom prst="roundRect">
             <a:avLst>
-              <a:gd name="adj" fmla="val 11215"/>
+              <a:gd name="adj" fmla="val 9615"/>
             </a:avLst>
           </a:prstGeom>
           <a:solidFill>
@@ -3703,24 +3308,24 @@
         </p:nvSpPr>
         <p:spPr>
           <a:xfrm>
-            <a:off x="914400" y="3712464"/>
-            <a:ext cx="4023360" cy="365760"/>
-          </a:xfrm>
-          <a:prstGeom prst="rect">
-            <a:avLst/>
-          </a:prstGeom>
-          <a:noFill/>
-          <a:ln/>
-        </p:spPr>
-        <p:txBody>
-          <a:bodyPr wrap="square" lIns="0" tIns="0" rIns="0" bIns="0" rtlCol="0" anchor="ctr"/>
-          <a:lstStyle/>
-          <a:p>
-            <a:pPr rtl="1" algn="r" indent="0" marL="0">
-              <a:buNone/>
-            </a:pPr>
-            <a:r>
-              <a:rPr lang="en-US" sz="1600" b="1" dirty="0">
+            <a:off x="960120" y="3877056"/>
+            <a:ext cx="3886200" cy="365760"/>
+          </a:xfrm>
+          <a:prstGeom prst="rect">
+            <a:avLst/>
+          </a:prstGeom>
+          <a:noFill/>
+          <a:ln/>
+        </p:spPr>
+        <p:txBody>
+          <a:bodyPr wrap="square" lIns="0" tIns="0" rIns="0" bIns="0" rtlCol="0" anchor="ctr"/>
+          <a:lstStyle/>
+          <a:p>
+            <a:pPr rtl="1" algn="r" indent="0" marL="0">
+              <a:buNone/>
+            </a:pPr>
+            <a:r>
+              <a:rPr lang="en-US" sz="1650" b="1" dirty="0">
                 <a:solidFill>
                   <a:srgbClr val="EFAE6E"/>
                 </a:solidFill>
@@ -3730,7 +3335,7 @@
               </a:rPr>
               <a:t>٢١ مليون معامل</a:t>
             </a:r>
-            <a:endParaRPr lang="en-US" sz="1600" dirty="0"/>
+            <a:endParaRPr lang="en-US" sz="1650" dirty="0"/>
           </a:p>
         </p:txBody>
       </p:sp>
@@ -3742,8 +3347,8 @@
         </p:nvSpPr>
         <p:spPr>
           <a:xfrm>
-            <a:off x="914400" y="4114800"/>
-            <a:ext cx="4023360" cy="347472"/>
+            <a:off x="960120" y="4279392"/>
+            <a:ext cx="3886200" cy="347472"/>
           </a:xfrm>
           <a:prstGeom prst="rect">
             <a:avLst/>
@@ -3781,12 +3386,12 @@
         </p:nvSpPr>
         <p:spPr>
           <a:xfrm>
-            <a:off x="640080" y="4690872"/>
-            <a:ext cx="4572000" cy="978408"/>
+            <a:off x="685800" y="4837176"/>
+            <a:ext cx="4434840" cy="950976"/>
           </a:xfrm>
           <a:prstGeom prst="roundRect">
             <a:avLst>
-              <a:gd name="adj" fmla="val 11215"/>
+              <a:gd name="adj" fmla="val 9615"/>
             </a:avLst>
           </a:prstGeom>
           <a:solidFill>
@@ -3808,24 +3413,24 @@
         </p:nvSpPr>
         <p:spPr>
           <a:xfrm>
-            <a:off x="914400" y="4818888"/>
-            <a:ext cx="4023360" cy="365760"/>
-          </a:xfrm>
-          <a:prstGeom prst="rect">
-            <a:avLst/>
-          </a:prstGeom>
-          <a:noFill/>
-          <a:ln/>
-        </p:spPr>
-        <p:txBody>
-          <a:bodyPr wrap="square" lIns="0" tIns="0" rIns="0" bIns="0" rtlCol="0" anchor="ctr"/>
-          <a:lstStyle/>
-          <a:p>
-            <a:pPr rtl="1" algn="r" indent="0" marL="0">
-              <a:buNone/>
-            </a:pPr>
-            <a:r>
-              <a:rPr lang="en-US" sz="1600" b="1" dirty="0">
+            <a:off x="960120" y="4956048"/>
+            <a:ext cx="3886200" cy="365760"/>
+          </a:xfrm>
+          <a:prstGeom prst="rect">
+            <a:avLst/>
+          </a:prstGeom>
+          <a:noFill/>
+          <a:ln/>
+        </p:spPr>
+        <p:txBody>
+          <a:bodyPr wrap="square" lIns="0" tIns="0" rIns="0" bIns="0" rtlCol="0" anchor="ctr"/>
+          <a:lstStyle/>
+          <a:p>
+            <a:pPr rtl="1" algn="r" indent="0" marL="0">
+              <a:buNone/>
+            </a:pPr>
+            <a:r>
+              <a:rPr lang="en-US" sz="1650" b="1" dirty="0">
                 <a:solidFill>
                   <a:srgbClr val="EFAE6E"/>
                 </a:solidFill>
@@ -3835,7 +3440,7 @@
               </a:rPr>
               <a:t>يعمل بلا ضبط</a:t>
             </a:r>
-            <a:endParaRPr lang="en-US" sz="1600" dirty="0"/>
+            <a:endParaRPr lang="en-US" sz="1650" dirty="0"/>
           </a:p>
         </p:txBody>
       </p:sp>
@@ -3847,8 +3452,8 @@
         </p:nvSpPr>
         <p:spPr>
           <a:xfrm>
-            <a:off x="914400" y="5221224"/>
-            <a:ext cx="4023360" cy="347472"/>
+            <a:off x="960120" y="5358384"/>
+            <a:ext cx="3886200" cy="347472"/>
           </a:xfrm>
           <a:prstGeom prst="rect">
             <a:avLst/>
@@ -3883,6 +3488,18 @@
   <p:clrMapOvr>
     <a:masterClrMapping/>
   </p:clrMapOvr>
+  <mc:AlternateContent xmlns:mc="http://schemas.openxmlformats.org/markup-compatibility/2006">
+    <mc:Choice xmlns:p159="http://schemas.microsoft.com/office/powerpoint/2015/09/main" Requires="p159">
+      <p:transition xmlns:p14="http://schemas.microsoft.com/office/powerpoint/2010/main" spd="slow" p14:dur="900">
+        <p159:morph option="byObject"/>
+      </p:transition>
+    </mc:Choice>
+    <mc:Fallback>
+      <p:transition xmlns:p14="http://schemas.microsoft.com/office/powerpoint/2010/main" spd="slow" p14:dur="900">
+        <p:fade/>
+      </p:transition>
+    </mc:Fallback>
+  </mc:AlternateContent>
 </p:sld>
 </file>
 
@@ -3912,30 +3529,30 @@
       </p:grpSpPr>
       <p:sp>
         <p:nvSpPr>
-          <p:cNvPr id="2" name="Text 0"/>
-          <p:cNvSpPr/>
-          <p:nvPr/>
-        </p:nvSpPr>
-        <p:spPr>
-          <a:xfrm>
-            <a:off x="640080" y="457200"/>
-            <a:ext cx="10911535" cy="777240"/>
-          </a:xfrm>
-          <a:prstGeom prst="rect">
-            <a:avLst/>
-          </a:prstGeom>
-          <a:noFill/>
-          <a:ln/>
-        </p:spPr>
-        <p:txBody>
-          <a:bodyPr wrap="square" lIns="0" tIns="0" rIns="0" bIns="0" rtlCol="0" anchor="ctr"/>
-          <a:lstStyle/>
-          <a:p>
-            <a:pPr rtl="1" algn="r" indent="0" marL="0">
-              <a:buNone/>
-            </a:pPr>
-            <a:r>
-              <a:rPr lang="en-US" sz="3600" b="1" dirty="0">
+          <p:cNvPr id="2" name="!!title"/>
+          <p:cNvSpPr/>
+          <p:nvPr/>
+        </p:nvSpPr>
+        <p:spPr>
+          <a:xfrm>
+            <a:off x="685800" y="502920"/>
+            <a:ext cx="10820095" cy="868680"/>
+          </a:xfrm>
+          <a:prstGeom prst="rect">
+            <a:avLst/>
+          </a:prstGeom>
+          <a:noFill/>
+          <a:ln/>
+        </p:spPr>
+        <p:txBody>
+          <a:bodyPr wrap="square" lIns="0" tIns="0" rIns="0" bIns="0" rtlCol="0" anchor="ctr"/>
+          <a:lstStyle/>
+          <a:p>
+            <a:pPr rtl="1" algn="r" indent="0" marL="0">
+              <a:buNone/>
+            </a:pPr>
+            <a:r>
+              <a:rPr lang="en-US" sz="4000" b="1" dirty="0">
                 <a:solidFill>
                   <a:srgbClr val="E8DCC8"/>
                 </a:solidFill>
@@ -3945,7 +3562,7 @@
               </a:rPr>
               <a:t>يعمل داخل الجوّال. كلّه.</a:t>
             </a:r>
-            <a:endParaRPr lang="en-US" sz="3600" dirty="0"/>
+            <a:endParaRPr lang="en-US" sz="4000" dirty="0"/>
           </a:p>
         </p:txBody>
       </p:sp>
@@ -3957,24 +3574,24 @@
         </p:nvSpPr>
         <p:spPr>
           <a:xfrm>
-            <a:off x="640080" y="1234440"/>
-            <a:ext cx="10911535" cy="457200"/>
-          </a:xfrm>
-          <a:prstGeom prst="rect">
-            <a:avLst/>
-          </a:prstGeom>
-          <a:noFill/>
-          <a:ln/>
-        </p:spPr>
-        <p:txBody>
-          <a:bodyPr wrap="square" lIns="0" tIns="0" rIns="0" bIns="0" rtlCol="0" anchor="ctr"/>
-          <a:lstStyle/>
-          <a:p>
-            <a:pPr rtl="1" algn="r" indent="0" marL="0">
-              <a:buNone/>
-            </a:pPr>
-            <a:r>
-              <a:rPr lang="en-US" sz="1800" dirty="0">
+            <a:off x="685800" y="1371600"/>
+            <a:ext cx="10820095" cy="457200"/>
+          </a:xfrm>
+          <a:prstGeom prst="rect">
+            <a:avLst/>
+          </a:prstGeom>
+          <a:noFill/>
+          <a:ln/>
+        </p:spPr>
+        <p:txBody>
+          <a:bodyPr wrap="square" lIns="0" tIns="0" rIns="0" bIns="0" rtlCol="0" anchor="ctr"/>
+          <a:lstStyle/>
+          <a:p>
+            <a:pPr rtl="1" algn="r" indent="0" marL="0">
+              <a:buNone/>
+            </a:pPr>
+            <a:r>
+              <a:rPr lang="en-US" sz="1900" dirty="0">
                 <a:solidFill>
                   <a:srgbClr val="A2977F"/>
                 </a:solidFill>
@@ -3984,7 +3601,7 @@
               </a:rPr>
               <a:t>لا خادم، ولا مفتاح واجهة، ولا إنترنت بعد أوّل تحميل.</a:t>
             </a:r>
-            <a:endParaRPr lang="en-US" sz="1800" dirty="0"/>
+            <a:endParaRPr lang="en-US" sz="1900" dirty="0"/>
           </a:p>
         </p:txBody>
       </p:sp>
@@ -3996,16 +3613,16 @@
         </p:nvSpPr>
         <p:spPr>
           <a:xfrm>
-            <a:off x="8899855" y="2103120"/>
-            <a:ext cx="2651760" cy="1783080"/>
+            <a:off x="8835847" y="2286000"/>
+            <a:ext cx="2670048" cy="1920240"/>
           </a:xfrm>
           <a:prstGeom prst="roundRect">
             <a:avLst>
-              <a:gd name="adj" fmla="val 6154"/>
+              <a:gd name="adj" fmla="val 4762"/>
             </a:avLst>
           </a:prstGeom>
           <a:solidFill>
-            <a:srgbClr val="1A2233"/>
+            <a:srgbClr val="151D2C"/>
           </a:solidFill>
           <a:ln w="12700">
             <a:solidFill>
@@ -4023,8 +3640,8 @@
         </p:nvSpPr>
         <p:spPr>
           <a:xfrm>
-            <a:off x="8899855" y="2331720"/>
-            <a:ext cx="2651760" cy="777240"/>
+            <a:off x="8835847" y="2542032"/>
+            <a:ext cx="2670048" cy="868680"/>
           </a:xfrm>
           <a:prstGeom prst="rect">
             <a:avLst/>
@@ -4040,7 +3657,7 @@
               <a:buNone/>
             </a:pPr>
             <a:r>
-              <a:rPr lang="en-US" sz="3800" b="1" dirty="0">
+              <a:rPr lang="en-US" sz="4200" b="1" dirty="0">
                 <a:solidFill>
                   <a:srgbClr val="DD8C58"/>
                 </a:solidFill>
@@ -4050,7 +3667,7 @@
               </a:rPr>
               <a:t>٢٢</a:t>
             </a:r>
-            <a:endParaRPr lang="en-US" sz="3800" dirty="0"/>
+            <a:endParaRPr lang="en-US" sz="4200" dirty="0"/>
           </a:p>
         </p:txBody>
       </p:sp>
@@ -4062,8 +3679,8 @@
         </p:nvSpPr>
         <p:spPr>
           <a:xfrm>
-            <a:off x="9037015" y="3127248"/>
-            <a:ext cx="2377440" cy="411480"/>
+            <a:off x="9018727" y="3456432"/>
+            <a:ext cx="2304288" cy="457200"/>
           </a:xfrm>
           <a:prstGeom prst="rect">
             <a:avLst/>
@@ -4076,6 +3693,9 @@
           <a:lstStyle/>
           <a:p>
             <a:pPr rtl="1" algn="ctr" indent="0" marL="0">
+              <a:lnSpc>
+                <a:spcPts val="1900"/>
+              </a:lnSpc>
               <a:buNone/>
             </a:pPr>
             <a:r>
@@ -4101,16 +3721,16 @@
         </p:nvSpPr>
         <p:spPr>
           <a:xfrm>
-            <a:off x="6129223" y="2103120"/>
-            <a:ext cx="2651760" cy="1783080"/>
+            <a:off x="6065215" y="2286000"/>
+            <a:ext cx="2670048" cy="1920240"/>
           </a:xfrm>
           <a:prstGeom prst="roundRect">
             <a:avLst>
-              <a:gd name="adj" fmla="val 6154"/>
+              <a:gd name="adj" fmla="val 4762"/>
             </a:avLst>
           </a:prstGeom>
           <a:solidFill>
-            <a:srgbClr val="1A2233"/>
+            <a:srgbClr val="151D2C"/>
           </a:solidFill>
           <a:ln w="12700">
             <a:solidFill>
@@ -4128,8 +3748,8 @@
         </p:nvSpPr>
         <p:spPr>
           <a:xfrm>
-            <a:off x="6129223" y="2331720"/>
-            <a:ext cx="2651760" cy="777240"/>
+            <a:off x="6065215" y="2542032"/>
+            <a:ext cx="2670048" cy="868680"/>
           </a:xfrm>
           <a:prstGeom prst="rect">
             <a:avLst/>
@@ -4145,7 +3765,7 @@
               <a:buNone/>
             </a:pPr>
             <a:r>
-              <a:rPr lang="en-US" sz="3800" b="1" dirty="0">
+              <a:rPr lang="en-US" sz="4200" b="1" dirty="0">
                 <a:solidFill>
                   <a:srgbClr val="EFAE6E"/>
                 </a:solidFill>
@@ -4155,7 +3775,7 @@
               </a:rPr>
               <a:t>صفر</a:t>
             </a:r>
-            <a:endParaRPr lang="en-US" sz="3800" dirty="0"/>
+            <a:endParaRPr lang="en-US" sz="4200" dirty="0"/>
           </a:p>
         </p:txBody>
       </p:sp>
@@ -4167,8 +3787,8 @@
         </p:nvSpPr>
         <p:spPr>
           <a:xfrm>
-            <a:off x="6266383" y="3127248"/>
-            <a:ext cx="2377440" cy="411480"/>
+            <a:off x="6248095" y="3456432"/>
+            <a:ext cx="2304288" cy="457200"/>
           </a:xfrm>
           <a:prstGeom prst="rect">
             <a:avLst/>
@@ -4181,6 +3801,9 @@
           <a:lstStyle/>
           <a:p>
             <a:pPr rtl="1" algn="ctr" indent="0" marL="0">
+              <a:lnSpc>
+                <a:spcPts val="1900"/>
+              </a:lnSpc>
               <a:buNone/>
             </a:pPr>
             <a:r>
@@ -4206,16 +3829,16 @@
         </p:nvSpPr>
         <p:spPr>
           <a:xfrm>
-            <a:off x="3358591" y="2103120"/>
-            <a:ext cx="2651760" cy="1783080"/>
+            <a:off x="3294583" y="2286000"/>
+            <a:ext cx="2670048" cy="1920240"/>
           </a:xfrm>
           <a:prstGeom prst="roundRect">
             <a:avLst>
-              <a:gd name="adj" fmla="val 6154"/>
+              <a:gd name="adj" fmla="val 4762"/>
             </a:avLst>
           </a:prstGeom>
           <a:solidFill>
-            <a:srgbClr val="1A2233"/>
+            <a:srgbClr val="151D2C"/>
           </a:solidFill>
           <a:ln w="12700">
             <a:solidFill>
@@ -4233,8 +3856,8 @@
         </p:nvSpPr>
         <p:spPr>
           <a:xfrm>
-            <a:off x="3358591" y="2331720"/>
-            <a:ext cx="2651760" cy="777240"/>
+            <a:off x="3294583" y="2542032"/>
+            <a:ext cx="2670048" cy="868680"/>
           </a:xfrm>
           <a:prstGeom prst="rect">
             <a:avLst/>
@@ -4250,7 +3873,7 @@
               <a:buNone/>
             </a:pPr>
             <a:r>
-              <a:rPr lang="en-US" sz="3800" b="1" dirty="0">
+              <a:rPr lang="en-US" sz="4200" b="1" dirty="0">
                 <a:solidFill>
                   <a:srgbClr val="DD8C58"/>
                 </a:solidFill>
@@ -4260,7 +3883,7 @@
               </a:rPr>
               <a:t>صفر</a:t>
             </a:r>
-            <a:endParaRPr lang="en-US" sz="3800" dirty="0"/>
+            <a:endParaRPr lang="en-US" sz="4200" dirty="0"/>
           </a:p>
         </p:txBody>
       </p:sp>
@@ -4272,8 +3895,8 @@
         </p:nvSpPr>
         <p:spPr>
           <a:xfrm>
-            <a:off x="3495751" y="3127248"/>
-            <a:ext cx="2377440" cy="411480"/>
+            <a:off x="3477463" y="3456432"/>
+            <a:ext cx="2304288" cy="457200"/>
           </a:xfrm>
           <a:prstGeom prst="rect">
             <a:avLst/>
@@ -4286,6 +3909,9 @@
           <a:lstStyle/>
           <a:p>
             <a:pPr rtl="1" algn="ctr" indent="0" marL="0">
+              <a:lnSpc>
+                <a:spcPts val="1900"/>
+              </a:lnSpc>
               <a:buNone/>
             </a:pPr>
             <a:r>
@@ -4311,16 +3937,16 @@
         </p:nvSpPr>
         <p:spPr>
           <a:xfrm>
-            <a:off x="587959" y="2103120"/>
-            <a:ext cx="2651760" cy="1783080"/>
+            <a:off x="523951" y="2286000"/>
+            <a:ext cx="2670048" cy="1920240"/>
           </a:xfrm>
           <a:prstGeom prst="roundRect">
             <a:avLst>
-              <a:gd name="adj" fmla="val 6154"/>
+              <a:gd name="adj" fmla="val 4762"/>
             </a:avLst>
           </a:prstGeom>
           <a:solidFill>
-            <a:srgbClr val="1A2233"/>
+            <a:srgbClr val="151D2C"/>
           </a:solidFill>
           <a:ln w="12700">
             <a:solidFill>
@@ -4338,8 +3964,8 @@
         </p:nvSpPr>
         <p:spPr>
           <a:xfrm>
-            <a:off x="587959" y="2331720"/>
-            <a:ext cx="2651760" cy="777240"/>
+            <a:off x="523951" y="2542032"/>
+            <a:ext cx="2670048" cy="868680"/>
           </a:xfrm>
           <a:prstGeom prst="rect">
             <a:avLst/>
@@ -4355,7 +3981,7 @@
               <a:buNone/>
             </a:pPr>
             <a:r>
-              <a:rPr lang="en-US" sz="3800" b="1" dirty="0">
+              <a:rPr lang="en-US" sz="4200" b="1" dirty="0">
                 <a:solidFill>
                   <a:srgbClr val="EFAE6E"/>
                 </a:solidFill>
@@ -4365,7 +3991,7 @@
               </a:rPr>
               <a:t>١٠٠٪</a:t>
             </a:r>
-            <a:endParaRPr lang="en-US" sz="3800" dirty="0"/>
+            <a:endParaRPr lang="en-US" sz="4200" dirty="0"/>
           </a:p>
         </p:txBody>
       </p:sp>
@@ -4377,8 +4003,8 @@
         </p:nvSpPr>
         <p:spPr>
           <a:xfrm>
-            <a:off x="725119" y="3127248"/>
-            <a:ext cx="2377440" cy="411480"/>
+            <a:off x="706831" y="3456432"/>
+            <a:ext cx="2304288" cy="457200"/>
           </a:xfrm>
           <a:prstGeom prst="rect">
             <a:avLst/>
@@ -4391,6 +4017,9 @@
           <a:lstStyle/>
           <a:p>
             <a:pPr rtl="1" algn="ctr" indent="0" marL="0">
+              <a:lnSpc>
+                <a:spcPts val="1900"/>
+              </a:lnSpc>
               <a:buNone/>
             </a:pPr>
             <a:r>
@@ -4416,12 +4045,12 @@
         </p:nvSpPr>
         <p:spPr>
           <a:xfrm>
-            <a:off x="640080" y="4160520"/>
-            <a:ext cx="10911535" cy="1325880"/>
+            <a:off x="685800" y="4526280"/>
+            <a:ext cx="10820095" cy="1325880"/>
           </a:xfrm>
           <a:prstGeom prst="roundRect">
             <a:avLst>
-              <a:gd name="adj" fmla="val 8276"/>
+              <a:gd name="adj" fmla="val 6897"/>
             </a:avLst>
           </a:prstGeom>
           <a:solidFill>
@@ -4443,8 +4072,8 @@
         </p:nvSpPr>
         <p:spPr>
           <a:xfrm>
-            <a:off x="1051560" y="4434840"/>
-            <a:ext cx="10088575" cy="822960"/>
+            <a:off x="1097280" y="4800600"/>
+            <a:ext cx="9997135" cy="822960"/>
           </a:xfrm>
           <a:prstGeom prst="rect">
             <a:avLst/>
@@ -4458,12 +4087,12 @@
           <a:p>
             <a:pPr rtl="1" algn="r" indent="0" marL="0">
               <a:lnSpc>
-                <a:spcPts val="2500"/>
+                <a:spcPts val="2600"/>
               </a:lnSpc>
               <a:buNone/>
             </a:pPr>
             <a:r>
-              <a:rPr lang="en-US" sz="1600" dirty="0">
+              <a:rPr lang="en-US" sz="1650" dirty="0">
                 <a:solidFill>
                   <a:srgbClr val="E8DCC8"/>
                 </a:solidFill>
@@ -4473,7 +4102,7 @@
               </a:rPr>
               <a:t>أكثر المشاريع تتوقّف حين تتوقّف الشبكة، أو حين ينفد رصيد الواجهة. وهذا يعمل في وسط النفود — وتكلفته لزائرٍ واحد كتكلفته لمليون.</a:t>
             </a:r>
-            <a:endParaRPr lang="en-US" sz="1600" dirty="0"/>
+            <a:endParaRPr lang="en-US" sz="1650" dirty="0"/>
           </a:p>
         </p:txBody>
       </p:sp>
@@ -4482,6 +4111,18 @@
   <p:clrMapOvr>
     <a:masterClrMapping/>
   </p:clrMapOvr>
+  <mc:AlternateContent xmlns:mc="http://schemas.openxmlformats.org/markup-compatibility/2006">
+    <mc:Choice xmlns:p159="http://schemas.microsoft.com/office/powerpoint/2015/09/main" Requires="p159">
+      <p:transition xmlns:p14="http://schemas.microsoft.com/office/powerpoint/2010/main" spd="slow" p14:dur="900">
+        <p159:morph option="byObject"/>
+      </p:transition>
+    </mc:Choice>
+    <mc:Fallback>
+      <p:transition xmlns:p14="http://schemas.microsoft.com/office/powerpoint/2010/main" spd="slow" p14:dur="900">
+        <p:fade/>
+      </p:transition>
+    </mc:Fallback>
+  </mc:AlternateContent>
 </p:sld>
 </file>
 
@@ -4511,30 +4152,30 @@
       </p:grpSpPr>
       <p:sp>
         <p:nvSpPr>
-          <p:cNvPr id="2" name="Text 0"/>
-          <p:cNvSpPr/>
-          <p:nvPr/>
-        </p:nvSpPr>
-        <p:spPr>
-          <a:xfrm>
-            <a:off x="640080" y="457200"/>
-            <a:ext cx="10911535" cy="777240"/>
-          </a:xfrm>
-          <a:prstGeom prst="rect">
-            <a:avLst/>
-          </a:prstGeom>
-          <a:noFill/>
-          <a:ln/>
-        </p:spPr>
-        <p:txBody>
-          <a:bodyPr wrap="square" lIns="0" tIns="0" rIns="0" bIns="0" rtlCol="0" anchor="ctr"/>
-          <a:lstStyle/>
-          <a:p>
-            <a:pPr rtl="1" algn="r" indent="0" marL="0">
-              <a:buNone/>
-            </a:pPr>
-            <a:r>
-              <a:rPr lang="en-US" sz="3600" b="1" dirty="0">
+          <p:cNvPr id="2" name="!!title"/>
+          <p:cNvSpPr/>
+          <p:nvPr/>
+        </p:nvSpPr>
+        <p:spPr>
+          <a:xfrm>
+            <a:off x="685800" y="502920"/>
+            <a:ext cx="10820095" cy="868680"/>
+          </a:xfrm>
+          <a:prstGeom prst="rect">
+            <a:avLst/>
+          </a:prstGeom>
+          <a:noFill/>
+          <a:ln/>
+        </p:spPr>
+        <p:txBody>
+          <a:bodyPr wrap="square" lIns="0" tIns="0" rIns="0" bIns="0" rtlCol="0" anchor="ctr"/>
+          <a:lstStyle/>
+          <a:p>
+            <a:pPr rtl="1" algn="r" indent="0" marL="0">
+              <a:buNone/>
+            </a:pPr>
+            <a:r>
+              <a:rPr lang="en-US" sz="4000" b="1" dirty="0">
                 <a:solidFill>
                   <a:srgbClr val="E8DCC8"/>
                 </a:solidFill>
@@ -4544,7 +4185,7 @@
               </a:rPr>
               <a:t>ويتعلّم — داخل الجهاز</a:t>
             </a:r>
-            <a:endParaRPr lang="en-US" sz="3600" dirty="0"/>
+            <a:endParaRPr lang="en-US" sz="4000" dirty="0"/>
           </a:p>
         </p:txBody>
       </p:sp>
@@ -4556,24 +4197,24 @@
         </p:nvSpPr>
         <p:spPr>
           <a:xfrm>
-            <a:off x="640080" y="1207008"/>
-            <a:ext cx="10911535" cy="457200"/>
-          </a:xfrm>
-          <a:prstGeom prst="rect">
-            <a:avLst/>
-          </a:prstGeom>
-          <a:noFill/>
-          <a:ln/>
-        </p:spPr>
-        <p:txBody>
-          <a:bodyPr wrap="square" lIns="0" tIns="0" rIns="0" bIns="0" rtlCol="0" anchor="ctr"/>
-          <a:lstStyle/>
-          <a:p>
-            <a:pPr rtl="1" algn="r" indent="0" marL="0">
-              <a:buNone/>
-            </a:pPr>
-            <a:r>
-              <a:rPr lang="en-US" sz="1600" dirty="0">
+            <a:off x="685800" y="1371600"/>
+            <a:ext cx="10820095" cy="457200"/>
+          </a:xfrm>
+          <a:prstGeom prst="rect">
+            <a:avLst/>
+          </a:prstGeom>
+          <a:noFill/>
+          <a:ln/>
+        </p:spPr>
+        <p:txBody>
+          <a:bodyPr wrap="square" lIns="0" tIns="0" rIns="0" bIns="0" rtlCol="0" anchor="ctr"/>
+          <a:lstStyle/>
+          <a:p>
+            <a:pPr rtl="1" algn="r" indent="0" marL="0">
+              <a:buNone/>
+            </a:pPr>
+            <a:r>
+              <a:rPr lang="en-US" sz="1650" dirty="0">
                 <a:solidFill>
                   <a:srgbClr val="A2977F"/>
                 </a:solidFill>
@@ -4583,28 +4224,52 @@
               </a:rPr>
               <a:t>تعلُّمٌ إشرافيّ بالأمثلة: كلّ تصحيحٍ مثالٌ مُعنون يدخل النموذج فيتغيّر قراره فورًا.</a:t>
             </a:r>
-            <a:endParaRPr lang="en-US" sz="1600" dirty="0"/>
-          </a:p>
-        </p:txBody>
-      </p:sp>
-      <p:sp>
-        <p:nvSpPr>
-          <p:cNvPr id="4" name="Shape 2"/>
-          <p:cNvSpPr/>
-          <p:nvPr/>
-        </p:nvSpPr>
-        <p:spPr>
-          <a:xfrm>
-            <a:off x="8899855" y="1828800"/>
-            <a:ext cx="2651760" cy="1828800"/>
+            <a:endParaRPr lang="en-US" sz="1650" dirty="0"/>
+          </a:p>
+        </p:txBody>
+      </p:sp>
+      <p:pic>
+        <p:nvPicPr>
+          <p:cNvPr id="4" name="Image 0" descr="preencoded.png">    </p:cNvPr>
+          <p:cNvPicPr>
+            <a:picLocks noChangeAspect="1"/>
+          </p:cNvPicPr>
+          <p:nvPr/>
+        </p:nvPicPr>
+        <p:blipFill>
+          <a:blip r:embed="rId1"/>
+          <a:stretch>
+            <a:fillRect/>
+          </a:stretch>
+        </p:blipFill>
+        <p:spPr>
+          <a:xfrm>
+            <a:off x="868680" y="1810512"/>
+            <a:ext cx="1106424" cy="1682496"/>
+          </a:xfrm>
+          <a:prstGeom prst="rect">
+            <a:avLst/>
+          </a:prstGeom>
+        </p:spPr>
+      </p:pic>
+      <p:sp>
+        <p:nvSpPr>
+          <p:cNvPr id="5" name="Shape 2"/>
+          <p:cNvSpPr/>
+          <p:nvPr/>
+        </p:nvSpPr>
+        <p:spPr>
+          <a:xfrm>
+            <a:off x="9402775" y="1965960"/>
+            <a:ext cx="2103120" cy="1417320"/>
           </a:xfrm>
           <a:prstGeom prst="roundRect">
             <a:avLst>
-              <a:gd name="adj" fmla="val 6000"/>
+              <a:gd name="adj" fmla="val 6452"/>
             </a:avLst>
           </a:prstGeom>
           <a:solidFill>
-            <a:srgbClr val="1A2233"/>
+            <a:srgbClr val="151D2C"/>
           </a:solidFill>
           <a:ln w="12700">
             <a:solidFill>
@@ -4616,63 +4281,38 @@
       </p:sp>
       <p:sp>
         <p:nvSpPr>
-          <p:cNvPr id="5" name="Shape 3"/>
-          <p:cNvSpPr/>
-          <p:nvPr/>
-        </p:nvSpPr>
-        <p:spPr>
-          <a:xfrm>
-            <a:off x="10774375" y="2084832"/>
-            <a:ext cx="502920" cy="502920"/>
-          </a:xfrm>
-          <a:prstGeom prst="ellipse">
-            <a:avLst/>
-          </a:prstGeom>
-          <a:solidFill>
-            <a:srgbClr val="C97A4A"/>
-          </a:solidFill>
-          <a:ln w="12700">
-            <a:solidFill>
-              <a:srgbClr val="333333"/>
-            </a:solidFill>
-            <a:prstDash val="solid"/>
-          </a:ln>
-        </p:spPr>
-      </p:sp>
-      <p:sp>
-        <p:nvSpPr>
-          <p:cNvPr id="6" name="Text 4"/>
-          <p:cNvSpPr/>
-          <p:nvPr/>
-        </p:nvSpPr>
-        <p:spPr>
-          <a:xfrm>
-            <a:off x="10774375" y="2084832"/>
-            <a:ext cx="502920" cy="502920"/>
-          </a:xfrm>
-          <a:prstGeom prst="rect">
-            <a:avLst/>
-          </a:prstGeom>
-          <a:noFill/>
-          <a:ln/>
-        </p:spPr>
-        <p:txBody>
-          <a:bodyPr wrap="square" lIns="0" tIns="0" rIns="0" bIns="0" rtlCol="0" anchor="ctr"/>
-          <a:lstStyle/>
-          <a:p>
-            <a:pPr algn="ctr" indent="0" marL="0">
+          <p:cNvPr id="6" name="Text 3"/>
+          <p:cNvSpPr/>
+          <p:nvPr/>
+        </p:nvSpPr>
+        <p:spPr>
+          <a:xfrm>
+            <a:off x="9603943" y="2176272"/>
+            <a:ext cx="1700784" cy="411480"/>
+          </a:xfrm>
+          <a:prstGeom prst="rect">
+            <a:avLst/>
+          </a:prstGeom>
+          <a:noFill/>
+          <a:ln/>
+        </p:spPr>
+        <p:txBody>
+          <a:bodyPr wrap="square" lIns="0" tIns="0" rIns="0" bIns="0" rtlCol="0" anchor="ctr"/>
+          <a:lstStyle/>
+          <a:p>
+            <a:pPr rtl="1" algn="r" indent="0" marL="0">
               <a:buNone/>
             </a:pPr>
             <a:r>
               <a:rPr lang="en-US" sz="1900" b="1" dirty="0">
                 <a:solidFill>
-                  <a:srgbClr val="0B0F17"/>
-                </a:solidFill>
-                <a:latin typeface="Calibri" pitchFamily="34" charset="0"/>
-                <a:ea typeface="Calibri" pitchFamily="34" charset="-122"/>
-                <a:cs typeface="Calibri" pitchFamily="34" charset="-120"/>
-              </a:rPr>
-              <a:t>1</a:t>
+                  <a:srgbClr val="DD8C58"/>
+                </a:solidFill>
+                <a:latin typeface="Arial" pitchFamily="34" charset="0"/>
+                <a:ea typeface="Arial" pitchFamily="34" charset="-122"/>
+                <a:cs typeface="Arial" pitchFamily="34" charset="-120"/>
+              </a:rPr>
+              <a:t>يمسح</a:t>
             </a:r>
             <a:endParaRPr lang="en-US" sz="1900" dirty="0"/>
           </a:p>
@@ -4680,53 +4320,14 @@
       </p:sp>
       <p:sp>
         <p:nvSpPr>
-          <p:cNvPr id="7" name="Text 5"/>
-          <p:cNvSpPr/>
-          <p:nvPr/>
-        </p:nvSpPr>
-        <p:spPr>
-          <a:xfrm>
-            <a:off x="9174175" y="2130552"/>
-            <a:ext cx="1508760" cy="411480"/>
-          </a:xfrm>
-          <a:prstGeom prst="rect">
-            <a:avLst/>
-          </a:prstGeom>
-          <a:noFill/>
-          <a:ln/>
-        </p:spPr>
-        <p:txBody>
-          <a:bodyPr wrap="square" lIns="0" tIns="0" rIns="0" bIns="0" rtlCol="0" anchor="ctr"/>
-          <a:lstStyle/>
-          <a:p>
-            <a:pPr rtl="1" algn="r" indent="0" marL="0">
-              <a:buNone/>
-            </a:pPr>
-            <a:r>
-              <a:rPr lang="en-US" sz="1900" b="1" dirty="0">
-                <a:solidFill>
-                  <a:srgbClr val="DD8C58"/>
-                </a:solidFill>
-                <a:latin typeface="Arial" pitchFamily="34" charset="0"/>
-                <a:ea typeface="Arial" pitchFamily="34" charset="-122"/>
-                <a:cs typeface="Arial" pitchFamily="34" charset="-120"/>
-              </a:rPr>
-              <a:t>يمسح</a:t>
-            </a:r>
-            <a:endParaRPr lang="en-US" sz="1900" dirty="0"/>
-          </a:p>
-        </p:txBody>
-      </p:sp>
-      <p:sp>
-        <p:nvSpPr>
-          <p:cNvPr id="8" name="Text 6"/>
-          <p:cNvSpPr/>
-          <p:nvPr/>
-        </p:nvSpPr>
-        <p:spPr>
-          <a:xfrm>
-            <a:off x="9174175" y="2697480"/>
-            <a:ext cx="2103120" cy="731520"/>
+          <p:cNvPr id="7" name="Text 4"/>
+          <p:cNvSpPr/>
+          <p:nvPr/>
+        </p:nvSpPr>
+        <p:spPr>
+          <a:xfrm>
+            <a:off x="9603943" y="2670048"/>
+            <a:ext cx="1700784" cy="548640"/>
           </a:xfrm>
           <a:prstGeom prst="rect">
             <a:avLst/>
@@ -4740,12 +4341,12 @@
           <a:p>
             <a:pPr rtl="1" algn="r" indent="0" marL="0">
               <a:lnSpc>
-                <a:spcPts val="2000"/>
+                <a:spcPts val="1900"/>
               </a:lnSpc>
               <a:buNone/>
             </a:pPr>
             <a:r>
-              <a:rPr lang="en-US" sz="1300" dirty="0">
+              <a:rPr lang="en-US" sz="1250" dirty="0">
                 <a:solidFill>
                   <a:srgbClr val="A2977F"/>
                 </a:solidFill>
@@ -4755,28 +4356,28 @@
               </a:rPr>
               <a:t>فيسمّي اللوحة</a:t>
             </a:r>
-            <a:endParaRPr lang="en-US" sz="1300" dirty="0"/>
-          </a:p>
-        </p:txBody>
-      </p:sp>
-      <p:sp>
-        <p:nvSpPr>
-          <p:cNvPr id="9" name="Shape 7"/>
-          <p:cNvSpPr/>
-          <p:nvPr/>
-        </p:nvSpPr>
-        <p:spPr>
-          <a:xfrm>
-            <a:off x="6129223" y="1828800"/>
-            <a:ext cx="2651760" cy="1828800"/>
+            <a:endParaRPr lang="en-US" sz="1250" dirty="0"/>
+          </a:p>
+        </p:txBody>
+      </p:sp>
+      <p:sp>
+        <p:nvSpPr>
+          <p:cNvPr id="8" name="Shape 5"/>
+          <p:cNvSpPr/>
+          <p:nvPr/>
+        </p:nvSpPr>
+        <p:spPr>
+          <a:xfrm>
+            <a:off x="7162495" y="1965960"/>
+            <a:ext cx="2103120" cy="1417320"/>
           </a:xfrm>
           <a:prstGeom prst="roundRect">
             <a:avLst>
-              <a:gd name="adj" fmla="val 6000"/>
+              <a:gd name="adj" fmla="val 6452"/>
             </a:avLst>
           </a:prstGeom>
           <a:solidFill>
-            <a:srgbClr val="1A2233"/>
+            <a:srgbClr val="151D2C"/>
           </a:solidFill>
           <a:ln w="12700">
             <a:solidFill>
@@ -4788,63 +4389,38 @@
       </p:sp>
       <p:sp>
         <p:nvSpPr>
-          <p:cNvPr id="10" name="Shape 8"/>
-          <p:cNvSpPr/>
-          <p:nvPr/>
-        </p:nvSpPr>
-        <p:spPr>
-          <a:xfrm>
-            <a:off x="8003743" y="2084832"/>
-            <a:ext cx="502920" cy="502920"/>
-          </a:xfrm>
-          <a:prstGeom prst="ellipse">
-            <a:avLst/>
-          </a:prstGeom>
-          <a:solidFill>
-            <a:srgbClr val="C97A4A"/>
-          </a:solidFill>
-          <a:ln w="12700">
-            <a:solidFill>
-              <a:srgbClr val="333333"/>
-            </a:solidFill>
-            <a:prstDash val="solid"/>
-          </a:ln>
-        </p:spPr>
-      </p:sp>
-      <p:sp>
-        <p:nvSpPr>
-          <p:cNvPr id="11" name="Text 9"/>
-          <p:cNvSpPr/>
-          <p:nvPr/>
-        </p:nvSpPr>
-        <p:spPr>
-          <a:xfrm>
-            <a:off x="8003743" y="2084832"/>
-            <a:ext cx="502920" cy="502920"/>
-          </a:xfrm>
-          <a:prstGeom prst="rect">
-            <a:avLst/>
-          </a:prstGeom>
-          <a:noFill/>
-          <a:ln/>
-        </p:spPr>
-        <p:txBody>
-          <a:bodyPr wrap="square" lIns="0" tIns="0" rIns="0" bIns="0" rtlCol="0" anchor="ctr"/>
-          <a:lstStyle/>
-          <a:p>
-            <a:pPr algn="ctr" indent="0" marL="0">
+          <p:cNvPr id="9" name="Text 6"/>
+          <p:cNvSpPr/>
+          <p:nvPr/>
+        </p:nvSpPr>
+        <p:spPr>
+          <a:xfrm>
+            <a:off x="7363663" y="2176272"/>
+            <a:ext cx="1700784" cy="411480"/>
+          </a:xfrm>
+          <a:prstGeom prst="rect">
+            <a:avLst/>
+          </a:prstGeom>
+          <a:noFill/>
+          <a:ln/>
+        </p:spPr>
+        <p:txBody>
+          <a:bodyPr wrap="square" lIns="0" tIns="0" rIns="0" bIns="0" rtlCol="0" anchor="ctr"/>
+          <a:lstStyle/>
+          <a:p>
+            <a:pPr rtl="1" algn="r" indent="0" marL="0">
               <a:buNone/>
             </a:pPr>
             <a:r>
               <a:rPr lang="en-US" sz="1900" b="1" dirty="0">
                 <a:solidFill>
-                  <a:srgbClr val="0B0F17"/>
-                </a:solidFill>
-                <a:latin typeface="Calibri" pitchFamily="34" charset="0"/>
-                <a:ea typeface="Calibri" pitchFamily="34" charset="-122"/>
-                <a:cs typeface="Calibri" pitchFamily="34" charset="-120"/>
-              </a:rPr>
-              <a:t>2</a:t>
+                  <a:srgbClr val="DD8C58"/>
+                </a:solidFill>
+                <a:latin typeface="Arial" pitchFamily="34" charset="0"/>
+                <a:ea typeface="Arial" pitchFamily="34" charset="-122"/>
+                <a:cs typeface="Arial" pitchFamily="34" charset="-120"/>
+              </a:rPr>
+              <a:t>تصحّح</a:t>
             </a:r>
             <a:endParaRPr lang="en-US" sz="1900" dirty="0"/>
           </a:p>
@@ -4852,53 +4428,14 @@
       </p:sp>
       <p:sp>
         <p:nvSpPr>
-          <p:cNvPr id="12" name="Text 10"/>
-          <p:cNvSpPr/>
-          <p:nvPr/>
-        </p:nvSpPr>
-        <p:spPr>
-          <a:xfrm>
-            <a:off x="6403543" y="2130552"/>
-            <a:ext cx="1508760" cy="411480"/>
-          </a:xfrm>
-          <a:prstGeom prst="rect">
-            <a:avLst/>
-          </a:prstGeom>
-          <a:noFill/>
-          <a:ln/>
-        </p:spPr>
-        <p:txBody>
-          <a:bodyPr wrap="square" lIns="0" tIns="0" rIns="0" bIns="0" rtlCol="0" anchor="ctr"/>
-          <a:lstStyle/>
-          <a:p>
-            <a:pPr rtl="1" algn="r" indent="0" marL="0">
-              <a:buNone/>
-            </a:pPr>
-            <a:r>
-              <a:rPr lang="en-US" sz="1900" b="1" dirty="0">
-                <a:solidFill>
-                  <a:srgbClr val="DD8C58"/>
-                </a:solidFill>
-                <a:latin typeface="Arial" pitchFamily="34" charset="0"/>
-                <a:ea typeface="Arial" pitchFamily="34" charset="-122"/>
-                <a:cs typeface="Arial" pitchFamily="34" charset="-120"/>
-              </a:rPr>
-              <a:t>تصحّح</a:t>
-            </a:r>
-            <a:endParaRPr lang="en-US" sz="1900" dirty="0"/>
-          </a:p>
-        </p:txBody>
-      </p:sp>
-      <p:sp>
-        <p:nvSpPr>
-          <p:cNvPr id="13" name="Text 11"/>
-          <p:cNvSpPr/>
-          <p:nvPr/>
-        </p:nvSpPr>
-        <p:spPr>
-          <a:xfrm>
-            <a:off x="6403543" y="2697480"/>
-            <a:ext cx="2103120" cy="731520"/>
+          <p:cNvPr id="10" name="Text 7"/>
+          <p:cNvSpPr/>
+          <p:nvPr/>
+        </p:nvSpPr>
+        <p:spPr>
+          <a:xfrm>
+            <a:off x="7363663" y="2670048"/>
+            <a:ext cx="1700784" cy="548640"/>
           </a:xfrm>
           <a:prstGeom prst="rect">
             <a:avLst/>
@@ -4912,12 +4449,12 @@
           <a:p>
             <a:pPr rtl="1" algn="r" indent="0" marL="0">
               <a:lnSpc>
-                <a:spcPts val="2000"/>
+                <a:spcPts val="1900"/>
               </a:lnSpc>
               <a:buNone/>
             </a:pPr>
             <a:r>
-              <a:rPr lang="en-US" sz="1300" dirty="0">
+              <a:rPr lang="en-US" sz="1250" dirty="0">
                 <a:solidFill>
                   <a:srgbClr val="A2977F"/>
                 </a:solidFill>
@@ -4927,28 +4464,28 @@
               </a:rPr>
               <a:t>تضغط «ليست هذه»</a:t>
             </a:r>
-            <a:endParaRPr lang="en-US" sz="1300" dirty="0"/>
-          </a:p>
-        </p:txBody>
-      </p:sp>
-      <p:sp>
-        <p:nvSpPr>
-          <p:cNvPr id="14" name="Shape 12"/>
-          <p:cNvSpPr/>
-          <p:nvPr/>
-        </p:nvSpPr>
-        <p:spPr>
-          <a:xfrm>
-            <a:off x="3358591" y="1828800"/>
-            <a:ext cx="2651760" cy="1828800"/>
+            <a:endParaRPr lang="en-US" sz="1250" dirty="0"/>
+          </a:p>
+        </p:txBody>
+      </p:sp>
+      <p:sp>
+        <p:nvSpPr>
+          <p:cNvPr id="11" name="Shape 8"/>
+          <p:cNvSpPr/>
+          <p:nvPr/>
+        </p:nvSpPr>
+        <p:spPr>
+          <a:xfrm>
+            <a:off x="4922215" y="1965960"/>
+            <a:ext cx="2103120" cy="1417320"/>
           </a:xfrm>
           <a:prstGeom prst="roundRect">
             <a:avLst>
-              <a:gd name="adj" fmla="val 6000"/>
+              <a:gd name="adj" fmla="val 6452"/>
             </a:avLst>
           </a:prstGeom>
           <a:solidFill>
-            <a:srgbClr val="1A2233"/>
+            <a:srgbClr val="151D2C"/>
           </a:solidFill>
           <a:ln w="12700">
             <a:solidFill>
@@ -4960,63 +4497,38 @@
       </p:sp>
       <p:sp>
         <p:nvSpPr>
-          <p:cNvPr id="15" name="Shape 13"/>
-          <p:cNvSpPr/>
-          <p:nvPr/>
-        </p:nvSpPr>
-        <p:spPr>
-          <a:xfrm>
-            <a:off x="5233111" y="2084832"/>
-            <a:ext cx="502920" cy="502920"/>
-          </a:xfrm>
-          <a:prstGeom prst="ellipse">
-            <a:avLst/>
-          </a:prstGeom>
-          <a:solidFill>
-            <a:srgbClr val="C97A4A"/>
-          </a:solidFill>
-          <a:ln w="12700">
-            <a:solidFill>
-              <a:srgbClr val="333333"/>
-            </a:solidFill>
-            <a:prstDash val="solid"/>
-          </a:ln>
-        </p:spPr>
-      </p:sp>
-      <p:sp>
-        <p:nvSpPr>
-          <p:cNvPr id="16" name="Text 14"/>
-          <p:cNvSpPr/>
-          <p:nvPr/>
-        </p:nvSpPr>
-        <p:spPr>
-          <a:xfrm>
-            <a:off x="5233111" y="2084832"/>
-            <a:ext cx="502920" cy="502920"/>
-          </a:xfrm>
-          <a:prstGeom prst="rect">
-            <a:avLst/>
-          </a:prstGeom>
-          <a:noFill/>
-          <a:ln/>
-        </p:spPr>
-        <p:txBody>
-          <a:bodyPr wrap="square" lIns="0" tIns="0" rIns="0" bIns="0" rtlCol="0" anchor="ctr"/>
-          <a:lstStyle/>
-          <a:p>
-            <a:pPr algn="ctr" indent="0" marL="0">
+          <p:cNvPr id="12" name="Text 9"/>
+          <p:cNvSpPr/>
+          <p:nvPr/>
+        </p:nvSpPr>
+        <p:spPr>
+          <a:xfrm>
+            <a:off x="5123383" y="2176272"/>
+            <a:ext cx="1700784" cy="411480"/>
+          </a:xfrm>
+          <a:prstGeom prst="rect">
+            <a:avLst/>
+          </a:prstGeom>
+          <a:noFill/>
+          <a:ln/>
+        </p:spPr>
+        <p:txBody>
+          <a:bodyPr wrap="square" lIns="0" tIns="0" rIns="0" bIns="0" rtlCol="0" anchor="ctr"/>
+          <a:lstStyle/>
+          <a:p>
+            <a:pPr rtl="1" algn="r" indent="0" marL="0">
               <a:buNone/>
             </a:pPr>
             <a:r>
               <a:rPr lang="en-US" sz="1900" b="1" dirty="0">
                 <a:solidFill>
-                  <a:srgbClr val="0B0F17"/>
-                </a:solidFill>
-                <a:latin typeface="Calibri" pitchFamily="34" charset="0"/>
-                <a:ea typeface="Calibri" pitchFamily="34" charset="-122"/>
-                <a:cs typeface="Calibri" pitchFamily="34" charset="-120"/>
-              </a:rPr>
-              <a:t>3</a:t>
+                  <a:srgbClr val="DD8C58"/>
+                </a:solidFill>
+                <a:latin typeface="Arial" pitchFamily="34" charset="0"/>
+                <a:ea typeface="Arial" pitchFamily="34" charset="-122"/>
+                <a:cs typeface="Arial" pitchFamily="34" charset="-120"/>
+              </a:rPr>
+              <a:t>يتعلّم</a:t>
             </a:r>
             <a:endParaRPr lang="en-US" sz="1900" dirty="0"/>
           </a:p>
@@ -5024,53 +4536,14 @@
       </p:sp>
       <p:sp>
         <p:nvSpPr>
-          <p:cNvPr id="17" name="Text 15"/>
-          <p:cNvSpPr/>
-          <p:nvPr/>
-        </p:nvSpPr>
-        <p:spPr>
-          <a:xfrm>
-            <a:off x="3632911" y="2130552"/>
-            <a:ext cx="1508760" cy="411480"/>
-          </a:xfrm>
-          <a:prstGeom prst="rect">
-            <a:avLst/>
-          </a:prstGeom>
-          <a:noFill/>
-          <a:ln/>
-        </p:spPr>
-        <p:txBody>
-          <a:bodyPr wrap="square" lIns="0" tIns="0" rIns="0" bIns="0" rtlCol="0" anchor="ctr"/>
-          <a:lstStyle/>
-          <a:p>
-            <a:pPr rtl="1" algn="r" indent="0" marL="0">
-              <a:buNone/>
-            </a:pPr>
-            <a:r>
-              <a:rPr lang="en-US" sz="1900" b="1" dirty="0">
-                <a:solidFill>
-                  <a:srgbClr val="DD8C58"/>
-                </a:solidFill>
-                <a:latin typeface="Arial" pitchFamily="34" charset="0"/>
-                <a:ea typeface="Arial" pitchFamily="34" charset="-122"/>
-                <a:cs typeface="Arial" pitchFamily="34" charset="-120"/>
-              </a:rPr>
-              <a:t>يتعلّم</a:t>
-            </a:r>
-            <a:endParaRPr lang="en-US" sz="1900" dirty="0"/>
-          </a:p>
-        </p:txBody>
-      </p:sp>
-      <p:sp>
-        <p:nvSpPr>
-          <p:cNvPr id="18" name="Text 16"/>
-          <p:cNvSpPr/>
-          <p:nvPr/>
-        </p:nvSpPr>
-        <p:spPr>
-          <a:xfrm>
-            <a:off x="3632911" y="2697480"/>
-            <a:ext cx="2103120" cy="731520"/>
+          <p:cNvPr id="13" name="Text 10"/>
+          <p:cNvSpPr/>
+          <p:nvPr/>
+        </p:nvSpPr>
+        <p:spPr>
+          <a:xfrm>
+            <a:off x="5123383" y="2670048"/>
+            <a:ext cx="1700784" cy="548640"/>
           </a:xfrm>
           <a:prstGeom prst="rect">
             <a:avLst/>
@@ -5084,12 +4557,12 @@
           <a:p>
             <a:pPr rtl="1" algn="r" indent="0" marL="0">
               <a:lnSpc>
-                <a:spcPts val="2000"/>
+                <a:spcPts val="1900"/>
               </a:lnSpc>
               <a:buNone/>
             </a:pPr>
             <a:r>
-              <a:rPr lang="en-US" sz="1300" dirty="0">
+              <a:rPr lang="en-US" sz="1250" dirty="0">
                 <a:solidFill>
                   <a:srgbClr val="A2977F"/>
                 </a:solidFill>
@@ -5099,28 +4572,28 @@
               </a:rPr>
               <a:t>يُحفظ في جوّالك</a:t>
             </a:r>
-            <a:endParaRPr lang="en-US" sz="1300" dirty="0"/>
-          </a:p>
-        </p:txBody>
-      </p:sp>
-      <p:sp>
-        <p:nvSpPr>
-          <p:cNvPr id="19" name="Shape 17"/>
-          <p:cNvSpPr/>
-          <p:nvPr/>
-        </p:nvSpPr>
-        <p:spPr>
-          <a:xfrm>
-            <a:off x="587959" y="1828800"/>
-            <a:ext cx="2651760" cy="1828800"/>
+            <a:endParaRPr lang="en-US" sz="1250" dirty="0"/>
+          </a:p>
+        </p:txBody>
+      </p:sp>
+      <p:sp>
+        <p:nvSpPr>
+          <p:cNvPr id="14" name="Shape 11"/>
+          <p:cNvSpPr/>
+          <p:nvPr/>
+        </p:nvSpPr>
+        <p:spPr>
+          <a:xfrm>
+            <a:off x="2681935" y="1965960"/>
+            <a:ext cx="2103120" cy="1417320"/>
           </a:xfrm>
           <a:prstGeom prst="roundRect">
             <a:avLst>
-              <a:gd name="adj" fmla="val 6000"/>
+              <a:gd name="adj" fmla="val 6452"/>
             </a:avLst>
           </a:prstGeom>
           <a:solidFill>
-            <a:srgbClr val="1A2233"/>
+            <a:srgbClr val="151D2C"/>
           </a:solidFill>
           <a:ln w="12700">
             <a:solidFill>
@@ -5132,63 +4605,38 @@
       </p:sp>
       <p:sp>
         <p:nvSpPr>
-          <p:cNvPr id="20" name="Shape 18"/>
-          <p:cNvSpPr/>
-          <p:nvPr/>
-        </p:nvSpPr>
-        <p:spPr>
-          <a:xfrm>
-            <a:off x="2462479" y="2084832"/>
-            <a:ext cx="502920" cy="502920"/>
-          </a:xfrm>
-          <a:prstGeom prst="ellipse">
-            <a:avLst/>
-          </a:prstGeom>
-          <a:solidFill>
-            <a:srgbClr val="C97A4A"/>
-          </a:solidFill>
-          <a:ln w="12700">
-            <a:solidFill>
-              <a:srgbClr val="333333"/>
-            </a:solidFill>
-            <a:prstDash val="solid"/>
-          </a:ln>
-        </p:spPr>
-      </p:sp>
-      <p:sp>
-        <p:nvSpPr>
-          <p:cNvPr id="21" name="Text 19"/>
-          <p:cNvSpPr/>
-          <p:nvPr/>
-        </p:nvSpPr>
-        <p:spPr>
-          <a:xfrm>
-            <a:off x="2462479" y="2084832"/>
-            <a:ext cx="502920" cy="502920"/>
-          </a:xfrm>
-          <a:prstGeom prst="rect">
-            <a:avLst/>
-          </a:prstGeom>
-          <a:noFill/>
-          <a:ln/>
-        </p:spPr>
-        <p:txBody>
-          <a:bodyPr wrap="square" lIns="0" tIns="0" rIns="0" bIns="0" rtlCol="0" anchor="ctr"/>
-          <a:lstStyle/>
-          <a:p>
-            <a:pPr algn="ctr" indent="0" marL="0">
+          <p:cNvPr id="15" name="Text 12"/>
+          <p:cNvSpPr/>
+          <p:nvPr/>
+        </p:nvSpPr>
+        <p:spPr>
+          <a:xfrm>
+            <a:off x="2883103" y="2176272"/>
+            <a:ext cx="1700784" cy="411480"/>
+          </a:xfrm>
+          <a:prstGeom prst="rect">
+            <a:avLst/>
+          </a:prstGeom>
+          <a:noFill/>
+          <a:ln/>
+        </p:spPr>
+        <p:txBody>
+          <a:bodyPr wrap="square" lIns="0" tIns="0" rIns="0" bIns="0" rtlCol="0" anchor="ctr"/>
+          <a:lstStyle/>
+          <a:p>
+            <a:pPr rtl="1" algn="r" indent="0" marL="0">
               <a:buNone/>
             </a:pPr>
             <a:r>
               <a:rPr lang="en-US" sz="1900" b="1" dirty="0">
                 <a:solidFill>
-                  <a:srgbClr val="0B0F17"/>
-                </a:solidFill>
-                <a:latin typeface="Calibri" pitchFamily="34" charset="0"/>
-                <a:ea typeface="Calibri" pitchFamily="34" charset="-122"/>
-                <a:cs typeface="Calibri" pitchFamily="34" charset="-120"/>
-              </a:rPr>
-              <a:t>4</a:t>
+                  <a:srgbClr val="DD8C58"/>
+                </a:solidFill>
+                <a:latin typeface="Arial" pitchFamily="34" charset="0"/>
+                <a:ea typeface="Arial" pitchFamily="34" charset="-122"/>
+                <a:cs typeface="Arial" pitchFamily="34" charset="-120"/>
+              </a:rPr>
+              <a:t>يصيب</a:t>
             </a:r>
             <a:endParaRPr lang="en-US" sz="1900" dirty="0"/>
           </a:p>
@@ -5196,53 +4644,14 @@
       </p:sp>
       <p:sp>
         <p:nvSpPr>
-          <p:cNvPr id="22" name="Text 20"/>
-          <p:cNvSpPr/>
-          <p:nvPr/>
-        </p:nvSpPr>
-        <p:spPr>
-          <a:xfrm>
-            <a:off x="862279" y="2130552"/>
-            <a:ext cx="1508760" cy="411480"/>
-          </a:xfrm>
-          <a:prstGeom prst="rect">
-            <a:avLst/>
-          </a:prstGeom>
-          <a:noFill/>
-          <a:ln/>
-        </p:spPr>
-        <p:txBody>
-          <a:bodyPr wrap="square" lIns="0" tIns="0" rIns="0" bIns="0" rtlCol="0" anchor="ctr"/>
-          <a:lstStyle/>
-          <a:p>
-            <a:pPr rtl="1" algn="r" indent="0" marL="0">
-              <a:buNone/>
-            </a:pPr>
-            <a:r>
-              <a:rPr lang="en-US" sz="1900" b="1" dirty="0">
-                <a:solidFill>
-                  <a:srgbClr val="DD8C58"/>
-                </a:solidFill>
-                <a:latin typeface="Arial" pitchFamily="34" charset="0"/>
-                <a:ea typeface="Arial" pitchFamily="34" charset="-122"/>
-                <a:cs typeface="Arial" pitchFamily="34" charset="-120"/>
-              </a:rPr>
-              <a:t>يصيب</a:t>
-            </a:r>
-            <a:endParaRPr lang="en-US" sz="1900" dirty="0"/>
-          </a:p>
-        </p:txBody>
-      </p:sp>
-      <p:sp>
-        <p:nvSpPr>
-          <p:cNvPr id="23" name="Text 21"/>
-          <p:cNvSpPr/>
-          <p:nvPr/>
-        </p:nvSpPr>
-        <p:spPr>
-          <a:xfrm>
-            <a:off x="862279" y="2697480"/>
-            <a:ext cx="2103120" cy="731520"/>
+          <p:cNvPr id="16" name="Text 13"/>
+          <p:cNvSpPr/>
+          <p:nvPr/>
+        </p:nvSpPr>
+        <p:spPr>
+          <a:xfrm>
+            <a:off x="2883103" y="2670048"/>
+            <a:ext cx="1700784" cy="548640"/>
           </a:xfrm>
           <a:prstGeom prst="rect">
             <a:avLst/>
@@ -5256,12 +4665,12 @@
           <a:p>
             <a:pPr rtl="1" algn="r" indent="0" marL="0">
               <a:lnSpc>
-                <a:spcPts val="2000"/>
+                <a:spcPts val="1900"/>
               </a:lnSpc>
               <a:buNone/>
             </a:pPr>
             <a:r>
-              <a:rPr lang="en-US" sz="1300" dirty="0">
+              <a:rPr lang="en-US" sz="1250" dirty="0">
                 <a:solidFill>
                   <a:srgbClr val="A2977F"/>
                 </a:solidFill>
@@ -5271,28 +4680,28 @@
               </a:rPr>
               <a:t>في المسح التالي</a:t>
             </a:r>
-            <a:endParaRPr lang="en-US" sz="1300" dirty="0"/>
-          </a:p>
-        </p:txBody>
-      </p:sp>
-      <p:sp>
-        <p:nvSpPr>
-          <p:cNvPr id="24" name="Shape 22"/>
-          <p:cNvSpPr/>
-          <p:nvPr/>
-        </p:nvSpPr>
-        <p:spPr>
-          <a:xfrm>
-            <a:off x="6355080" y="3977640"/>
-            <a:ext cx="5166360" cy="1920240"/>
+            <a:endParaRPr lang="en-US" sz="1250" dirty="0"/>
+          </a:p>
+        </p:txBody>
+      </p:sp>
+      <p:sp>
+        <p:nvSpPr>
+          <p:cNvPr id="17" name="Shape 14"/>
+          <p:cNvSpPr/>
+          <p:nvPr/>
+        </p:nvSpPr>
+        <p:spPr>
+          <a:xfrm>
+            <a:off x="6355080" y="3657600"/>
+            <a:ext cx="5166360" cy="2148840"/>
           </a:xfrm>
           <a:prstGeom prst="roundRect">
             <a:avLst>
-              <a:gd name="adj" fmla="val 5714"/>
+              <a:gd name="adj" fmla="val 4255"/>
             </a:avLst>
           </a:prstGeom>
           <a:solidFill>
-            <a:srgbClr val="1A2233"/>
+            <a:srgbClr val="151D2C"/>
           </a:solidFill>
           <a:ln w="12700">
             <a:solidFill>
@@ -5304,30 +4713,30 @@
       </p:sp>
       <p:sp>
         <p:nvSpPr>
-          <p:cNvPr id="25" name="Text 23"/>
-          <p:cNvSpPr/>
-          <p:nvPr/>
-        </p:nvSpPr>
-        <p:spPr>
-          <a:xfrm>
-            <a:off x="6675120" y="4206240"/>
-            <a:ext cx="4526280" cy="384048"/>
-          </a:xfrm>
-          <a:prstGeom prst="rect">
-            <a:avLst/>
-          </a:prstGeom>
-          <a:noFill/>
-          <a:ln/>
-        </p:spPr>
-        <p:txBody>
-          <a:bodyPr wrap="square" lIns="0" tIns="0" rIns="0" bIns="0" rtlCol="0" anchor="ctr"/>
-          <a:lstStyle/>
-          <a:p>
-            <a:pPr rtl="1" algn="r" indent="0" marL="0">
-              <a:buNone/>
-            </a:pPr>
-            <a:r>
-              <a:rPr lang="en-US" sz="1800" b="1" dirty="0">
+          <p:cNvPr id="18" name="Text 15"/>
+          <p:cNvSpPr/>
+          <p:nvPr/>
+        </p:nvSpPr>
+        <p:spPr>
+          <a:xfrm>
+            <a:off x="6675120" y="3886200"/>
+            <a:ext cx="4526280" cy="411480"/>
+          </a:xfrm>
+          <a:prstGeom prst="rect">
+            <a:avLst/>
+          </a:prstGeom>
+          <a:noFill/>
+          <a:ln/>
+        </p:spPr>
+        <p:txBody>
+          <a:bodyPr wrap="square" lIns="0" tIns="0" rIns="0" bIns="0" rtlCol="0" anchor="ctr"/>
+          <a:lstStyle/>
+          <a:p>
+            <a:pPr rtl="1" algn="r" indent="0" marL="0">
+              <a:buNone/>
+            </a:pPr>
+            <a:r>
+              <a:rPr lang="en-US" sz="1900" b="1" dirty="0">
                 <a:solidFill>
                   <a:srgbClr val="E8DCC8"/>
                 </a:solidFill>
@@ -5337,20 +4746,20 @@
               </a:rPr>
               <a:t>لماذا يهمّ هذا</a:t>
             </a:r>
-            <a:endParaRPr lang="en-US" sz="1800" dirty="0"/>
-          </a:p>
-        </p:txBody>
-      </p:sp>
-      <p:sp>
-        <p:nvSpPr>
-          <p:cNvPr id="26" name="Text 24"/>
-          <p:cNvSpPr/>
-          <p:nvPr/>
-        </p:nvSpPr>
-        <p:spPr>
-          <a:xfrm>
-            <a:off x="6675120" y="4681728"/>
-            <a:ext cx="4526280" cy="1097280"/>
+            <a:endParaRPr lang="en-US" sz="1900" dirty="0"/>
+          </a:p>
+        </p:txBody>
+      </p:sp>
+      <p:sp>
+        <p:nvSpPr>
+          <p:cNvPr id="19" name="Text 16"/>
+          <p:cNvSpPr/>
+          <p:nvPr/>
+        </p:nvSpPr>
+        <p:spPr>
+          <a:xfrm>
+            <a:off x="6675120" y="4389120"/>
+            <a:ext cx="4526280" cy="1280160"/>
           </a:xfrm>
           <a:prstGeom prst="rect">
             <a:avLst/>
@@ -5364,12 +4773,12 @@
           <a:p>
             <a:pPr rtl="1" algn="r" indent="0" marL="0">
               <a:lnSpc>
-                <a:spcPts val="2100"/>
+                <a:spcPts val="2300"/>
               </a:lnSpc>
               <a:buNone/>
             </a:pPr>
             <a:r>
-              <a:rPr lang="en-US" sz="1350" dirty="0">
+              <a:rPr lang="en-US" sz="1400" dirty="0">
                 <a:solidFill>
                   <a:srgbClr val="A2977F"/>
                 </a:solidFill>
@@ -5377,26 +4786,26 @@
                 <a:ea typeface="Arial" pitchFamily="34" charset="-122"/>
                 <a:cs typeface="Arial" pitchFamily="34" charset="-120"/>
               </a:rPr>
-              <a:t>كلّ الصور المرجعية من زيارةٍ ميدانية واحدة: يومٌ واحد وجوّالٌ واحد وإضاءةٌ واحدة. وتصحيحُ الزائر صورةٌ من يومٍ آخر وجهازٍ آخر — وهو ما ينقص الفهرس.</a:t>
-            </a:r>
-            <a:endParaRPr lang="en-US" sz="1350" dirty="0"/>
-          </a:p>
-        </p:txBody>
-      </p:sp>
-      <p:sp>
-        <p:nvSpPr>
-          <p:cNvPr id="27" name="Shape 25"/>
-          <p:cNvSpPr/>
-          <p:nvPr/>
-        </p:nvSpPr>
-        <p:spPr>
-          <a:xfrm>
-            <a:off x="640080" y="3977640"/>
-            <a:ext cx="5166360" cy="1920240"/>
+              <a:t>كلّ الصور المرجعية من زيارةٍ ميدانية واحدة: يومٌ وجوّالٌ وإضاءةٌ واحدة. وتصحيحُ الزائر صورةٌ من يومٍ آخر وجهازٍ آخر — وهو ما ينقص الفهرس.</a:t>
+            </a:r>
+            <a:endParaRPr lang="en-US" sz="1400" dirty="0"/>
+          </a:p>
+        </p:txBody>
+      </p:sp>
+      <p:sp>
+        <p:nvSpPr>
+          <p:cNvPr id="20" name="Shape 17"/>
+          <p:cNvSpPr/>
+          <p:nvPr/>
+        </p:nvSpPr>
+        <p:spPr>
+          <a:xfrm>
+            <a:off x="685800" y="3657600"/>
+            <a:ext cx="5166360" cy="2148840"/>
           </a:xfrm>
           <a:prstGeom prst="roundRect">
             <a:avLst>
-              <a:gd name="adj" fmla="val 5714"/>
+              <a:gd name="adj" fmla="val 4255"/>
             </a:avLst>
           </a:prstGeom>
           <a:solidFill>
@@ -5412,30 +4821,30 @@
       </p:sp>
       <p:sp>
         <p:nvSpPr>
-          <p:cNvPr id="28" name="Text 26"/>
-          <p:cNvSpPr/>
-          <p:nvPr/>
-        </p:nvSpPr>
-        <p:spPr>
-          <a:xfrm>
-            <a:off x="960120" y="4206240"/>
-            <a:ext cx="4526280" cy="384048"/>
-          </a:xfrm>
-          <a:prstGeom prst="rect">
-            <a:avLst/>
-          </a:prstGeom>
-          <a:noFill/>
-          <a:ln/>
-        </p:spPr>
-        <p:txBody>
-          <a:bodyPr wrap="square" lIns="0" tIns="0" rIns="0" bIns="0" rtlCol="0" anchor="ctr"/>
-          <a:lstStyle/>
-          <a:p>
-            <a:pPr rtl="1" algn="r" indent="0" marL="0">
-              <a:buNone/>
-            </a:pPr>
-            <a:r>
-              <a:rPr lang="en-US" sz="1800" b="1" dirty="0">
+          <p:cNvPr id="21" name="Text 18"/>
+          <p:cNvSpPr/>
+          <p:nvPr/>
+        </p:nvSpPr>
+        <p:spPr>
+          <a:xfrm>
+            <a:off x="1005840" y="3886200"/>
+            <a:ext cx="4526280" cy="411480"/>
+          </a:xfrm>
+          <a:prstGeom prst="rect">
+            <a:avLst/>
+          </a:prstGeom>
+          <a:noFill/>
+          <a:ln/>
+        </p:spPr>
+        <p:txBody>
+          <a:bodyPr wrap="square" lIns="0" tIns="0" rIns="0" bIns="0" rtlCol="0" anchor="ctr"/>
+          <a:lstStyle/>
+          <a:p>
+            <a:pPr rtl="1" algn="r" indent="0" marL="0">
+              <a:buNone/>
+            </a:pPr>
+            <a:r>
+              <a:rPr lang="en-US" sz="1900" b="1" dirty="0">
                 <a:solidFill>
                   <a:srgbClr val="EFAE6E"/>
                 </a:solidFill>
@@ -5445,20 +4854,20 @@
               </a:rPr>
               <a:t>ويتعلّم السلبيّ أيضًا</a:t>
             </a:r>
-            <a:endParaRPr lang="en-US" sz="1800" dirty="0"/>
-          </a:p>
-        </p:txBody>
-      </p:sp>
-      <p:sp>
-        <p:nvSpPr>
-          <p:cNvPr id="29" name="Text 27"/>
-          <p:cNvSpPr/>
-          <p:nvPr/>
-        </p:nvSpPr>
-        <p:spPr>
-          <a:xfrm>
-            <a:off x="960120" y="4681728"/>
-            <a:ext cx="4526280" cy="1097280"/>
+            <a:endParaRPr lang="en-US" sz="1900" dirty="0"/>
+          </a:p>
+        </p:txBody>
+      </p:sp>
+      <p:sp>
+        <p:nvSpPr>
+          <p:cNvPr id="22" name="Text 19"/>
+          <p:cNvSpPr/>
+          <p:nvPr/>
+        </p:nvSpPr>
+        <p:spPr>
+          <a:xfrm>
+            <a:off x="1005840" y="4389120"/>
+            <a:ext cx="4526280" cy="1280160"/>
           </a:xfrm>
           <a:prstGeom prst="rect">
             <a:avLst/>
@@ -5472,12 +4881,12 @@
           <a:p>
             <a:pPr rtl="1" algn="r" indent="0" marL="0">
               <a:lnSpc>
-                <a:spcPts val="2100"/>
+                <a:spcPts val="2300"/>
               </a:lnSpc>
               <a:buNone/>
             </a:pPr>
             <a:r>
-              <a:rPr lang="en-US" sz="1350" dirty="0">
+              <a:rPr lang="en-US" sz="1400" dirty="0">
                 <a:solidFill>
                   <a:srgbClr val="A2977F"/>
                 </a:solidFill>
@@ -5487,7 +4896,7 @@
               </a:rPr>
               <a:t>صوّب على حاسوبك واضغط «ليست نقشًا أصلًا». فيصير الرفضُ جوابًا تعلّمه النظام من إنسان، لا عجزًا عن بلوغ عتبة.</a:t>
             </a:r>
-            <a:endParaRPr lang="en-US" sz="1350" dirty="0"/>
+            <a:endParaRPr lang="en-US" sz="1400" dirty="0"/>
           </a:p>
         </p:txBody>
       </p:sp>
@@ -5496,6 +4905,18 @@
   <p:clrMapOvr>
     <a:masterClrMapping/>
   </p:clrMapOvr>
+  <mc:AlternateContent xmlns:mc="http://schemas.openxmlformats.org/markup-compatibility/2006">
+    <mc:Choice xmlns:p159="http://schemas.microsoft.com/office/powerpoint/2015/09/main" Requires="p159">
+      <p:transition xmlns:p14="http://schemas.microsoft.com/office/powerpoint/2010/main" spd="slow" p14:dur="900">
+        <p159:morph option="byObject"/>
+      </p:transition>
+    </mc:Choice>
+    <mc:Fallback>
+      <p:transition xmlns:p14="http://schemas.microsoft.com/office/powerpoint/2010/main" spd="slow" p14:dur="900">
+        <p:fade/>
+      </p:transition>
+    </mc:Fallback>
+  </mc:AlternateContent>
 </p:sld>
 </file>
 
@@ -5525,30 +4946,30 @@
       </p:grpSpPr>
       <p:sp>
         <p:nvSpPr>
-          <p:cNvPr id="2" name="Text 0"/>
-          <p:cNvSpPr/>
-          <p:nvPr/>
-        </p:nvSpPr>
-        <p:spPr>
-          <a:xfrm>
-            <a:off x="640080" y="457200"/>
-            <a:ext cx="10911535" cy="777240"/>
-          </a:xfrm>
-          <a:prstGeom prst="rect">
-            <a:avLst/>
-          </a:prstGeom>
-          <a:noFill/>
-          <a:ln/>
-        </p:spPr>
-        <p:txBody>
-          <a:bodyPr wrap="square" lIns="0" tIns="0" rIns="0" bIns="0" rtlCol="0" anchor="ctr"/>
-          <a:lstStyle/>
-          <a:p>
-            <a:pPr rtl="1" algn="r" indent="0" marL="0">
-              <a:buNone/>
-            </a:pPr>
-            <a:r>
-              <a:rPr lang="en-US" sz="3600" b="1" dirty="0">
+          <p:cNvPr id="2" name="!!title"/>
+          <p:cNvSpPr/>
+          <p:nvPr/>
+        </p:nvSpPr>
+        <p:spPr>
+          <a:xfrm>
+            <a:off x="685800" y="502920"/>
+            <a:ext cx="10820095" cy="868680"/>
+          </a:xfrm>
+          <a:prstGeom prst="rect">
+            <a:avLst/>
+          </a:prstGeom>
+          <a:noFill/>
+          <a:ln/>
+        </p:spPr>
+        <p:txBody>
+          <a:bodyPr wrap="square" lIns="0" tIns="0" rIns="0" bIns="0" rtlCol="0" anchor="ctr"/>
+          <a:lstStyle/>
+          <a:p>
+            <a:pPr rtl="1" algn="r" indent="0" marL="0">
+              <a:buNone/>
+            </a:pPr>
+            <a:r>
+              <a:rPr lang="en-US" sz="4000" b="1" dirty="0">
                 <a:solidFill>
                   <a:srgbClr val="E8DCC8"/>
                 </a:solidFill>
@@ -5558,7 +4979,7 @@
               </a:rPr>
               <a:t>قياسنا الأوّل كذب علينا</a:t>
             </a:r>
-            <a:endParaRPr lang="en-US" sz="3600" dirty="0"/>
+            <a:endParaRPr lang="en-US" sz="4000" dirty="0"/>
           </a:p>
         </p:txBody>
       </p:sp>
@@ -5570,24 +4991,24 @@
         </p:nvSpPr>
         <p:spPr>
           <a:xfrm>
-            <a:off x="640080" y="1188720"/>
-            <a:ext cx="10911535" cy="457200"/>
-          </a:xfrm>
-          <a:prstGeom prst="rect">
-            <a:avLst/>
-          </a:prstGeom>
-          <a:noFill/>
-          <a:ln/>
-        </p:spPr>
-        <p:txBody>
-          <a:bodyPr wrap="square" lIns="0" tIns="0" rIns="0" bIns="0" rtlCol="0" anchor="ctr"/>
-          <a:lstStyle/>
-          <a:p>
-            <a:pPr rtl="1" algn="r" indent="0" marL="0">
-              <a:buNone/>
-            </a:pPr>
-            <a:r>
-              <a:rPr lang="en-US" sz="1650" dirty="0">
+            <a:off x="685800" y="1371600"/>
+            <a:ext cx="10820095" cy="457200"/>
+          </a:xfrm>
+          <a:prstGeom prst="rect">
+            <a:avLst/>
+          </a:prstGeom>
+          <a:noFill/>
+          <a:ln/>
+        </p:spPr>
+        <p:txBody>
+          <a:bodyPr wrap="square" lIns="0" tIns="0" rIns="0" bIns="0" rtlCol="0" anchor="ctr"/>
+          <a:lstStyle/>
+          <a:p>
+            <a:pPr rtl="1" algn="r" indent="0" marL="0">
+              <a:buNone/>
+            </a:pPr>
+            <a:r>
+              <a:rPr lang="en-US" sz="1700" dirty="0">
                 <a:solidFill>
                   <a:srgbClr val="A2977F"/>
                 </a:solidFill>
@@ -5597,7 +5018,7 @@
               </a:rPr>
               <a:t>قال ٩٦٫٥٪، والصادق ٧٩٫٣٪ — وكشفُ السبب أثمنُ ما أنجزناه.</a:t>
             </a:r>
-            <a:endParaRPr lang="en-US" sz="1650" dirty="0"/>
+            <a:endParaRPr lang="en-US" sz="1700" dirty="0"/>
           </a:p>
         </p:txBody>
       </p:sp>
@@ -5609,16 +5030,16 @@
         </p:nvSpPr>
         <p:spPr>
           <a:xfrm>
-            <a:off x="5349240" y="1874520"/>
-            <a:ext cx="6172200" cy="3246120"/>
+            <a:off x="5349240" y="2148840"/>
+            <a:ext cx="6172200" cy="3017520"/>
           </a:xfrm>
           <a:prstGeom prst="roundRect">
             <a:avLst>
-              <a:gd name="adj" fmla="val 3380"/>
+              <a:gd name="adj" fmla="val 3030"/>
             </a:avLst>
           </a:prstGeom>
           <a:solidFill>
-            <a:srgbClr val="1A2233"/>
+            <a:srgbClr val="151D2C"/>
           </a:solidFill>
           <a:ln w="12700">
             <a:solidFill>
@@ -5636,24 +5057,24 @@
         </p:nvSpPr>
         <p:spPr>
           <a:xfrm>
-            <a:off x="5669280" y="2103120"/>
-            <a:ext cx="5532120" cy="365760"/>
-          </a:xfrm>
-          <a:prstGeom prst="rect">
-            <a:avLst/>
-          </a:prstGeom>
-          <a:noFill/>
-          <a:ln/>
-        </p:spPr>
-        <p:txBody>
-          <a:bodyPr wrap="square" lIns="0" tIns="0" rIns="0" bIns="0" rtlCol="0" anchor="ctr"/>
-          <a:lstStyle/>
-          <a:p>
-            <a:pPr rtl="1" algn="r" indent="0" marL="0">
-              <a:buNone/>
-            </a:pPr>
-            <a:r>
-              <a:rPr lang="en-US" sz="1800" b="1" dirty="0">
+            <a:off x="5715000" y="2377440"/>
+            <a:ext cx="5440680" cy="411480"/>
+          </a:xfrm>
+          <a:prstGeom prst="rect">
+            <a:avLst/>
+          </a:prstGeom>
+          <a:noFill/>
+          <a:ln/>
+        </p:spPr>
+        <p:txBody>
+          <a:bodyPr wrap="square" lIns="0" tIns="0" rIns="0" bIns="0" rtlCol="0" anchor="ctr"/>
+          <a:lstStyle/>
+          <a:p>
+            <a:pPr rtl="1" algn="r" indent="0" marL="0">
+              <a:buNone/>
+            </a:pPr>
+            <a:r>
+              <a:rPr lang="en-US" sz="1900" b="1" dirty="0">
                 <a:solidFill>
                   <a:srgbClr val="E8DCC8"/>
                 </a:solidFill>
@@ -5663,7 +5084,7 @@
               </a:rPr>
               <a:t>ما قِيس</a:t>
             </a:r>
-            <a:endParaRPr lang="en-US" sz="1800" dirty="0"/>
+            <a:endParaRPr lang="en-US" sz="1900" dirty="0"/>
           </a:p>
         </p:txBody>
       </p:sp>
@@ -5675,24 +5096,24 @@
         </p:nvSpPr>
         <p:spPr>
           <a:xfrm>
-            <a:off x="7863840" y="2743200"/>
-            <a:ext cx="3337560" cy="320040"/>
-          </a:xfrm>
-          <a:prstGeom prst="rect">
-            <a:avLst/>
-          </a:prstGeom>
-          <a:noFill/>
-          <a:ln/>
-        </p:spPr>
-        <p:txBody>
-          <a:bodyPr wrap="square" lIns="0" tIns="0" rIns="0" bIns="0" rtlCol="0" anchor="ctr"/>
-          <a:lstStyle/>
-          <a:p>
-            <a:pPr rtl="1" algn="r" indent="0" marL="0">
-              <a:buNone/>
-            </a:pPr>
-            <a:r>
-              <a:rPr lang="en-US" sz="1250" dirty="0">
+            <a:off x="7589520" y="2971800"/>
+            <a:ext cx="3566160" cy="347472"/>
+          </a:xfrm>
+          <a:prstGeom prst="rect">
+            <a:avLst/>
+          </a:prstGeom>
+          <a:noFill/>
+          <a:ln/>
+        </p:spPr>
+        <p:txBody>
+          <a:bodyPr wrap="square" lIns="0" tIns="0" rIns="0" bIns="0" rtlCol="0" anchor="ctr"/>
+          <a:lstStyle/>
+          <a:p>
+            <a:pPr rtl="1" algn="r" indent="0" marL="0">
+              <a:buNone/>
+            </a:pPr>
+            <a:r>
+              <a:rPr lang="en-US" sz="1300" dirty="0">
                 <a:solidFill>
                   <a:srgbClr val="A2977F"/>
                 </a:solidFill>
@@ -5702,7 +5123,7 @@
               </a:rPr>
               <a:t>بترك واحدة — قياسٌ متساهل</a:t>
             </a:r>
-            <a:endParaRPr lang="en-US" sz="1250" dirty="0"/>
+            <a:endParaRPr lang="en-US" sz="1300" dirty="0"/>
           </a:p>
         </p:txBody>
       </p:sp>
@@ -5714,12 +5135,12 @@
         </p:nvSpPr>
         <p:spPr>
           <a:xfrm>
-            <a:off x="5669280" y="3090672"/>
-            <a:ext cx="5029200" cy="274320"/>
+            <a:off x="5715000" y="3355848"/>
+            <a:ext cx="5074920" cy="310896"/>
           </a:xfrm>
           <a:prstGeom prst="roundRect">
             <a:avLst>
-              <a:gd name="adj" fmla="val 20000"/>
+              <a:gd name="adj" fmla="val 20588"/>
             </a:avLst>
           </a:prstGeom>
           <a:solidFill>
@@ -5741,16 +5162,16 @@
         </p:nvSpPr>
         <p:spPr>
           <a:xfrm>
-            <a:off x="5845302" y="3090672"/>
-            <a:ext cx="4853178" cy="274320"/>
+            <a:off x="5892622" y="3355848"/>
+            <a:ext cx="4897298" cy="310896"/>
           </a:xfrm>
           <a:prstGeom prst="roundRect">
             <a:avLst>
-              <a:gd name="adj" fmla="val 20000"/>
+              <a:gd name="adj" fmla="val 20588"/>
             </a:avLst>
           </a:prstGeom>
           <a:solidFill>
-            <a:srgbClr val="A2977F"/>
+            <a:srgbClr val="6E6757"/>
           </a:solidFill>
           <a:ln w="12700">
             <a:solidFill>
@@ -5768,8 +5189,8 @@
         </p:nvSpPr>
         <p:spPr>
           <a:xfrm>
-            <a:off x="5669280" y="2743200"/>
-            <a:ext cx="1463040" cy="320040"/>
+            <a:off x="5715000" y="2971800"/>
+            <a:ext cx="1554480" cy="347472"/>
           </a:xfrm>
           <a:prstGeom prst="rect">
             <a:avLst/>
@@ -5785,7 +5206,46 @@
               <a:buNone/>
             </a:pPr>
             <a:r>
-              <a:rPr lang="en-US" sz="1600" b="1" dirty="0">
+              <a:rPr lang="en-US" sz="1700" b="1" dirty="0">
+                <a:solidFill>
+                  <a:srgbClr val="6E6757"/>
+                </a:solidFill>
+                <a:latin typeface="Arial" pitchFamily="34" charset="0"/>
+                <a:ea typeface="Arial" pitchFamily="34" charset="-122"/>
+                <a:cs typeface="Arial" pitchFamily="34" charset="-120"/>
+              </a:rPr>
+              <a:t>٩٦٫٥٪</a:t>
+            </a:r>
+            <a:endParaRPr lang="en-US" sz="1700" dirty="0"/>
+          </a:p>
+        </p:txBody>
+      </p:sp>
+      <p:sp>
+        <p:nvSpPr>
+          <p:cNvPr id="10" name="Text 8"/>
+          <p:cNvSpPr/>
+          <p:nvPr/>
+        </p:nvSpPr>
+        <p:spPr>
+          <a:xfrm>
+            <a:off x="7589520" y="4023360"/>
+            <a:ext cx="3566160" cy="347472"/>
+          </a:xfrm>
+          <a:prstGeom prst="rect">
+            <a:avLst/>
+          </a:prstGeom>
+          <a:noFill/>
+          <a:ln/>
+        </p:spPr>
+        <p:txBody>
+          <a:bodyPr wrap="square" lIns="0" tIns="0" rIns="0" bIns="0" rtlCol="0" anchor="ctr"/>
+          <a:lstStyle/>
+          <a:p>
+            <a:pPr rtl="1" algn="r" indent="0" marL="0">
+              <a:buNone/>
+            </a:pPr>
+            <a:r>
+              <a:rPr lang="en-US" sz="1300" dirty="0">
                 <a:solidFill>
                   <a:srgbClr val="A2977F"/>
                 </a:solidFill>
@@ -5793,48 +5253,9 @@
                 <a:ea typeface="Arial" pitchFamily="34" charset="-122"/>
                 <a:cs typeface="Arial" pitchFamily="34" charset="-120"/>
               </a:rPr>
-              <a:t>٩٦٫٥٪</a:t>
-            </a:r>
-            <a:endParaRPr lang="en-US" sz="1600" dirty="0"/>
-          </a:p>
-        </p:txBody>
-      </p:sp>
-      <p:sp>
-        <p:nvSpPr>
-          <p:cNvPr id="10" name="Text 8"/>
-          <p:cNvSpPr/>
-          <p:nvPr/>
-        </p:nvSpPr>
-        <p:spPr>
-          <a:xfrm>
-            <a:off x="7863840" y="3794760"/>
-            <a:ext cx="3337560" cy="320040"/>
-          </a:xfrm>
-          <a:prstGeom prst="rect">
-            <a:avLst/>
-          </a:prstGeom>
-          <a:noFill/>
-          <a:ln/>
-        </p:spPr>
-        <p:txBody>
-          <a:bodyPr wrap="square" lIns="0" tIns="0" rIns="0" bIns="0" rtlCol="0" anchor="ctr"/>
-          <a:lstStyle/>
-          <a:p>
-            <a:pPr rtl="1" algn="r" indent="0" marL="0">
-              <a:buNone/>
-            </a:pPr>
-            <a:r>
-              <a:rPr lang="en-US" sz="1250" dirty="0">
-                <a:solidFill>
-                  <a:srgbClr val="A2977F"/>
-                </a:solidFill>
-                <a:latin typeface="Arial" pitchFamily="34" charset="0"/>
-                <a:ea typeface="Arial" pitchFamily="34" charset="-122"/>
-                <a:cs typeface="Arial" pitchFamily="34" charset="-120"/>
-              </a:rPr>
               <a:t>صورةٌ جديدة — قياسٌ أمين</a:t>
             </a:r>
-            <a:endParaRPr lang="en-US" sz="1250" dirty="0"/>
+            <a:endParaRPr lang="en-US" sz="1300" dirty="0"/>
           </a:p>
         </p:txBody>
       </p:sp>
@@ -5846,12 +5267,12 @@
         </p:nvSpPr>
         <p:spPr>
           <a:xfrm>
-            <a:off x="5669280" y="4142232"/>
-            <a:ext cx="5029200" cy="274320"/>
+            <a:off x="5715000" y="4407408"/>
+            <a:ext cx="5074920" cy="310896"/>
           </a:xfrm>
           <a:prstGeom prst="roundRect">
             <a:avLst>
-              <a:gd name="adj" fmla="val 20000"/>
+              <a:gd name="adj" fmla="val 20588"/>
             </a:avLst>
           </a:prstGeom>
           <a:solidFill>
@@ -5873,16 +5294,16 @@
         </p:nvSpPr>
         <p:spPr>
           <a:xfrm>
-            <a:off x="6710324" y="4142232"/>
-            <a:ext cx="3988156" cy="274320"/>
+            <a:off x="6765508" y="4407408"/>
+            <a:ext cx="4024412" cy="310896"/>
           </a:xfrm>
           <a:prstGeom prst="roundRect">
             <a:avLst>
-              <a:gd name="adj" fmla="val 20000"/>
+              <a:gd name="adj" fmla="val 20588"/>
             </a:avLst>
           </a:prstGeom>
           <a:solidFill>
-            <a:srgbClr val="DD8C58"/>
+            <a:srgbClr val="C97A4A"/>
           </a:solidFill>
           <a:ln w="12700">
             <a:solidFill>
@@ -5900,8 +5321,8 @@
         </p:nvSpPr>
         <p:spPr>
           <a:xfrm>
-            <a:off x="5669280" y="3794760"/>
-            <a:ext cx="1463040" cy="320040"/>
+            <a:off x="5715000" y="4023360"/>
+            <a:ext cx="1554480" cy="347472"/>
           </a:xfrm>
           <a:prstGeom prst="rect">
             <a:avLst/>
@@ -5917,9 +5338,9 @@
               <a:buNone/>
             </a:pPr>
             <a:r>
-              <a:rPr lang="en-US" sz="1600" b="1" dirty="0">
-                <a:solidFill>
-                  <a:srgbClr val="DD8C58"/>
+              <a:rPr lang="en-US" sz="1700" b="1" dirty="0">
+                <a:solidFill>
+                  <a:srgbClr val="C97A4A"/>
                 </a:solidFill>
                 <a:latin typeface="Arial" pitchFamily="34" charset="0"/>
                 <a:ea typeface="Arial" pitchFamily="34" charset="-122"/>
@@ -5927,7 +5348,7 @@
               </a:rPr>
               <a:t>٧٩٫٣٪</a:t>
             </a:r>
-            <a:endParaRPr lang="en-US" sz="1600" dirty="0"/>
+            <a:endParaRPr lang="en-US" sz="1700" dirty="0"/>
           </a:p>
         </p:txBody>
       </p:sp>
@@ -5939,12 +5360,12 @@
         </p:nvSpPr>
         <p:spPr>
           <a:xfrm>
-            <a:off x="640080" y="1874520"/>
-            <a:ext cx="4572000" cy="3246120"/>
+            <a:off x="685800" y="2148840"/>
+            <a:ext cx="4434840" cy="3017520"/>
           </a:xfrm>
           <a:prstGeom prst="roundRect">
             <a:avLst>
-              <a:gd name="adj" fmla="val 3380"/>
+              <a:gd name="adj" fmla="val 3030"/>
             </a:avLst>
           </a:prstGeom>
           <a:solidFill>
@@ -5966,24 +5387,24 @@
         </p:nvSpPr>
         <p:spPr>
           <a:xfrm>
-            <a:off x="914400" y="2103120"/>
-            <a:ext cx="4023360" cy="365760"/>
-          </a:xfrm>
-          <a:prstGeom prst="rect">
-            <a:avLst/>
-          </a:prstGeom>
-          <a:noFill/>
-          <a:ln/>
-        </p:spPr>
-        <p:txBody>
-          <a:bodyPr wrap="square" lIns="0" tIns="0" rIns="0" bIns="0" rtlCol="0" anchor="ctr"/>
-          <a:lstStyle/>
-          <a:p>
-            <a:pPr rtl="1" algn="r" indent="0" marL="0">
-              <a:buNone/>
-            </a:pPr>
-            <a:r>
-              <a:rPr lang="en-US" sz="1800" b="1" dirty="0">
+            <a:off x="960120" y="2377440"/>
+            <a:ext cx="3886200" cy="411480"/>
+          </a:xfrm>
+          <a:prstGeom prst="rect">
+            <a:avLst/>
+          </a:prstGeom>
+          <a:noFill/>
+          <a:ln/>
+        </p:spPr>
+        <p:txBody>
+          <a:bodyPr wrap="square" lIns="0" tIns="0" rIns="0" bIns="0" rtlCol="0" anchor="ctr"/>
+          <a:lstStyle/>
+          <a:p>
+            <a:pPr rtl="1" algn="r" indent="0" marL="0">
+              <a:buNone/>
+            </a:pPr>
+            <a:r>
+              <a:rPr lang="en-US" sz="1900" b="1" dirty="0">
                 <a:solidFill>
                   <a:srgbClr val="EFAE6E"/>
                 </a:solidFill>
@@ -5993,7 +5414,7 @@
               </a:rPr>
               <a:t>العلّة التي وجدناها</a:t>
             </a:r>
-            <a:endParaRPr lang="en-US" sz="1800" dirty="0"/>
+            <a:endParaRPr lang="en-US" sz="1900" dirty="0"/>
           </a:p>
         </p:txBody>
       </p:sp>
@@ -6005,8 +5426,8 @@
         </p:nvSpPr>
         <p:spPr>
           <a:xfrm>
-            <a:off x="914400" y="2606040"/>
-            <a:ext cx="4023360" cy="2286000"/>
+            <a:off x="960120" y="2880360"/>
+            <a:ext cx="3886200" cy="2103120"/>
           </a:xfrm>
           <a:prstGeom prst="rect">
             <a:avLst/>
@@ -6020,7 +5441,7 @@
           <a:p>
             <a:pPr rtl="1" algn="r" indent="0" marL="0">
               <a:lnSpc>
-                <a:spcPts val="2100"/>
+                <a:spcPts val="2200"/>
               </a:lnSpc>
               <a:buNone/>
             </a:pPr>
@@ -6040,7 +5461,7 @@
           <a:p>
             <a:pPr rtl="1" algn="r" indent="0" marL="0">
               <a:lnSpc>
-                <a:spcPts val="2100"/>
+                <a:spcPts val="2200"/>
               </a:lnSpc>
               <a:buNone/>
             </a:pPr>
@@ -6049,7 +5470,7 @@
           <a:p>
             <a:pPr rtl="1" algn="r" indent="0" marL="0">
               <a:lnSpc>
-                <a:spcPts val="2100"/>
+                <a:spcPts val="2200"/>
               </a:lnSpc>
               <a:buNone/>
             </a:pPr>
@@ -6076,24 +5497,24 @@
         </p:nvSpPr>
         <p:spPr>
           <a:xfrm>
-            <a:off x="640080" y="5440680"/>
-            <a:ext cx="10911535" cy="457200"/>
-          </a:xfrm>
-          <a:prstGeom prst="rect">
-            <a:avLst/>
-          </a:prstGeom>
-          <a:noFill/>
-          <a:ln/>
-        </p:spPr>
-        <p:txBody>
-          <a:bodyPr wrap="square" lIns="0" tIns="0" rIns="0" bIns="0" rtlCol="0" anchor="ctr"/>
-          <a:lstStyle/>
-          <a:p>
-            <a:pPr rtl="1" algn="r" indent="0" marL="0">
-              <a:buNone/>
-            </a:pPr>
-            <a:r>
-              <a:rPr lang="en-US" sz="1500" i="1" dirty="0">
+            <a:off x="685800" y="5440680"/>
+            <a:ext cx="10820095" cy="457200"/>
+          </a:xfrm>
+          <a:prstGeom prst="rect">
+            <a:avLst/>
+          </a:prstGeom>
+          <a:noFill/>
+          <a:ln/>
+        </p:spPr>
+        <p:txBody>
+          <a:bodyPr wrap="square" lIns="0" tIns="0" rIns="0" bIns="0" rtlCol="0" anchor="ctr"/>
+          <a:lstStyle/>
+          <a:p>
+            <a:pPr rtl="1" algn="r" indent="0" marL="0">
+              <a:buNone/>
+            </a:pPr>
+            <a:r>
+              <a:rPr lang="en-US" sz="1550" i="1" dirty="0">
                 <a:solidFill>
                   <a:srgbClr val="EFAE6E"/>
                 </a:solidFill>
@@ -6103,7 +5524,7 @@
               </a:rPr>
               <a:t>صفر إجابة خاطئة على ٥٣ صورة رملٍ وسماء، و١٢٢ صورة مستقلّة لنقوشٍ أخرى في جبة.</a:t>
             </a:r>
-            <a:endParaRPr lang="en-US" sz="1500" dirty="0"/>
+            <a:endParaRPr lang="en-US" sz="1550" dirty="0"/>
           </a:p>
         </p:txBody>
       </p:sp>
@@ -6112,6 +5533,18 @@
   <p:clrMapOvr>
     <a:masterClrMapping/>
   </p:clrMapOvr>
+  <mc:AlternateContent xmlns:mc="http://schemas.openxmlformats.org/markup-compatibility/2006">
+    <mc:Choice xmlns:p159="http://schemas.microsoft.com/office/powerpoint/2015/09/main" Requires="p159">
+      <p:transition xmlns:p14="http://schemas.microsoft.com/office/powerpoint/2010/main" spd="slow" p14:dur="900">
+        <p159:morph option="byObject"/>
+      </p:transition>
+    </mc:Choice>
+    <mc:Fallback>
+      <p:transition xmlns:p14="http://schemas.microsoft.com/office/powerpoint/2010/main" spd="slow" p14:dur="900">
+        <p:fade/>
+      </p:transition>
+    </mc:Fallback>
+  </mc:AlternateContent>
 </p:sld>
 </file>
 
@@ -6141,30 +5574,30 @@
       </p:grpSpPr>
       <p:sp>
         <p:nvSpPr>
-          <p:cNvPr id="2" name="Text 0"/>
-          <p:cNvSpPr/>
-          <p:nvPr/>
-        </p:nvSpPr>
-        <p:spPr>
-          <a:xfrm>
-            <a:off x="6400800" y="960120"/>
-            <a:ext cx="5148072" cy="1143000"/>
-          </a:xfrm>
-          <a:prstGeom prst="rect">
-            <a:avLst/>
-          </a:prstGeom>
-          <a:noFill/>
-          <a:ln/>
-        </p:spPr>
-        <p:txBody>
-          <a:bodyPr wrap="square" lIns="0" tIns="0" rIns="0" bIns="0" rtlCol="0" anchor="ctr"/>
-          <a:lstStyle/>
-          <a:p>
-            <a:pPr rtl="1" algn="r" indent="0" marL="0">
-              <a:buNone/>
-            </a:pPr>
-            <a:r>
-              <a:rPr lang="en-US" sz="6200" b="1" dirty="0">
+          <p:cNvPr id="2" name="!!wordmark"/>
+          <p:cNvSpPr/>
+          <p:nvPr/>
+        </p:nvSpPr>
+        <p:spPr>
+          <a:xfrm>
+            <a:off x="6400800" y="1051560"/>
+            <a:ext cx="5148072" cy="1234440"/>
+          </a:xfrm>
+          <a:prstGeom prst="rect">
+            <a:avLst/>
+          </a:prstGeom>
+          <a:noFill/>
+          <a:ln/>
+        </p:spPr>
+        <p:txBody>
+          <a:bodyPr wrap="square" lIns="0" tIns="0" rIns="0" bIns="0" rtlCol="0" anchor="ctr"/>
+          <a:lstStyle/>
+          <a:p>
+            <a:pPr rtl="1" algn="r" indent="0" marL="0">
+              <a:buNone/>
+            </a:pPr>
+            <a:r>
+              <a:rPr lang="en-US" sz="6800" b="1" dirty="0">
                 <a:solidFill>
                   <a:srgbClr val="C97A4A"/>
                 </a:solidFill>
@@ -6174,7 +5607,7 @@
               </a:rPr>
               <a:t>أثر</a:t>
             </a:r>
-            <a:endParaRPr lang="en-US" sz="6200" dirty="0"/>
+            <a:endParaRPr lang="en-US" sz="6800" dirty="0"/>
           </a:p>
         </p:txBody>
       </p:sp>
@@ -6186,24 +5619,24 @@
         </p:nvSpPr>
         <p:spPr>
           <a:xfrm>
-            <a:off x="4480560" y="2194560"/>
-            <a:ext cx="7068312" cy="594360"/>
-          </a:xfrm>
-          <a:prstGeom prst="rect">
-            <a:avLst/>
-          </a:prstGeom>
-          <a:noFill/>
-          <a:ln/>
-        </p:spPr>
-        <p:txBody>
-          <a:bodyPr wrap="square" lIns="0" tIns="0" rIns="0" bIns="0" rtlCol="0" anchor="ctr"/>
-          <a:lstStyle/>
-          <a:p>
-            <a:pPr rtl="1" algn="r" indent="0" marL="0">
-              <a:buNone/>
-            </a:pPr>
-            <a:r>
-              <a:rPr lang="en-US" sz="3000" b="1" dirty="0">
+            <a:off x="4480560" y="2377440"/>
+            <a:ext cx="7068312" cy="640080"/>
+          </a:xfrm>
+          <a:prstGeom prst="rect">
+            <a:avLst/>
+          </a:prstGeom>
+          <a:noFill/>
+          <a:ln/>
+        </p:spPr>
+        <p:txBody>
+          <a:bodyPr wrap="square" lIns="0" tIns="0" rIns="0" bIns="0" rtlCol="0" anchor="ctr"/>
+          <a:lstStyle/>
+          <a:p>
+            <a:pPr rtl="1" algn="r" indent="0" marL="0">
+              <a:buNone/>
+            </a:pPr>
+            <a:r>
+              <a:rPr lang="en-US" sz="3200" b="1" dirty="0">
                 <a:solidFill>
                   <a:srgbClr val="E8DCC8"/>
                 </a:solidFill>
@@ -6213,7 +5646,7 @@
               </a:rPr>
               <a:t>جرّبه على جوّالك</a:t>
             </a:r>
-            <a:endParaRPr lang="en-US" sz="3000" dirty="0"/>
+            <a:endParaRPr lang="en-US" sz="3200" dirty="0"/>
           </a:p>
         </p:txBody>
       </p:sp>
@@ -6225,8 +5658,8 @@
         </p:nvSpPr>
         <p:spPr>
           <a:xfrm>
-            <a:off x="4480560" y="2880360"/>
-            <a:ext cx="7068312" cy="457200"/>
+            <a:off x="4480560" y="3108960"/>
+            <a:ext cx="7068312" cy="502920"/>
           </a:xfrm>
           <a:prstGeom prst="rect">
             <a:avLst/>
@@ -6242,7 +5675,7 @@
               <a:buNone/>
             </a:pPr>
             <a:r>
-              <a:rPr lang="en-US" sz="1900" dirty="0">
+              <a:rPr lang="en-US" sz="2000" dirty="0">
                 <a:solidFill>
                   <a:srgbClr val="DD8C58"/>
                 </a:solidFill>
@@ -6252,7 +5685,7 @@
               </a:rPr>
               <a:t>w-electro.github.io/athr</a:t>
             </a:r>
-            <a:endParaRPr lang="en-US" sz="1900" dirty="0"/>
+            <a:endParaRPr lang="en-US" sz="2000" dirty="0"/>
           </a:p>
         </p:txBody>
       </p:sp>
@@ -6264,7 +5697,7 @@
         </p:nvSpPr>
         <p:spPr>
           <a:xfrm>
-            <a:off x="4480560" y="3401568"/>
+            <a:off x="4480560" y="3657600"/>
             <a:ext cx="7068312" cy="457200"/>
           </a:xfrm>
           <a:prstGeom prst="rect">
@@ -6303,16 +5736,16 @@
         </p:nvSpPr>
         <p:spPr>
           <a:xfrm>
-            <a:off x="9311335" y="4114800"/>
-            <a:ext cx="2240280" cy="1188720"/>
+            <a:off x="9265615" y="4389120"/>
+            <a:ext cx="2240280" cy="1234440"/>
           </a:xfrm>
           <a:prstGeom prst="roundRect">
             <a:avLst>
-              <a:gd name="adj" fmla="val 9231"/>
+              <a:gd name="adj" fmla="val 7407"/>
             </a:avLst>
           </a:prstGeom>
           <a:solidFill>
-            <a:srgbClr val="1A2233"/>
+            <a:srgbClr val="151D2C"/>
           </a:solidFill>
           <a:ln w="12700">
             <a:solidFill>
@@ -6330,7 +5763,7 @@
         </p:nvSpPr>
         <p:spPr>
           <a:xfrm>
-            <a:off x="9512503" y="4279392"/>
+            <a:off x="9466783" y="4572000"/>
             <a:ext cx="1828800" cy="384048"/>
           </a:xfrm>
           <a:prstGeom prst="rect">
@@ -6369,7 +5802,7 @@
         </p:nvSpPr>
         <p:spPr>
           <a:xfrm>
-            <a:off x="9512503" y="4700016"/>
+            <a:off x="9466783" y="4992624"/>
             <a:ext cx="1828800" cy="457200"/>
           </a:xfrm>
           <a:prstGeom prst="rect">
@@ -6411,16 +5844,16 @@
         </p:nvSpPr>
         <p:spPr>
           <a:xfrm>
-            <a:off x="6897319" y="4114800"/>
-            <a:ext cx="2240280" cy="1188720"/>
+            <a:off x="6851599" y="4389120"/>
+            <a:ext cx="2240280" cy="1234440"/>
           </a:xfrm>
           <a:prstGeom prst="roundRect">
             <a:avLst>
-              <a:gd name="adj" fmla="val 9231"/>
+              <a:gd name="adj" fmla="val 7407"/>
             </a:avLst>
           </a:prstGeom>
           <a:solidFill>
-            <a:srgbClr val="1A2233"/>
+            <a:srgbClr val="151D2C"/>
           </a:solidFill>
           <a:ln w="12700">
             <a:solidFill>
@@ -6438,7 +5871,7 @@
         </p:nvSpPr>
         <p:spPr>
           <a:xfrm>
-            <a:off x="7098487" y="4279392"/>
+            <a:off x="7052767" y="4572000"/>
             <a:ext cx="1828800" cy="384048"/>
           </a:xfrm>
           <a:prstGeom prst="rect">
@@ -6477,7 +5910,7 @@
         </p:nvSpPr>
         <p:spPr>
           <a:xfrm>
-            <a:off x="7098487" y="4700016"/>
+            <a:off x="7052767" y="4992624"/>
             <a:ext cx="1828800" cy="457200"/>
           </a:xfrm>
           <a:prstGeom prst="rect">
@@ -6519,16 +5952,16 @@
         </p:nvSpPr>
         <p:spPr>
           <a:xfrm>
-            <a:off x="4483303" y="4114800"/>
-            <a:ext cx="2240280" cy="1188720"/>
+            <a:off x="4437583" y="4389120"/>
+            <a:ext cx="2240280" cy="1234440"/>
           </a:xfrm>
           <a:prstGeom prst="roundRect">
             <a:avLst>
-              <a:gd name="adj" fmla="val 9231"/>
+              <a:gd name="adj" fmla="val 7407"/>
             </a:avLst>
           </a:prstGeom>
           <a:solidFill>
-            <a:srgbClr val="1A2233"/>
+            <a:srgbClr val="151D2C"/>
           </a:solidFill>
           <a:ln w="12700">
             <a:solidFill>
@@ -6546,7 +5979,7 @@
         </p:nvSpPr>
         <p:spPr>
           <a:xfrm>
-            <a:off x="4684471" y="4279392"/>
+            <a:off x="4638751" y="4572000"/>
             <a:ext cx="1828800" cy="384048"/>
           </a:xfrm>
           <a:prstGeom prst="rect">
@@ -6585,7 +6018,7 @@
         </p:nvSpPr>
         <p:spPr>
           <a:xfrm>
-            <a:off x="4684471" y="4700016"/>
+            <a:off x="4638751" y="4992624"/>
             <a:ext cx="1828800" cy="457200"/>
           </a:xfrm>
           <a:prstGeom prst="rect">
@@ -6627,12 +6060,12 @@
         </p:nvSpPr>
         <p:spPr>
           <a:xfrm>
-            <a:off x="640080" y="1325880"/>
+            <a:off x="685800" y="1371600"/>
             <a:ext cx="3383280" cy="3383280"/>
           </a:xfrm>
           <a:prstGeom prst="roundRect">
             <a:avLst>
-              <a:gd name="adj" fmla="val 3243"/>
+              <a:gd name="adj" fmla="val 2703"/>
             </a:avLst>
           </a:prstGeom>
           <a:solidFill>
@@ -6662,7 +6095,7 @@
         </p:blipFill>
         <p:spPr>
           <a:xfrm>
-            <a:off x="960120" y="1645920"/>
+            <a:off x="1005840" y="1691640"/>
             <a:ext cx="2743200" cy="2743200"/>
           </a:xfrm>
           <a:prstGeom prst="rect">
@@ -6678,7 +6111,7 @@
         </p:nvSpPr>
         <p:spPr>
           <a:xfrm>
-            <a:off x="640080" y="4800600"/>
+            <a:off x="685800" y="4846320"/>
             <a:ext cx="3383280" cy="365760"/>
           </a:xfrm>
           <a:prstGeom prst="rect">
@@ -6717,7 +6150,7 @@
         </p:nvSpPr>
         <p:spPr>
           <a:xfrm>
-            <a:off x="4480560" y="5806440"/>
+            <a:off x="4480560" y="5852160"/>
             <a:ext cx="7068312" cy="365760"/>
           </a:xfrm>
           <a:prstGeom prst="rect">
@@ -6736,7 +6169,7 @@
             <a:r>
               <a:rPr lang="en-US" sz="1250" dirty="0">
                 <a:solidFill>
-                  <a:srgbClr val="A2977F"/>
+                  <a:srgbClr val="6E6757"/>
                 </a:solidFill>
                 <a:latin typeface="Arial" pitchFamily="34" charset="0"/>
                 <a:ea typeface="Arial" pitchFamily="34" charset="-122"/>
@@ -6753,6 +6186,18 @@
   <p:clrMapOvr>
     <a:masterClrMapping/>
   </p:clrMapOvr>
+  <mc:AlternateContent xmlns:mc="http://schemas.openxmlformats.org/markup-compatibility/2006">
+    <mc:Choice xmlns:p159="http://schemas.microsoft.com/office/powerpoint/2015/09/main" Requires="p159">
+      <p:transition xmlns:p14="http://schemas.microsoft.com/office/powerpoint/2010/main" spd="slow" p14:dur="900">
+        <p159:morph option="byObject"/>
+      </p:transition>
+    </mc:Choice>
+    <mc:Fallback>
+      <p:transition xmlns:p14="http://schemas.microsoft.com/office/powerpoint/2010/main" spd="slow" p14:dur="900">
+        <p:fade/>
+      </p:transition>
+    </mc:Fallback>
+  </mc:AlternateContent>
 </p:sld>
 </file>
 

--- a/athr-pitch-ar.pptx
+++ b/athr-pitch-ar.pptx
@@ -509,7 +509,7 @@
           <a:p>
             <a:r>
               <a:rPr lang="en-US" dirty="0"/>
-              <a:t>ابدأ بالمكان لا بالتقنية: جبة على بعد ساعة من حائل، وفيها نقوشٌ يبلغ عمر بعضها عشرة آلاف سنة.</a:t>
+              <a:t>ابدأ بالمكان لا بالتقنية: جبة على بعد ساعة من حائل، وفيها نقوش يبلغ عمر بعضها عشرة آلاف سنة.</a:t>
             </a:r>
             <a:endParaRPr lang="en-US" dirty="0"/>
           </a:p>
@@ -597,7 +597,7 @@
           <a:p>
             <a:r>
               <a:rPr lang="en-US" dirty="0"/>
-              <a:t>ثبّت القيد مبكرًا: لا شبكة. عندها يبدو اختيار العمل بلا إنترنت ضرورةً لا استعراضًا.</a:t>
+              <a:t>ثبت القيد مبكرا: لا شبكة. عندها يبدو العمل بدون إنترنت ضرورة لا استعراضا.</a:t>
             </a:r>
             <a:endParaRPr lang="en-US" dirty="0"/>
           </a:p>
@@ -685,7 +685,7 @@
           <a:p>
             <a:r>
               <a:rPr lang="en-US" dirty="0"/>
-              <a:t>اعرض هنا مباشرةً على جوّالك. ولا تشرح البنية أثناء العرض — دعهم يرونه يعمل.</a:t>
+              <a:t>اعرض هنا مباشرة على جوالك. ولا تشرح البنية أثناء العرض — دعهم يرونه يعمل.</a:t>
             </a:r>
             <a:endParaRPr lang="en-US" dirty="0"/>
           </a:p>
@@ -773,7 +773,7 @@
           <a:p>
             <a:r>
               <a:rPr lang="en-US" dirty="0"/>
-              <a:t>لو سُئلت: لم نُدرّب الشبكة ولم نضبطها. نستعمل تمثيلات نموذجٍ أساسيّ ونبحث فيها — وهو ما تفعله محرّكات البحث البصريّ.</a:t>
+              <a:t>لو سئلت: لم ندرب الشبكة ولم نضبط أوزانها. نستخدم تمثيلات نموذج أساسي ونبحث فيها — وهو ما تفعله محركات البحث بالصور.</a:t>
             </a:r>
             <a:endParaRPr lang="en-US" dirty="0"/>
           </a:p>
@@ -861,7 +861,7 @@
           <a:p>
             <a:r>
               <a:rPr lang="en-US" dirty="0"/>
-              <a:t>هذه هي نقطة التميّز. قُلها بوضوح وامضِ — لا تُطِل فيها.</a:t>
+              <a:t>هذه نقطة التميز. قلها بوضوح وامض — لا تطل فيها.</a:t>
             </a:r>
             <a:endParaRPr lang="en-US" dirty="0"/>
           </a:p>
@@ -949,7 +949,7 @@
           <a:p>
             <a:r>
               <a:rPr lang="en-US" dirty="0"/>
-              <a:t>اعرضه حيًّا: امسح، صحّح، امسح ثانيةً. عشر ثوانٍ يرون فيها التعلّم يقع. وإن سُئلت: النموذج غير بارامتري (k-NN)، وأوزان الشبكة لا تتغيّر — الذي يتغيّر هو ما يعرفه عن لوحات جبة.</a:t>
+              <a:t>اعرضه حيا: امسح، صحح، امسح مرة أخرى. عشر ثوان يرون فيها التعلم يقع. وإن سئلت: النموذج غير بارامتري (k-NN)، وأوزان الشبكة لا تتغير — الذي يتغير هو ما يعرفه عن لوحات جبة.</a:t>
             </a:r>
             <a:endParaRPr lang="en-US" dirty="0"/>
           </a:p>
@@ -1037,7 +1037,7 @@
           <a:p>
             <a:r>
               <a:rPr lang="en-US" dirty="0"/>
-              <a:t>هذه الشريحة تكسب الثقة. أكثر الفرق تعرض الرقم الجميل وحده، وقولُ «قياسنا كذب وهكذا كشفناه» أثقل في الميزان.</a:t>
+              <a:t>هذه الشريحة تكسب الثقة. أكثر الفرق تعرض الرقم الجميل وحده، وقول «قياسنا كذب وهكذا اكتشفناه» أثقل في الميزان.</a:t>
             </a:r>
             <a:endParaRPr lang="en-US" dirty="0"/>
           </a:p>
@@ -1125,7 +1125,7 @@
           <a:p>
             <a:r>
               <a:rPr lang="en-US" dirty="0"/>
-              <a:t>اختم بأن تعطي أحد المحكّمين جوّالك، أو اتركهم يمسحون الرمز فيفتحوه على أجهزتهم.</a:t>
+              <a:t>اختم بأن تعطي أحد المحكمين جوالك، أو اتركهم يمسحون الرمز فيفتحوه على أجهزتهم.</a:t>
             </a:r>
             <a:endParaRPr lang="en-US" dirty="0"/>
           </a:p>
@@ -1506,34 +1506,34 @@
         </p:nvSpPr>
         <p:spPr>
           <a:xfrm>
-            <a:off x="5394960" y="1417320"/>
-            <a:ext cx="6126480" cy="1691640"/>
-          </a:xfrm>
-          <a:prstGeom prst="rect">
-            <a:avLst/>
-          </a:prstGeom>
-          <a:noFill/>
-          <a:ln/>
-        </p:spPr>
-        <p:txBody>
-          <a:bodyPr wrap="square" lIns="0" tIns="0" rIns="0" bIns="0" rtlCol="0" anchor="ctr"/>
-          <a:lstStyle/>
-          <a:p>
-            <a:pPr rtl="1" algn="r" indent="0" marL="0">
-              <a:buNone/>
-            </a:pPr>
-            <a:r>
-              <a:rPr lang="en-US" sz="9600" b="1" dirty="0">
+            <a:off x="5394960" y="1207008"/>
+            <a:ext cx="6126480" cy="2011680"/>
+          </a:xfrm>
+          <a:prstGeom prst="rect">
+            <a:avLst/>
+          </a:prstGeom>
+          <a:noFill/>
+          <a:ln/>
+        </p:spPr>
+        <p:txBody>
+          <a:bodyPr wrap="square" lIns="0" tIns="0" rIns="0" bIns="0" rtlCol="0" anchor="ctr"/>
+          <a:lstStyle/>
+          <a:p>
+            <a:pPr rtl="1" algn="r" indent="0" marL="0">
+              <a:buNone/>
+            </a:pPr>
+            <a:r>
+              <a:rPr lang="en-US" sz="13000" b="1" dirty="0">
                 <a:solidFill>
                   <a:srgbClr val="C97A4A"/>
                 </a:solidFill>
-                <a:latin typeface="Arial" pitchFamily="34" charset="0"/>
-                <a:ea typeface="Arial" pitchFamily="34" charset="-122"/>
-                <a:cs typeface="Arial" pitchFamily="34" charset="-120"/>
+                <a:latin typeface="Reem Kufi" pitchFamily="34" charset="0"/>
+                <a:ea typeface="Reem Kufi" pitchFamily="34" charset="-122"/>
+                <a:cs typeface="Reem Kufi" pitchFamily="34" charset="-120"/>
               </a:rPr>
               <a:t>أثر</a:t>
             </a:r>
-            <a:endParaRPr lang="en-US" sz="9600" dirty="0"/>
+            <a:endParaRPr lang="en-US" sz="13000" dirty="0"/>
           </a:p>
         </p:txBody>
       </p:sp>
@@ -1545,7 +1545,7 @@
         </p:nvSpPr>
         <p:spPr>
           <a:xfrm>
-            <a:off x="4206240" y="3200400"/>
+            <a:off x="4206240" y="3310128"/>
             <a:ext cx="7315200" cy="640080"/>
           </a:xfrm>
           <a:prstGeom prst="rect">
@@ -1562,17 +1562,17 @@
               <a:buNone/>
             </a:pPr>
             <a:r>
-              <a:rPr lang="en-US" sz="2800" b="1" dirty="0">
+              <a:rPr lang="en-US" sz="3000" b="1" dirty="0">
                 <a:solidFill>
                   <a:srgbClr val="E8DCC8"/>
                 </a:solidFill>
-                <a:latin typeface="Arial" pitchFamily="34" charset="0"/>
-                <a:ea typeface="Arial" pitchFamily="34" charset="-122"/>
-                <a:cs typeface="Arial" pitchFamily="34" charset="-120"/>
-              </a:rPr>
-              <a:t>دليلٌ تراثيّ يعمل حيث يقع التراث</a:t>
-            </a:r>
-            <a:endParaRPr lang="en-US" sz="2800" dirty="0"/>
+                <a:latin typeface="Tajawal" pitchFamily="34" charset="0"/>
+                <a:ea typeface="Tajawal" pitchFamily="34" charset="-122"/>
+                <a:cs typeface="Tajawal" pitchFamily="34" charset="-120"/>
+              </a:rPr>
+              <a:t>دليلك إلى نقوش حائل</a:t>
+            </a:r>
+            <a:endParaRPr lang="en-US" sz="3000" dirty="0"/>
           </a:p>
         </p:txBody>
       </p:sp>
@@ -1584,7 +1584,7 @@
         </p:nvSpPr>
         <p:spPr>
           <a:xfrm>
-            <a:off x="4206240" y="3931920"/>
+            <a:off x="4206240" y="3950208"/>
             <a:ext cx="7315200" cy="457200"/>
           </a:xfrm>
           <a:prstGeom prst="rect">
@@ -1605,11 +1605,11 @@
                 <a:solidFill>
                   <a:srgbClr val="A2977F"/>
                 </a:solidFill>
-                <a:latin typeface="Arial" pitchFamily="34" charset="0"/>
-                <a:ea typeface="Arial" pitchFamily="34" charset="-122"/>
-                <a:cs typeface="Arial" pitchFamily="34" charset="-120"/>
-              </a:rPr>
-              <a:t>بلا إنترنت · داخل الجوّال · بتسعٍ وعشرين لغة</a:t>
+                <a:latin typeface="Tajawal" pitchFamily="34" charset="0"/>
+                <a:ea typeface="Tajawal" pitchFamily="34" charset="-122"/>
+                <a:cs typeface="Tajawal" pitchFamily="34" charset="-120"/>
+              </a:rPr>
+              <a:t>يعمل بدون إنترنت، وبتسع وعشرين لغة</a:t>
             </a:r>
             <a:endParaRPr lang="en-US" sz="1700" dirty="0"/>
           </a:p>
@@ -1644,11 +1644,11 @@
                 <a:solidFill>
                   <a:srgbClr val="6E6757"/>
                 </a:solidFill>
-                <a:latin typeface="Arial" pitchFamily="34" charset="0"/>
-                <a:ea typeface="Arial" pitchFamily="34" charset="-122"/>
-                <a:cs typeface="Arial" pitchFamily="34" charset="-120"/>
-              </a:rPr>
-              <a:t>هاكاثون أجا للذكاء الاصطناعي   ·   حائل</a:t>
+                <a:latin typeface="Tajawal" pitchFamily="34" charset="0"/>
+                <a:ea typeface="Tajawal" pitchFamily="34" charset="-122"/>
+                <a:cs typeface="Tajawal" pitchFamily="34" charset="-120"/>
+              </a:rPr>
+              <a:t>هاكاثون أجا للذكاء الاصطناعي — حائل</a:t>
             </a:r>
             <a:endParaRPr lang="en-US" sz="1300" dirty="0"/>
           </a:p>
@@ -1747,17 +1747,17 @@
               <a:buNone/>
             </a:pPr>
             <a:r>
-              <a:rPr lang="en-US" sz="4000" b="1" dirty="0">
+              <a:rPr lang="en-US" sz="3800" b="1" dirty="0">
                 <a:solidFill>
                   <a:srgbClr val="E8DCC8"/>
                 </a:solidFill>
-                <a:latin typeface="Arial" pitchFamily="34" charset="0"/>
-                <a:ea typeface="Arial" pitchFamily="34" charset="-122"/>
-                <a:cs typeface="Arial" pitchFamily="34" charset="-120"/>
-              </a:rPr>
-              <a:t>زائرٌ يقف أمام نقش</a:t>
-            </a:r>
-            <a:endParaRPr lang="en-US" sz="4000" dirty="0"/>
+                <a:latin typeface="Tajawal" pitchFamily="34" charset="0"/>
+                <a:ea typeface="Tajawal" pitchFamily="34" charset="-122"/>
+                <a:cs typeface="Tajawal" pitchFamily="34" charset="-120"/>
+              </a:rPr>
+              <a:t>زائر يقف أمام نقش</a:t>
+            </a:r>
+            <a:endParaRPr lang="en-US" sz="3800" dirty="0"/>
           </a:p>
         </p:txBody>
       </p:sp>
@@ -1790,11 +1790,11 @@
                 <a:solidFill>
                   <a:srgbClr val="A2977F"/>
                 </a:solidFill>
-                <a:latin typeface="Arial" pitchFamily="34" charset="0"/>
-                <a:ea typeface="Arial" pitchFamily="34" charset="-122"/>
-                <a:cs typeface="Arial" pitchFamily="34" charset="-120"/>
-              </a:rPr>
-              <a:t>ولا شيء يقول له ما هو.</a:t>
+                <a:latin typeface="Tajawal" pitchFamily="34" charset="0"/>
+                <a:ea typeface="Tajawal" pitchFamily="34" charset="-122"/>
+                <a:cs typeface="Tajawal" pitchFamily="34" charset="-120"/>
+              </a:rPr>
+              <a:t>ولا شيء يشرح له ما يرى</a:t>
             </a:r>
             <a:endParaRPr lang="en-US" sz="1900" dirty="0"/>
           </a:p>
@@ -1808,12 +1808,12 @@
         </p:nvSpPr>
         <p:spPr>
           <a:xfrm>
-            <a:off x="7939735" y="2240280"/>
-            <a:ext cx="3566160" cy="2514600"/>
+            <a:off x="7939735" y="2103120"/>
+            <a:ext cx="3566160" cy="3063240"/>
           </a:xfrm>
           <a:prstGeom prst="roundRect">
             <a:avLst>
-              <a:gd name="adj" fmla="val 3636"/>
+              <a:gd name="adj" fmla="val 2985"/>
             </a:avLst>
           </a:prstGeom>
           <a:solidFill>
@@ -1827,16 +1827,40 @@
           </a:ln>
         </p:spPr>
       </p:sp>
-      <p:sp>
-        <p:nvSpPr>
-          <p:cNvPr id="5" name="Text 3"/>
-          <p:cNvSpPr/>
-          <p:nvPr/>
-        </p:nvSpPr>
-        <p:spPr>
-          <a:xfrm>
-            <a:off x="8305495" y="2606040"/>
-            <a:ext cx="2834640" cy="502920"/>
+      <p:pic>
+        <p:nvPicPr>
+          <p:cNvPr id="5" name="Image 0" descr="preencoded.png">    </p:cNvPr>
+          <p:cNvPicPr>
+            <a:picLocks noChangeAspect="1"/>
+          </p:cNvPicPr>
+          <p:nvPr/>
+        </p:nvPicPr>
+        <p:blipFill>
+          <a:blip r:embed="rId1"/>
+          <a:stretch>
+            <a:fillRect/>
+          </a:stretch>
+        </p:blipFill>
+        <p:spPr>
+          <a:xfrm>
+            <a:off x="10048280" y="2377440"/>
+            <a:ext cx="1046136" cy="1143000"/>
+          </a:xfrm>
+          <a:prstGeom prst="rect">
+            <a:avLst/>
+          </a:prstGeom>
+        </p:spPr>
+      </p:pic>
+      <p:sp>
+        <p:nvSpPr>
+          <p:cNvPr id="6" name="Text 3"/>
+          <p:cNvSpPr/>
+          <p:nvPr/>
+        </p:nvSpPr>
+        <p:spPr>
+          <a:xfrm>
+            <a:off x="8305495" y="3657600"/>
+            <a:ext cx="2834640" cy="457200"/>
           </a:xfrm>
           <a:prstGeom prst="rect">
             <a:avLst/>
@@ -1856,9 +1880,9 @@
                 <a:solidFill>
                   <a:srgbClr val="DD8C58"/>
                 </a:solidFill>
-                <a:latin typeface="Arial" pitchFamily="34" charset="0"/>
-                <a:ea typeface="Arial" pitchFamily="34" charset="-122"/>
-                <a:cs typeface="Arial" pitchFamily="34" charset="-120"/>
+                <a:latin typeface="Tajawal" pitchFamily="34" charset="0"/>
+                <a:ea typeface="Tajawal" pitchFamily="34" charset="-122"/>
+                <a:cs typeface="Tajawal" pitchFamily="34" charset="-120"/>
               </a:rPr>
               <a:t>لا لافتة</a:t>
             </a:r>
@@ -1868,14 +1892,14 @@
       </p:sp>
       <p:sp>
         <p:nvSpPr>
-          <p:cNvPr id="6" name="Text 4"/>
-          <p:cNvSpPr/>
-          <p:nvPr/>
-        </p:nvSpPr>
-        <p:spPr>
-          <a:xfrm>
-            <a:off x="8305495" y="3246120"/>
-            <a:ext cx="2834640" cy="1188720"/>
+          <p:cNvPr id="7" name="Text 4"/>
+          <p:cNvSpPr/>
+          <p:nvPr/>
+        </p:nvSpPr>
+        <p:spPr>
+          <a:xfrm>
+            <a:off x="8305495" y="4206240"/>
+            <a:ext cx="2834640" cy="777240"/>
           </a:xfrm>
           <a:prstGeom prst="rect">
             <a:avLst/>
@@ -1898,11 +1922,11 @@
                 <a:solidFill>
                   <a:srgbClr val="A2977F"/>
                 </a:solidFill>
-                <a:latin typeface="Arial" pitchFamily="34" charset="0"/>
-                <a:ea typeface="Arial" pitchFamily="34" charset="-122"/>
-                <a:cs typeface="Arial" pitchFamily="34" charset="-120"/>
-              </a:rPr>
-              <a:t>أكثر اللوحات بلا تعريف، والصخرة لا تشرح نفسها.</a:t>
+                <a:latin typeface="Tajawal" pitchFamily="34" charset="0"/>
+                <a:ea typeface="Tajawal" pitchFamily="34" charset="-122"/>
+                <a:cs typeface="Tajawal" pitchFamily="34" charset="-120"/>
+              </a:rPr>
+              <a:t>أغلب اللوحات بلا تعريف، والصخرة لا تشرح نفسها.</a:t>
             </a:r>
             <a:endParaRPr lang="en-US" sz="1450" dirty="0"/>
           </a:p>
@@ -1910,18 +1934,18 @@
       </p:sp>
       <p:sp>
         <p:nvSpPr>
-          <p:cNvPr id="7" name="Shape 5"/>
-          <p:cNvSpPr/>
-          <p:nvPr/>
-        </p:nvSpPr>
-        <p:spPr>
-          <a:xfrm>
-            <a:off x="4236415" y="2240280"/>
-            <a:ext cx="3566160" cy="2514600"/>
+          <p:cNvPr id="8" name="Shape 5"/>
+          <p:cNvSpPr/>
+          <p:nvPr/>
+        </p:nvSpPr>
+        <p:spPr>
+          <a:xfrm>
+            <a:off x="4236415" y="2103120"/>
+            <a:ext cx="3566160" cy="3063240"/>
           </a:xfrm>
           <a:prstGeom prst="roundRect">
             <a:avLst>
-              <a:gd name="adj" fmla="val 3636"/>
+              <a:gd name="adj" fmla="val 2985"/>
             </a:avLst>
           </a:prstGeom>
           <a:solidFill>
@@ -1935,16 +1959,40 @@
           </a:ln>
         </p:spPr>
       </p:sp>
-      <p:sp>
-        <p:nvSpPr>
-          <p:cNvPr id="8" name="Text 6"/>
-          <p:cNvSpPr/>
-          <p:nvPr/>
-        </p:nvSpPr>
-        <p:spPr>
-          <a:xfrm>
-            <a:off x="4602175" y="2606040"/>
-            <a:ext cx="2834640" cy="502920"/>
+      <p:pic>
+        <p:nvPicPr>
+          <p:cNvPr id="9" name="Image 1" descr="preencoded.png">    </p:cNvPr>
+          <p:cNvPicPr>
+            <a:picLocks noChangeAspect="1"/>
+          </p:cNvPicPr>
+          <p:nvPr/>
+        </p:nvPicPr>
+        <p:blipFill>
+          <a:blip r:embed="rId2"/>
+          <a:stretch>
+            <a:fillRect/>
+          </a:stretch>
+        </p:blipFill>
+        <p:spPr>
+          <a:xfrm>
+            <a:off x="6386260" y="2377440"/>
+            <a:ext cx="1004835" cy="1143000"/>
+          </a:xfrm>
+          <a:prstGeom prst="rect">
+            <a:avLst/>
+          </a:prstGeom>
+        </p:spPr>
+      </p:pic>
+      <p:sp>
+        <p:nvSpPr>
+          <p:cNvPr id="10" name="Text 6"/>
+          <p:cNvSpPr/>
+          <p:nvPr/>
+        </p:nvSpPr>
+        <p:spPr>
+          <a:xfrm>
+            <a:off x="4602175" y="3657600"/>
+            <a:ext cx="2834640" cy="457200"/>
           </a:xfrm>
           <a:prstGeom prst="rect">
             <a:avLst/>
@@ -1964,9 +2012,9 @@
                 <a:solidFill>
                   <a:srgbClr val="DD8C58"/>
                 </a:solidFill>
-                <a:latin typeface="Arial" pitchFamily="34" charset="0"/>
-                <a:ea typeface="Arial" pitchFamily="34" charset="-122"/>
-                <a:cs typeface="Arial" pitchFamily="34" charset="-120"/>
+                <a:latin typeface="Tajawal" pitchFamily="34" charset="0"/>
+                <a:ea typeface="Tajawal" pitchFamily="34" charset="-122"/>
+                <a:cs typeface="Tajawal" pitchFamily="34" charset="-120"/>
               </a:rPr>
               <a:t>لا مرشد</a:t>
             </a:r>
@@ -1976,14 +2024,14 @@
       </p:sp>
       <p:sp>
         <p:nvSpPr>
-          <p:cNvPr id="9" name="Text 7"/>
-          <p:cNvSpPr/>
-          <p:nvPr/>
-        </p:nvSpPr>
-        <p:spPr>
-          <a:xfrm>
-            <a:off x="4602175" y="3246120"/>
-            <a:ext cx="2834640" cy="1188720"/>
+          <p:cNvPr id="11" name="Text 7"/>
+          <p:cNvSpPr/>
+          <p:nvPr/>
+        </p:nvSpPr>
+        <p:spPr>
+          <a:xfrm>
+            <a:off x="4602175" y="4206240"/>
+            <a:ext cx="2834640" cy="777240"/>
           </a:xfrm>
           <a:prstGeom prst="rect">
             <a:avLst/>
@@ -2006,11 +2054,11 @@
                 <a:solidFill>
                   <a:srgbClr val="A2977F"/>
                 </a:solidFill>
-                <a:latin typeface="Arial" pitchFamily="34" charset="0"/>
-                <a:ea typeface="Arial" pitchFamily="34" charset="-122"/>
-                <a:cs typeface="Arial" pitchFamily="34" charset="-120"/>
-              </a:rPr>
-              <a:t>المرشدون قليل، ولا أحد منهم يتكلّم لغة كلّ زائر.</a:t>
+                <a:latin typeface="Tajawal" pitchFamily="34" charset="0"/>
+                <a:ea typeface="Tajawal" pitchFamily="34" charset="-122"/>
+                <a:cs typeface="Tajawal" pitchFamily="34" charset="-120"/>
+              </a:rPr>
+              <a:t>المرشدون قليلون، ولا يتكلمون كل لغات الزوار.</a:t>
             </a:r>
             <a:endParaRPr lang="en-US" sz="1450" dirty="0"/>
           </a:p>
@@ -2018,18 +2066,18 @@
       </p:sp>
       <p:sp>
         <p:nvSpPr>
-          <p:cNvPr id="10" name="Shape 8"/>
-          <p:cNvSpPr/>
-          <p:nvPr/>
-        </p:nvSpPr>
-        <p:spPr>
-          <a:xfrm>
-            <a:off x="533095" y="2240280"/>
-            <a:ext cx="3566160" cy="2514600"/>
+          <p:cNvPr id="12" name="Shape 8"/>
+          <p:cNvSpPr/>
+          <p:nvPr/>
+        </p:nvSpPr>
+        <p:spPr>
+          <a:xfrm>
+            <a:off x="533095" y="2103120"/>
+            <a:ext cx="3566160" cy="3063240"/>
           </a:xfrm>
           <a:prstGeom prst="roundRect">
             <a:avLst>
-              <a:gd name="adj" fmla="val 3636"/>
+              <a:gd name="adj" fmla="val 2985"/>
             </a:avLst>
           </a:prstGeom>
           <a:solidFill>
@@ -2043,16 +2091,40 @@
           </a:ln>
         </p:spPr>
       </p:sp>
-      <p:sp>
-        <p:nvSpPr>
-          <p:cNvPr id="11" name="Text 9"/>
-          <p:cNvSpPr/>
-          <p:nvPr/>
-        </p:nvSpPr>
-        <p:spPr>
-          <a:xfrm>
-            <a:off x="898855" y="2606040"/>
-            <a:ext cx="2834640" cy="502920"/>
+      <p:pic>
+        <p:nvPicPr>
+          <p:cNvPr id="13" name="Image 2" descr="preencoded.png">    </p:cNvPr>
+          <p:cNvPicPr>
+            <a:picLocks noChangeAspect="1"/>
+          </p:cNvPicPr>
+          <p:nvPr/>
+        </p:nvPicPr>
+        <p:blipFill>
+          <a:blip r:embed="rId3"/>
+          <a:stretch>
+            <a:fillRect/>
+          </a:stretch>
+        </p:blipFill>
+        <p:spPr>
+          <a:xfrm>
+            <a:off x="2709807" y="2377440"/>
+            <a:ext cx="977968" cy="1143000"/>
+          </a:xfrm>
+          <a:prstGeom prst="rect">
+            <a:avLst/>
+          </a:prstGeom>
+        </p:spPr>
+      </p:pic>
+      <p:sp>
+        <p:nvSpPr>
+          <p:cNvPr id="14" name="Text 9"/>
+          <p:cNvSpPr/>
+          <p:nvPr/>
+        </p:nvSpPr>
+        <p:spPr>
+          <a:xfrm>
+            <a:off x="898855" y="3657600"/>
+            <a:ext cx="2834640" cy="457200"/>
           </a:xfrm>
           <a:prstGeom prst="rect">
             <a:avLst/>
@@ -2072,9 +2144,9 @@
                 <a:solidFill>
                   <a:srgbClr val="DD8C58"/>
                 </a:solidFill>
-                <a:latin typeface="Arial" pitchFamily="34" charset="0"/>
-                <a:ea typeface="Arial" pitchFamily="34" charset="-122"/>
-                <a:cs typeface="Arial" pitchFamily="34" charset="-120"/>
+                <a:latin typeface="Tajawal" pitchFamily="34" charset="0"/>
+                <a:ea typeface="Tajawal" pitchFamily="34" charset="-122"/>
+                <a:cs typeface="Tajawal" pitchFamily="34" charset="-120"/>
               </a:rPr>
               <a:t>لا شبكة</a:t>
             </a:r>
@@ -2084,14 +2156,14 @@
       </p:sp>
       <p:sp>
         <p:nvSpPr>
-          <p:cNvPr id="12" name="Text 10"/>
-          <p:cNvSpPr/>
-          <p:nvPr/>
-        </p:nvSpPr>
-        <p:spPr>
-          <a:xfrm>
-            <a:off x="898855" y="3246120"/>
-            <a:ext cx="2834640" cy="1188720"/>
+          <p:cNvPr id="15" name="Text 10"/>
+          <p:cNvSpPr/>
+          <p:nvPr/>
+        </p:nvSpPr>
+        <p:spPr>
+          <a:xfrm>
+            <a:off x="898855" y="4206240"/>
+            <a:ext cx="2834640" cy="777240"/>
           </a:xfrm>
           <a:prstGeom prst="rect">
             <a:avLst/>
@@ -2114,11 +2186,11 @@
                 <a:solidFill>
                   <a:srgbClr val="A2977F"/>
                 </a:solidFill>
-                <a:latin typeface="Arial" pitchFamily="34" charset="0"/>
-                <a:ea typeface="Arial" pitchFamily="34" charset="-122"/>
-                <a:cs typeface="Arial" pitchFamily="34" charset="-120"/>
-              </a:rPr>
-              <a:t>الموقع في الصحراء المفتوحة، فكلّ ما يعتمد على السحابة يسقط.</a:t>
+                <a:latin typeface="Tajawal" pitchFamily="34" charset="0"/>
+                <a:ea typeface="Tajawal" pitchFamily="34" charset="-122"/>
+                <a:cs typeface="Tajawal" pitchFamily="34" charset="-120"/>
+              </a:rPr>
+              <a:t>الموقع في الصحراء، فأي حل يعتمد على الإنترنت يتوقف.</a:t>
             </a:r>
             <a:endParaRPr lang="en-US" sz="1450" dirty="0"/>
           </a:p>
@@ -2126,13 +2198,13 @@
       </p:sp>
       <p:sp>
         <p:nvSpPr>
-          <p:cNvPr id="13" name="Text 11"/>
-          <p:cNvSpPr/>
-          <p:nvPr/>
-        </p:nvSpPr>
-        <p:spPr>
-          <a:xfrm>
-            <a:off x="685800" y="5257800"/>
+          <p:cNvPr id="16" name="Text 11"/>
+          <p:cNvSpPr/>
+          <p:nvPr/>
+        </p:nvSpPr>
+        <p:spPr>
+          <a:xfrm>
+            <a:off x="685800" y="5486400"/>
             <a:ext cx="10820095" cy="457200"/>
           </a:xfrm>
           <a:prstGeom prst="rect">
@@ -2153,11 +2225,11 @@
                 <a:solidFill>
                   <a:srgbClr val="EFAE6E"/>
                 </a:solidFill>
-                <a:latin typeface="Arial" pitchFamily="34" charset="0"/>
-                <a:ea typeface="Arial" pitchFamily="34" charset="-122"/>
-                <a:cs typeface="Arial" pitchFamily="34" charset="-120"/>
-              </a:rPr>
-              <a:t>الحلّ السحابيّ هو الجواب البديهيّ — وهو الجواب الذي لا يعمل هنا.</a:t>
+                <a:latin typeface="Tajawal" pitchFamily="34" charset="0"/>
+                <a:ea typeface="Tajawal" pitchFamily="34" charset="-122"/>
+                <a:cs typeface="Tajawal" pitchFamily="34" charset="-120"/>
+              </a:rPr>
+              <a:t>الحل السحابي هو أول جواب يخطر بالبال، وهو الجواب الذي لا يعمل هنا.</a:t>
             </a:r>
             <a:endParaRPr lang="en-US" sz="1700" dirty="0"/>
           </a:p>
@@ -2232,17 +2304,17 @@
               <a:buNone/>
             </a:pPr>
             <a:r>
-              <a:rPr lang="en-US" sz="4000" b="1" dirty="0">
+              <a:rPr lang="en-US" sz="3800" b="1" dirty="0">
                 <a:solidFill>
                   <a:srgbClr val="E8DCC8"/>
                 </a:solidFill>
-                <a:latin typeface="Arial" pitchFamily="34" charset="0"/>
-                <a:ea typeface="Arial" pitchFamily="34" charset="-122"/>
-                <a:cs typeface="Arial" pitchFamily="34" charset="-120"/>
-              </a:rPr>
-              <a:t>وجّه الكاميرا. واسمع القصّة.</a:t>
-            </a:r>
-            <a:endParaRPr lang="en-US" sz="4000" dirty="0"/>
+                <a:latin typeface="Tajawal" pitchFamily="34" charset="0"/>
+                <a:ea typeface="Tajawal" pitchFamily="34" charset="-122"/>
+                <a:cs typeface="Tajawal" pitchFamily="34" charset="-120"/>
+              </a:rPr>
+              <a:t>وجّه الكاميرا، واسمع القصة</a:t>
+            </a:r>
+            <a:endParaRPr lang="en-US" sz="3800" dirty="0"/>
           </a:p>
         </p:txBody>
       </p:sp>
@@ -2391,9 +2463,9 @@
                 <a:solidFill>
                   <a:srgbClr val="DD8C58"/>
                 </a:solidFill>
-                <a:latin typeface="Arial" pitchFamily="34" charset="0"/>
-                <a:ea typeface="Arial" pitchFamily="34" charset="-122"/>
-                <a:cs typeface="Arial" pitchFamily="34" charset="-120"/>
+                <a:latin typeface="Tajawal" pitchFamily="34" charset="0"/>
+                <a:ea typeface="Tajawal" pitchFamily="34" charset="-122"/>
+                <a:cs typeface="Tajawal" pitchFamily="34" charset="-120"/>
               </a:rPr>
               <a:t>وجّه</a:t>
             </a:r>
@@ -2433,11 +2505,11 @@
                 <a:solidFill>
                   <a:srgbClr val="A2977F"/>
                 </a:solidFill>
-                <a:latin typeface="Arial" pitchFamily="34" charset="0"/>
-                <a:ea typeface="Arial" pitchFamily="34" charset="-122"/>
-                <a:cs typeface="Arial" pitchFamily="34" charset="-120"/>
-              </a:rPr>
-              <a:t>الكاميرا تمسح باستمرار وأنت تحرّك يدك — لا تحتاج لقطةً مثالية.</a:t>
+                <a:latin typeface="Tajawal" pitchFamily="34" charset="0"/>
+                <a:ea typeface="Tajawal" pitchFamily="34" charset="-122"/>
+                <a:cs typeface="Tajawal" pitchFamily="34" charset="-120"/>
+              </a:rPr>
+              <a:t>الكاميرا تمسح باستمرار وأنت تحرك يدك، فلا تحتاج لقطة مثالية.</a:t>
             </a:r>
             <a:endParaRPr lang="en-US" sz="1350" dirty="0"/>
           </a:p>
@@ -2472,11 +2544,11 @@
                 <a:solidFill>
                   <a:srgbClr val="DD8C58"/>
                 </a:solidFill>
-                <a:latin typeface="Arial" pitchFamily="34" charset="0"/>
-                <a:ea typeface="Arial" pitchFamily="34" charset="-122"/>
-                <a:cs typeface="Arial" pitchFamily="34" charset="-120"/>
-              </a:rPr>
-              <a:t>يتعرّف</a:t>
+                <a:latin typeface="Tajawal" pitchFamily="34" charset="0"/>
+                <a:ea typeface="Tajawal" pitchFamily="34" charset="-122"/>
+                <a:cs typeface="Tajawal" pitchFamily="34" charset="-120"/>
+              </a:rPr>
+              <a:t>يتعرف</a:t>
             </a:r>
             <a:endParaRPr lang="en-US" sz="2200" dirty="0"/>
           </a:p>
@@ -2514,11 +2586,11 @@
                 <a:solidFill>
                   <a:srgbClr val="A2977F"/>
                 </a:solidFill>
-                <a:latin typeface="Arial" pitchFamily="34" charset="0"/>
-                <a:ea typeface="Arial" pitchFamily="34" charset="-122"/>
-                <a:cs typeface="Arial" pitchFamily="34" charset="-120"/>
-              </a:rPr>
-              <a:t>يسمّي اللوحة التي أمامك بعينها، لا «نقوشًا صخرية» فحسب.</a:t>
+                <a:latin typeface="Tajawal" pitchFamily="34" charset="0"/>
+                <a:ea typeface="Tajawal" pitchFamily="34" charset="-122"/>
+                <a:cs typeface="Tajawal" pitchFamily="34" charset="-120"/>
+              </a:rPr>
+              <a:t>يحدد اللوحة التي أمامك بالاسم، لا «نقوش صخرية» فقط.</a:t>
             </a:r>
             <a:endParaRPr lang="en-US" sz="1350" dirty="0"/>
           </a:p>
@@ -2553,9 +2625,9 @@
                 <a:solidFill>
                   <a:srgbClr val="DD8C58"/>
                 </a:solidFill>
-                <a:latin typeface="Arial" pitchFamily="34" charset="0"/>
-                <a:ea typeface="Arial" pitchFamily="34" charset="-122"/>
-                <a:cs typeface="Arial" pitchFamily="34" charset="-120"/>
+                <a:latin typeface="Tajawal" pitchFamily="34" charset="0"/>
+                <a:ea typeface="Tajawal" pitchFamily="34" charset="-122"/>
+                <a:cs typeface="Tajawal" pitchFamily="34" charset="-120"/>
               </a:rPr>
               <a:t>اسمع</a:t>
             </a:r>
@@ -2595,11 +2667,11 @@
                 <a:solidFill>
                   <a:srgbClr val="A2977F"/>
                 </a:solidFill>
-                <a:latin typeface="Arial" pitchFamily="34" charset="0"/>
-                <a:ea typeface="Arial" pitchFamily="34" charset="-122"/>
-                <a:cs typeface="Arial" pitchFamily="34" charset="-120"/>
-              </a:rPr>
-              <a:t>تُروى القصّة بلغتك، مسموعةً، ومعها تاريخ الموقع.</a:t>
+                <a:latin typeface="Tajawal" pitchFamily="34" charset="0"/>
+                <a:ea typeface="Tajawal" pitchFamily="34" charset="-122"/>
+                <a:cs typeface="Tajawal" pitchFamily="34" charset="-120"/>
+              </a:rPr>
+              <a:t>تسمع القصة بصوت، بلغتك أنت، ومعها تاريخ الموقع.</a:t>
             </a:r>
             <a:endParaRPr lang="en-US" sz="1350" dirty="0"/>
           </a:p>
@@ -2653,7 +2725,7 @@
           <a:bodyPr wrap="square" lIns="0" tIns="0" rIns="0" bIns="0" rtlCol="0" anchor="ctr"/>
           <a:lstStyle/>
           <a:p>
-            <a:pPr algn="ctr" indent="0" marL="0">
+            <a:pPr rtl="1" algn="ctr" indent="0" marL="0">
               <a:buNone/>
             </a:pPr>
             <a:r>
@@ -2661,9 +2733,9 @@
                 <a:solidFill>
                   <a:srgbClr val="DD8C58"/>
                 </a:solidFill>
-                <a:latin typeface="Arial" pitchFamily="34" charset="0"/>
-                <a:ea typeface="Arial" pitchFamily="34" charset="-122"/>
-                <a:cs typeface="Arial" pitchFamily="34" charset="-120"/>
+                <a:latin typeface="Tajawal" pitchFamily="34" charset="0"/>
+                <a:ea typeface="Tajawal" pitchFamily="34" charset="-122"/>
+                <a:cs typeface="Tajawal" pitchFamily="34" charset="-120"/>
               </a:rPr>
               <a:t>٢٩</a:t>
             </a:r>
@@ -2679,7 +2751,7 @@
         </p:nvSpPr>
         <p:spPr>
           <a:xfrm>
-            <a:off x="9006840" y="5285232"/>
+            <a:off x="9006840" y="5303520"/>
             <a:ext cx="1051560" cy="365760"/>
           </a:xfrm>
           <a:prstGeom prst="rect">
@@ -2700,9 +2772,9 @@
                 <a:solidFill>
                   <a:srgbClr val="A2977F"/>
                 </a:solidFill>
-                <a:latin typeface="Arial" pitchFamily="34" charset="0"/>
-                <a:ea typeface="Arial" pitchFamily="34" charset="-122"/>
-                <a:cs typeface="Arial" pitchFamily="34" charset="-120"/>
+                <a:latin typeface="Tajawal" pitchFamily="34" charset="0"/>
+                <a:ea typeface="Tajawal" pitchFamily="34" charset="-122"/>
+                <a:cs typeface="Tajawal" pitchFamily="34" charset="-120"/>
               </a:rPr>
               <a:t>لغة</a:t>
             </a:r>
@@ -2731,7 +2803,7 @@
           <a:bodyPr wrap="square" lIns="0" tIns="0" rIns="0" bIns="0" rtlCol="0" anchor="ctr"/>
           <a:lstStyle/>
           <a:p>
-            <a:pPr algn="ctr" indent="0" marL="0">
+            <a:pPr rtl="1" algn="ctr" indent="0" marL="0">
               <a:buNone/>
             </a:pPr>
             <a:r>
@@ -2739,9 +2811,9 @@
                 <a:solidFill>
                   <a:srgbClr val="EFAE6E"/>
                 </a:solidFill>
-                <a:latin typeface="Arial" pitchFamily="34" charset="0"/>
-                <a:ea typeface="Arial" pitchFamily="34" charset="-122"/>
-                <a:cs typeface="Arial" pitchFamily="34" charset="-120"/>
+                <a:latin typeface="Tajawal" pitchFamily="34" charset="0"/>
+                <a:ea typeface="Tajawal" pitchFamily="34" charset="-122"/>
+                <a:cs typeface="Tajawal" pitchFamily="34" charset="-120"/>
               </a:rPr>
               <a:t>١٠</a:t>
             </a:r>
@@ -2757,7 +2829,7 @@
         </p:nvSpPr>
         <p:spPr>
           <a:xfrm>
-            <a:off x="6035040" y="5285232"/>
+            <a:off x="6035040" y="5303520"/>
             <a:ext cx="1600200" cy="365760"/>
           </a:xfrm>
           <a:prstGeom prst="rect">
@@ -2778,11 +2850,11 @@
                 <a:solidFill>
                   <a:srgbClr val="A2977F"/>
                 </a:solidFill>
-                <a:latin typeface="Arial" pitchFamily="34" charset="0"/>
-                <a:ea typeface="Arial" pitchFamily="34" charset="-122"/>
-                <a:cs typeface="Arial" pitchFamily="34" charset="-120"/>
-              </a:rPr>
-              <a:t>لوحات موثّقة</a:t>
+                <a:latin typeface="Tajawal" pitchFamily="34" charset="0"/>
+                <a:ea typeface="Tajawal" pitchFamily="34" charset="-122"/>
+                <a:cs typeface="Tajawal" pitchFamily="34" charset="-120"/>
+              </a:rPr>
+              <a:t>لوحات موثقة</a:t>
             </a:r>
             <a:endParaRPr lang="en-US" sz="1300" dirty="0"/>
           </a:p>
@@ -2857,17 +2929,17 @@
               <a:buNone/>
             </a:pPr>
             <a:r>
-              <a:rPr lang="en-US" sz="4000" b="1" dirty="0">
+              <a:rPr lang="en-US" sz="3800" b="1" dirty="0">
                 <a:solidFill>
                   <a:srgbClr val="E8DCC8"/>
                 </a:solidFill>
-                <a:latin typeface="Arial" pitchFamily="34" charset="0"/>
-                <a:ea typeface="Arial" pitchFamily="34" charset="-122"/>
-                <a:cs typeface="Arial" pitchFamily="34" charset="-120"/>
+                <a:latin typeface="Tajawal" pitchFamily="34" charset="0"/>
+                <a:ea typeface="Tajawal" pitchFamily="34" charset="-122"/>
+                <a:cs typeface="Tajawal" pitchFamily="34" charset="-120"/>
               </a:rPr>
               <a:t>النموذج: DINOv3</a:t>
             </a:r>
-            <a:endParaRPr lang="en-US" sz="4000" dirty="0"/>
+            <a:endParaRPr lang="en-US" sz="3800" dirty="0"/>
           </a:p>
         </p:txBody>
       </p:sp>
@@ -2879,12 +2951,12 @@
         </p:nvSpPr>
         <p:spPr>
           <a:xfrm>
-            <a:off x="5349240" y="1600200"/>
-            <a:ext cx="6172200" cy="4160520"/>
+            <a:off x="4160520" y="1554480"/>
+            <a:ext cx="7360920" cy="4251960"/>
           </a:xfrm>
           <a:prstGeom prst="roundRect">
             <a:avLst>
-              <a:gd name="adj" fmla="val 2198"/>
+              <a:gd name="adj" fmla="val 2151"/>
             </a:avLst>
           </a:prstGeom>
           <a:solidFill>
@@ -2906,8 +2978,8 @@
         </p:nvSpPr>
         <p:spPr>
           <a:xfrm>
-            <a:off x="5715000" y="1920240"/>
-            <a:ext cx="5440680" cy="502920"/>
+            <a:off x="4526280" y="1828800"/>
+            <a:ext cx="6629400" cy="502920"/>
           </a:xfrm>
           <a:prstGeom prst="rect">
             <a:avLst/>
@@ -2945,8 +3017,86 @@
         </p:nvSpPr>
         <p:spPr>
           <a:xfrm>
-            <a:off x="5715000" y="2560320"/>
-            <a:ext cx="5440680" cy="914400"/>
+            <a:off x="4526280" y="2468880"/>
+            <a:ext cx="6629400" cy="457200"/>
+          </a:xfrm>
+          <a:prstGeom prst="rect">
+            <a:avLst/>
+          </a:prstGeom>
+          <a:noFill/>
+          <a:ln/>
+        </p:spPr>
+        <p:txBody>
+          <a:bodyPr wrap="square" lIns="0" tIns="0" rIns="0" bIns="0" rtlCol="0" anchor="ctr"/>
+          <a:lstStyle/>
+          <a:p>
+            <a:pPr rtl="1" algn="r" indent="0" marL="0">
+              <a:buNone/>
+            </a:pPr>
+            <a:r>
+              <a:rPr lang="en-US" sz="1600" dirty="0">
+                <a:solidFill>
+                  <a:srgbClr val="A2977F"/>
+                </a:solidFill>
+                <a:latin typeface="Tajawal" pitchFamily="34" charset="0"/>
+                <a:ea typeface="Tajawal" pitchFamily="34" charset="-122"/>
+                <a:cs typeface="Tajawal" pitchFamily="34" charset="-120"/>
+              </a:rPr>
+              <a:t>نموذج رؤية من Meta، تدرب على ١٫٧ مليار صورة بدون أي وسم بشري.</a:t>
+            </a:r>
+            <a:endParaRPr lang="en-US" sz="1600" dirty="0"/>
+          </a:p>
+        </p:txBody>
+      </p:sp>
+      <p:sp>
+        <p:nvSpPr>
+          <p:cNvPr id="6" name="Text 4"/>
+          <p:cNvSpPr/>
+          <p:nvPr/>
+        </p:nvSpPr>
+        <p:spPr>
+          <a:xfrm>
+            <a:off x="4526280" y="3017520"/>
+            <a:ext cx="6629400" cy="457200"/>
+          </a:xfrm>
+          <a:prstGeom prst="rect">
+            <a:avLst/>
+          </a:prstGeom>
+          <a:noFill/>
+          <a:ln/>
+        </p:spPr>
+        <p:txBody>
+          <a:bodyPr wrap="square" lIns="0" tIns="0" rIns="0" bIns="0" rtlCol="0" anchor="ctr"/>
+          <a:lstStyle/>
+          <a:p>
+            <a:pPr rtl="1" algn="r" indent="0" marL="0">
+              <a:buNone/>
+            </a:pPr>
+            <a:r>
+              <a:rPr lang="en-US" sz="1600" dirty="0">
+                <a:solidFill>
+                  <a:srgbClr val="E8DCC8"/>
+                </a:solidFill>
+                <a:latin typeface="Tajawal" pitchFamily="34" charset="0"/>
+                <a:ea typeface="Tajawal" pitchFamily="34" charset="-122"/>
+                <a:cs typeface="Tajawal" pitchFamily="34" charset="-120"/>
+              </a:rPr>
+              <a:t>يحول أي صورة إلى ٣٨٤ رقما: بصمة تتقارب فيها الصور المتشابهة.</a:t>
+            </a:r>
+            <a:endParaRPr lang="en-US" sz="1600" dirty="0"/>
+          </a:p>
+        </p:txBody>
+      </p:sp>
+      <p:sp>
+        <p:nvSpPr>
+          <p:cNvPr id="7" name="Text 5"/>
+          <p:cNvSpPr/>
+          <p:nvPr/>
+        </p:nvSpPr>
+        <p:spPr>
+          <a:xfrm>
+            <a:off x="4526280" y="3611880"/>
+            <a:ext cx="6629400" cy="731520"/>
           </a:xfrm>
           <a:prstGeom prst="rect">
             <a:avLst/>
@@ -2960,123 +3110,102 @@
           <a:p>
             <a:pPr rtl="1" algn="r" indent="0" marL="0">
               <a:lnSpc>
-                <a:spcPts val="2500"/>
+                <a:spcPts val="2400"/>
               </a:lnSpc>
               <a:buNone/>
             </a:pPr>
             <a:r>
-              <a:rPr lang="en-US" sz="1550" dirty="0">
+              <a:rPr lang="en-US" sz="1450" dirty="0">
                 <a:solidFill>
                   <a:srgbClr val="A2977F"/>
                 </a:solidFill>
-                <a:latin typeface="Arial" pitchFamily="34" charset="0"/>
-                <a:ea typeface="Arial" pitchFamily="34" charset="-122"/>
-                <a:cs typeface="Arial" pitchFamily="34" charset="-120"/>
-              </a:rPr>
-              <a:t>محوّلٌ بصريّ من Meta، دُرّب تدريبًا ذاتيَّ الإشراف على نحو مليارٍ وسبعمئة مليون صورة — بلا تسميةٍ بشرية واحدة.</a:t>
-            </a:r>
-            <a:endParaRPr lang="en-US" sz="1550" dirty="0"/>
-          </a:p>
-        </p:txBody>
-      </p:sp>
-      <p:sp>
-        <p:nvSpPr>
-          <p:cNvPr id="6" name="Text 4"/>
-          <p:cNvSpPr/>
-          <p:nvPr/>
-        </p:nvSpPr>
-        <p:spPr>
-          <a:xfrm>
-            <a:off x="5715000" y="3611880"/>
-            <a:ext cx="5440680" cy="731520"/>
-          </a:xfrm>
-          <a:prstGeom prst="rect">
-            <a:avLst/>
-          </a:prstGeom>
-          <a:noFill/>
-          <a:ln/>
-        </p:spPr>
-        <p:txBody>
-          <a:bodyPr wrap="square" lIns="0" tIns="0" rIns="0" bIns="0" rtlCol="0" anchor="ctr"/>
-          <a:lstStyle/>
-          <a:p>
-            <a:pPr rtl="1" algn="r" indent="0" marL="0">
-              <a:lnSpc>
-                <a:spcPts val="2500"/>
-              </a:lnSpc>
-              <a:buNone/>
-            </a:pPr>
-            <a:r>
-              <a:rPr lang="en-US" sz="1550" dirty="0">
-                <a:solidFill>
-                  <a:srgbClr val="E8DCC8"/>
-                </a:solidFill>
-                <a:latin typeface="Arial" pitchFamily="34" charset="0"/>
-                <a:ea typeface="Arial" pitchFamily="34" charset="-122"/>
-                <a:cs typeface="Arial" pitchFamily="34" charset="-120"/>
-              </a:rPr>
-              <a:t>ويحوّل أيّ صورة إلى ٣٨٤ رقمًا — بصمةٌ عددية تتقارب فيها المتشابهات.</a:t>
-            </a:r>
-            <a:endParaRPr lang="en-US" sz="1550" dirty="0"/>
-          </a:p>
-        </p:txBody>
-      </p:sp>
-      <p:sp>
-        <p:nvSpPr>
-          <p:cNvPr id="7" name="Text 5"/>
-          <p:cNvSpPr/>
-          <p:nvPr/>
-        </p:nvSpPr>
-        <p:spPr>
-          <a:xfrm>
-            <a:off x="5715000" y="4480560"/>
-            <a:ext cx="5440680" cy="1005840"/>
-          </a:xfrm>
-          <a:prstGeom prst="rect">
-            <a:avLst/>
-          </a:prstGeom>
-          <a:noFill/>
-          <a:ln/>
-        </p:spPr>
-        <p:txBody>
-          <a:bodyPr wrap="square" lIns="0" tIns="0" rIns="0" bIns="0" rtlCol="0" anchor="ctr"/>
-          <a:lstStyle/>
-          <a:p>
-            <a:pPr rtl="1" algn="r" indent="0" marL="0">
-              <a:lnSpc>
-                <a:spcPts val="2300"/>
-              </a:lnSpc>
-              <a:buNone/>
-            </a:pPr>
-            <a:r>
-              <a:rPr lang="en-US" sz="1400" dirty="0">
-                <a:solidFill>
-                  <a:srgbClr val="A2977F"/>
-                </a:solidFill>
-                <a:latin typeface="Arial" pitchFamily="34" charset="0"/>
-                <a:ea typeface="Arial" pitchFamily="34" charset="-122"/>
-                <a:cs typeface="Arial" pitchFamily="34" charset="-120"/>
-              </a:rPr>
-              <a:t>ونحن نستعمل تمثيلاته كما هي: نخزّن بصمات ٢٠١ صورةٍ مرجعية من تصويرنا الميداني، ونبحث عن أقربها.</a:t>
-            </a:r>
-            <a:endParaRPr lang="en-US" sz="1400" dirty="0"/>
-          </a:p>
-        </p:txBody>
-      </p:sp>
-      <p:sp>
-        <p:nvSpPr>
-          <p:cNvPr id="8" name="Shape 6"/>
-          <p:cNvSpPr/>
-          <p:nvPr/>
-        </p:nvSpPr>
-        <p:spPr>
-          <a:xfrm>
-            <a:off x="685800" y="1600200"/>
-            <a:ext cx="4434840" cy="950976"/>
+                <a:latin typeface="Tajawal" pitchFamily="34" charset="0"/>
+                <a:ea typeface="Tajawal" pitchFamily="34" charset="-122"/>
+                <a:cs typeface="Tajawal" pitchFamily="34" charset="-120"/>
+              </a:rPr>
+              <a:t>ونحن نستخدمه كما هو: حفظنا بصمات ٢٠١ صورة التقطناها في الموقع، وعند كل مسح نبحث عن أقربها.</a:t>
+            </a:r>
+            <a:endParaRPr lang="en-US" sz="1450" dirty="0"/>
+          </a:p>
+        </p:txBody>
+      </p:sp>
+      <p:pic>
+        <p:nvPicPr>
+          <p:cNvPr id="8" name="Image 0" descr="preencoded.png">    </p:cNvPr>
+          <p:cNvPicPr>
+            <a:picLocks noChangeAspect="1"/>
+          </p:cNvPicPr>
+          <p:nvPr/>
+        </p:nvPicPr>
+        <p:blipFill>
+          <a:blip r:embed="rId1"/>
+          <a:stretch>
+            <a:fillRect/>
+          </a:stretch>
+        </p:blipFill>
+        <p:spPr>
+          <a:xfrm>
+            <a:off x="10607040" y="4526280"/>
+            <a:ext cx="658368" cy="1152144"/>
+          </a:xfrm>
+          <a:prstGeom prst="rect">
+            <a:avLst/>
+          </a:prstGeom>
+        </p:spPr>
+      </p:pic>
+      <p:sp>
+        <p:nvSpPr>
+          <p:cNvPr id="9" name="Text 6"/>
+          <p:cNvSpPr/>
+          <p:nvPr/>
+        </p:nvSpPr>
+        <p:spPr>
+          <a:xfrm>
+            <a:off x="4526280" y="4983480"/>
+            <a:ext cx="5760720" cy="411480"/>
+          </a:xfrm>
+          <a:prstGeom prst="rect">
+            <a:avLst/>
+          </a:prstGeom>
+          <a:noFill/>
+          <a:ln/>
+        </p:spPr>
+        <p:txBody>
+          <a:bodyPr wrap="square" lIns="0" tIns="0" rIns="0" bIns="0" rtlCol="0" anchor="ctr"/>
+          <a:lstStyle/>
+          <a:p>
+            <a:pPr rtl="1" algn="r" indent="0" marL="0">
+              <a:buNone/>
+            </a:pPr>
+            <a:r>
+              <a:rPr lang="en-US" sz="1500" i="1" dirty="0">
+                <a:solidFill>
+                  <a:srgbClr val="EFAE6E"/>
+                </a:solidFill>
+                <a:latin typeface="Tajawal" pitchFamily="34" charset="0"/>
+                <a:ea typeface="Tajawal" pitchFamily="34" charset="-122"/>
+                <a:cs typeface="Tajawal" pitchFamily="34" charset="-120"/>
+              </a:rPr>
+              <a:t>يرى، فيتعرف</a:t>
+            </a:r>
+            <a:endParaRPr lang="en-US" sz="1500" dirty="0"/>
+          </a:p>
+        </p:txBody>
+      </p:sp>
+      <p:sp>
+        <p:nvSpPr>
+          <p:cNvPr id="10" name="Shape 7"/>
+          <p:cNvSpPr/>
+          <p:nvPr/>
+        </p:nvSpPr>
+        <p:spPr>
+          <a:xfrm>
+            <a:off x="685800" y="1554480"/>
+            <a:ext cx="3246120" cy="960120"/>
           </a:xfrm>
           <a:prstGeom prst="roundRect">
             <a:avLst>
-              <a:gd name="adj" fmla="val 9615"/>
+              <a:gd name="adj" fmla="val 9524"/>
             </a:avLst>
           </a:prstGeom>
           <a:solidFill>
@@ -3092,96 +3221,96 @@
       </p:sp>
       <p:sp>
         <p:nvSpPr>
-          <p:cNvPr id="9" name="Text 7"/>
-          <p:cNvSpPr/>
-          <p:nvPr/>
-        </p:nvSpPr>
-        <p:spPr>
-          <a:xfrm>
-            <a:off x="960120" y="1719072"/>
-            <a:ext cx="3886200" cy="365760"/>
-          </a:xfrm>
-          <a:prstGeom prst="rect">
-            <a:avLst/>
-          </a:prstGeom>
-          <a:noFill/>
-          <a:ln/>
-        </p:spPr>
-        <p:txBody>
-          <a:bodyPr wrap="square" lIns="0" tIns="0" rIns="0" bIns="0" rtlCol="0" anchor="ctr"/>
-          <a:lstStyle/>
-          <a:p>
-            <a:pPr rtl="1" algn="r" indent="0" marL="0">
-              <a:buNone/>
-            </a:pPr>
-            <a:r>
-              <a:rPr lang="en-US" sz="1650" b="1" dirty="0">
+          <p:cNvPr id="11" name="Text 8"/>
+          <p:cNvSpPr/>
+          <p:nvPr/>
+        </p:nvSpPr>
+        <p:spPr>
+          <a:xfrm>
+            <a:off x="941832" y="1673352"/>
+            <a:ext cx="2734056" cy="365760"/>
+          </a:xfrm>
+          <a:prstGeom prst="rect">
+            <a:avLst/>
+          </a:prstGeom>
+          <a:noFill/>
+          <a:ln/>
+        </p:spPr>
+        <p:txBody>
+          <a:bodyPr wrap="square" lIns="0" tIns="0" rIns="0" bIns="0" rtlCol="0" anchor="ctr"/>
+          <a:lstStyle/>
+          <a:p>
+            <a:pPr rtl="1" algn="r" indent="0" marL="0">
+              <a:buNone/>
+            </a:pPr>
+            <a:r>
+              <a:rPr lang="en-US" sz="1600" b="1" dirty="0">
                 <a:solidFill>
                   <a:srgbClr val="EFAE6E"/>
                 </a:solidFill>
-                <a:latin typeface="Arial" pitchFamily="34" charset="0"/>
-                <a:ea typeface="Arial" pitchFamily="34" charset="-122"/>
-                <a:cs typeface="Arial" pitchFamily="34" charset="-120"/>
-              </a:rPr>
-              <a:t>يميّز الأمثلة</a:t>
-            </a:r>
-            <a:endParaRPr lang="en-US" sz="1650" dirty="0"/>
-          </a:p>
-        </p:txBody>
-      </p:sp>
-      <p:sp>
-        <p:nvSpPr>
-          <p:cNvPr id="10" name="Text 8"/>
-          <p:cNvSpPr/>
-          <p:nvPr/>
-        </p:nvSpPr>
-        <p:spPr>
-          <a:xfrm>
-            <a:off x="960120" y="2121408"/>
-            <a:ext cx="3886200" cy="347472"/>
-          </a:xfrm>
-          <a:prstGeom prst="rect">
-            <a:avLst/>
-          </a:prstGeom>
-          <a:noFill/>
-          <a:ln/>
-        </p:spPr>
-        <p:txBody>
-          <a:bodyPr wrap="square" lIns="0" tIns="0" rIns="0" bIns="0" rtlCol="0" anchor="ctr"/>
-          <a:lstStyle/>
-          <a:p>
-            <a:pPr rtl="1" algn="r" indent="0" marL="0">
-              <a:buNone/>
-            </a:pPr>
-            <a:r>
-              <a:rPr lang="en-US" sz="1250" dirty="0">
+                <a:latin typeface="Tajawal" pitchFamily="34" charset="0"/>
+                <a:ea typeface="Tajawal" pitchFamily="34" charset="-122"/>
+                <a:cs typeface="Tajawal" pitchFamily="34" charset="-120"/>
+              </a:rPr>
+              <a:t>يميز الشيء نفسه</a:t>
+            </a:r>
+            <a:endParaRPr lang="en-US" sz="1600" dirty="0"/>
+          </a:p>
+        </p:txBody>
+      </p:sp>
+      <p:sp>
+        <p:nvSpPr>
+          <p:cNvPr id="12" name="Text 9"/>
+          <p:cNvSpPr/>
+          <p:nvPr/>
+        </p:nvSpPr>
+        <p:spPr>
+          <a:xfrm>
+            <a:off x="941832" y="2075688"/>
+            <a:ext cx="2734056" cy="347472"/>
+          </a:xfrm>
+          <a:prstGeom prst="rect">
+            <a:avLst/>
+          </a:prstGeom>
+          <a:noFill/>
+          <a:ln/>
+        </p:spPr>
+        <p:txBody>
+          <a:bodyPr wrap="square" lIns="0" tIns="0" rIns="0" bIns="0" rtlCol="0" anchor="ctr"/>
+          <a:lstStyle/>
+          <a:p>
+            <a:pPr rtl="1" algn="r" indent="0" marL="0">
+              <a:buNone/>
+            </a:pPr>
+            <a:r>
+              <a:rPr lang="en-US" sz="1200" dirty="0">
                 <a:solidFill>
                   <a:srgbClr val="A2977F"/>
                 </a:solidFill>
-                <a:latin typeface="Arial" pitchFamily="34" charset="0"/>
-                <a:ea typeface="Arial" pitchFamily="34" charset="-122"/>
-                <a:cs typeface="Arial" pitchFamily="34" charset="-120"/>
-              </a:rPr>
-              <a:t>هذه الصخرة بعينها لا صخرةً ما</a:t>
-            </a:r>
-            <a:endParaRPr lang="en-US" sz="1250" dirty="0"/>
-          </a:p>
-        </p:txBody>
-      </p:sp>
-      <p:sp>
-        <p:nvSpPr>
-          <p:cNvPr id="11" name="Shape 9"/>
-          <p:cNvSpPr/>
-          <p:nvPr/>
-        </p:nvSpPr>
-        <p:spPr>
-          <a:xfrm>
-            <a:off x="685800" y="2679192"/>
-            <a:ext cx="4434840" cy="950976"/>
+                <a:latin typeface="Tajawal" pitchFamily="34" charset="0"/>
+                <a:ea typeface="Tajawal" pitchFamily="34" charset="-122"/>
+                <a:cs typeface="Tajawal" pitchFamily="34" charset="-120"/>
+              </a:rPr>
+              <a:t>هذه الصخرة بالذات، لا «صخرة ما»</a:t>
+            </a:r>
+            <a:endParaRPr lang="en-US" sz="1200" dirty="0"/>
+          </a:p>
+        </p:txBody>
+      </p:sp>
+      <p:sp>
+        <p:nvSpPr>
+          <p:cNvPr id="13" name="Shape 10"/>
+          <p:cNvSpPr/>
+          <p:nvPr/>
+        </p:nvSpPr>
+        <p:spPr>
+          <a:xfrm>
+            <a:off x="685800" y="2651760"/>
+            <a:ext cx="3246120" cy="960120"/>
           </a:xfrm>
           <a:prstGeom prst="roundRect">
             <a:avLst>
-              <a:gd name="adj" fmla="val 9615"/>
+              <a:gd name="adj" fmla="val 9524"/>
             </a:avLst>
           </a:prstGeom>
           <a:solidFill>
@@ -3197,96 +3326,96 @@
       </p:sp>
       <p:sp>
         <p:nvSpPr>
-          <p:cNvPr id="12" name="Text 10"/>
-          <p:cNvSpPr/>
-          <p:nvPr/>
-        </p:nvSpPr>
-        <p:spPr>
-          <a:xfrm>
-            <a:off x="960120" y="2798064"/>
-            <a:ext cx="3886200" cy="365760"/>
-          </a:xfrm>
-          <a:prstGeom prst="rect">
-            <a:avLst/>
-          </a:prstGeom>
-          <a:noFill/>
-          <a:ln/>
-        </p:spPr>
-        <p:txBody>
-          <a:bodyPr wrap="square" lIns="0" tIns="0" rIns="0" bIns="0" rtlCol="0" anchor="ctr"/>
-          <a:lstStyle/>
-          <a:p>
-            <a:pPr rtl="1" algn="r" indent="0" marL="0">
-              <a:buNone/>
-            </a:pPr>
-            <a:r>
-              <a:rPr lang="en-US" sz="1650" b="1" dirty="0">
+          <p:cNvPr id="14" name="Text 11"/>
+          <p:cNvSpPr/>
+          <p:nvPr/>
+        </p:nvSpPr>
+        <p:spPr>
+          <a:xfrm>
+            <a:off x="941832" y="2770632"/>
+            <a:ext cx="2734056" cy="365760"/>
+          </a:xfrm>
+          <a:prstGeom prst="rect">
+            <a:avLst/>
+          </a:prstGeom>
+          <a:noFill/>
+          <a:ln/>
+        </p:spPr>
+        <p:txBody>
+          <a:bodyPr wrap="square" lIns="0" tIns="0" rIns="0" bIns="0" rtlCol="0" anchor="ctr"/>
+          <a:lstStyle/>
+          <a:p>
+            <a:pPr rtl="1" algn="r" indent="0" marL="0">
+              <a:buNone/>
+            </a:pPr>
+            <a:r>
+              <a:rPr lang="en-US" sz="1600" b="1" dirty="0">
                 <a:solidFill>
                   <a:srgbClr val="EFAE6E"/>
                 </a:solidFill>
-                <a:latin typeface="Arial" pitchFamily="34" charset="0"/>
-                <a:ea typeface="Arial" pitchFamily="34" charset="-122"/>
-                <a:cs typeface="Arial" pitchFamily="34" charset="-120"/>
-              </a:rPr>
-              <a:t>بلا تسميات</a:t>
-            </a:r>
-            <a:endParaRPr lang="en-US" sz="1650" dirty="0"/>
-          </a:p>
-        </p:txBody>
-      </p:sp>
-      <p:sp>
-        <p:nvSpPr>
-          <p:cNvPr id="13" name="Text 11"/>
-          <p:cNvSpPr/>
-          <p:nvPr/>
-        </p:nvSpPr>
-        <p:spPr>
-          <a:xfrm>
-            <a:off x="960120" y="3200400"/>
-            <a:ext cx="3886200" cy="347472"/>
-          </a:xfrm>
-          <a:prstGeom prst="rect">
-            <a:avLst/>
-          </a:prstGeom>
-          <a:noFill/>
-          <a:ln/>
-        </p:spPr>
-        <p:txBody>
-          <a:bodyPr wrap="square" lIns="0" tIns="0" rIns="0" bIns="0" rtlCol="0" anchor="ctr"/>
-          <a:lstStyle/>
-          <a:p>
-            <a:pPr rtl="1" algn="r" indent="0" marL="0">
-              <a:buNone/>
-            </a:pPr>
-            <a:r>
-              <a:rPr lang="en-US" sz="1250" dirty="0">
+                <a:latin typeface="Tajawal" pitchFamily="34" charset="0"/>
+                <a:ea typeface="Tajawal" pitchFamily="34" charset="-122"/>
+                <a:cs typeface="Tajawal" pitchFamily="34" charset="-120"/>
+              </a:rPr>
+              <a:t>بدون وسوم</a:t>
+            </a:r>
+            <a:endParaRPr lang="en-US" sz="1600" dirty="0"/>
+          </a:p>
+        </p:txBody>
+      </p:sp>
+      <p:sp>
+        <p:nvSpPr>
+          <p:cNvPr id="15" name="Text 12"/>
+          <p:cNvSpPr/>
+          <p:nvPr/>
+        </p:nvSpPr>
+        <p:spPr>
+          <a:xfrm>
+            <a:off x="941832" y="3172968"/>
+            <a:ext cx="2734056" cy="347472"/>
+          </a:xfrm>
+          <a:prstGeom prst="rect">
+            <a:avLst/>
+          </a:prstGeom>
+          <a:noFill/>
+          <a:ln/>
+        </p:spPr>
+        <p:txBody>
+          <a:bodyPr wrap="square" lIns="0" tIns="0" rIns="0" bIns="0" rtlCol="0" anchor="ctr"/>
+          <a:lstStyle/>
+          <a:p>
+            <a:pPr rtl="1" algn="r" indent="0" marL="0">
+              <a:buNone/>
+            </a:pPr>
+            <a:r>
+              <a:rPr lang="en-US" sz="1200" dirty="0">
                 <a:solidFill>
                   <a:srgbClr val="A2977F"/>
                 </a:solidFill>
-                <a:latin typeface="Arial" pitchFamily="34" charset="0"/>
-                <a:ea typeface="Arial" pitchFamily="34" charset="-122"/>
-                <a:cs typeface="Arial" pitchFamily="34" charset="-120"/>
-              </a:rPr>
-              <a:t>تعلّم الشكل والملمس دون معلّم</a:t>
-            </a:r>
-            <a:endParaRPr lang="en-US" sz="1250" dirty="0"/>
-          </a:p>
-        </p:txBody>
-      </p:sp>
-      <p:sp>
-        <p:nvSpPr>
-          <p:cNvPr id="14" name="Shape 12"/>
-          <p:cNvSpPr/>
-          <p:nvPr/>
-        </p:nvSpPr>
-        <p:spPr>
-          <a:xfrm>
-            <a:off x="685800" y="3758184"/>
-            <a:ext cx="4434840" cy="950976"/>
+                <a:latin typeface="Tajawal" pitchFamily="34" charset="0"/>
+                <a:ea typeface="Tajawal" pitchFamily="34" charset="-122"/>
+                <a:cs typeface="Tajawal" pitchFamily="34" charset="-120"/>
+              </a:rPr>
+              <a:t>تعلم الأشكال والملمس بلا معلم</a:t>
+            </a:r>
+            <a:endParaRPr lang="en-US" sz="1200" dirty="0"/>
+          </a:p>
+        </p:txBody>
+      </p:sp>
+      <p:sp>
+        <p:nvSpPr>
+          <p:cNvPr id="16" name="Shape 13"/>
+          <p:cNvSpPr/>
+          <p:nvPr/>
+        </p:nvSpPr>
+        <p:spPr>
+          <a:xfrm>
+            <a:off x="685800" y="3749040"/>
+            <a:ext cx="3246120" cy="960120"/>
           </a:xfrm>
           <a:prstGeom prst="roundRect">
             <a:avLst>
-              <a:gd name="adj" fmla="val 9615"/>
+              <a:gd name="adj" fmla="val 9524"/>
             </a:avLst>
           </a:prstGeom>
           <a:solidFill>
@@ -3302,96 +3431,96 @@
       </p:sp>
       <p:sp>
         <p:nvSpPr>
-          <p:cNvPr id="15" name="Text 13"/>
-          <p:cNvSpPr/>
-          <p:nvPr/>
-        </p:nvSpPr>
-        <p:spPr>
-          <a:xfrm>
-            <a:off x="960120" y="3877056"/>
-            <a:ext cx="3886200" cy="365760"/>
-          </a:xfrm>
-          <a:prstGeom prst="rect">
-            <a:avLst/>
-          </a:prstGeom>
-          <a:noFill/>
-          <a:ln/>
-        </p:spPr>
-        <p:txBody>
-          <a:bodyPr wrap="square" lIns="0" tIns="0" rIns="0" bIns="0" rtlCol="0" anchor="ctr"/>
-          <a:lstStyle/>
-          <a:p>
-            <a:pPr rtl="1" algn="r" indent="0" marL="0">
-              <a:buNone/>
-            </a:pPr>
-            <a:r>
-              <a:rPr lang="en-US" sz="1650" b="1" dirty="0">
+          <p:cNvPr id="17" name="Text 14"/>
+          <p:cNvSpPr/>
+          <p:nvPr/>
+        </p:nvSpPr>
+        <p:spPr>
+          <a:xfrm>
+            <a:off x="941832" y="3867912"/>
+            <a:ext cx="2734056" cy="365760"/>
+          </a:xfrm>
+          <a:prstGeom prst="rect">
+            <a:avLst/>
+          </a:prstGeom>
+          <a:noFill/>
+          <a:ln/>
+        </p:spPr>
+        <p:txBody>
+          <a:bodyPr wrap="square" lIns="0" tIns="0" rIns="0" bIns="0" rtlCol="0" anchor="ctr"/>
+          <a:lstStyle/>
+          <a:p>
+            <a:pPr rtl="1" algn="r" indent="0" marL="0">
+              <a:buNone/>
+            </a:pPr>
+            <a:r>
+              <a:rPr lang="en-US" sz="1600" b="1" dirty="0">
                 <a:solidFill>
                   <a:srgbClr val="EFAE6E"/>
                 </a:solidFill>
-                <a:latin typeface="Arial" pitchFamily="34" charset="0"/>
-                <a:ea typeface="Arial" pitchFamily="34" charset="-122"/>
-                <a:cs typeface="Arial" pitchFamily="34" charset="-120"/>
+                <a:latin typeface="Tajawal" pitchFamily="34" charset="0"/>
+                <a:ea typeface="Tajawal" pitchFamily="34" charset="-122"/>
+                <a:cs typeface="Tajawal" pitchFamily="34" charset="-120"/>
               </a:rPr>
               <a:t>٢١ مليون معامل</a:t>
             </a:r>
-            <a:endParaRPr lang="en-US" sz="1650" dirty="0"/>
-          </a:p>
-        </p:txBody>
-      </p:sp>
-      <p:sp>
-        <p:nvSpPr>
-          <p:cNvPr id="16" name="Text 14"/>
-          <p:cNvSpPr/>
-          <p:nvPr/>
-        </p:nvSpPr>
-        <p:spPr>
-          <a:xfrm>
-            <a:off x="960120" y="4279392"/>
-            <a:ext cx="3886200" cy="347472"/>
-          </a:xfrm>
-          <a:prstGeom prst="rect">
-            <a:avLst/>
-          </a:prstGeom>
-          <a:noFill/>
-          <a:ln/>
-        </p:spPr>
-        <p:txBody>
-          <a:bodyPr wrap="square" lIns="0" tIns="0" rIns="0" bIns="0" rtlCol="0" anchor="ctr"/>
-          <a:lstStyle/>
-          <a:p>
-            <a:pPr rtl="1" algn="r" indent="0" marL="0">
-              <a:buNone/>
-            </a:pPr>
-            <a:r>
-              <a:rPr lang="en-US" sz="1250" dirty="0">
+            <a:endParaRPr lang="en-US" sz="1600" dirty="0"/>
+          </a:p>
+        </p:txBody>
+      </p:sp>
+      <p:sp>
+        <p:nvSpPr>
+          <p:cNvPr id="18" name="Text 15"/>
+          <p:cNvSpPr/>
+          <p:nvPr/>
+        </p:nvSpPr>
+        <p:spPr>
+          <a:xfrm>
+            <a:off x="941832" y="4270248"/>
+            <a:ext cx="2734056" cy="347472"/>
+          </a:xfrm>
+          <a:prstGeom prst="rect">
+            <a:avLst/>
+          </a:prstGeom>
+          <a:noFill/>
+          <a:ln/>
+        </p:spPr>
+        <p:txBody>
+          <a:bodyPr wrap="square" lIns="0" tIns="0" rIns="0" bIns="0" rtlCol="0" anchor="ctr"/>
+          <a:lstStyle/>
+          <a:p>
+            <a:pPr rtl="1" algn="r" indent="0" marL="0">
+              <a:buNone/>
+            </a:pPr>
+            <a:r>
+              <a:rPr lang="en-US" sz="1200" dirty="0">
                 <a:solidFill>
                   <a:srgbClr val="A2977F"/>
                 </a:solidFill>
-                <a:latin typeface="Arial" pitchFamily="34" charset="0"/>
-                <a:ea typeface="Arial" pitchFamily="34" charset="-122"/>
-                <a:cs typeface="Arial" pitchFamily="34" charset="-120"/>
-              </a:rPr>
-              <a:t>و٢٢ ميغابايت بعد التكميم</a:t>
-            </a:r>
-            <a:endParaRPr lang="en-US" sz="1250" dirty="0"/>
-          </a:p>
-        </p:txBody>
-      </p:sp>
-      <p:sp>
-        <p:nvSpPr>
-          <p:cNvPr id="17" name="Shape 15"/>
-          <p:cNvSpPr/>
-          <p:nvPr/>
-        </p:nvSpPr>
-        <p:spPr>
-          <a:xfrm>
-            <a:off x="685800" y="4837176"/>
-            <a:ext cx="4434840" cy="950976"/>
+                <a:latin typeface="Tajawal" pitchFamily="34" charset="0"/>
+                <a:ea typeface="Tajawal" pitchFamily="34" charset="-122"/>
+                <a:cs typeface="Tajawal" pitchFamily="34" charset="-120"/>
+              </a:rPr>
+              <a:t>و٢٢ ميغابايت بعد الضغط</a:t>
+            </a:r>
+            <a:endParaRPr lang="en-US" sz="1200" dirty="0"/>
+          </a:p>
+        </p:txBody>
+      </p:sp>
+      <p:sp>
+        <p:nvSpPr>
+          <p:cNvPr id="19" name="Shape 16"/>
+          <p:cNvSpPr/>
+          <p:nvPr/>
+        </p:nvSpPr>
+        <p:spPr>
+          <a:xfrm>
+            <a:off x="685800" y="4846320"/>
+            <a:ext cx="3246120" cy="960120"/>
           </a:xfrm>
           <a:prstGeom prst="roundRect">
             <a:avLst>
-              <a:gd name="adj" fmla="val 9615"/>
+              <a:gd name="adj" fmla="val 9524"/>
             </a:avLst>
           </a:prstGeom>
           <a:solidFill>
@@ -3407,79 +3536,79 @@
       </p:sp>
       <p:sp>
         <p:nvSpPr>
-          <p:cNvPr id="18" name="Text 16"/>
-          <p:cNvSpPr/>
-          <p:nvPr/>
-        </p:nvSpPr>
-        <p:spPr>
-          <a:xfrm>
-            <a:off x="960120" y="4956048"/>
-            <a:ext cx="3886200" cy="365760"/>
-          </a:xfrm>
-          <a:prstGeom prst="rect">
-            <a:avLst/>
-          </a:prstGeom>
-          <a:noFill/>
-          <a:ln/>
-        </p:spPr>
-        <p:txBody>
-          <a:bodyPr wrap="square" lIns="0" tIns="0" rIns="0" bIns="0" rtlCol="0" anchor="ctr"/>
-          <a:lstStyle/>
-          <a:p>
-            <a:pPr rtl="1" algn="r" indent="0" marL="0">
-              <a:buNone/>
-            </a:pPr>
-            <a:r>
-              <a:rPr lang="en-US" sz="1650" b="1" dirty="0">
+          <p:cNvPr id="20" name="Text 17"/>
+          <p:cNvSpPr/>
+          <p:nvPr/>
+        </p:nvSpPr>
+        <p:spPr>
+          <a:xfrm>
+            <a:off x="941832" y="4965192"/>
+            <a:ext cx="2734056" cy="365760"/>
+          </a:xfrm>
+          <a:prstGeom prst="rect">
+            <a:avLst/>
+          </a:prstGeom>
+          <a:noFill/>
+          <a:ln/>
+        </p:spPr>
+        <p:txBody>
+          <a:bodyPr wrap="square" lIns="0" tIns="0" rIns="0" bIns="0" rtlCol="0" anchor="ctr"/>
+          <a:lstStyle/>
+          <a:p>
+            <a:pPr rtl="1" algn="r" indent="0" marL="0">
+              <a:buNone/>
+            </a:pPr>
+            <a:r>
+              <a:rPr lang="en-US" sz="1600" b="1" dirty="0">
                 <a:solidFill>
                   <a:srgbClr val="EFAE6E"/>
                 </a:solidFill>
-                <a:latin typeface="Arial" pitchFamily="34" charset="0"/>
-                <a:ea typeface="Arial" pitchFamily="34" charset="-122"/>
-                <a:cs typeface="Arial" pitchFamily="34" charset="-120"/>
-              </a:rPr>
-              <a:t>يعمل بلا ضبط</a:t>
-            </a:r>
-            <a:endParaRPr lang="en-US" sz="1650" dirty="0"/>
-          </a:p>
-        </p:txBody>
-      </p:sp>
-      <p:sp>
-        <p:nvSpPr>
-          <p:cNvPr id="19" name="Text 17"/>
-          <p:cNvSpPr/>
-          <p:nvPr/>
-        </p:nvSpPr>
-        <p:spPr>
-          <a:xfrm>
-            <a:off x="960120" y="5358384"/>
-            <a:ext cx="3886200" cy="347472"/>
-          </a:xfrm>
-          <a:prstGeom prst="rect">
-            <a:avLst/>
-          </a:prstGeom>
-          <a:noFill/>
-          <a:ln/>
-        </p:spPr>
-        <p:txBody>
-          <a:bodyPr wrap="square" lIns="0" tIns="0" rIns="0" bIns="0" rtlCol="0" anchor="ctr"/>
-          <a:lstStyle/>
-          <a:p>
-            <a:pPr rtl="1" algn="r" indent="0" marL="0">
-              <a:buNone/>
-            </a:pPr>
-            <a:r>
-              <a:rPr lang="en-US" sz="1250" dirty="0">
+                <a:latin typeface="Tajawal" pitchFamily="34" charset="0"/>
+                <a:ea typeface="Tajawal" pitchFamily="34" charset="-122"/>
+                <a:cs typeface="Tajawal" pitchFamily="34" charset="-120"/>
+              </a:rPr>
+              <a:t>بلا تدريب إضافي</a:t>
+            </a:r>
+            <a:endParaRPr lang="en-US" sz="1600" dirty="0"/>
+          </a:p>
+        </p:txBody>
+      </p:sp>
+      <p:sp>
+        <p:nvSpPr>
+          <p:cNvPr id="21" name="Text 18"/>
+          <p:cNvSpPr/>
+          <p:nvPr/>
+        </p:nvSpPr>
+        <p:spPr>
+          <a:xfrm>
+            <a:off x="941832" y="5367528"/>
+            <a:ext cx="2734056" cy="347472"/>
+          </a:xfrm>
+          <a:prstGeom prst="rect">
+            <a:avLst/>
+          </a:prstGeom>
+          <a:noFill/>
+          <a:ln/>
+        </p:spPr>
+        <p:txBody>
+          <a:bodyPr wrap="square" lIns="0" tIns="0" rIns="0" bIns="0" rtlCol="0" anchor="ctr"/>
+          <a:lstStyle/>
+          <a:p>
+            <a:pPr rtl="1" algn="r" indent="0" marL="0">
+              <a:buNone/>
+            </a:pPr>
+            <a:r>
+              <a:rPr lang="en-US" sz="1200" dirty="0">
                 <a:solidFill>
                   <a:srgbClr val="A2977F"/>
                 </a:solidFill>
-                <a:latin typeface="Arial" pitchFamily="34" charset="0"/>
-                <a:ea typeface="Arial" pitchFamily="34" charset="-122"/>
-                <a:cs typeface="Arial" pitchFamily="34" charset="-120"/>
-              </a:rPr>
-              <a:t>لم يرَ جبة قطّ، ويعرف لوحاتها</a:t>
-            </a:r>
-            <a:endParaRPr lang="en-US" sz="1250" dirty="0"/>
+                <a:latin typeface="Tajawal" pitchFamily="34" charset="0"/>
+                <a:ea typeface="Tajawal" pitchFamily="34" charset="-122"/>
+                <a:cs typeface="Tajawal" pitchFamily="34" charset="-120"/>
+              </a:rPr>
+              <a:t>لم ير جبة من قبل، ويعرف لوحاتها</a:t>
+            </a:r>
+            <a:endParaRPr lang="en-US" sz="1200" dirty="0"/>
           </a:p>
         </p:txBody>
       </p:sp>
@@ -3552,17 +3681,17 @@
               <a:buNone/>
             </a:pPr>
             <a:r>
-              <a:rPr lang="en-US" sz="4000" b="1" dirty="0">
+              <a:rPr lang="en-US" sz="3800" b="1" dirty="0">
                 <a:solidFill>
                   <a:srgbClr val="E8DCC8"/>
                 </a:solidFill>
-                <a:latin typeface="Arial" pitchFamily="34" charset="0"/>
-                <a:ea typeface="Arial" pitchFamily="34" charset="-122"/>
-                <a:cs typeface="Arial" pitchFamily="34" charset="-120"/>
-              </a:rPr>
-              <a:t>يعمل داخل الجوّال. كلّه.</a:t>
-            </a:r>
-            <a:endParaRPr lang="en-US" sz="4000" dirty="0"/>
+                <a:latin typeface="Tajawal" pitchFamily="34" charset="0"/>
+                <a:ea typeface="Tajawal" pitchFamily="34" charset="-122"/>
+                <a:cs typeface="Tajawal" pitchFamily="34" charset="-120"/>
+              </a:rPr>
+              <a:t>كل شيء داخل جوالك</a:t>
+            </a:r>
+            <a:endParaRPr lang="en-US" sz="3800" dirty="0"/>
           </a:p>
         </p:txBody>
       </p:sp>
@@ -3595,11 +3724,11 @@
                 <a:solidFill>
                   <a:srgbClr val="A2977F"/>
                 </a:solidFill>
-                <a:latin typeface="Arial" pitchFamily="34" charset="0"/>
-                <a:ea typeface="Arial" pitchFamily="34" charset="-122"/>
-                <a:cs typeface="Arial" pitchFamily="34" charset="-120"/>
-              </a:rPr>
-              <a:t>لا خادم، ولا مفتاح واجهة، ولا إنترنت بعد أوّل تحميل.</a:t>
+                <a:latin typeface="Tajawal" pitchFamily="34" charset="0"/>
+                <a:ea typeface="Tajawal" pitchFamily="34" charset="-122"/>
+                <a:cs typeface="Tajawal" pitchFamily="34" charset="-120"/>
+              </a:rPr>
+              <a:t>لا خادم، ولا مفتاح API، ولا إنترنت بعد أول تحميل</a:t>
             </a:r>
             <a:endParaRPr lang="en-US" sz="1900" dirty="0"/>
           </a:p>
@@ -3613,12 +3742,164 @@
         </p:nvSpPr>
         <p:spPr>
           <a:xfrm>
-            <a:off x="8835847" y="2286000"/>
-            <a:ext cx="2670048" cy="1920240"/>
+            <a:off x="868680" y="2011680"/>
+            <a:ext cx="2148840" cy="3931920"/>
           </a:xfrm>
           <a:prstGeom prst="roundRect">
             <a:avLst>
-              <a:gd name="adj" fmla="val 4762"/>
+              <a:gd name="adj" fmla="val 12766"/>
+            </a:avLst>
+          </a:prstGeom>
+          <a:solidFill>
+            <a:srgbClr val="151D2C"/>
+          </a:solidFill>
+          <a:ln w="25400">
+            <a:solidFill>
+              <a:srgbClr val="C97A4A"/>
+            </a:solidFill>
+            <a:prstDash val="solid"/>
+          </a:ln>
+        </p:spPr>
+      </p:sp>
+      <p:pic>
+        <p:nvPicPr>
+          <p:cNvPr id="5" name="Image 0" descr="preencoded.png">    </p:cNvPr>
+          <p:cNvPicPr>
+            <a:picLocks noChangeAspect="1"/>
+          </p:cNvPicPr>
+          <p:nvPr/>
+        </p:nvPicPr>
+        <p:blipFill>
+          <a:blip r:embed="rId1"/>
+          <a:stretch>
+            <a:fillRect/>
+          </a:stretch>
+        </p:blipFill>
+        <p:spPr>
+          <a:xfrm>
+            <a:off x="1078992" y="3246120"/>
+            <a:ext cx="1737360" cy="1106424"/>
+          </a:xfrm>
+          <a:prstGeom prst="rect">
+            <a:avLst/>
+          </a:prstGeom>
+        </p:spPr>
+      </p:pic>
+      <p:sp>
+        <p:nvSpPr>
+          <p:cNvPr id="6" name="Text 3"/>
+          <p:cNvSpPr/>
+          <p:nvPr/>
+        </p:nvSpPr>
+        <p:spPr>
+          <a:xfrm>
+            <a:off x="1051560" y="2395728"/>
+            <a:ext cx="1783080" cy="566928"/>
+          </a:xfrm>
+          <a:prstGeom prst="rect">
+            <a:avLst/>
+          </a:prstGeom>
+          <a:noFill/>
+          <a:ln/>
+        </p:spPr>
+        <p:txBody>
+          <a:bodyPr wrap="square" lIns="0" tIns="0" rIns="0" bIns="0" rtlCol="0" anchor="ctr"/>
+          <a:lstStyle/>
+          <a:p>
+            <a:pPr rtl="1" algn="ctr" indent="0" marL="0">
+              <a:buNone/>
+            </a:pPr>
+            <a:r>
+              <a:rPr lang="en-US" sz="3000" b="1" dirty="0">
+                <a:solidFill>
+                  <a:srgbClr val="DD8C58"/>
+                </a:solidFill>
+                <a:latin typeface="Reem Kufi" pitchFamily="34" charset="0"/>
+                <a:ea typeface="Reem Kufi" pitchFamily="34" charset="-122"/>
+                <a:cs typeface="Reem Kufi" pitchFamily="34" charset="-120"/>
+              </a:rPr>
+              <a:t>أثر</a:t>
+            </a:r>
+            <a:endParaRPr lang="en-US" sz="3000" dirty="0"/>
+          </a:p>
+        </p:txBody>
+      </p:sp>
+      <p:sp>
+        <p:nvSpPr>
+          <p:cNvPr id="7" name="Text 4"/>
+          <p:cNvSpPr/>
+          <p:nvPr/>
+        </p:nvSpPr>
+        <p:spPr>
+          <a:xfrm>
+            <a:off x="1051560" y="4709160"/>
+            <a:ext cx="1783080" cy="731520"/>
+          </a:xfrm>
+          <a:prstGeom prst="rect">
+            <a:avLst/>
+          </a:prstGeom>
+          <a:noFill/>
+          <a:ln/>
+        </p:spPr>
+        <p:txBody>
+          <a:bodyPr wrap="square" lIns="0" tIns="0" rIns="0" bIns="0" rtlCol="0" anchor="ctr"/>
+          <a:lstStyle/>
+          <a:p>
+            <a:pPr rtl="1" algn="ctr" indent="0" marL="0">
+              <a:lnSpc>
+                <a:spcPts val="1800"/>
+              </a:lnSpc>
+              <a:buNone/>
+            </a:pPr>
+            <a:r>
+              <a:rPr lang="en-US" sz="1200" dirty="0">
+                <a:solidFill>
+                  <a:srgbClr val="A2977F"/>
+                </a:solidFill>
+                <a:latin typeface="Tajawal" pitchFamily="34" charset="0"/>
+                <a:ea typeface="Tajawal" pitchFamily="34" charset="-122"/>
+                <a:cs typeface="Tajawal" pitchFamily="34" charset="-120"/>
+              </a:rPr>
+              <a:t>يعمل والجهاز</a:t>
+            </a:r>
+            <a:endParaRPr lang="en-US" sz="1200" dirty="0"/>
+          </a:p>
+          <a:p>
+            <a:pPr rtl="1" algn="ctr" indent="0" marL="0">
+              <a:lnSpc>
+                <a:spcPts val="1800"/>
+              </a:lnSpc>
+              <a:buNone/>
+            </a:pPr>
+            <a:r>
+              <a:rPr lang="en-US" sz="1200" dirty="0">
+                <a:solidFill>
+                  <a:srgbClr val="A2977F"/>
+                </a:solidFill>
+                <a:latin typeface="Tajawal" pitchFamily="34" charset="0"/>
+                <a:ea typeface="Tajawal" pitchFamily="34" charset="-122"/>
+                <a:cs typeface="Tajawal" pitchFamily="34" charset="-120"/>
+              </a:rPr>
+              <a:t>في وضع الطيران</a:t>
+            </a:r>
+            <a:endParaRPr lang="en-US" sz="1200" dirty="0"/>
+          </a:p>
+        </p:txBody>
+      </p:sp>
+      <p:sp>
+        <p:nvSpPr>
+          <p:cNvPr id="8" name="Shape 5"/>
+          <p:cNvSpPr/>
+          <p:nvPr/>
+        </p:nvSpPr>
+        <p:spPr>
+          <a:xfrm>
+            <a:off x="7555687" y="2011680"/>
+            <a:ext cx="3950208" cy="1737360"/>
+          </a:xfrm>
+          <a:prstGeom prst="roundRect">
+            <a:avLst>
+              <a:gd name="adj" fmla="val 5263"/>
             </a:avLst>
           </a:prstGeom>
           <a:solidFill>
@@ -3634,53 +3915,53 @@
       </p:sp>
       <p:sp>
         <p:nvSpPr>
-          <p:cNvPr id="5" name="Text 3"/>
-          <p:cNvSpPr/>
-          <p:nvPr/>
-        </p:nvSpPr>
-        <p:spPr>
-          <a:xfrm>
-            <a:off x="8835847" y="2542032"/>
-            <a:ext cx="2670048" cy="868680"/>
-          </a:xfrm>
-          <a:prstGeom prst="rect">
-            <a:avLst/>
-          </a:prstGeom>
-          <a:noFill/>
-          <a:ln/>
-        </p:spPr>
-        <p:txBody>
-          <a:bodyPr wrap="square" lIns="0" tIns="0" rIns="0" bIns="0" rtlCol="0" anchor="ctr"/>
-          <a:lstStyle/>
-          <a:p>
-            <a:pPr algn="ctr" indent="0" marL="0">
-              <a:buNone/>
-            </a:pPr>
-            <a:r>
-              <a:rPr lang="en-US" sz="4200" b="1" dirty="0">
+          <p:cNvPr id="9" name="Text 6"/>
+          <p:cNvSpPr/>
+          <p:nvPr/>
+        </p:nvSpPr>
+        <p:spPr>
+          <a:xfrm>
+            <a:off x="7555687" y="2267712"/>
+            <a:ext cx="3950208" cy="777240"/>
+          </a:xfrm>
+          <a:prstGeom prst="rect">
+            <a:avLst/>
+          </a:prstGeom>
+          <a:noFill/>
+          <a:ln/>
+        </p:spPr>
+        <p:txBody>
+          <a:bodyPr wrap="square" lIns="0" tIns="0" rIns="0" bIns="0" rtlCol="0" anchor="ctr"/>
+          <a:lstStyle/>
+          <a:p>
+            <a:pPr rtl="1" algn="ctr" indent="0" marL="0">
+              <a:buNone/>
+            </a:pPr>
+            <a:r>
+              <a:rPr lang="en-US" sz="4000" b="1" dirty="0">
                 <a:solidFill>
                   <a:srgbClr val="DD8C58"/>
                 </a:solidFill>
-                <a:latin typeface="Arial" pitchFamily="34" charset="0"/>
-                <a:ea typeface="Arial" pitchFamily="34" charset="-122"/>
-                <a:cs typeface="Arial" pitchFamily="34" charset="-120"/>
+                <a:latin typeface="Tajawal" pitchFamily="34" charset="0"/>
+                <a:ea typeface="Tajawal" pitchFamily="34" charset="-122"/>
+                <a:cs typeface="Tajawal" pitchFamily="34" charset="-120"/>
               </a:rPr>
               <a:t>٢٢</a:t>
             </a:r>
-            <a:endParaRPr lang="en-US" sz="4200" dirty="0"/>
-          </a:p>
-        </p:txBody>
-      </p:sp>
-      <p:sp>
-        <p:nvSpPr>
-          <p:cNvPr id="6" name="Text 4"/>
-          <p:cNvSpPr/>
-          <p:nvPr/>
-        </p:nvSpPr>
-        <p:spPr>
-          <a:xfrm>
-            <a:off x="9018727" y="3456432"/>
-            <a:ext cx="2304288" cy="457200"/>
+            <a:endParaRPr lang="en-US" sz="4000" dirty="0"/>
+          </a:p>
+        </p:txBody>
+      </p:sp>
+      <p:sp>
+        <p:nvSpPr>
+          <p:cNvPr id="10" name="Text 7"/>
+          <p:cNvSpPr/>
+          <p:nvPr/>
+        </p:nvSpPr>
+        <p:spPr>
+          <a:xfrm>
+            <a:off x="7875727" y="3127248"/>
+            <a:ext cx="3310128" cy="411480"/>
           </a:xfrm>
           <a:prstGeom prst="rect">
             <a:avLst/>
@@ -3693,9 +3974,6 @@
           <a:lstStyle/>
           <a:p>
             <a:pPr rtl="1" algn="ctr" indent="0" marL="0">
-              <a:lnSpc>
-                <a:spcPts val="1900"/>
-              </a:lnSpc>
               <a:buNone/>
             </a:pPr>
             <a:r>
@@ -3703,11 +3981,11 @@
                 <a:solidFill>
                   <a:srgbClr val="A2977F"/>
                 </a:solidFill>
-                <a:latin typeface="Arial" pitchFamily="34" charset="0"/>
-                <a:ea typeface="Arial" pitchFamily="34" charset="-122"/>
-                <a:cs typeface="Arial" pitchFamily="34" charset="-120"/>
-              </a:rPr>
-              <a:t>ميغابايت — النموذج كلّه</a:t>
+                <a:latin typeface="Tajawal" pitchFamily="34" charset="0"/>
+                <a:ea typeface="Tajawal" pitchFamily="34" charset="-122"/>
+                <a:cs typeface="Tajawal" pitchFamily="34" charset="-120"/>
+              </a:rPr>
+              <a:t>ميغابايت: حجم النموذج كاملا</a:t>
             </a:r>
             <a:endParaRPr lang="en-US" sz="1300" dirty="0"/>
           </a:p>
@@ -3715,18 +3993,18 @@
       </p:sp>
       <p:sp>
         <p:nvSpPr>
-          <p:cNvPr id="7" name="Shape 5"/>
-          <p:cNvSpPr/>
-          <p:nvPr/>
-        </p:nvSpPr>
-        <p:spPr>
-          <a:xfrm>
-            <a:off x="6065215" y="2286000"/>
-            <a:ext cx="2670048" cy="1920240"/>
+          <p:cNvPr id="11" name="Shape 8"/>
+          <p:cNvSpPr/>
+          <p:nvPr/>
+        </p:nvSpPr>
+        <p:spPr>
+          <a:xfrm>
+            <a:off x="3349447" y="2011680"/>
+            <a:ext cx="3950208" cy="1737360"/>
           </a:xfrm>
           <a:prstGeom prst="roundRect">
             <a:avLst>
-              <a:gd name="adj" fmla="val 4762"/>
+              <a:gd name="adj" fmla="val 5263"/>
             </a:avLst>
           </a:prstGeom>
           <a:solidFill>
@@ -3742,53 +4020,53 @@
       </p:sp>
       <p:sp>
         <p:nvSpPr>
-          <p:cNvPr id="8" name="Text 6"/>
-          <p:cNvSpPr/>
-          <p:nvPr/>
-        </p:nvSpPr>
-        <p:spPr>
-          <a:xfrm>
-            <a:off x="6065215" y="2542032"/>
-            <a:ext cx="2670048" cy="868680"/>
-          </a:xfrm>
-          <a:prstGeom prst="rect">
-            <a:avLst/>
-          </a:prstGeom>
-          <a:noFill/>
-          <a:ln/>
-        </p:spPr>
-        <p:txBody>
-          <a:bodyPr wrap="square" lIns="0" tIns="0" rIns="0" bIns="0" rtlCol="0" anchor="ctr"/>
-          <a:lstStyle/>
-          <a:p>
-            <a:pPr algn="ctr" indent="0" marL="0">
-              <a:buNone/>
-            </a:pPr>
-            <a:r>
-              <a:rPr lang="en-US" sz="4200" b="1" dirty="0">
+          <p:cNvPr id="12" name="Text 9"/>
+          <p:cNvSpPr/>
+          <p:nvPr/>
+        </p:nvSpPr>
+        <p:spPr>
+          <a:xfrm>
+            <a:off x="3349447" y="2267712"/>
+            <a:ext cx="3950208" cy="777240"/>
+          </a:xfrm>
+          <a:prstGeom prst="rect">
+            <a:avLst/>
+          </a:prstGeom>
+          <a:noFill/>
+          <a:ln/>
+        </p:spPr>
+        <p:txBody>
+          <a:bodyPr wrap="square" lIns="0" tIns="0" rIns="0" bIns="0" rtlCol="0" anchor="ctr"/>
+          <a:lstStyle/>
+          <a:p>
+            <a:pPr rtl="1" algn="ctr" indent="0" marL="0">
+              <a:buNone/>
+            </a:pPr>
+            <a:r>
+              <a:rPr lang="en-US" sz="4000" b="1" dirty="0">
                 <a:solidFill>
                   <a:srgbClr val="EFAE6E"/>
                 </a:solidFill>
-                <a:latin typeface="Arial" pitchFamily="34" charset="0"/>
-                <a:ea typeface="Arial" pitchFamily="34" charset="-122"/>
-                <a:cs typeface="Arial" pitchFamily="34" charset="-120"/>
+                <a:latin typeface="Tajawal" pitchFamily="34" charset="0"/>
+                <a:ea typeface="Tajawal" pitchFamily="34" charset="-122"/>
+                <a:cs typeface="Tajawal" pitchFamily="34" charset="-120"/>
               </a:rPr>
               <a:t>صفر</a:t>
             </a:r>
-            <a:endParaRPr lang="en-US" sz="4200" dirty="0"/>
-          </a:p>
-        </p:txBody>
-      </p:sp>
-      <p:sp>
-        <p:nvSpPr>
-          <p:cNvPr id="9" name="Text 7"/>
-          <p:cNvSpPr/>
-          <p:nvPr/>
-        </p:nvSpPr>
-        <p:spPr>
-          <a:xfrm>
-            <a:off x="6248095" y="3456432"/>
-            <a:ext cx="2304288" cy="457200"/>
+            <a:endParaRPr lang="en-US" sz="4000" dirty="0"/>
+          </a:p>
+        </p:txBody>
+      </p:sp>
+      <p:sp>
+        <p:nvSpPr>
+          <p:cNvPr id="13" name="Text 10"/>
+          <p:cNvSpPr/>
+          <p:nvPr/>
+        </p:nvSpPr>
+        <p:spPr>
+          <a:xfrm>
+            <a:off x="3669487" y="3127248"/>
+            <a:ext cx="3310128" cy="411480"/>
           </a:xfrm>
           <a:prstGeom prst="rect">
             <a:avLst/>
@@ -3801,9 +4079,6 @@
           <a:lstStyle/>
           <a:p>
             <a:pPr rtl="1" algn="ctr" indent="0" marL="0">
-              <a:lnSpc>
-                <a:spcPts val="1900"/>
-              </a:lnSpc>
               <a:buNone/>
             </a:pPr>
             <a:r>
@@ -3811,11 +4086,11 @@
                 <a:solidFill>
                   <a:srgbClr val="A2977F"/>
                 </a:solidFill>
-                <a:latin typeface="Arial" pitchFamily="34" charset="0"/>
-                <a:ea typeface="Arial" pitchFamily="34" charset="-122"/>
-                <a:cs typeface="Arial" pitchFamily="34" charset="-120"/>
-              </a:rPr>
-              <a:t>خوادم تُدار</a:t>
+                <a:latin typeface="Tajawal" pitchFamily="34" charset="0"/>
+                <a:ea typeface="Tajawal" pitchFamily="34" charset="-122"/>
+                <a:cs typeface="Tajawal" pitchFamily="34" charset="-120"/>
+              </a:rPr>
+              <a:t>خوادم ندير</a:t>
             </a:r>
             <a:endParaRPr lang="en-US" sz="1300" dirty="0"/>
           </a:p>
@@ -3823,18 +4098,18 @@
       </p:sp>
       <p:sp>
         <p:nvSpPr>
-          <p:cNvPr id="10" name="Shape 8"/>
-          <p:cNvSpPr/>
-          <p:nvPr/>
-        </p:nvSpPr>
-        <p:spPr>
-          <a:xfrm>
-            <a:off x="3294583" y="2286000"/>
-            <a:ext cx="2670048" cy="1920240"/>
+          <p:cNvPr id="14" name="Shape 11"/>
+          <p:cNvSpPr/>
+          <p:nvPr/>
+        </p:nvSpPr>
+        <p:spPr>
+          <a:xfrm>
+            <a:off x="7555687" y="4023360"/>
+            <a:ext cx="3950208" cy="1737360"/>
           </a:xfrm>
           <a:prstGeom prst="roundRect">
             <a:avLst>
-              <a:gd name="adj" fmla="val 4762"/>
+              <a:gd name="adj" fmla="val 5263"/>
             </a:avLst>
           </a:prstGeom>
           <a:solidFill>
@@ -3850,53 +4125,53 @@
       </p:sp>
       <p:sp>
         <p:nvSpPr>
-          <p:cNvPr id="11" name="Text 9"/>
-          <p:cNvSpPr/>
-          <p:nvPr/>
-        </p:nvSpPr>
-        <p:spPr>
-          <a:xfrm>
-            <a:off x="3294583" y="2542032"/>
-            <a:ext cx="2670048" cy="868680"/>
-          </a:xfrm>
-          <a:prstGeom prst="rect">
-            <a:avLst/>
-          </a:prstGeom>
-          <a:noFill/>
-          <a:ln/>
-        </p:spPr>
-        <p:txBody>
-          <a:bodyPr wrap="square" lIns="0" tIns="0" rIns="0" bIns="0" rtlCol="0" anchor="ctr"/>
-          <a:lstStyle/>
-          <a:p>
-            <a:pPr algn="ctr" indent="0" marL="0">
-              <a:buNone/>
-            </a:pPr>
-            <a:r>
-              <a:rPr lang="en-US" sz="4200" b="1" dirty="0">
+          <p:cNvPr id="15" name="Text 12"/>
+          <p:cNvSpPr/>
+          <p:nvPr/>
+        </p:nvSpPr>
+        <p:spPr>
+          <a:xfrm>
+            <a:off x="7555687" y="4279392"/>
+            <a:ext cx="3950208" cy="777240"/>
+          </a:xfrm>
+          <a:prstGeom prst="rect">
+            <a:avLst/>
+          </a:prstGeom>
+          <a:noFill/>
+          <a:ln/>
+        </p:spPr>
+        <p:txBody>
+          <a:bodyPr wrap="square" lIns="0" tIns="0" rIns="0" bIns="0" rtlCol="0" anchor="ctr"/>
+          <a:lstStyle/>
+          <a:p>
+            <a:pPr rtl="1" algn="ctr" indent="0" marL="0">
+              <a:buNone/>
+            </a:pPr>
+            <a:r>
+              <a:rPr lang="en-US" sz="4000" b="1" dirty="0">
                 <a:solidFill>
                   <a:srgbClr val="DD8C58"/>
                 </a:solidFill>
-                <a:latin typeface="Arial" pitchFamily="34" charset="0"/>
-                <a:ea typeface="Arial" pitchFamily="34" charset="-122"/>
-                <a:cs typeface="Arial" pitchFamily="34" charset="-120"/>
+                <a:latin typeface="Tajawal" pitchFamily="34" charset="0"/>
+                <a:ea typeface="Tajawal" pitchFamily="34" charset="-122"/>
+                <a:cs typeface="Tajawal" pitchFamily="34" charset="-120"/>
               </a:rPr>
               <a:t>صفر</a:t>
             </a:r>
-            <a:endParaRPr lang="en-US" sz="4200" dirty="0"/>
-          </a:p>
-        </p:txBody>
-      </p:sp>
-      <p:sp>
-        <p:nvSpPr>
-          <p:cNvPr id="12" name="Text 10"/>
-          <p:cNvSpPr/>
-          <p:nvPr/>
-        </p:nvSpPr>
-        <p:spPr>
-          <a:xfrm>
-            <a:off x="3477463" y="3456432"/>
-            <a:ext cx="2304288" cy="457200"/>
+            <a:endParaRPr lang="en-US" sz="4000" dirty="0"/>
+          </a:p>
+        </p:txBody>
+      </p:sp>
+      <p:sp>
+        <p:nvSpPr>
+          <p:cNvPr id="16" name="Text 13"/>
+          <p:cNvSpPr/>
+          <p:nvPr/>
+        </p:nvSpPr>
+        <p:spPr>
+          <a:xfrm>
+            <a:off x="7875727" y="5138928"/>
+            <a:ext cx="3310128" cy="411480"/>
           </a:xfrm>
           <a:prstGeom prst="rect">
             <a:avLst/>
@@ -3909,9 +4184,6 @@
           <a:lstStyle/>
           <a:p>
             <a:pPr rtl="1" algn="ctr" indent="0" marL="0">
-              <a:lnSpc>
-                <a:spcPts val="1900"/>
-              </a:lnSpc>
               <a:buNone/>
             </a:pPr>
             <a:r>
@@ -3919,11 +4191,11 @@
                 <a:solidFill>
                   <a:srgbClr val="A2977F"/>
                 </a:solidFill>
-                <a:latin typeface="Arial" pitchFamily="34" charset="0"/>
-                <a:ea typeface="Arial" pitchFamily="34" charset="-122"/>
-                <a:cs typeface="Arial" pitchFamily="34" charset="-120"/>
-              </a:rPr>
-              <a:t>تكلفة لكلّ زائر</a:t>
+                <a:latin typeface="Tajawal" pitchFamily="34" charset="0"/>
+                <a:ea typeface="Tajawal" pitchFamily="34" charset="-122"/>
+                <a:cs typeface="Tajawal" pitchFamily="34" charset="-120"/>
+              </a:rPr>
+              <a:t>تكلفة لكل زائر: واحد أو مليون</a:t>
             </a:r>
             <a:endParaRPr lang="en-US" sz="1300" dirty="0"/>
           </a:p>
@@ -3931,18 +4203,18 @@
       </p:sp>
       <p:sp>
         <p:nvSpPr>
-          <p:cNvPr id="13" name="Shape 11"/>
-          <p:cNvSpPr/>
-          <p:nvPr/>
-        </p:nvSpPr>
-        <p:spPr>
-          <a:xfrm>
-            <a:off x="523951" y="2286000"/>
-            <a:ext cx="2670048" cy="1920240"/>
+          <p:cNvPr id="17" name="Shape 14"/>
+          <p:cNvSpPr/>
+          <p:nvPr/>
+        </p:nvSpPr>
+        <p:spPr>
+          <a:xfrm>
+            <a:off x="3349447" y="4023360"/>
+            <a:ext cx="3950208" cy="1737360"/>
           </a:xfrm>
           <a:prstGeom prst="roundRect">
             <a:avLst>
-              <a:gd name="adj" fmla="val 4762"/>
+              <a:gd name="adj" fmla="val 5263"/>
             </a:avLst>
           </a:prstGeom>
           <a:solidFill>
@@ -3958,53 +4230,53 @@
       </p:sp>
       <p:sp>
         <p:nvSpPr>
-          <p:cNvPr id="14" name="Text 12"/>
-          <p:cNvSpPr/>
-          <p:nvPr/>
-        </p:nvSpPr>
-        <p:spPr>
-          <a:xfrm>
-            <a:off x="523951" y="2542032"/>
-            <a:ext cx="2670048" cy="868680"/>
-          </a:xfrm>
-          <a:prstGeom prst="rect">
-            <a:avLst/>
-          </a:prstGeom>
-          <a:noFill/>
-          <a:ln/>
-        </p:spPr>
-        <p:txBody>
-          <a:bodyPr wrap="square" lIns="0" tIns="0" rIns="0" bIns="0" rtlCol="0" anchor="ctr"/>
-          <a:lstStyle/>
-          <a:p>
-            <a:pPr algn="ctr" indent="0" marL="0">
-              <a:buNone/>
-            </a:pPr>
-            <a:r>
-              <a:rPr lang="en-US" sz="4200" b="1" dirty="0">
+          <p:cNvPr id="18" name="Text 15"/>
+          <p:cNvSpPr/>
+          <p:nvPr/>
+        </p:nvSpPr>
+        <p:spPr>
+          <a:xfrm>
+            <a:off x="3349447" y="4279392"/>
+            <a:ext cx="3950208" cy="777240"/>
+          </a:xfrm>
+          <a:prstGeom prst="rect">
+            <a:avLst/>
+          </a:prstGeom>
+          <a:noFill/>
+          <a:ln/>
+        </p:spPr>
+        <p:txBody>
+          <a:bodyPr wrap="square" lIns="0" tIns="0" rIns="0" bIns="0" rtlCol="0" anchor="ctr"/>
+          <a:lstStyle/>
+          <a:p>
+            <a:pPr rtl="1" algn="ctr" indent="0" marL="0">
+              <a:buNone/>
+            </a:pPr>
+            <a:r>
+              <a:rPr lang="en-US" sz="4000" b="1" dirty="0">
                 <a:solidFill>
                   <a:srgbClr val="EFAE6E"/>
                 </a:solidFill>
-                <a:latin typeface="Arial" pitchFamily="34" charset="0"/>
-                <a:ea typeface="Arial" pitchFamily="34" charset="-122"/>
-                <a:cs typeface="Arial" pitchFamily="34" charset="-120"/>
+                <a:latin typeface="Tajawal" pitchFamily="34" charset="0"/>
+                <a:ea typeface="Tajawal" pitchFamily="34" charset="-122"/>
+                <a:cs typeface="Tajawal" pitchFamily="34" charset="-120"/>
               </a:rPr>
               <a:t>١٠٠٪</a:t>
             </a:r>
-            <a:endParaRPr lang="en-US" sz="4200" dirty="0"/>
-          </a:p>
-        </p:txBody>
-      </p:sp>
-      <p:sp>
-        <p:nvSpPr>
-          <p:cNvPr id="15" name="Text 13"/>
-          <p:cNvSpPr/>
-          <p:nvPr/>
-        </p:nvSpPr>
-        <p:spPr>
-          <a:xfrm>
-            <a:off x="706831" y="3456432"/>
-            <a:ext cx="2304288" cy="457200"/>
+            <a:endParaRPr lang="en-US" sz="4000" dirty="0"/>
+          </a:p>
+        </p:txBody>
+      </p:sp>
+      <p:sp>
+        <p:nvSpPr>
+          <p:cNvPr id="19" name="Text 16"/>
+          <p:cNvSpPr/>
+          <p:nvPr/>
+        </p:nvSpPr>
+        <p:spPr>
+          <a:xfrm>
+            <a:off x="3669487" y="5138928"/>
+            <a:ext cx="3310128" cy="411480"/>
           </a:xfrm>
           <a:prstGeom prst="rect">
             <a:avLst/>
@@ -4017,9 +4289,6 @@
           <a:lstStyle/>
           <a:p>
             <a:pPr rtl="1" algn="ctr" indent="0" marL="0">
-              <a:lnSpc>
-                <a:spcPts val="1900"/>
-              </a:lnSpc>
               <a:buNone/>
             </a:pPr>
             <a:r>
@@ -4027,11 +4296,11 @@
                 <a:solidFill>
                   <a:srgbClr val="A2977F"/>
                 </a:solidFill>
-                <a:latin typeface="Arial" pitchFamily="34" charset="0"/>
-                <a:ea typeface="Arial" pitchFamily="34" charset="-122"/>
-                <a:cs typeface="Arial" pitchFamily="34" charset="-120"/>
-              </a:rPr>
-              <a:t>يعمل بلا اتّصال</a:t>
+                <a:latin typeface="Tajawal" pitchFamily="34" charset="0"/>
+                <a:ea typeface="Tajawal" pitchFamily="34" charset="-122"/>
+                <a:cs typeface="Tajawal" pitchFamily="34" charset="-120"/>
+              </a:rPr>
+              <a:t>يعمل بلا اتصال</a:t>
             </a:r>
             <a:endParaRPr lang="en-US" sz="1300" dirty="0"/>
           </a:p>
@@ -4039,70 +4308,40 @@
       </p:sp>
       <p:sp>
         <p:nvSpPr>
-          <p:cNvPr id="16" name="Shape 14"/>
-          <p:cNvSpPr/>
-          <p:nvPr/>
-        </p:nvSpPr>
-        <p:spPr>
-          <a:xfrm>
-            <a:off x="685800" y="4526280"/>
-            <a:ext cx="10820095" cy="1325880"/>
-          </a:xfrm>
-          <a:prstGeom prst="roundRect">
-            <a:avLst>
-              <a:gd name="adj" fmla="val 6897"/>
-            </a:avLst>
-          </a:prstGeom>
-          <a:solidFill>
-            <a:srgbClr val="232D42"/>
-          </a:solidFill>
-          <a:ln w="12700">
-            <a:solidFill>
-              <a:srgbClr val="232D42"/>
-            </a:solidFill>
-            <a:prstDash val="solid"/>
-          </a:ln>
-        </p:spPr>
-      </p:sp>
-      <p:sp>
-        <p:nvSpPr>
-          <p:cNvPr id="17" name="Text 15"/>
-          <p:cNvSpPr/>
-          <p:nvPr/>
-        </p:nvSpPr>
-        <p:spPr>
-          <a:xfrm>
-            <a:off x="1097280" y="4800600"/>
-            <a:ext cx="9997135" cy="822960"/>
-          </a:xfrm>
-          <a:prstGeom prst="rect">
-            <a:avLst/>
-          </a:prstGeom>
-          <a:noFill/>
-          <a:ln/>
-        </p:spPr>
-        <p:txBody>
-          <a:bodyPr wrap="square" lIns="0" tIns="0" rIns="0" bIns="0" rtlCol="0" anchor="ctr"/>
-          <a:lstStyle/>
-          <a:p>
-            <a:pPr rtl="1" algn="r" indent="0" marL="0">
-              <a:lnSpc>
-                <a:spcPts val="2600"/>
-              </a:lnSpc>
-              <a:buNone/>
-            </a:pPr>
-            <a:r>
-              <a:rPr lang="en-US" sz="1650" dirty="0">
-                <a:solidFill>
-                  <a:srgbClr val="E8DCC8"/>
-                </a:solidFill>
-                <a:latin typeface="Arial" pitchFamily="34" charset="0"/>
-                <a:ea typeface="Arial" pitchFamily="34" charset="-122"/>
-                <a:cs typeface="Arial" pitchFamily="34" charset="-120"/>
-              </a:rPr>
-              <a:t>أكثر المشاريع تتوقّف حين تتوقّف الشبكة، أو حين ينفد رصيد الواجهة. وهذا يعمل في وسط النفود — وتكلفته لزائرٍ واحد كتكلفته لمليون.</a:t>
-            </a:r>
-            <a:endParaRPr lang="en-US" sz="1650" dirty="0"/>
+          <p:cNvPr id="20" name="Text 17"/>
+          <p:cNvSpPr/>
+          <p:nvPr/>
+        </p:nvSpPr>
+        <p:spPr>
+          <a:xfrm>
+            <a:off x="685800" y="6080760"/>
+            <a:ext cx="10820095" cy="411480"/>
+          </a:xfrm>
+          <a:prstGeom prst="rect">
+            <a:avLst/>
+          </a:prstGeom>
+          <a:noFill/>
+          <a:ln/>
+        </p:spPr>
+        <p:txBody>
+          <a:bodyPr wrap="square" lIns="0" tIns="0" rIns="0" bIns="0" rtlCol="0" anchor="ctr"/>
+          <a:lstStyle/>
+          <a:p>
+            <a:pPr rtl="1" algn="r" indent="0" marL="0">
+              <a:buNone/>
+            </a:pPr>
+            <a:r>
+              <a:rPr lang="en-US" sz="1600" i="1" dirty="0">
+                <a:solidFill>
+                  <a:srgbClr val="EFAE6E"/>
+                </a:solidFill>
+                <a:latin typeface="Tajawal" pitchFamily="34" charset="0"/>
+                <a:ea typeface="Tajawal" pitchFamily="34" charset="-122"/>
+                <a:cs typeface="Tajawal" pitchFamily="34" charset="-120"/>
+              </a:rPr>
+              <a:t>أغلب المشاريع تتوقف حين تنقطع الشبكة أو ينفد رصيد خدمة API. وهذا يعمل في وسط النفود.</a:t>
+            </a:r>
+            <a:endParaRPr lang="en-US" sz="1600" dirty="0"/>
           </a:p>
         </p:txBody>
       </p:sp>
@@ -4175,17 +4414,17 @@
               <a:buNone/>
             </a:pPr>
             <a:r>
-              <a:rPr lang="en-US" sz="4000" b="1" dirty="0">
+              <a:rPr lang="en-US" sz="3800" b="1" dirty="0">
                 <a:solidFill>
                   <a:srgbClr val="E8DCC8"/>
                 </a:solidFill>
-                <a:latin typeface="Arial" pitchFamily="34" charset="0"/>
-                <a:ea typeface="Arial" pitchFamily="34" charset="-122"/>
-                <a:cs typeface="Arial" pitchFamily="34" charset="-120"/>
-              </a:rPr>
-              <a:t>ويتعلّم — داخل الجهاز</a:t>
-            </a:r>
-            <a:endParaRPr lang="en-US" sz="4000" dirty="0"/>
+                <a:latin typeface="Tajawal" pitchFamily="34" charset="0"/>
+                <a:ea typeface="Tajawal" pitchFamily="34" charset="-122"/>
+                <a:cs typeface="Tajawal" pitchFamily="34" charset="-120"/>
+              </a:rPr>
+              <a:t>ويتعلم داخل جهازك</a:t>
+            </a:r>
+            <a:endParaRPr lang="en-US" sz="3800" dirty="0"/>
           </a:p>
         </p:txBody>
       </p:sp>
@@ -4218,11 +4457,11 @@
                 <a:solidFill>
                   <a:srgbClr val="A2977F"/>
                 </a:solidFill>
-                <a:latin typeface="Arial" pitchFamily="34" charset="0"/>
-                <a:ea typeface="Arial" pitchFamily="34" charset="-122"/>
-                <a:cs typeface="Arial" pitchFamily="34" charset="-120"/>
-              </a:rPr>
-              <a:t>تعلُّمٌ إشرافيّ بالأمثلة: كلّ تصحيحٍ مثالٌ مُعنون يدخل النموذج فيتغيّر قراره فورًا.</a:t>
+                <a:latin typeface="Tajawal" pitchFamily="34" charset="0"/>
+                <a:ea typeface="Tajawal" pitchFamily="34" charset="-122"/>
+                <a:cs typeface="Tajawal" pitchFamily="34" charset="-120"/>
+              </a:rPr>
+              <a:t>كل تصحيح من الزائر مثال جديد يدخل النموذج، فيتغير قراره فورا.</a:t>
             </a:r>
             <a:endParaRPr lang="en-US" sz="1650" dirty="0"/>
           </a:p>
@@ -4308,9 +4547,9 @@
                 <a:solidFill>
                   <a:srgbClr val="DD8C58"/>
                 </a:solidFill>
-                <a:latin typeface="Arial" pitchFamily="34" charset="0"/>
-                <a:ea typeface="Arial" pitchFamily="34" charset="-122"/>
-                <a:cs typeface="Arial" pitchFamily="34" charset="-120"/>
+                <a:latin typeface="Tajawal" pitchFamily="34" charset="0"/>
+                <a:ea typeface="Tajawal" pitchFamily="34" charset="-122"/>
+                <a:cs typeface="Tajawal" pitchFamily="34" charset="-120"/>
               </a:rPr>
               <a:t>يمسح</a:t>
             </a:r>
@@ -4350,11 +4589,11 @@
                 <a:solidFill>
                   <a:srgbClr val="A2977F"/>
                 </a:solidFill>
-                <a:latin typeface="Arial" pitchFamily="34" charset="0"/>
-                <a:ea typeface="Arial" pitchFamily="34" charset="-122"/>
-                <a:cs typeface="Arial" pitchFamily="34" charset="-120"/>
-              </a:rPr>
-              <a:t>فيسمّي اللوحة</a:t>
+                <a:latin typeface="Tajawal" pitchFamily="34" charset="0"/>
+                <a:ea typeface="Tajawal" pitchFamily="34" charset="-122"/>
+                <a:cs typeface="Tajawal" pitchFamily="34" charset="-120"/>
+              </a:rPr>
+              <a:t>فيسمي اللوحة</a:t>
             </a:r>
             <a:endParaRPr lang="en-US" sz="1250" dirty="0"/>
           </a:p>
@@ -4416,11 +4655,11 @@
                 <a:solidFill>
                   <a:srgbClr val="DD8C58"/>
                 </a:solidFill>
-                <a:latin typeface="Arial" pitchFamily="34" charset="0"/>
-                <a:ea typeface="Arial" pitchFamily="34" charset="-122"/>
-                <a:cs typeface="Arial" pitchFamily="34" charset="-120"/>
-              </a:rPr>
-              <a:t>تصحّح</a:t>
+                <a:latin typeface="Tajawal" pitchFamily="34" charset="0"/>
+                <a:ea typeface="Tajawal" pitchFamily="34" charset="-122"/>
+                <a:cs typeface="Tajawal" pitchFamily="34" charset="-120"/>
+              </a:rPr>
+              <a:t>تصحح</a:t>
             </a:r>
             <a:endParaRPr lang="en-US" sz="1900" dirty="0"/>
           </a:p>
@@ -4458,9 +4697,9 @@
                 <a:solidFill>
                   <a:srgbClr val="A2977F"/>
                 </a:solidFill>
-                <a:latin typeface="Arial" pitchFamily="34" charset="0"/>
-                <a:ea typeface="Arial" pitchFamily="34" charset="-122"/>
-                <a:cs typeface="Arial" pitchFamily="34" charset="-120"/>
+                <a:latin typeface="Tajawal" pitchFamily="34" charset="0"/>
+                <a:ea typeface="Tajawal" pitchFamily="34" charset="-122"/>
+                <a:cs typeface="Tajawal" pitchFamily="34" charset="-120"/>
               </a:rPr>
               <a:t>تضغط «ليست هذه»</a:t>
             </a:r>
@@ -4524,11 +4763,11 @@
                 <a:solidFill>
                   <a:srgbClr val="DD8C58"/>
                 </a:solidFill>
-                <a:latin typeface="Arial" pitchFamily="34" charset="0"/>
-                <a:ea typeface="Arial" pitchFamily="34" charset="-122"/>
-                <a:cs typeface="Arial" pitchFamily="34" charset="-120"/>
-              </a:rPr>
-              <a:t>يتعلّم</a:t>
+                <a:latin typeface="Tajawal" pitchFamily="34" charset="0"/>
+                <a:ea typeface="Tajawal" pitchFamily="34" charset="-122"/>
+                <a:cs typeface="Tajawal" pitchFamily="34" charset="-120"/>
+              </a:rPr>
+              <a:t>يتعلم</a:t>
             </a:r>
             <a:endParaRPr lang="en-US" sz="1900" dirty="0"/>
           </a:p>
@@ -4566,11 +4805,11 @@
                 <a:solidFill>
                   <a:srgbClr val="A2977F"/>
                 </a:solidFill>
-                <a:latin typeface="Arial" pitchFamily="34" charset="0"/>
-                <a:ea typeface="Arial" pitchFamily="34" charset="-122"/>
-                <a:cs typeface="Arial" pitchFamily="34" charset="-120"/>
-              </a:rPr>
-              <a:t>يُحفظ في جوّالك</a:t>
+                <a:latin typeface="Tajawal" pitchFamily="34" charset="0"/>
+                <a:ea typeface="Tajawal" pitchFamily="34" charset="-122"/>
+                <a:cs typeface="Tajawal" pitchFamily="34" charset="-120"/>
+              </a:rPr>
+              <a:t>يبقى في جوالك</a:t>
             </a:r>
             <a:endParaRPr lang="en-US" sz="1250" dirty="0"/>
           </a:p>
@@ -4632,9 +4871,9 @@
                 <a:solidFill>
                   <a:srgbClr val="DD8C58"/>
                 </a:solidFill>
-                <a:latin typeface="Arial" pitchFamily="34" charset="0"/>
-                <a:ea typeface="Arial" pitchFamily="34" charset="-122"/>
-                <a:cs typeface="Arial" pitchFamily="34" charset="-120"/>
+                <a:latin typeface="Tajawal" pitchFamily="34" charset="0"/>
+                <a:ea typeface="Tajawal" pitchFamily="34" charset="-122"/>
+                <a:cs typeface="Tajawal" pitchFamily="34" charset="-120"/>
               </a:rPr>
               <a:t>يصيب</a:t>
             </a:r>
@@ -4674,9 +4913,9 @@
                 <a:solidFill>
                   <a:srgbClr val="A2977F"/>
                 </a:solidFill>
-                <a:latin typeface="Arial" pitchFamily="34" charset="0"/>
-                <a:ea typeface="Arial" pitchFamily="34" charset="-122"/>
-                <a:cs typeface="Arial" pitchFamily="34" charset="-120"/>
+                <a:latin typeface="Tajawal" pitchFamily="34" charset="0"/>
+                <a:ea typeface="Tajawal" pitchFamily="34" charset="-122"/>
+                <a:cs typeface="Tajawal" pitchFamily="34" charset="-120"/>
               </a:rPr>
               <a:t>في المسح التالي</a:t>
             </a:r>
@@ -4740,11 +4979,11 @@
                 <a:solidFill>
                   <a:srgbClr val="E8DCC8"/>
                 </a:solidFill>
-                <a:latin typeface="Arial" pitchFamily="34" charset="0"/>
-                <a:ea typeface="Arial" pitchFamily="34" charset="-122"/>
-                <a:cs typeface="Arial" pitchFamily="34" charset="-120"/>
-              </a:rPr>
-              <a:t>لماذا يهمّ هذا</a:t>
+                <a:latin typeface="Tajawal" pitchFamily="34" charset="0"/>
+                <a:ea typeface="Tajawal" pitchFamily="34" charset="-122"/>
+                <a:cs typeface="Tajawal" pitchFamily="34" charset="-120"/>
+              </a:rPr>
+              <a:t>لماذا يهم هذا</a:t>
             </a:r>
             <a:endParaRPr lang="en-US" sz="1900" dirty="0"/>
           </a:p>
@@ -4782,11 +5021,11 @@
                 <a:solidFill>
                   <a:srgbClr val="A2977F"/>
                 </a:solidFill>
-                <a:latin typeface="Arial" pitchFamily="34" charset="0"/>
-                <a:ea typeface="Arial" pitchFamily="34" charset="-122"/>
-                <a:cs typeface="Arial" pitchFamily="34" charset="-120"/>
-              </a:rPr>
-              <a:t>كلّ الصور المرجعية من زيارةٍ ميدانية واحدة: يومٌ وجوّالٌ وإضاءةٌ واحدة. وتصحيحُ الزائر صورةٌ من يومٍ آخر وجهازٍ آخر — وهو ما ينقص الفهرس.</a:t>
+                <a:latin typeface="Tajawal" pitchFamily="34" charset="0"/>
+                <a:ea typeface="Tajawal" pitchFamily="34" charset="-122"/>
+                <a:cs typeface="Tajawal" pitchFamily="34" charset="-120"/>
+              </a:rPr>
+              <a:t>كل صورنا المرجعية من زيارة واحدة: يوم واحد، وجوال واحد، وإضاءة واحدة. وتصحيح الزائر صورة من يوم آخر وجهاز آخر، وهذا بالضبط ما ينقص الفهرس.</a:t>
             </a:r>
             <a:endParaRPr lang="en-US" sz="1400" dirty="0"/>
           </a:p>
@@ -4848,11 +5087,11 @@
                 <a:solidFill>
                   <a:srgbClr val="EFAE6E"/>
                 </a:solidFill>
-                <a:latin typeface="Arial" pitchFamily="34" charset="0"/>
-                <a:ea typeface="Arial" pitchFamily="34" charset="-122"/>
-                <a:cs typeface="Arial" pitchFamily="34" charset="-120"/>
-              </a:rPr>
-              <a:t>ويتعلّم السلبيّ أيضًا</a:t>
+                <a:latin typeface="Tajawal" pitchFamily="34" charset="0"/>
+                <a:ea typeface="Tajawal" pitchFamily="34" charset="-122"/>
+                <a:cs typeface="Tajawal" pitchFamily="34" charset="-120"/>
+              </a:rPr>
+              <a:t>ويتعلم ما ليس نقشا</a:t>
             </a:r>
             <a:endParaRPr lang="en-US" sz="1900" dirty="0"/>
           </a:p>
@@ -4890,11 +5129,11 @@
                 <a:solidFill>
                   <a:srgbClr val="A2977F"/>
                 </a:solidFill>
-                <a:latin typeface="Arial" pitchFamily="34" charset="0"/>
-                <a:ea typeface="Arial" pitchFamily="34" charset="-122"/>
-                <a:cs typeface="Arial" pitchFamily="34" charset="-120"/>
-              </a:rPr>
-              <a:t>صوّب على حاسوبك واضغط «ليست نقشًا أصلًا». فيصير الرفضُ جوابًا تعلّمه النظام من إنسان، لا عجزًا عن بلوغ عتبة.</a:t>
+                <a:latin typeface="Tajawal" pitchFamily="34" charset="0"/>
+                <a:ea typeface="Tajawal" pitchFamily="34" charset="-122"/>
+                <a:cs typeface="Tajawal" pitchFamily="34" charset="-120"/>
+              </a:rPr>
+              <a:t>صوب على حاسوبك واضغط «ليست نقشا». فيصبح الرفض جوابا تعلمه من إنسان، لا مجرد فشل في تجاوز عتبة.</a:t>
             </a:r>
             <a:endParaRPr lang="en-US" sz="1400" dirty="0"/>
           </a:p>
@@ -4969,17 +5208,17 @@
               <a:buNone/>
             </a:pPr>
             <a:r>
-              <a:rPr lang="en-US" sz="4000" b="1" dirty="0">
+              <a:rPr lang="en-US" sz="3800" b="1" dirty="0">
                 <a:solidFill>
                   <a:srgbClr val="E8DCC8"/>
                 </a:solidFill>
-                <a:latin typeface="Arial" pitchFamily="34" charset="0"/>
-                <a:ea typeface="Arial" pitchFamily="34" charset="-122"/>
-                <a:cs typeface="Arial" pitchFamily="34" charset="-120"/>
-              </a:rPr>
-              <a:t>قياسنا الأوّل كذب علينا</a:t>
-            </a:r>
-            <a:endParaRPr lang="en-US" sz="4000" dirty="0"/>
+                <a:latin typeface="Tajawal" pitchFamily="34" charset="0"/>
+                <a:ea typeface="Tajawal" pitchFamily="34" charset="-122"/>
+                <a:cs typeface="Tajawal" pitchFamily="34" charset="-120"/>
+              </a:rPr>
+              <a:t>أول قياس كذب علينا</a:t>
+            </a:r>
+            <a:endParaRPr lang="en-US" sz="3800" dirty="0"/>
           </a:p>
         </p:txBody>
       </p:sp>
@@ -5012,11 +5251,11 @@
                 <a:solidFill>
                   <a:srgbClr val="A2977F"/>
                 </a:solidFill>
-                <a:latin typeface="Arial" pitchFamily="34" charset="0"/>
-                <a:ea typeface="Arial" pitchFamily="34" charset="-122"/>
-                <a:cs typeface="Arial" pitchFamily="34" charset="-120"/>
-              </a:rPr>
-              <a:t>قال ٩٦٫٥٪، والصادق ٧٩٫٣٪ — وكشفُ السبب أثمنُ ما أنجزناه.</a:t>
+                <a:latin typeface="Tajawal" pitchFamily="34" charset="0"/>
+                <a:ea typeface="Tajawal" pitchFamily="34" charset="-122"/>
+                <a:cs typeface="Tajawal" pitchFamily="34" charset="-120"/>
+              </a:rPr>
+              <a:t>قال ٩٦٫٥٪، والصحيح ٧٩٫٣٪ — واكتشاف السبب أهم ما أنجزناه.</a:t>
             </a:r>
             <a:endParaRPr lang="en-US" sz="1700" dirty="0"/>
           </a:p>
@@ -5030,12 +5269,12 @@
         </p:nvSpPr>
         <p:spPr>
           <a:xfrm>
-            <a:off x="5349240" y="2148840"/>
-            <a:ext cx="6172200" cy="3017520"/>
+            <a:off x="5349240" y="2057400"/>
+            <a:ext cx="6172200" cy="3657600"/>
           </a:xfrm>
           <a:prstGeom prst="roundRect">
             <a:avLst>
-              <a:gd name="adj" fmla="val 3030"/>
+              <a:gd name="adj" fmla="val 2500"/>
             </a:avLst>
           </a:prstGeom>
           <a:solidFill>
@@ -5057,7 +5296,7 @@
         </p:nvSpPr>
         <p:spPr>
           <a:xfrm>
-            <a:off x="5715000" y="2377440"/>
+            <a:off x="5715000" y="2286000"/>
             <a:ext cx="5440680" cy="411480"/>
           </a:xfrm>
           <a:prstGeom prst="rect">
@@ -5078,11 +5317,11 @@
                 <a:solidFill>
                   <a:srgbClr val="E8DCC8"/>
                 </a:solidFill>
-                <a:latin typeface="Arial" pitchFamily="34" charset="0"/>
-                <a:ea typeface="Arial" pitchFamily="34" charset="-122"/>
-                <a:cs typeface="Arial" pitchFamily="34" charset="-120"/>
-              </a:rPr>
-              <a:t>ما قِيس</a:t>
+                <a:latin typeface="Tajawal" pitchFamily="34" charset="0"/>
+                <a:ea typeface="Tajawal" pitchFamily="34" charset="-122"/>
+                <a:cs typeface="Tajawal" pitchFamily="34" charset="-120"/>
+              </a:rPr>
+              <a:t>ما قسناه</a:t>
             </a:r>
             <a:endParaRPr lang="en-US" sz="1900" dirty="0"/>
           </a:p>
@@ -5096,7 +5335,7 @@
         </p:nvSpPr>
         <p:spPr>
           <a:xfrm>
-            <a:off x="7589520" y="2971800"/>
+            <a:off x="7589520" y="3063240"/>
             <a:ext cx="3566160" cy="347472"/>
           </a:xfrm>
           <a:prstGeom prst="rect">
@@ -5117,11 +5356,11 @@
                 <a:solidFill>
                   <a:srgbClr val="A2977F"/>
                 </a:solidFill>
-                <a:latin typeface="Arial" pitchFamily="34" charset="0"/>
-                <a:ea typeface="Arial" pitchFamily="34" charset="-122"/>
-                <a:cs typeface="Arial" pitchFamily="34" charset="-120"/>
-              </a:rPr>
-              <a:t>بترك واحدة — قياسٌ متساهل</a:t>
+                <a:latin typeface="Tajawal" pitchFamily="34" charset="0"/>
+                <a:ea typeface="Tajawal" pitchFamily="34" charset="-122"/>
+                <a:cs typeface="Tajawal" pitchFamily="34" charset="-120"/>
+              </a:rPr>
+              <a:t>حين نختبره بصورة من المجموعة نفسها</a:t>
             </a:r>
             <a:endParaRPr lang="en-US" sz="1300" dirty="0"/>
           </a:p>
@@ -5135,12 +5374,12 @@
         </p:nvSpPr>
         <p:spPr>
           <a:xfrm>
-            <a:off x="5715000" y="3355848"/>
-            <a:ext cx="5074920" cy="310896"/>
+            <a:off x="5715000" y="3465576"/>
+            <a:ext cx="5074920" cy="329184"/>
           </a:xfrm>
           <a:prstGeom prst="roundRect">
             <a:avLst>
-              <a:gd name="adj" fmla="val 20588"/>
+              <a:gd name="adj" fmla="val 19444"/>
             </a:avLst>
           </a:prstGeom>
           <a:solidFill>
@@ -5162,12 +5401,12 @@
         </p:nvSpPr>
         <p:spPr>
           <a:xfrm>
-            <a:off x="5892622" y="3355848"/>
-            <a:ext cx="4897298" cy="310896"/>
+            <a:off x="5892622" y="3465576"/>
+            <a:ext cx="4897298" cy="329184"/>
           </a:xfrm>
           <a:prstGeom prst="roundRect">
             <a:avLst>
-              <a:gd name="adj" fmla="val 20588"/>
+              <a:gd name="adj" fmla="val 19444"/>
             </a:avLst>
           </a:prstGeom>
           <a:solidFill>
@@ -5189,7 +5428,7 @@
         </p:nvSpPr>
         <p:spPr>
           <a:xfrm>
-            <a:off x="5715000" y="2971800"/>
+            <a:off x="5715000" y="3063240"/>
             <a:ext cx="1554480" cy="347472"/>
           </a:xfrm>
           <a:prstGeom prst="rect">
@@ -5202,7 +5441,7 @@
           <a:bodyPr wrap="square" lIns="0" tIns="0" rIns="0" bIns="0" rtlCol="0" anchor="ctr"/>
           <a:lstStyle/>
           <a:p>
-            <a:pPr algn="l" indent="0" marL="0">
+            <a:pPr rtl="1" algn="l" indent="0" marL="0">
               <a:buNone/>
             </a:pPr>
             <a:r>
@@ -5210,9 +5449,9 @@
                 <a:solidFill>
                   <a:srgbClr val="6E6757"/>
                 </a:solidFill>
-                <a:latin typeface="Arial" pitchFamily="34" charset="0"/>
-                <a:ea typeface="Arial" pitchFamily="34" charset="-122"/>
-                <a:cs typeface="Arial" pitchFamily="34" charset="-120"/>
+                <a:latin typeface="Tajawal" pitchFamily="34" charset="0"/>
+                <a:ea typeface="Tajawal" pitchFamily="34" charset="-122"/>
+                <a:cs typeface="Tajawal" pitchFamily="34" charset="-120"/>
               </a:rPr>
               <a:t>٩٦٫٥٪</a:t>
             </a:r>
@@ -5228,7 +5467,7 @@
         </p:nvSpPr>
         <p:spPr>
           <a:xfrm>
-            <a:off x="7589520" y="4023360"/>
+            <a:off x="7589520" y="4251960"/>
             <a:ext cx="3566160" cy="347472"/>
           </a:xfrm>
           <a:prstGeom prst="rect">
@@ -5249,11 +5488,11 @@
                 <a:solidFill>
                   <a:srgbClr val="A2977F"/>
                 </a:solidFill>
-                <a:latin typeface="Arial" pitchFamily="34" charset="0"/>
-                <a:ea typeface="Arial" pitchFamily="34" charset="-122"/>
-                <a:cs typeface="Arial" pitchFamily="34" charset="-120"/>
-              </a:rPr>
-              <a:t>صورةٌ جديدة — قياسٌ أمين</a:t>
+                <a:latin typeface="Tajawal" pitchFamily="34" charset="0"/>
+                <a:ea typeface="Tajawal" pitchFamily="34" charset="-122"/>
+                <a:cs typeface="Tajawal" pitchFamily="34" charset="-120"/>
+              </a:rPr>
+              <a:t>حين نختبره بصورة جديدة تماما</a:t>
             </a:r>
             <a:endParaRPr lang="en-US" sz="1300" dirty="0"/>
           </a:p>
@@ -5267,12 +5506,12 @@
         </p:nvSpPr>
         <p:spPr>
           <a:xfrm>
-            <a:off x="5715000" y="4407408"/>
-            <a:ext cx="5074920" cy="310896"/>
+            <a:off x="5715000" y="4654296"/>
+            <a:ext cx="5074920" cy="329184"/>
           </a:xfrm>
           <a:prstGeom prst="roundRect">
             <a:avLst>
-              <a:gd name="adj" fmla="val 20588"/>
+              <a:gd name="adj" fmla="val 19444"/>
             </a:avLst>
           </a:prstGeom>
           <a:solidFill>
@@ -5294,12 +5533,12 @@
         </p:nvSpPr>
         <p:spPr>
           <a:xfrm>
-            <a:off x="6765508" y="4407408"/>
-            <a:ext cx="4024412" cy="310896"/>
+            <a:off x="6765508" y="4654296"/>
+            <a:ext cx="4024412" cy="329184"/>
           </a:xfrm>
           <a:prstGeom prst="roundRect">
             <a:avLst>
-              <a:gd name="adj" fmla="val 20588"/>
+              <a:gd name="adj" fmla="val 19444"/>
             </a:avLst>
           </a:prstGeom>
           <a:solidFill>
@@ -5321,7 +5560,7 @@
         </p:nvSpPr>
         <p:spPr>
           <a:xfrm>
-            <a:off x="5715000" y="4023360"/>
+            <a:off x="5715000" y="4251960"/>
             <a:ext cx="1554480" cy="347472"/>
           </a:xfrm>
           <a:prstGeom prst="rect">
@@ -5334,7 +5573,7 @@
           <a:bodyPr wrap="square" lIns="0" tIns="0" rIns="0" bIns="0" rtlCol="0" anchor="ctr"/>
           <a:lstStyle/>
           <a:p>
-            <a:pPr algn="l" indent="0" marL="0">
+            <a:pPr rtl="1" algn="l" indent="0" marL="0">
               <a:buNone/>
             </a:pPr>
             <a:r>
@@ -5342,9 +5581,9 @@
                 <a:solidFill>
                   <a:srgbClr val="C97A4A"/>
                 </a:solidFill>
-                <a:latin typeface="Arial" pitchFamily="34" charset="0"/>
-                <a:ea typeface="Arial" pitchFamily="34" charset="-122"/>
-                <a:cs typeface="Arial" pitchFamily="34" charset="-120"/>
+                <a:latin typeface="Tajawal" pitchFamily="34" charset="0"/>
+                <a:ea typeface="Tajawal" pitchFamily="34" charset="-122"/>
+                <a:cs typeface="Tajawal" pitchFamily="34" charset="-120"/>
               </a:rPr>
               <a:t>٧٩٫٣٪</a:t>
             </a:r>
@@ -5360,12 +5599,12 @@
         </p:nvSpPr>
         <p:spPr>
           <a:xfrm>
-            <a:off x="685800" y="2148840"/>
-            <a:ext cx="4434840" cy="3017520"/>
+            <a:off x="685800" y="2057400"/>
+            <a:ext cx="4434840" cy="3657600"/>
           </a:xfrm>
           <a:prstGeom prst="roundRect">
             <a:avLst>
-              <a:gd name="adj" fmla="val 3030"/>
+              <a:gd name="adj" fmla="val 2500"/>
             </a:avLst>
           </a:prstGeom>
           <a:solidFill>
@@ -5379,15 +5618,104 @@
           </a:ln>
         </p:spPr>
       </p:sp>
-      <p:sp>
-        <p:nvSpPr>
-          <p:cNvPr id="15" name="Text 13"/>
-          <p:cNvSpPr/>
-          <p:nvPr/>
-        </p:nvSpPr>
-        <p:spPr>
-          <a:xfrm>
-            <a:off x="960120" y="2377440"/>
+      <p:pic>
+        <p:nvPicPr>
+          <p:cNvPr id="15" name="Image 0" descr="preencoded.png">    </p:cNvPr>
+          <p:cNvPicPr>
+            <a:picLocks noChangeAspect="1"/>
+          </p:cNvPicPr>
+          <p:nvPr/>
+        </p:nvPicPr>
+        <p:blipFill>
+          <a:blip r:embed="rId1">
+            <a:alphaModFix amt="45000"/>
+          </a:blip>
+          <a:stretch>
+            <a:fillRect/>
+          </a:stretch>
+        </p:blipFill>
+        <p:spPr>
+          <a:xfrm>
+            <a:off x="1234440" y="2331720"/>
+            <a:ext cx="2286000" cy="1453896"/>
+          </a:xfrm>
+          <a:prstGeom prst="rect">
+            <a:avLst/>
+          </a:prstGeom>
+        </p:spPr>
+      </p:pic>
+      <p:pic>
+        <p:nvPicPr>
+          <p:cNvPr id="16" name="Image 1" descr="preencoded.png">    </p:cNvPr>
+          <p:cNvPicPr>
+            <a:picLocks noChangeAspect="1"/>
+          </p:cNvPicPr>
+          <p:nvPr/>
+        </p:nvPicPr>
+        <p:blipFill>
+          <a:blip r:embed="rId2"/>
+          <a:stretch>
+            <a:fillRect/>
+          </a:stretch>
+        </p:blipFill>
+        <p:spPr>
+          <a:xfrm>
+            <a:off x="1463040" y="2450592"/>
+            <a:ext cx="2286000" cy="1453896"/>
+          </a:xfrm>
+          <a:prstGeom prst="rect">
+            <a:avLst/>
+          </a:prstGeom>
+        </p:spPr>
+      </p:pic>
+      <p:sp>
+        <p:nvSpPr>
+          <p:cNvPr id="17" name="Text 13"/>
+          <p:cNvSpPr/>
+          <p:nvPr/>
+        </p:nvSpPr>
+        <p:spPr>
+          <a:xfrm>
+            <a:off x="960120" y="3886200"/>
+            <a:ext cx="3886200" cy="347472"/>
+          </a:xfrm>
+          <a:prstGeom prst="rect">
+            <a:avLst/>
+          </a:prstGeom>
+          <a:noFill/>
+          <a:ln/>
+        </p:spPr>
+        <p:txBody>
+          <a:bodyPr wrap="square" lIns="0" tIns="0" rIns="0" bIns="0" rtlCol="0" anchor="ctr"/>
+          <a:lstStyle/>
+          <a:p>
+            <a:pPr rtl="1" algn="ctr" indent="0" marL="0">
+              <a:buNone/>
+            </a:pPr>
+            <a:r>
+              <a:rPr lang="en-US" sz="1200" dirty="0">
+                <a:solidFill>
+                  <a:srgbClr val="6E6757"/>
+                </a:solidFill>
+                <a:latin typeface="Tajawal" pitchFamily="34" charset="0"/>
+                <a:ea typeface="Tajawal" pitchFamily="34" charset="-122"/>
+                <a:cs typeface="Tajawal" pitchFamily="34" charset="-120"/>
+              </a:rPr>
+              <a:t>لقطتان من اللحظة نفسها</a:t>
+            </a:r>
+            <a:endParaRPr lang="en-US" sz="1200" dirty="0"/>
+          </a:p>
+        </p:txBody>
+      </p:sp>
+      <p:sp>
+        <p:nvSpPr>
+          <p:cNvPr id="18" name="Text 14"/>
+          <p:cNvSpPr/>
+          <p:nvPr/>
+        </p:nvSpPr>
+        <p:spPr>
+          <a:xfrm>
+            <a:off x="960120" y="4343400"/>
             <a:ext cx="3886200" cy="411480"/>
           </a:xfrm>
           <a:prstGeom prst="rect">
@@ -5408,11 +5736,11 @@
                 <a:solidFill>
                   <a:srgbClr val="EFAE6E"/>
                 </a:solidFill>
-                <a:latin typeface="Arial" pitchFamily="34" charset="0"/>
-                <a:ea typeface="Arial" pitchFamily="34" charset="-122"/>
-                <a:cs typeface="Arial" pitchFamily="34" charset="-120"/>
-              </a:rPr>
-              <a:t>العلّة التي وجدناها</a:t>
+                <a:latin typeface="Tajawal" pitchFamily="34" charset="0"/>
+                <a:ea typeface="Tajawal" pitchFamily="34" charset="-122"/>
+                <a:cs typeface="Tajawal" pitchFamily="34" charset="-120"/>
+              </a:rPr>
+              <a:t>العلة التي وجدناها</a:t>
             </a:r>
             <a:endParaRPr lang="en-US" sz="1900" dirty="0"/>
           </a:p>
@@ -5420,14 +5748,14 @@
       </p:sp>
       <p:sp>
         <p:nvSpPr>
-          <p:cNvPr id="16" name="Text 14"/>
-          <p:cNvSpPr/>
-          <p:nvPr/>
-        </p:nvSpPr>
-        <p:spPr>
-          <a:xfrm>
-            <a:off x="960120" y="2880360"/>
-            <a:ext cx="3886200" cy="2103120"/>
+          <p:cNvPr id="19" name="Text 15"/>
+          <p:cNvSpPr/>
+          <p:nvPr/>
+        </p:nvSpPr>
+        <p:spPr>
+          <a:xfrm>
+            <a:off x="960120" y="4846320"/>
+            <a:ext cx="3886200" cy="777240"/>
           </a:xfrm>
           <a:prstGeom prst="rect">
             <a:avLst/>
@@ -5441,63 +5769,34 @@
           <a:p>
             <a:pPr rtl="1" algn="r" indent="0" marL="0">
               <a:lnSpc>
-                <a:spcPts val="2200"/>
+                <a:spcPts val="2000"/>
               </a:lnSpc>
               <a:buNone/>
             </a:pPr>
             <a:r>
-              <a:rPr lang="en-US" sz="1350" dirty="0">
+              <a:rPr lang="en-US" sz="1250" dirty="0">
                 <a:solidFill>
                   <a:srgbClr val="A2977F"/>
                 </a:solidFill>
-                <a:latin typeface="Arial" pitchFamily="34" charset="0"/>
-                <a:ea typeface="Arial" pitchFamily="34" charset="-122"/>
-                <a:cs typeface="Arial" pitchFamily="34" charset="-120"/>
-              </a:rPr>
-              <a:t>الصور المرجعية كلّها من زيارةٍ واحدة، فالمتتابعتان شبه متطابقتين. فكان الاختبار يسأل: هل تطابق الصورةُ أختَها الملتقطة قبل ثانيتين؟</a:t>
-            </a:r>
-            <a:endParaRPr lang="en-US" sz="1350" dirty="0"/>
-          </a:p>
-          <a:p>
-            <a:pPr rtl="1" algn="r" indent="0" marL="0">
-              <a:lnSpc>
-                <a:spcPts val="2200"/>
-              </a:lnSpc>
-              <a:buNone/>
-            </a:pPr>
-            <a:endParaRPr lang="en-US" sz="1350" dirty="0"/>
-          </a:p>
-          <a:p>
-            <a:pPr rtl="1" algn="r" indent="0" marL="0">
-              <a:lnSpc>
-                <a:spcPts val="2200"/>
-              </a:lnSpc>
-              <a:buNone/>
-            </a:pPr>
-            <a:r>
-              <a:rPr lang="en-US" sz="1350" dirty="0">
-                <a:solidFill>
-                  <a:srgbClr val="A2977F"/>
-                </a:solidFill>
-                <a:latin typeface="Arial" pitchFamily="34" charset="0"/>
-                <a:ea typeface="Arial" pitchFamily="34" charset="-122"/>
-                <a:cs typeface="Arial" pitchFamily="34" charset="-120"/>
-              </a:rPr>
-              <a:t>وذاك تسرّبُ بيانات. فأعدنا بناء طبقة القرار على الرقم الصادق.</a:t>
-            </a:r>
-            <a:endParaRPr lang="en-US" sz="1350" dirty="0"/>
-          </a:p>
-        </p:txBody>
-      </p:sp>
-      <p:sp>
-        <p:nvSpPr>
-          <p:cNvPr id="17" name="Text 15"/>
-          <p:cNvSpPr/>
-          <p:nvPr/>
-        </p:nvSpPr>
-        <p:spPr>
-          <a:xfrm>
-            <a:off x="685800" y="5440680"/>
+                <a:latin typeface="Tajawal" pitchFamily="34" charset="0"/>
+                <a:ea typeface="Tajawal" pitchFamily="34" charset="-122"/>
+                <a:cs typeface="Tajawal" pitchFamily="34" charset="-120"/>
+              </a:rPr>
+              <a:t>صورنا المرجعية كلها من زيارة واحدة، فكل صورتين متتاليتين شبه متطابقتين. فكان الاختبار يسأل: هل تشبه الصورة أختها الملتقطة قبل ثانيتين؟ وهذا تسرب بيانات.</a:t>
+            </a:r>
+            <a:endParaRPr lang="en-US" sz="1250" dirty="0"/>
+          </a:p>
+        </p:txBody>
+      </p:sp>
+      <p:sp>
+        <p:nvSpPr>
+          <p:cNvPr id="20" name="Text 16"/>
+          <p:cNvSpPr/>
+          <p:nvPr/>
+        </p:nvSpPr>
+        <p:spPr>
+          <a:xfrm>
+            <a:off x="685800" y="5943600"/>
             <a:ext cx="10820095" cy="457200"/>
           </a:xfrm>
           <a:prstGeom prst="rect">
@@ -5518,11 +5817,11 @@
                 <a:solidFill>
                   <a:srgbClr val="EFAE6E"/>
                 </a:solidFill>
-                <a:latin typeface="Arial" pitchFamily="34" charset="0"/>
-                <a:ea typeface="Arial" pitchFamily="34" charset="-122"/>
-                <a:cs typeface="Arial" pitchFamily="34" charset="-120"/>
-              </a:rPr>
-              <a:t>صفر إجابة خاطئة على ٥٣ صورة رملٍ وسماء، و١٢٢ صورة مستقلّة لنقوشٍ أخرى في جبة.</a:t>
+                <a:latin typeface="Tajawal" pitchFamily="34" charset="0"/>
+                <a:ea typeface="Tajawal" pitchFamily="34" charset="-122"/>
+                <a:cs typeface="Tajawal" pitchFamily="34" charset="-120"/>
+              </a:rPr>
+              <a:t>صفر إجابة خاطئة على ٥٣ صورة رمل وسماء، و١٢٢ صورة لنقوش أخرى في جبة.</a:t>
             </a:r>
             <a:endParaRPr lang="en-US" sz="1550" dirty="0"/>
           </a:p>
@@ -5580,34 +5879,34 @@
         </p:nvSpPr>
         <p:spPr>
           <a:xfrm>
-            <a:off x="6400800" y="1051560"/>
-            <a:ext cx="5148072" cy="1234440"/>
-          </a:xfrm>
-          <a:prstGeom prst="rect">
-            <a:avLst/>
-          </a:prstGeom>
-          <a:noFill/>
-          <a:ln/>
-        </p:spPr>
-        <p:txBody>
-          <a:bodyPr wrap="square" lIns="0" tIns="0" rIns="0" bIns="0" rtlCol="0" anchor="ctr"/>
-          <a:lstStyle/>
-          <a:p>
-            <a:pPr rtl="1" algn="r" indent="0" marL="0">
-              <a:buNone/>
-            </a:pPr>
-            <a:r>
-              <a:rPr lang="en-US" sz="6800" b="1" dirty="0">
+            <a:off x="6400800" y="914400"/>
+            <a:ext cx="5148072" cy="1463040"/>
+          </a:xfrm>
+          <a:prstGeom prst="rect">
+            <a:avLst/>
+          </a:prstGeom>
+          <a:noFill/>
+          <a:ln/>
+        </p:spPr>
+        <p:txBody>
+          <a:bodyPr wrap="square" lIns="0" tIns="0" rIns="0" bIns="0" rtlCol="0" anchor="ctr"/>
+          <a:lstStyle/>
+          <a:p>
+            <a:pPr rtl="1" algn="r" indent="0" marL="0">
+              <a:buNone/>
+            </a:pPr>
+            <a:r>
+              <a:rPr lang="en-US" sz="9200" b="1" dirty="0">
                 <a:solidFill>
                   <a:srgbClr val="C97A4A"/>
                 </a:solidFill>
-                <a:latin typeface="Arial" pitchFamily="34" charset="0"/>
-                <a:ea typeface="Arial" pitchFamily="34" charset="-122"/>
-                <a:cs typeface="Arial" pitchFamily="34" charset="-120"/>
+                <a:latin typeface="Reem Kufi" pitchFamily="34" charset="0"/>
+                <a:ea typeface="Reem Kufi" pitchFamily="34" charset="-122"/>
+                <a:cs typeface="Reem Kufi" pitchFamily="34" charset="-120"/>
               </a:rPr>
               <a:t>أثر</a:t>
             </a:r>
-            <a:endParaRPr lang="en-US" sz="6800" dirty="0"/>
+            <a:endParaRPr lang="en-US" sz="9200" dirty="0"/>
           </a:p>
         </p:txBody>
       </p:sp>
@@ -5619,7 +5918,7 @@
         </p:nvSpPr>
         <p:spPr>
           <a:xfrm>
-            <a:off x="4480560" y="2377440"/>
+            <a:off x="4480560" y="2542032"/>
             <a:ext cx="7068312" cy="640080"/>
           </a:xfrm>
           <a:prstGeom prst="rect">
@@ -5640,11 +5939,11 @@
                 <a:solidFill>
                   <a:srgbClr val="E8DCC8"/>
                 </a:solidFill>
-                <a:latin typeface="Arial" pitchFamily="34" charset="0"/>
-                <a:ea typeface="Arial" pitchFamily="34" charset="-122"/>
-                <a:cs typeface="Arial" pitchFamily="34" charset="-120"/>
-              </a:rPr>
-              <a:t>جرّبه على جوّالك</a:t>
+                <a:latin typeface="Tajawal" pitchFamily="34" charset="0"/>
+                <a:ea typeface="Tajawal" pitchFamily="34" charset="-122"/>
+                <a:cs typeface="Tajawal" pitchFamily="34" charset="-120"/>
+              </a:rPr>
+              <a:t>جربه على جوالك</a:t>
             </a:r>
             <a:endParaRPr lang="en-US" sz="3200" dirty="0"/>
           </a:p>
@@ -5718,11 +6017,11 @@
                 <a:solidFill>
                   <a:srgbClr val="A2977F"/>
                 </a:solidFill>
-                <a:latin typeface="Arial" pitchFamily="34" charset="0"/>
-                <a:ea typeface="Arial" pitchFamily="34" charset="-122"/>
-                <a:cs typeface="Arial" pitchFamily="34" charset="-120"/>
-              </a:rPr>
-              <a:t>افتحه مرّةً على الشبكة، ثم يعمل والجوّال في وضع الطيران.</a:t>
+                <a:latin typeface="Tajawal" pitchFamily="34" charset="0"/>
+                <a:ea typeface="Tajawal" pitchFamily="34" charset="-122"/>
+                <a:cs typeface="Tajawal" pitchFamily="34" charset="-120"/>
+              </a:rPr>
+              <a:t>افتحه مرة واحدة على الشبكة، ثم يعمل والجوال في وضع الطيران</a:t>
             </a:r>
             <a:endParaRPr lang="en-US" sz="1400" dirty="0"/>
           </a:p>
@@ -5784,11 +6083,11 @@
                 <a:solidFill>
                   <a:srgbClr val="DD8C58"/>
                 </a:solidFill>
-                <a:latin typeface="Arial" pitchFamily="34" charset="0"/>
-                <a:ea typeface="Arial" pitchFamily="34" charset="-122"/>
-                <a:cs typeface="Arial" pitchFamily="34" charset="-120"/>
-              </a:rPr>
-              <a:t>بلا إنترنت</a:t>
+                <a:latin typeface="Tajawal" pitchFamily="34" charset="0"/>
+                <a:ea typeface="Tajawal" pitchFamily="34" charset="-122"/>
+                <a:cs typeface="Tajawal" pitchFamily="34" charset="-120"/>
+              </a:rPr>
+              <a:t>بدون إنترنت</a:t>
             </a:r>
             <a:endParaRPr lang="en-US" sz="1600" dirty="0"/>
           </a:p>
@@ -5826,11 +6125,11 @@
                 <a:solidFill>
                   <a:srgbClr val="A2977F"/>
                 </a:solidFill>
-                <a:latin typeface="Arial" pitchFamily="34" charset="0"/>
-                <a:ea typeface="Arial" pitchFamily="34" charset="-122"/>
-                <a:cs typeface="Arial" pitchFamily="34" charset="-120"/>
-              </a:rPr>
-              <a:t>النموذج داخل الجوّال</a:t>
+                <a:latin typeface="Tajawal" pitchFamily="34" charset="0"/>
+                <a:ea typeface="Tajawal" pitchFamily="34" charset="-122"/>
+                <a:cs typeface="Tajawal" pitchFamily="34" charset="-120"/>
+              </a:rPr>
+              <a:t>النموذج داخل الجوال</a:t>
             </a:r>
             <a:endParaRPr lang="en-US" sz="1200" dirty="0"/>
           </a:p>
@@ -5892,9 +6191,9 @@
                 <a:solidFill>
                   <a:srgbClr val="DD8C58"/>
                 </a:solidFill>
-                <a:latin typeface="Arial" pitchFamily="34" charset="0"/>
-                <a:ea typeface="Arial" pitchFamily="34" charset="-122"/>
-                <a:cs typeface="Arial" pitchFamily="34" charset="-120"/>
+                <a:latin typeface="Tajawal" pitchFamily="34" charset="0"/>
+                <a:ea typeface="Tajawal" pitchFamily="34" charset="-122"/>
+                <a:cs typeface="Tajawal" pitchFamily="34" charset="-120"/>
               </a:rPr>
               <a:t>٢٩ لغة</a:t>
             </a:r>
@@ -5934,11 +6233,11 @@
                 <a:solidFill>
                   <a:srgbClr val="A2977F"/>
                 </a:solidFill>
-                <a:latin typeface="Arial" pitchFamily="34" charset="0"/>
-                <a:ea typeface="Arial" pitchFamily="34" charset="-122"/>
-                <a:cs typeface="Arial" pitchFamily="34" charset="-120"/>
-              </a:rPr>
-              <a:t>لكلّ زائرٍ لسانه</a:t>
+                <a:latin typeface="Tajawal" pitchFamily="34" charset="0"/>
+                <a:ea typeface="Tajawal" pitchFamily="34" charset="-122"/>
+                <a:cs typeface="Tajawal" pitchFamily="34" charset="-120"/>
+              </a:rPr>
+              <a:t>لكل زائر لغته</a:t>
             </a:r>
             <a:endParaRPr lang="en-US" sz="1200" dirty="0"/>
           </a:p>
@@ -6000,11 +6299,11 @@
                 <a:solidFill>
                   <a:srgbClr val="DD8C58"/>
                 </a:solidFill>
-                <a:latin typeface="Arial" pitchFamily="34" charset="0"/>
-                <a:ea typeface="Arial" pitchFamily="34" charset="-122"/>
-                <a:cs typeface="Arial" pitchFamily="34" charset="-120"/>
-              </a:rPr>
-              <a:t>يتعلّم</a:t>
+                <a:latin typeface="Tajawal" pitchFamily="34" charset="0"/>
+                <a:ea typeface="Tajawal" pitchFamily="34" charset="-122"/>
+                <a:cs typeface="Tajawal" pitchFamily="34" charset="-120"/>
+              </a:rPr>
+              <a:t>يتعلم</a:t>
             </a:r>
             <a:endParaRPr lang="en-US" sz="1600" dirty="0"/>
           </a:p>
@@ -6042,11 +6341,11 @@
                 <a:solidFill>
                   <a:srgbClr val="A2977F"/>
                 </a:solidFill>
-                <a:latin typeface="Arial" pitchFamily="34" charset="0"/>
-                <a:ea typeface="Arial" pitchFamily="34" charset="-122"/>
-                <a:cs typeface="Arial" pitchFamily="34" charset="-120"/>
-              </a:rPr>
-              <a:t>يقوى بكلّ تصحيح</a:t>
+                <a:latin typeface="Tajawal" pitchFamily="34" charset="0"/>
+                <a:ea typeface="Tajawal" pitchFamily="34" charset="-122"/>
+                <a:cs typeface="Tajawal" pitchFamily="34" charset="-120"/>
+              </a:rPr>
+              <a:t>يقوى بكل تصحيح</a:t>
             </a:r>
             <a:endParaRPr lang="en-US" sz="1200" dirty="0"/>
           </a:p>
@@ -6132,9 +6431,9 @@
                 <a:solidFill>
                   <a:srgbClr val="A2977F"/>
                 </a:solidFill>
-                <a:latin typeface="Arial" pitchFamily="34" charset="0"/>
-                <a:ea typeface="Arial" pitchFamily="34" charset="-122"/>
-                <a:cs typeface="Arial" pitchFamily="34" charset="-120"/>
+                <a:latin typeface="Tajawal" pitchFamily="34" charset="0"/>
+                <a:ea typeface="Tajawal" pitchFamily="34" charset="-122"/>
+                <a:cs typeface="Tajawal" pitchFamily="34" charset="-120"/>
               </a:rPr>
               <a:t>امسح الرمز</a:t>
             </a:r>
@@ -6171,11 +6470,11 @@
                 <a:solidFill>
                   <a:srgbClr val="6E6757"/>
                 </a:solidFill>
-                <a:latin typeface="Arial" pitchFamily="34" charset="0"/>
-                <a:ea typeface="Arial" pitchFamily="34" charset="-122"/>
-                <a:cs typeface="Arial" pitchFamily="34" charset="-120"/>
-              </a:rPr>
-              <a:t>بُني لهاكاثون أجا للذكاء الاصطناعي  ·  حائل</a:t>
+                <a:latin typeface="Tajawal" pitchFamily="34" charset="0"/>
+                <a:ea typeface="Tajawal" pitchFamily="34" charset="-122"/>
+                <a:cs typeface="Tajawal" pitchFamily="34" charset="-120"/>
+              </a:rPr>
+              <a:t>مشروع هاكاثون أجا للذكاء الاصطناعي — حائل</a:t>
             </a:r>
             <a:endParaRPr lang="en-US" sz="1250" dirty="0"/>
           </a:p>

--- a/athr-pitch-ar.pptx
+++ b/athr-pitch-ar.pptx
@@ -509,7 +509,7 @@
           <a:p>
             <a:r>
               <a:rPr lang="en-US" dirty="0"/>
-              <a:t>ابدأ بالمكان لا بالتقنية: جبة على بعد ساعة من حائل، وفيها نقوش يبلغ عمر بعضها عشرة آلاف سنة.</a:t>
+              <a:t>ابدأ بالمكان لا بالتقنية: ما خلفي نقوش جبة، على بعد ساعة من حائل، وعمر بعضها عشرة آلاف سنة.</a:t>
             </a:r>
             <a:endParaRPr lang="en-US" dirty="0"/>
           </a:p>
@@ -597,7 +597,7 @@
           <a:p>
             <a:r>
               <a:rPr lang="en-US" dirty="0"/>
-              <a:t>ثبت القيد مبكرا: لا شبكة. عندها يبدو العمل بدون إنترنت ضرورة لا استعراضا.</a:t>
+              <a:t>لا تقل إن الموقع مهمل — فيه لافتات ومرشدون. القيد الحقيقي أن التعريف عام، والمرشد بموعد، والشبكة غائبة.</a:t>
             </a:r>
             <a:endParaRPr lang="en-US" dirty="0"/>
           </a:p>
@@ -773,7 +773,7 @@
           <a:p>
             <a:r>
               <a:rPr lang="en-US" dirty="0"/>
-              <a:t>لو سئلت: لم ندرب الشبكة ولم نضبط أوزانها. نستخدم تمثيلات نموذج أساسي ونبحث فيها — وهو ما تفعله محركات البحث بالصور.</a:t>
+              <a:t>لو سُئلت: لم ندرّب الشبكة ولم نغيّر أوزانها. نستخدم تمثيلات نموذج جاهز ونبحث فيها — وهو ما تفعله محركات البحث بالصور.</a:t>
             </a:r>
             <a:endParaRPr lang="en-US" dirty="0"/>
           </a:p>
@@ -861,7 +861,7 @@
           <a:p>
             <a:r>
               <a:rPr lang="en-US" dirty="0"/>
-              <a:t>هذه نقطة التميز. قلها بوضوح وامض — لا تطل فيها.</a:t>
+              <a:t>هذه نقطة التميز. قُلها بوضوح وامضِ — لا تُطِل فيها.</a:t>
             </a:r>
             <a:endParaRPr lang="en-US" dirty="0"/>
           </a:p>
@@ -949,7 +949,7 @@
           <a:p>
             <a:r>
               <a:rPr lang="en-US" dirty="0"/>
-              <a:t>اعرضه حيا: امسح، صحح، امسح مرة أخرى. عشر ثوان يرون فيها التعلم يقع. وإن سئلت: النموذج غير بارامتري (k-NN)، وأوزان الشبكة لا تتغير — الذي يتغير هو ما يعرفه عن لوحات جبة.</a:t>
+              <a:t>اعرضه حيا: امسح، صحّح، امسح مرة أخرى. عشر ثوان يرون فيها التعلم يقع. وإن سُئلت: النموذج غير بارامتري (k-NN)، وأوزان الشبكة لا تتغير — الذي يتغير هو ما يعرفه عن لوحات جبة.</a:t>
             </a:r>
             <a:endParaRPr lang="en-US" dirty="0"/>
           </a:p>
@@ -1037,7 +1037,7 @@
           <a:p>
             <a:r>
               <a:rPr lang="en-US" dirty="0"/>
-              <a:t>هذه الشريحة تكسب الثقة. أكثر الفرق تعرض الرقم الجميل وحده، وقول «قياسنا كذب وهكذا اكتشفناه» أثقل في الميزان.</a:t>
+              <a:t>هذه شريحة الرحلة. اذكر أن الترتيب مقصود: الميدان أولا، ثم النموذج، ثم مقياس أمين، ثم التعلم من الزائر. ولو سأل محكّم عن الأرقام الحقيقية للدقة، فالجواب جاهز عندك شفهيا.</a:t>
             </a:r>
             <a:endParaRPr lang="en-US" dirty="0"/>
           </a:p>
@@ -1125,7 +1125,7 @@
           <a:p>
             <a:r>
               <a:rPr lang="en-US" dirty="0"/>
-              <a:t>اختم بأن تعطي أحد المحكمين جوالك، أو اتركهم يمسحون الرمز فيفتحوه على أجهزتهم.</a:t>
+              <a:t>اختم بأن تعطي أحد المحكّمين جوالك، أو اتركهم يمسحون الرمز فيفتحوه على أجهزتهم.</a:t>
             </a:r>
             <a:endParaRPr lang="en-US" dirty="0"/>
           </a:p>
@@ -1498,165 +1498,9 @@
           <a:chExt cx="0" cy="0"/>
         </a:xfrm>
       </p:grpSpPr>
-      <p:sp>
-        <p:nvSpPr>
-          <p:cNvPr id="2" name="!!wordmark"/>
-          <p:cNvSpPr/>
-          <p:nvPr/>
-        </p:nvSpPr>
-        <p:spPr>
-          <a:xfrm>
-            <a:off x="5394960" y="1207008"/>
-            <a:ext cx="6126480" cy="2011680"/>
-          </a:xfrm>
-          <a:prstGeom prst="rect">
-            <a:avLst/>
-          </a:prstGeom>
-          <a:noFill/>
-          <a:ln/>
-        </p:spPr>
-        <p:txBody>
-          <a:bodyPr wrap="square" lIns="0" tIns="0" rIns="0" bIns="0" rtlCol="0" anchor="ctr"/>
-          <a:lstStyle/>
-          <a:p>
-            <a:pPr rtl="1" algn="r" indent="0" marL="0">
-              <a:buNone/>
-            </a:pPr>
-            <a:r>
-              <a:rPr lang="en-US" sz="13000" b="1" dirty="0">
-                <a:solidFill>
-                  <a:srgbClr val="C97A4A"/>
-                </a:solidFill>
-                <a:latin typeface="Reem Kufi" pitchFamily="34" charset="0"/>
-                <a:ea typeface="Reem Kufi" pitchFamily="34" charset="-122"/>
-                <a:cs typeface="Reem Kufi" pitchFamily="34" charset="-120"/>
-              </a:rPr>
-              <a:t>أثر</a:t>
-            </a:r>
-            <a:endParaRPr lang="en-US" sz="13000" dirty="0"/>
-          </a:p>
-        </p:txBody>
-      </p:sp>
-      <p:sp>
-        <p:nvSpPr>
-          <p:cNvPr id="3" name="Text 1"/>
-          <p:cNvSpPr/>
-          <p:nvPr/>
-        </p:nvSpPr>
-        <p:spPr>
-          <a:xfrm>
-            <a:off x="4206240" y="3310128"/>
-            <a:ext cx="7315200" cy="640080"/>
-          </a:xfrm>
-          <a:prstGeom prst="rect">
-            <a:avLst/>
-          </a:prstGeom>
-          <a:noFill/>
-          <a:ln/>
-        </p:spPr>
-        <p:txBody>
-          <a:bodyPr wrap="square" lIns="0" tIns="0" rIns="0" bIns="0" rtlCol="0" anchor="ctr"/>
-          <a:lstStyle/>
-          <a:p>
-            <a:pPr rtl="1" algn="r" indent="0" marL="0">
-              <a:buNone/>
-            </a:pPr>
-            <a:r>
-              <a:rPr lang="en-US" sz="3000" b="1" dirty="0">
-                <a:solidFill>
-                  <a:srgbClr val="E8DCC8"/>
-                </a:solidFill>
-                <a:latin typeface="Tajawal" pitchFamily="34" charset="0"/>
-                <a:ea typeface="Tajawal" pitchFamily="34" charset="-122"/>
-                <a:cs typeface="Tajawal" pitchFamily="34" charset="-120"/>
-              </a:rPr>
-              <a:t>دليلك إلى نقوش حائل</a:t>
-            </a:r>
-            <a:endParaRPr lang="en-US" sz="3000" dirty="0"/>
-          </a:p>
-        </p:txBody>
-      </p:sp>
-      <p:sp>
-        <p:nvSpPr>
-          <p:cNvPr id="4" name="Text 2"/>
-          <p:cNvSpPr/>
-          <p:nvPr/>
-        </p:nvSpPr>
-        <p:spPr>
-          <a:xfrm>
-            <a:off x="4206240" y="3950208"/>
-            <a:ext cx="7315200" cy="457200"/>
-          </a:xfrm>
-          <a:prstGeom prst="rect">
-            <a:avLst/>
-          </a:prstGeom>
-          <a:noFill/>
-          <a:ln/>
-        </p:spPr>
-        <p:txBody>
-          <a:bodyPr wrap="square" lIns="0" tIns="0" rIns="0" bIns="0" rtlCol="0" anchor="ctr"/>
-          <a:lstStyle/>
-          <a:p>
-            <a:pPr rtl="1" algn="r" indent="0" marL="0">
-              <a:buNone/>
-            </a:pPr>
-            <a:r>
-              <a:rPr lang="en-US" sz="1700" dirty="0">
-                <a:solidFill>
-                  <a:srgbClr val="A2977F"/>
-                </a:solidFill>
-                <a:latin typeface="Tajawal" pitchFamily="34" charset="0"/>
-                <a:ea typeface="Tajawal" pitchFamily="34" charset="-122"/>
-                <a:cs typeface="Tajawal" pitchFamily="34" charset="-120"/>
-              </a:rPr>
-              <a:t>يعمل بدون إنترنت، وبتسع وعشرين لغة</a:t>
-            </a:r>
-            <a:endParaRPr lang="en-US" sz="1700" dirty="0"/>
-          </a:p>
-        </p:txBody>
-      </p:sp>
-      <p:sp>
-        <p:nvSpPr>
-          <p:cNvPr id="5" name="Text 3"/>
-          <p:cNvSpPr/>
-          <p:nvPr/>
-        </p:nvSpPr>
-        <p:spPr>
-          <a:xfrm>
-            <a:off x="4206240" y="5806440"/>
-            <a:ext cx="7315200" cy="365760"/>
-          </a:xfrm>
-          <a:prstGeom prst="rect">
-            <a:avLst/>
-          </a:prstGeom>
-          <a:noFill/>
-          <a:ln/>
-        </p:spPr>
-        <p:txBody>
-          <a:bodyPr wrap="square" lIns="0" tIns="0" rIns="0" bIns="0" rtlCol="0" anchor="ctr"/>
-          <a:lstStyle/>
-          <a:p>
-            <a:pPr rtl="1" algn="r" indent="0" marL="0">
-              <a:buNone/>
-            </a:pPr>
-            <a:r>
-              <a:rPr lang="en-US" sz="1300" dirty="0">
-                <a:solidFill>
-                  <a:srgbClr val="6E6757"/>
-                </a:solidFill>
-                <a:latin typeface="Tajawal" pitchFamily="34" charset="0"/>
-                <a:ea typeface="Tajawal" pitchFamily="34" charset="-122"/>
-                <a:cs typeface="Tajawal" pitchFamily="34" charset="-120"/>
-              </a:rPr>
-              <a:t>هاكاثون أجا للذكاء الاصطناعي — حائل</a:t>
-            </a:r>
-            <a:endParaRPr lang="en-US" sz="1300" dirty="0"/>
-          </a:p>
-        </p:txBody>
-      </p:sp>
       <p:pic>
         <p:nvPicPr>
-          <p:cNvPr id="6" name="Image 0" descr="preencoded.png">    </p:cNvPr>
+          <p:cNvPr id="2" name="!!wordmark" descr="preencoded.png">    </p:cNvPr>
           <p:cNvPicPr>
             <a:picLocks noChangeAspect="1"/>
           </p:cNvPicPr>
@@ -1670,14 +1514,170 @@
         </p:blipFill>
         <p:spPr>
           <a:xfrm>
-            <a:off x="548640" y="2240280"/>
-            <a:ext cx="4206240" cy="2670048"/>
+            <a:off x="0" y="0"/>
+            <a:ext cx="12191695" cy="6858000"/>
           </a:xfrm>
           <a:prstGeom prst="rect">
             <a:avLst/>
           </a:prstGeom>
         </p:spPr>
       </p:pic>
+      <p:sp>
+        <p:nvSpPr>
+          <p:cNvPr id="3" name="Text 0"/>
+          <p:cNvSpPr/>
+          <p:nvPr/>
+        </p:nvSpPr>
+        <p:spPr>
+          <a:xfrm>
+            <a:off x="5394960" y="1737360"/>
+            <a:ext cx="6126480" cy="2011680"/>
+          </a:xfrm>
+          <a:prstGeom prst="rect">
+            <a:avLst/>
+          </a:prstGeom>
+          <a:noFill/>
+          <a:ln/>
+        </p:spPr>
+        <p:txBody>
+          <a:bodyPr wrap="square" lIns="0" tIns="0" rIns="0" bIns="0" rtlCol="0" anchor="ctr"/>
+          <a:lstStyle/>
+          <a:p>
+            <a:pPr rtl="1" algn="r" indent="0" marL="0">
+              <a:buNone/>
+            </a:pPr>
+            <a:r>
+              <a:rPr lang="en-US" sz="13000" b="1" dirty="0">
+                <a:solidFill>
+                  <a:srgbClr val="DD8C58"/>
+                </a:solidFill>
+                <a:latin typeface="Reem Kufi" pitchFamily="34" charset="0"/>
+                <a:ea typeface="Reem Kufi" pitchFamily="34" charset="-122"/>
+                <a:cs typeface="Reem Kufi" pitchFamily="34" charset="-120"/>
+              </a:rPr>
+              <a:t>أثر</a:t>
+            </a:r>
+            <a:endParaRPr lang="en-US" sz="13000" dirty="0"/>
+          </a:p>
+        </p:txBody>
+      </p:sp>
+      <p:sp>
+        <p:nvSpPr>
+          <p:cNvPr id="4" name="Text 1"/>
+          <p:cNvSpPr/>
+          <p:nvPr/>
+        </p:nvSpPr>
+        <p:spPr>
+          <a:xfrm>
+            <a:off x="4206240" y="3840480"/>
+            <a:ext cx="7315200" cy="640080"/>
+          </a:xfrm>
+          <a:prstGeom prst="rect">
+            <a:avLst/>
+          </a:prstGeom>
+          <a:noFill/>
+          <a:ln/>
+        </p:spPr>
+        <p:txBody>
+          <a:bodyPr wrap="square" lIns="0" tIns="0" rIns="0" bIns="0" rtlCol="0" anchor="ctr"/>
+          <a:lstStyle/>
+          <a:p>
+            <a:pPr rtl="1" algn="r" indent="0" marL="0">
+              <a:buNone/>
+            </a:pPr>
+            <a:r>
+              <a:rPr lang="en-US" sz="3000" b="1" dirty="0">
+                <a:solidFill>
+                  <a:srgbClr val="E8DCC8"/>
+                </a:solidFill>
+                <a:latin typeface="Tajawal" pitchFamily="34" charset="0"/>
+                <a:ea typeface="Tajawal" pitchFamily="34" charset="-122"/>
+                <a:cs typeface="Tajawal" pitchFamily="34" charset="-120"/>
+              </a:rPr>
+              <a:t>دليلك إلى نقوش حائل</a:t>
+            </a:r>
+            <a:endParaRPr lang="en-US" sz="3000" dirty="0"/>
+          </a:p>
+        </p:txBody>
+      </p:sp>
+      <p:sp>
+        <p:nvSpPr>
+          <p:cNvPr id="5" name="Text 2"/>
+          <p:cNvSpPr/>
+          <p:nvPr/>
+        </p:nvSpPr>
+        <p:spPr>
+          <a:xfrm>
+            <a:off x="4206240" y="4526280"/>
+            <a:ext cx="7315200" cy="457200"/>
+          </a:xfrm>
+          <a:prstGeom prst="rect">
+            <a:avLst/>
+          </a:prstGeom>
+          <a:noFill/>
+          <a:ln/>
+        </p:spPr>
+        <p:txBody>
+          <a:bodyPr wrap="square" lIns="0" tIns="0" rIns="0" bIns="0" rtlCol="0" anchor="ctr"/>
+          <a:lstStyle/>
+          <a:p>
+            <a:pPr rtl="1" algn="r" indent="0" marL="0">
+              <a:buNone/>
+            </a:pPr>
+            <a:r>
+              <a:rPr lang="en-US" sz="1700" dirty="0">
+                <a:solidFill>
+                  <a:srgbClr val="A2977F"/>
+                </a:solidFill>
+                <a:latin typeface="Tajawal" pitchFamily="34" charset="0"/>
+                <a:ea typeface="Tajawal" pitchFamily="34" charset="-122"/>
+                <a:cs typeface="Tajawal" pitchFamily="34" charset="-120"/>
+              </a:rPr>
+              <a:t>يعمل بدون إنترنت، وبتسع وعشرين لغة</a:t>
+            </a:r>
+            <a:endParaRPr lang="en-US" sz="1700" dirty="0"/>
+          </a:p>
+        </p:txBody>
+      </p:sp>
+      <p:sp>
+        <p:nvSpPr>
+          <p:cNvPr id="6" name="Text 3"/>
+          <p:cNvSpPr/>
+          <p:nvPr/>
+        </p:nvSpPr>
+        <p:spPr>
+          <a:xfrm>
+            <a:off x="4206240" y="5943600"/>
+            <a:ext cx="7315200" cy="320040"/>
+          </a:xfrm>
+          <a:prstGeom prst="rect">
+            <a:avLst/>
+          </a:prstGeom>
+          <a:noFill/>
+          <a:ln/>
+        </p:spPr>
+        <p:txBody>
+          <a:bodyPr wrap="square" lIns="0" tIns="0" rIns="0" bIns="0" rtlCol="0" anchor="ctr"/>
+          <a:lstStyle/>
+          <a:p>
+            <a:pPr rtl="1" algn="r" indent="0" marL="0">
+              <a:buNone/>
+            </a:pPr>
+            <a:r>
+              <a:rPr lang="en-US" sz="1200" dirty="0">
+                <a:solidFill>
+                  <a:srgbClr val="6E6757"/>
+                </a:solidFill>
+                <a:latin typeface="Tajawal" pitchFamily="34" charset="0"/>
+                <a:ea typeface="Tajawal" pitchFamily="34" charset="-122"/>
+                <a:cs typeface="Tajawal" pitchFamily="34" charset="-120"/>
+              </a:rPr>
+              <a:t>نقوش جبة — حائل</a:t>
+            </a:r>
+            <a:endParaRPr lang="en-US" sz="1200" dirty="0"/>
+          </a:p>
+        </p:txBody>
+      </p:sp>
     </p:spTree>
   </p:cSld>
   <p:clrMapOvr>
@@ -1794,7 +1794,7 @@
                 <a:ea typeface="Tajawal" pitchFamily="34" charset="-122"/>
                 <a:cs typeface="Tajawal" pitchFamily="34" charset="-120"/>
               </a:rPr>
-              <a:t>ولا شيء يشرح له ما يرى</a:t>
+              <a:t>الموقع مجهّز، لكن الزائر ما زال وحده أمام الصخرة</a:t>
             </a:r>
             <a:endParaRPr lang="en-US" sz="1900" dirty="0"/>
           </a:p>
@@ -1843,8 +1843,8 @@
         </p:blipFill>
         <p:spPr>
           <a:xfrm>
-            <a:off x="10048280" y="2377440"/>
-            <a:ext cx="1046136" cy="1143000"/>
+            <a:off x="10090125" y="2377440"/>
+            <a:ext cx="1004290" cy="1097280"/>
           </a:xfrm>
           <a:prstGeom prst="rect">
             <a:avLst/>
@@ -1859,7 +1859,7 @@
         </p:nvSpPr>
         <p:spPr>
           <a:xfrm>
-            <a:off x="8305495" y="3657600"/>
+            <a:off x="8305495" y="3639312"/>
             <a:ext cx="2834640" cy="457200"/>
           </a:xfrm>
           <a:prstGeom prst="rect">
@@ -1876,7 +1876,7 @@
               <a:buNone/>
             </a:pPr>
             <a:r>
-              <a:rPr lang="en-US" sz="2400" b="1" dirty="0">
+              <a:rPr lang="en-US" sz="2100" b="1" dirty="0">
                 <a:solidFill>
                   <a:srgbClr val="DD8C58"/>
                 </a:solidFill>
@@ -1884,9 +1884,9 @@
                 <a:ea typeface="Tajawal" pitchFamily="34" charset="-122"/>
                 <a:cs typeface="Tajawal" pitchFamily="34" charset="-120"/>
               </a:rPr>
-              <a:t>لا لافتة</a:t>
-            </a:r>
-            <a:endParaRPr lang="en-US" sz="2400" dirty="0"/>
+              <a:t>اللافتة تعرّف بالموقع</a:t>
+            </a:r>
+            <a:endParaRPr lang="en-US" sz="2100" dirty="0"/>
           </a:p>
         </p:txBody>
       </p:sp>
@@ -1898,8 +1898,8 @@
         </p:nvSpPr>
         <p:spPr>
           <a:xfrm>
-            <a:off x="8305495" y="4206240"/>
-            <a:ext cx="2834640" cy="777240"/>
+            <a:off x="8305495" y="4187952"/>
+            <a:ext cx="2834640" cy="868680"/>
           </a:xfrm>
           <a:prstGeom prst="rect">
             <a:avLst/>
@@ -1913,12 +1913,12 @@
           <a:p>
             <a:pPr rtl="1" algn="r" indent="0" marL="0">
               <a:lnSpc>
-                <a:spcPts val="2400"/>
+                <a:spcPts val="2300"/>
               </a:lnSpc>
               <a:buNone/>
             </a:pPr>
             <a:r>
-              <a:rPr lang="en-US" sz="1450" dirty="0">
+              <a:rPr lang="en-US" sz="1400" dirty="0">
                 <a:solidFill>
                   <a:srgbClr val="A2977F"/>
                 </a:solidFill>
@@ -1926,9 +1926,9 @@
                 <a:ea typeface="Tajawal" pitchFamily="34" charset="-122"/>
                 <a:cs typeface="Tajawal" pitchFamily="34" charset="-120"/>
               </a:rPr>
-              <a:t>أغلب اللوحات بلا تعريف، والصخرة لا تشرح نفسها.</a:t>
-            </a:r>
-            <a:endParaRPr lang="en-US" sz="1450" dirty="0"/>
+              <a:t>لافتة عند المدخل تشرح الموقع كله، وأمامك مئات اللوحات لكل واحدة قصتها.</a:t>
+            </a:r>
+            <a:endParaRPr lang="en-US" sz="1400" dirty="0"/>
           </a:p>
         </p:txBody>
       </p:sp>
@@ -1975,8 +1975,8 @@
         </p:blipFill>
         <p:spPr>
           <a:xfrm>
-            <a:off x="6386260" y="2377440"/>
-            <a:ext cx="1004835" cy="1143000"/>
+            <a:off x="6329792" y="2377440"/>
+            <a:ext cx="1061304" cy="1097280"/>
           </a:xfrm>
           <a:prstGeom prst="rect">
             <a:avLst/>
@@ -1991,7 +1991,7 @@
         </p:nvSpPr>
         <p:spPr>
           <a:xfrm>
-            <a:off x="4602175" y="3657600"/>
+            <a:off x="4602175" y="3639312"/>
             <a:ext cx="2834640" cy="457200"/>
           </a:xfrm>
           <a:prstGeom prst="rect">
@@ -2008,7 +2008,7 @@
               <a:buNone/>
             </a:pPr>
             <a:r>
-              <a:rPr lang="en-US" sz="2400" b="1" dirty="0">
+              <a:rPr lang="en-US" sz="2100" b="1" dirty="0">
                 <a:solidFill>
                   <a:srgbClr val="DD8C58"/>
                 </a:solidFill>
@@ -2016,9 +2016,9 @@
                 <a:ea typeface="Tajawal" pitchFamily="34" charset="-122"/>
                 <a:cs typeface="Tajawal" pitchFamily="34" charset="-120"/>
               </a:rPr>
-              <a:t>لا مرشد</a:t>
-            </a:r>
-            <a:endParaRPr lang="en-US" sz="2400" dirty="0"/>
+              <a:t>المرشد بموعد</a:t>
+            </a:r>
+            <a:endParaRPr lang="en-US" sz="2100" dirty="0"/>
           </a:p>
         </p:txBody>
       </p:sp>
@@ -2030,8 +2030,8 @@
         </p:nvSpPr>
         <p:spPr>
           <a:xfrm>
-            <a:off x="4602175" y="4206240"/>
-            <a:ext cx="2834640" cy="777240"/>
+            <a:off x="4602175" y="4187952"/>
+            <a:ext cx="2834640" cy="868680"/>
           </a:xfrm>
           <a:prstGeom prst="rect">
             <a:avLst/>
@@ -2045,12 +2045,12 @@
           <a:p>
             <a:pPr rtl="1" algn="r" indent="0" marL="0">
               <a:lnSpc>
-                <a:spcPts val="2400"/>
+                <a:spcPts val="2300"/>
               </a:lnSpc>
               <a:buNone/>
             </a:pPr>
             <a:r>
-              <a:rPr lang="en-US" sz="1450" dirty="0">
+              <a:rPr lang="en-US" sz="1400" dirty="0">
                 <a:solidFill>
                   <a:srgbClr val="A2977F"/>
                 </a:solidFill>
@@ -2058,9 +2058,9 @@
                 <a:ea typeface="Tajawal" pitchFamily="34" charset="-122"/>
                 <a:cs typeface="Tajawal" pitchFamily="34" charset="-120"/>
               </a:rPr>
-              <a:t>المرشدون قليلون، ولا يتكلمون كل لغات الزوار.</a:t>
-            </a:r>
-            <a:endParaRPr lang="en-US" sz="1450" dirty="0"/>
+              <a:t>المرشدون موجودون، لكن بحجز مسبق وبعدد محدود من اللغات.</a:t>
+            </a:r>
+            <a:endParaRPr lang="en-US" sz="1400" dirty="0"/>
           </a:p>
         </p:txBody>
       </p:sp>
@@ -2107,8 +2107,8 @@
         </p:blipFill>
         <p:spPr>
           <a:xfrm>
-            <a:off x="2709807" y="2377440"/>
-            <a:ext cx="977968" cy="1143000"/>
+            <a:off x="2748926" y="2377440"/>
+            <a:ext cx="938849" cy="1097280"/>
           </a:xfrm>
           <a:prstGeom prst="rect">
             <a:avLst/>
@@ -2123,7 +2123,7 @@
         </p:nvSpPr>
         <p:spPr>
           <a:xfrm>
-            <a:off x="898855" y="3657600"/>
+            <a:off x="898855" y="3639312"/>
             <a:ext cx="2834640" cy="457200"/>
           </a:xfrm>
           <a:prstGeom prst="rect">
@@ -2140,7 +2140,7 @@
               <a:buNone/>
             </a:pPr>
             <a:r>
-              <a:rPr lang="en-US" sz="2400" b="1" dirty="0">
+              <a:rPr lang="en-US" sz="2100" b="1" dirty="0">
                 <a:solidFill>
                   <a:srgbClr val="DD8C58"/>
                 </a:solidFill>
@@ -2148,9 +2148,9 @@
                 <a:ea typeface="Tajawal" pitchFamily="34" charset="-122"/>
                 <a:cs typeface="Tajawal" pitchFamily="34" charset="-120"/>
               </a:rPr>
-              <a:t>لا شبكة</a:t>
-            </a:r>
-            <a:endParaRPr lang="en-US" sz="2400" dirty="0"/>
+              <a:t>والشبكة تنقطع</a:t>
+            </a:r>
+            <a:endParaRPr lang="en-US" sz="2100" dirty="0"/>
           </a:p>
         </p:txBody>
       </p:sp>
@@ -2162,8 +2162,8 @@
         </p:nvSpPr>
         <p:spPr>
           <a:xfrm>
-            <a:off x="898855" y="4206240"/>
-            <a:ext cx="2834640" cy="777240"/>
+            <a:off x="898855" y="4187952"/>
+            <a:ext cx="2834640" cy="868680"/>
           </a:xfrm>
           <a:prstGeom prst="rect">
             <a:avLst/>
@@ -2177,12 +2177,12 @@
           <a:p>
             <a:pPr rtl="1" algn="r" indent="0" marL="0">
               <a:lnSpc>
-                <a:spcPts val="2400"/>
+                <a:spcPts val="2300"/>
               </a:lnSpc>
               <a:buNone/>
             </a:pPr>
             <a:r>
-              <a:rPr lang="en-US" sz="1450" dirty="0">
+              <a:rPr lang="en-US" sz="1400" dirty="0">
                 <a:solidFill>
                   <a:srgbClr val="A2977F"/>
                 </a:solidFill>
@@ -2190,9 +2190,9 @@
                 <a:ea typeface="Tajawal" pitchFamily="34" charset="-122"/>
                 <a:cs typeface="Tajawal" pitchFamily="34" charset="-120"/>
               </a:rPr>
-              <a:t>الموقع في الصحراء، فأي حل يعتمد على الإنترنت يتوقف.</a:t>
-            </a:r>
-            <a:endParaRPr lang="en-US" sz="1450" dirty="0"/>
+              <a:t>الموقع في الصحراء المفتوحة، فأي حل يعتمد على الإنترنت يتوقف.</a:t>
+            </a:r>
+            <a:endParaRPr lang="en-US" sz="1400" dirty="0"/>
           </a:p>
         </p:txBody>
       </p:sp>
@@ -2229,7 +2229,7 @@
                 <a:ea typeface="Tajawal" pitchFamily="34" charset="-122"/>
                 <a:cs typeface="Tajawal" pitchFamily="34" charset="-120"/>
               </a:rPr>
-              <a:t>الحل السحابي هو أول جواب يخطر بالبال، وهو الجواب الذي لا يعمل هنا.</a:t>
+              <a:t>أقرب جواب هو خادم في السحابة — وهو الجواب الذي لا يعمل هنا.</a:t>
             </a:r>
             <a:endParaRPr lang="en-US" sz="1700" dirty="0"/>
           </a:p>
@@ -2467,7 +2467,7 @@
                 <a:ea typeface="Tajawal" pitchFamily="34" charset="-122"/>
                 <a:cs typeface="Tajawal" pitchFamily="34" charset="-120"/>
               </a:rPr>
-              <a:t>وجّه</a:t>
+              <a:t>حرّك</a:t>
             </a:r>
             <a:endParaRPr lang="en-US" sz="2200" dirty="0"/>
           </a:p>
@@ -2509,7 +2509,7 @@
                 <a:ea typeface="Tajawal" pitchFamily="34" charset="-122"/>
                 <a:cs typeface="Tajawal" pitchFamily="34" charset="-120"/>
               </a:rPr>
-              <a:t>الكاميرا تمسح باستمرار وأنت تحرك يدك، فلا تحتاج لقطة مثالية.</a:t>
+              <a:t>المسح مستمر وأنت تحرك يدك أمام النقش، فلا تحتاج لقطة مثالية.</a:t>
             </a:r>
             <a:endParaRPr lang="en-US" sz="1350" dirty="0"/>
           </a:p>
@@ -2548,7 +2548,7 @@
                 <a:ea typeface="Tajawal" pitchFamily="34" charset="-122"/>
                 <a:cs typeface="Tajawal" pitchFamily="34" charset="-120"/>
               </a:rPr>
-              <a:t>يتعرف</a:t>
+              <a:t>يتعرّف</a:t>
             </a:r>
             <a:endParaRPr lang="en-US" sz="2200" dirty="0"/>
           </a:p>
@@ -2590,7 +2590,7 @@
                 <a:ea typeface="Tajawal" pitchFamily="34" charset="-122"/>
                 <a:cs typeface="Tajawal" pitchFamily="34" charset="-120"/>
               </a:rPr>
-              <a:t>يحدد اللوحة التي أمامك بالاسم، لا «نقوش صخرية» فقط.</a:t>
+              <a:t>يقول لك اسم اللوحة التي أمامك بعينها، لا أنها نقوش صخرية فقط.</a:t>
             </a:r>
             <a:endParaRPr lang="en-US" sz="1350" dirty="0"/>
           </a:p>
@@ -2671,7 +2671,7 @@
                 <a:ea typeface="Tajawal" pitchFamily="34" charset="-122"/>
                 <a:cs typeface="Tajawal" pitchFamily="34" charset="-120"/>
               </a:rPr>
-              <a:t>تسمع القصة بصوت، بلغتك أنت، ومعها تاريخ الموقع.</a:t>
+              <a:t>تسمع قصتها بصوت، بلغتك أنت، ومعها تاريخ الموقع.</a:t>
             </a:r>
             <a:endParaRPr lang="en-US" sz="1350" dirty="0"/>
           </a:p>
@@ -2978,8 +2978,8 @@
         </p:nvSpPr>
         <p:spPr>
           <a:xfrm>
-            <a:off x="4526280" y="1828800"/>
-            <a:ext cx="6629400" cy="502920"/>
+            <a:off x="5349240" y="1810512"/>
+            <a:ext cx="5806440" cy="457200"/>
           </a:xfrm>
           <a:prstGeom prst="rect">
             <a:avLst/>
@@ -2995,7 +2995,7 @@
               <a:buNone/>
             </a:pPr>
             <a:r>
-              <a:rPr lang="en-US" sz="2700" b="1" dirty="0">
+              <a:rPr lang="en-US" sz="2400" b="1" dirty="0">
                 <a:solidFill>
                   <a:srgbClr val="DD8C58"/>
                 </a:solidFill>
@@ -3005,7 +3005,7 @@
               </a:rPr>
               <a:t>DINOv3  ViT-S/16</a:t>
             </a:r>
-            <a:endParaRPr lang="en-US" sz="2700" dirty="0"/>
+            <a:endParaRPr lang="en-US" sz="2400" dirty="0"/>
           </a:p>
         </p:txBody>
       </p:sp>
@@ -3017,34 +3017,34 @@
         </p:nvSpPr>
         <p:spPr>
           <a:xfrm>
-            <a:off x="4526280" y="2468880"/>
-            <a:ext cx="6629400" cy="457200"/>
-          </a:xfrm>
-          <a:prstGeom prst="rect">
-            <a:avLst/>
-          </a:prstGeom>
-          <a:noFill/>
-          <a:ln/>
-        </p:spPr>
-        <p:txBody>
-          <a:bodyPr wrap="square" lIns="0" tIns="0" rIns="0" bIns="0" rtlCol="0" anchor="ctr"/>
-          <a:lstStyle/>
-          <a:p>
-            <a:pPr rtl="1" algn="r" indent="0" marL="0">
-              <a:buNone/>
-            </a:pPr>
-            <a:r>
-              <a:rPr lang="en-US" sz="1600" dirty="0">
-                <a:solidFill>
-                  <a:srgbClr val="A2977F"/>
-                </a:solidFill>
-                <a:latin typeface="Tajawal" pitchFamily="34" charset="0"/>
-                <a:ea typeface="Tajawal" pitchFamily="34" charset="-122"/>
-                <a:cs typeface="Tajawal" pitchFamily="34" charset="-120"/>
-              </a:rPr>
-              <a:t>نموذج رؤية من Meta، تدرب على ١٫٧ مليار صورة بدون أي وسم بشري.</a:t>
-            </a:r>
-            <a:endParaRPr lang="en-US" sz="1600" dirty="0"/>
+            <a:off x="5349240" y="2395728"/>
+            <a:ext cx="5806440" cy="347472"/>
+          </a:xfrm>
+          <a:prstGeom prst="rect">
+            <a:avLst/>
+          </a:prstGeom>
+          <a:noFill/>
+          <a:ln/>
+        </p:spPr>
+        <p:txBody>
+          <a:bodyPr wrap="square" lIns="0" tIns="0" rIns="0" bIns="0" rtlCol="0" anchor="ctr"/>
+          <a:lstStyle/>
+          <a:p>
+            <a:pPr rtl="1" algn="r" indent="0" marL="0">
+              <a:buNone/>
+            </a:pPr>
+            <a:r>
+              <a:rPr lang="en-US" sz="1700" b="1" dirty="0">
+                <a:solidFill>
+                  <a:srgbClr val="EFAE6E"/>
+                </a:solidFill>
+                <a:latin typeface="Tajawal" pitchFamily="34" charset="0"/>
+                <a:ea typeface="Tajawal" pitchFamily="34" charset="-122"/>
+                <a:cs typeface="Tajawal" pitchFamily="34" charset="-120"/>
+              </a:rPr>
+              <a:t>ما هو؟</a:t>
+            </a:r>
+            <a:endParaRPr lang="en-US" sz="1700" dirty="0"/>
           </a:p>
         </p:txBody>
       </p:sp>
@@ -3056,47 +3056,8 @@
         </p:nvSpPr>
         <p:spPr>
           <a:xfrm>
-            <a:off x="4526280" y="3017520"/>
-            <a:ext cx="6629400" cy="457200"/>
-          </a:xfrm>
-          <a:prstGeom prst="rect">
-            <a:avLst/>
-          </a:prstGeom>
-          <a:noFill/>
-          <a:ln/>
-        </p:spPr>
-        <p:txBody>
-          <a:bodyPr wrap="square" lIns="0" tIns="0" rIns="0" bIns="0" rtlCol="0" anchor="ctr"/>
-          <a:lstStyle/>
-          <a:p>
-            <a:pPr rtl="1" algn="r" indent="0" marL="0">
-              <a:buNone/>
-            </a:pPr>
-            <a:r>
-              <a:rPr lang="en-US" sz="1600" dirty="0">
-                <a:solidFill>
-                  <a:srgbClr val="E8DCC8"/>
-                </a:solidFill>
-                <a:latin typeface="Tajawal" pitchFamily="34" charset="0"/>
-                <a:ea typeface="Tajawal" pitchFamily="34" charset="-122"/>
-                <a:cs typeface="Tajawal" pitchFamily="34" charset="-120"/>
-              </a:rPr>
-              <a:t>يحول أي صورة إلى ٣٨٤ رقما: بصمة تتقارب فيها الصور المتشابهة.</a:t>
-            </a:r>
-            <a:endParaRPr lang="en-US" sz="1600" dirty="0"/>
-          </a:p>
-        </p:txBody>
-      </p:sp>
-      <p:sp>
-        <p:nvSpPr>
-          <p:cNvPr id="7" name="Text 5"/>
-          <p:cNvSpPr/>
-          <p:nvPr/>
-        </p:nvSpPr>
-        <p:spPr>
-          <a:xfrm>
-            <a:off x="4526280" y="3611880"/>
-            <a:ext cx="6629400" cy="731520"/>
+            <a:off x="5349240" y="2779776"/>
+            <a:ext cx="5806440" cy="658368"/>
           </a:xfrm>
           <a:prstGeom prst="rect">
             <a:avLst/>
@@ -3123,7 +3084,169 @@
                 <a:ea typeface="Tajawal" pitchFamily="34" charset="-122"/>
                 <a:cs typeface="Tajawal" pitchFamily="34" charset="-120"/>
               </a:rPr>
-              <a:t>ونحن نستخدمه كما هو: حفظنا بصمات ٢٠١ صورة التقطناها في الموقع، وعند كل مسح نبحث عن أقربها.</a:t>
+              <a:t>نموذج رؤية مفتوح من Meta. نظر إلى ملايين الصور وتعلّم أشكال الأشياء بنفسه، دون أن يسمّيها له أحد.</a:t>
+            </a:r>
+            <a:endParaRPr lang="en-US" sz="1450" dirty="0"/>
+          </a:p>
+        </p:txBody>
+      </p:sp>
+      <p:sp>
+        <p:nvSpPr>
+          <p:cNvPr id="7" name="Text 5"/>
+          <p:cNvSpPr/>
+          <p:nvPr/>
+        </p:nvSpPr>
+        <p:spPr>
+          <a:xfrm>
+            <a:off x="5349240" y="3511296"/>
+            <a:ext cx="5806440" cy="347472"/>
+          </a:xfrm>
+          <a:prstGeom prst="rect">
+            <a:avLst/>
+          </a:prstGeom>
+          <a:noFill/>
+          <a:ln/>
+        </p:spPr>
+        <p:txBody>
+          <a:bodyPr wrap="square" lIns="0" tIns="0" rIns="0" bIns="0" rtlCol="0" anchor="ctr"/>
+          <a:lstStyle/>
+          <a:p>
+            <a:pPr rtl="1" algn="r" indent="0" marL="0">
+              <a:buNone/>
+            </a:pPr>
+            <a:r>
+              <a:rPr lang="en-US" sz="1700" b="1" dirty="0">
+                <a:solidFill>
+                  <a:srgbClr val="EFAE6E"/>
+                </a:solidFill>
+                <a:latin typeface="Tajawal" pitchFamily="34" charset="0"/>
+                <a:ea typeface="Tajawal" pitchFamily="34" charset="-122"/>
+                <a:cs typeface="Tajawal" pitchFamily="34" charset="-120"/>
+              </a:rPr>
+              <a:t>ماذا يفعل؟</a:t>
+            </a:r>
+            <a:endParaRPr lang="en-US" sz="1700" dirty="0"/>
+          </a:p>
+        </p:txBody>
+      </p:sp>
+      <p:sp>
+        <p:nvSpPr>
+          <p:cNvPr id="8" name="Text 6"/>
+          <p:cNvSpPr/>
+          <p:nvPr/>
+        </p:nvSpPr>
+        <p:spPr>
+          <a:xfrm>
+            <a:off x="5349240" y="3895344"/>
+            <a:ext cx="5806440" cy="658368"/>
+          </a:xfrm>
+          <a:prstGeom prst="rect">
+            <a:avLst/>
+          </a:prstGeom>
+          <a:noFill/>
+          <a:ln/>
+        </p:spPr>
+        <p:txBody>
+          <a:bodyPr wrap="square" lIns="0" tIns="0" rIns="0" bIns="0" rtlCol="0" anchor="ctr"/>
+          <a:lstStyle/>
+          <a:p>
+            <a:pPr rtl="1" algn="r" indent="0" marL="0">
+              <a:lnSpc>
+                <a:spcPts val="2400"/>
+              </a:lnSpc>
+              <a:buNone/>
+            </a:pPr>
+            <a:r>
+              <a:rPr lang="en-US" sz="1450" dirty="0">
+                <a:solidFill>
+                  <a:srgbClr val="A2977F"/>
+                </a:solidFill>
+                <a:latin typeface="Tajawal" pitchFamily="34" charset="0"/>
+                <a:ea typeface="Tajawal" pitchFamily="34" charset="-122"/>
+                <a:cs typeface="Tajawal" pitchFamily="34" charset="-120"/>
+              </a:rPr>
+              <a:t>يحوّل أي صورة إلى بصمة رقمية. والصورتان المتشابهتان تعطيان بصمتين متقاربتين.</a:t>
+            </a:r>
+            <a:endParaRPr lang="en-US" sz="1450" dirty="0"/>
+          </a:p>
+        </p:txBody>
+      </p:sp>
+      <p:sp>
+        <p:nvSpPr>
+          <p:cNvPr id="9" name="Text 7"/>
+          <p:cNvSpPr/>
+          <p:nvPr/>
+        </p:nvSpPr>
+        <p:spPr>
+          <a:xfrm>
+            <a:off x="5349240" y="4626864"/>
+            <a:ext cx="5806440" cy="347472"/>
+          </a:xfrm>
+          <a:prstGeom prst="rect">
+            <a:avLst/>
+          </a:prstGeom>
+          <a:noFill/>
+          <a:ln/>
+        </p:spPr>
+        <p:txBody>
+          <a:bodyPr wrap="square" lIns="0" tIns="0" rIns="0" bIns="0" rtlCol="0" anchor="ctr"/>
+          <a:lstStyle/>
+          <a:p>
+            <a:pPr rtl="1" algn="r" indent="0" marL="0">
+              <a:buNone/>
+            </a:pPr>
+            <a:r>
+              <a:rPr lang="en-US" sz="1700" b="1" dirty="0">
+                <a:solidFill>
+                  <a:srgbClr val="EFAE6E"/>
+                </a:solidFill>
+                <a:latin typeface="Tajawal" pitchFamily="34" charset="0"/>
+                <a:ea typeface="Tajawal" pitchFamily="34" charset="-122"/>
+                <a:cs typeface="Tajawal" pitchFamily="34" charset="-120"/>
+              </a:rPr>
+              <a:t>كيف نستخدمه؟</a:t>
+            </a:r>
+            <a:endParaRPr lang="en-US" sz="1700" dirty="0"/>
+          </a:p>
+        </p:txBody>
+      </p:sp>
+      <p:sp>
+        <p:nvSpPr>
+          <p:cNvPr id="10" name="Text 8"/>
+          <p:cNvSpPr/>
+          <p:nvPr/>
+        </p:nvSpPr>
+        <p:spPr>
+          <a:xfrm>
+            <a:off x="5349240" y="5010912"/>
+            <a:ext cx="5806440" cy="658368"/>
+          </a:xfrm>
+          <a:prstGeom prst="rect">
+            <a:avLst/>
+          </a:prstGeom>
+          <a:noFill/>
+          <a:ln/>
+        </p:spPr>
+        <p:txBody>
+          <a:bodyPr wrap="square" lIns="0" tIns="0" rIns="0" bIns="0" rtlCol="0" anchor="ctr"/>
+          <a:lstStyle/>
+          <a:p>
+            <a:pPr rtl="1" algn="r" indent="0" marL="0">
+              <a:lnSpc>
+                <a:spcPts val="2400"/>
+              </a:lnSpc>
+              <a:buNone/>
+            </a:pPr>
+            <a:r>
+              <a:rPr lang="en-US" sz="1450" dirty="0">
+                <a:solidFill>
+                  <a:srgbClr val="A2977F"/>
+                </a:solidFill>
+                <a:latin typeface="Tajawal" pitchFamily="34" charset="0"/>
+                <a:ea typeface="Tajawal" pitchFamily="34" charset="-122"/>
+                <a:cs typeface="Tajawal" pitchFamily="34" charset="-120"/>
+              </a:rPr>
+              <a:t>صوّرنا لوحات جبة وحفظنا بصماتها. وعند كل مسح نقارن بصمة الكاميرا بها ونختار الأقرب.</a:t>
             </a:r>
             <a:endParaRPr lang="en-US" sz="1450" dirty="0"/>
           </a:p>
@@ -3131,7 +3254,7 @@
       </p:sp>
       <p:pic>
         <p:nvPicPr>
-          <p:cNvPr id="8" name="Image 0" descr="preencoded.png">    </p:cNvPr>
+          <p:cNvPr id="11" name="Image 0" descr="preencoded.png">    </p:cNvPr>
           <p:cNvPicPr>
             <a:picLocks noChangeAspect="1"/>
           </p:cNvPicPr>
@@ -3145,8 +3268,8 @@
         </p:blipFill>
         <p:spPr>
           <a:xfrm>
-            <a:off x="10607040" y="4526280"/>
-            <a:ext cx="658368" cy="1152144"/>
+            <a:off x="4462272" y="3246120"/>
+            <a:ext cx="722376" cy="1261872"/>
           </a:xfrm>
           <a:prstGeom prst="rect">
             <a:avLst/>
@@ -3155,46 +3278,7 @@
       </p:pic>
       <p:sp>
         <p:nvSpPr>
-          <p:cNvPr id="9" name="Text 6"/>
-          <p:cNvSpPr/>
-          <p:nvPr/>
-        </p:nvSpPr>
-        <p:spPr>
-          <a:xfrm>
-            <a:off x="4526280" y="4983480"/>
-            <a:ext cx="5760720" cy="411480"/>
-          </a:xfrm>
-          <a:prstGeom prst="rect">
-            <a:avLst/>
-          </a:prstGeom>
-          <a:noFill/>
-          <a:ln/>
-        </p:spPr>
-        <p:txBody>
-          <a:bodyPr wrap="square" lIns="0" tIns="0" rIns="0" bIns="0" rtlCol="0" anchor="ctr"/>
-          <a:lstStyle/>
-          <a:p>
-            <a:pPr rtl="1" algn="r" indent="0" marL="0">
-              <a:buNone/>
-            </a:pPr>
-            <a:r>
-              <a:rPr lang="en-US" sz="1500" i="1" dirty="0">
-                <a:solidFill>
-                  <a:srgbClr val="EFAE6E"/>
-                </a:solidFill>
-                <a:latin typeface="Tajawal" pitchFamily="34" charset="0"/>
-                <a:ea typeface="Tajawal" pitchFamily="34" charset="-122"/>
-                <a:cs typeface="Tajawal" pitchFamily="34" charset="-120"/>
-              </a:rPr>
-              <a:t>يرى، فيتعرف</a:t>
-            </a:r>
-            <a:endParaRPr lang="en-US" sz="1500" dirty="0"/>
-          </a:p>
-        </p:txBody>
-      </p:sp>
-      <p:sp>
-        <p:nvSpPr>
-          <p:cNvPr id="10" name="Shape 7"/>
+          <p:cNvPr id="12" name="Shape 9"/>
           <p:cNvSpPr/>
           <p:nvPr/>
         </p:nvSpPr>
@@ -3221,7 +3305,7 @@
       </p:sp>
       <p:sp>
         <p:nvSpPr>
-          <p:cNvPr id="11" name="Text 8"/>
+          <p:cNvPr id="13" name="Text 10"/>
           <p:cNvSpPr/>
           <p:nvPr/>
         </p:nvSpPr>
@@ -3252,7 +3336,7 @@
                 <a:ea typeface="Tajawal" pitchFamily="34" charset="-122"/>
                 <a:cs typeface="Tajawal" pitchFamily="34" charset="-120"/>
               </a:rPr>
-              <a:t>يميز الشيء نفسه</a:t>
+              <a:t>يميّز الشيء نفسه</a:t>
             </a:r>
             <a:endParaRPr lang="en-US" sz="1600" dirty="0"/>
           </a:p>
@@ -3260,7 +3344,7 @@
       </p:sp>
       <p:sp>
         <p:nvSpPr>
-          <p:cNvPr id="12" name="Text 9"/>
+          <p:cNvPr id="14" name="Text 11"/>
           <p:cNvSpPr/>
           <p:nvPr/>
         </p:nvSpPr>
@@ -3291,7 +3375,7 @@
                 <a:ea typeface="Tajawal" pitchFamily="34" charset="-122"/>
                 <a:cs typeface="Tajawal" pitchFamily="34" charset="-120"/>
               </a:rPr>
-              <a:t>هذه الصخرة بالذات، لا «صخرة ما»</a:t>
+              <a:t>هذه الصخرة بالذات، لا أي صخرة</a:t>
             </a:r>
             <a:endParaRPr lang="en-US" sz="1200" dirty="0"/>
           </a:p>
@@ -3299,7 +3383,7 @@
       </p:sp>
       <p:sp>
         <p:nvSpPr>
-          <p:cNvPr id="13" name="Shape 10"/>
+          <p:cNvPr id="15" name="Shape 12"/>
           <p:cNvSpPr/>
           <p:nvPr/>
         </p:nvSpPr>
@@ -3326,7 +3410,7 @@
       </p:sp>
       <p:sp>
         <p:nvSpPr>
-          <p:cNvPr id="14" name="Text 11"/>
+          <p:cNvPr id="16" name="Text 13"/>
           <p:cNvSpPr/>
           <p:nvPr/>
         </p:nvSpPr>
@@ -3357,7 +3441,7 @@
                 <a:ea typeface="Tajawal" pitchFamily="34" charset="-122"/>
                 <a:cs typeface="Tajawal" pitchFamily="34" charset="-120"/>
               </a:rPr>
-              <a:t>بدون وسوم</a:t>
+              <a:t>تعلّم بلا معلّم</a:t>
             </a:r>
             <a:endParaRPr lang="en-US" sz="1600" dirty="0"/>
           </a:p>
@@ -3365,7 +3449,7 @@
       </p:sp>
       <p:sp>
         <p:nvSpPr>
-          <p:cNvPr id="15" name="Text 12"/>
+          <p:cNvPr id="17" name="Text 14"/>
           <p:cNvSpPr/>
           <p:nvPr/>
         </p:nvSpPr>
@@ -3396,7 +3480,7 @@
                 <a:ea typeface="Tajawal" pitchFamily="34" charset="-122"/>
                 <a:cs typeface="Tajawal" pitchFamily="34" charset="-120"/>
               </a:rPr>
-              <a:t>تعلم الأشكال والملمس بلا معلم</a:t>
+              <a:t>لم يخبره أحد ما في الصور</a:t>
             </a:r>
             <a:endParaRPr lang="en-US" sz="1200" dirty="0"/>
           </a:p>
@@ -3404,7 +3488,7 @@
       </p:sp>
       <p:sp>
         <p:nvSpPr>
-          <p:cNvPr id="16" name="Shape 13"/>
+          <p:cNvPr id="18" name="Shape 15"/>
           <p:cNvSpPr/>
           <p:nvPr/>
         </p:nvSpPr>
@@ -3431,7 +3515,7 @@
       </p:sp>
       <p:sp>
         <p:nvSpPr>
-          <p:cNvPr id="17" name="Text 14"/>
+          <p:cNvPr id="19" name="Text 16"/>
           <p:cNvSpPr/>
           <p:nvPr/>
         </p:nvSpPr>
@@ -3462,7 +3546,7 @@
                 <a:ea typeface="Tajawal" pitchFamily="34" charset="-122"/>
                 <a:cs typeface="Tajawal" pitchFamily="34" charset="-120"/>
               </a:rPr>
-              <a:t>٢١ مليون معامل</a:t>
+              <a:t>صغير</a:t>
             </a:r>
             <a:endParaRPr lang="en-US" sz="1600" dirty="0"/>
           </a:p>
@@ -3470,7 +3554,7 @@
       </p:sp>
       <p:sp>
         <p:nvSpPr>
-          <p:cNvPr id="18" name="Text 15"/>
+          <p:cNvPr id="20" name="Text 17"/>
           <p:cNvSpPr/>
           <p:nvPr/>
         </p:nvSpPr>
@@ -3501,7 +3585,7 @@
                 <a:ea typeface="Tajawal" pitchFamily="34" charset="-122"/>
                 <a:cs typeface="Tajawal" pitchFamily="34" charset="-120"/>
               </a:rPr>
-              <a:t>و٢٢ ميغابايت بعد الضغط</a:t>
+              <a:t>يسع جوالك: ٢٢ ميغابايت</a:t>
             </a:r>
             <a:endParaRPr lang="en-US" sz="1200" dirty="0"/>
           </a:p>
@@ -3509,7 +3593,7 @@
       </p:sp>
       <p:sp>
         <p:nvSpPr>
-          <p:cNvPr id="19" name="Shape 16"/>
+          <p:cNvPr id="21" name="Shape 18"/>
           <p:cNvSpPr/>
           <p:nvPr/>
         </p:nvSpPr>
@@ -3536,7 +3620,7 @@
       </p:sp>
       <p:sp>
         <p:nvSpPr>
-          <p:cNvPr id="20" name="Text 17"/>
+          <p:cNvPr id="22" name="Text 19"/>
           <p:cNvSpPr/>
           <p:nvPr/>
         </p:nvSpPr>
@@ -3575,7 +3659,7 @@
       </p:sp>
       <p:sp>
         <p:nvSpPr>
-          <p:cNvPr id="21" name="Text 18"/>
+          <p:cNvPr id="23" name="Text 20"/>
           <p:cNvSpPr/>
           <p:nvPr/>
         </p:nvSpPr>
@@ -3728,7 +3812,7 @@
                 <a:ea typeface="Tajawal" pitchFamily="34" charset="-122"/>
                 <a:cs typeface="Tajawal" pitchFamily="34" charset="-120"/>
               </a:rPr>
-              <a:t>لا خادم، ولا مفتاح API، ولا إنترنت بعد أول تحميل</a:t>
+              <a:t>لا خادم، ولا اشتراك، ولا إنترنت بعد أول تحميل</a:t>
             </a:r>
             <a:endParaRPr lang="en-US" sz="1900" dirty="0"/>
           </a:p>
@@ -3761,9 +3845,48 @@
           </a:ln>
         </p:spPr>
       </p:sp>
+      <p:sp>
+        <p:nvSpPr>
+          <p:cNvPr id="5" name="Text 3"/>
+          <p:cNvSpPr/>
+          <p:nvPr/>
+        </p:nvSpPr>
+        <p:spPr>
+          <a:xfrm>
+            <a:off x="1051560" y="2395728"/>
+            <a:ext cx="1783080" cy="566928"/>
+          </a:xfrm>
+          <a:prstGeom prst="rect">
+            <a:avLst/>
+          </a:prstGeom>
+          <a:noFill/>
+          <a:ln/>
+        </p:spPr>
+        <p:txBody>
+          <a:bodyPr wrap="square" lIns="0" tIns="0" rIns="0" bIns="0" rtlCol="0" anchor="ctr"/>
+          <a:lstStyle/>
+          <a:p>
+            <a:pPr rtl="1" algn="ctr" indent="0" marL="0">
+              <a:buNone/>
+            </a:pPr>
+            <a:r>
+              <a:rPr lang="en-US" sz="3000" b="1" dirty="0">
+                <a:solidFill>
+                  <a:srgbClr val="DD8C58"/>
+                </a:solidFill>
+                <a:latin typeface="Reem Kufi" pitchFamily="34" charset="0"/>
+                <a:ea typeface="Reem Kufi" pitchFamily="34" charset="-122"/>
+                <a:cs typeface="Reem Kufi" pitchFamily="34" charset="-120"/>
+              </a:rPr>
+              <a:t>أثر</a:t>
+            </a:r>
+            <a:endParaRPr lang="en-US" sz="3000" dirty="0"/>
+          </a:p>
+        </p:txBody>
+      </p:sp>
       <p:pic>
         <p:nvPicPr>
-          <p:cNvPr id="5" name="Image 0" descr="preencoded.png">    </p:cNvPr>
+          <p:cNvPr id="6" name="Image 0" descr="preencoded.png">    </p:cNvPr>
           <p:cNvPicPr>
             <a:picLocks noChangeAspect="1"/>
           </p:cNvPicPr>
@@ -3785,45 +3908,6 @@
           </a:prstGeom>
         </p:spPr>
       </p:pic>
-      <p:sp>
-        <p:nvSpPr>
-          <p:cNvPr id="6" name="Text 3"/>
-          <p:cNvSpPr/>
-          <p:nvPr/>
-        </p:nvSpPr>
-        <p:spPr>
-          <a:xfrm>
-            <a:off x="1051560" y="2395728"/>
-            <a:ext cx="1783080" cy="566928"/>
-          </a:xfrm>
-          <a:prstGeom prst="rect">
-            <a:avLst/>
-          </a:prstGeom>
-          <a:noFill/>
-          <a:ln/>
-        </p:spPr>
-        <p:txBody>
-          <a:bodyPr wrap="square" lIns="0" tIns="0" rIns="0" bIns="0" rtlCol="0" anchor="ctr"/>
-          <a:lstStyle/>
-          <a:p>
-            <a:pPr rtl="1" algn="ctr" indent="0" marL="0">
-              <a:buNone/>
-            </a:pPr>
-            <a:r>
-              <a:rPr lang="en-US" sz="3000" b="1" dirty="0">
-                <a:solidFill>
-                  <a:srgbClr val="DD8C58"/>
-                </a:solidFill>
-                <a:latin typeface="Reem Kufi" pitchFamily="34" charset="0"/>
-                <a:ea typeface="Reem Kufi" pitchFamily="34" charset="-122"/>
-                <a:cs typeface="Reem Kufi" pitchFamily="34" charset="-120"/>
-              </a:rPr>
-              <a:t>أثر</a:t>
-            </a:r>
-            <a:endParaRPr lang="en-US" sz="3000" dirty="0"/>
-          </a:p>
-        </p:txBody>
-      </p:sp>
       <p:sp>
         <p:nvSpPr>
           <p:cNvPr id="7" name="Text 4"/>
@@ -4051,7 +4135,7 @@
                 <a:ea typeface="Tajawal" pitchFamily="34" charset="-122"/>
                 <a:cs typeface="Tajawal" pitchFamily="34" charset="-120"/>
               </a:rPr>
-              <a:t>صفر</a:t>
+              <a:t>١٠٠٪</a:t>
             </a:r>
             <a:endParaRPr lang="en-US" sz="4000" dirty="0"/>
           </a:p>
@@ -4090,7 +4174,7 @@
                 <a:ea typeface="Tajawal" pitchFamily="34" charset="-122"/>
                 <a:cs typeface="Tajawal" pitchFamily="34" charset="-120"/>
               </a:rPr>
-              <a:t>خوادم ندير</a:t>
+              <a:t>يعمل بلا اتصال</a:t>
             </a:r>
             <a:endParaRPr lang="en-US" sz="1300" dirty="0"/>
           </a:p>
@@ -4150,7 +4234,7 @@
             <a:r>
               <a:rPr lang="en-US" sz="4000" b="1" dirty="0">
                 <a:solidFill>
-                  <a:srgbClr val="DD8C58"/>
+                  <a:srgbClr val="EFAE6E"/>
                 </a:solidFill>
                 <a:latin typeface="Tajawal" pitchFamily="34" charset="0"/>
                 <a:ea typeface="Tajawal" pitchFamily="34" charset="-122"/>
@@ -4195,7 +4279,7 @@
                 <a:ea typeface="Tajawal" pitchFamily="34" charset="-122"/>
                 <a:cs typeface="Tajawal" pitchFamily="34" charset="-120"/>
               </a:rPr>
-              <a:t>تكلفة لكل زائر: واحد أو مليون</a:t>
+              <a:t>خوادم نديرها</a:t>
             </a:r>
             <a:endParaRPr lang="en-US" sz="1300" dirty="0"/>
           </a:p>
@@ -4255,13 +4339,13 @@
             <a:r>
               <a:rPr lang="en-US" sz="4000" b="1" dirty="0">
                 <a:solidFill>
-                  <a:srgbClr val="EFAE6E"/>
-                </a:solidFill>
-                <a:latin typeface="Tajawal" pitchFamily="34" charset="0"/>
-                <a:ea typeface="Tajawal" pitchFamily="34" charset="-122"/>
-                <a:cs typeface="Tajawal" pitchFamily="34" charset="-120"/>
-              </a:rPr>
-              <a:t>١٠٠٪</a:t>
+                  <a:srgbClr val="DD8C58"/>
+                </a:solidFill>
+                <a:latin typeface="Tajawal" pitchFamily="34" charset="0"/>
+                <a:ea typeface="Tajawal" pitchFamily="34" charset="-122"/>
+                <a:cs typeface="Tajawal" pitchFamily="34" charset="-120"/>
+              </a:rPr>
+              <a:t>صفر</a:t>
             </a:r>
             <a:endParaRPr lang="en-US" sz="4000" dirty="0"/>
           </a:p>
@@ -4300,7 +4384,7 @@
                 <a:ea typeface="Tajawal" pitchFamily="34" charset="-122"/>
                 <a:cs typeface="Tajawal" pitchFamily="34" charset="-120"/>
               </a:rPr>
-              <a:t>يعمل بلا اتصال</a:t>
+              <a:t>تكلفة لكل زائر: واحد أو مليون</a:t>
             </a:r>
             <a:endParaRPr lang="en-US" sz="1300" dirty="0"/>
           </a:p>
@@ -4339,7 +4423,7 @@
                 <a:ea typeface="Tajawal" pitchFamily="34" charset="-122"/>
                 <a:cs typeface="Tajawal" pitchFamily="34" charset="-120"/>
               </a:rPr>
-              <a:t>أغلب المشاريع تتوقف حين تنقطع الشبكة أو ينفد رصيد خدمة API. وهذا يعمل في وسط النفود.</a:t>
+              <a:t>أغلب المشاريع تتوقف إذا انقطعت الشبكة أو انتهى رصيد الخدمة المدفوعة. وهذا يعمل في وسط النفود.</a:t>
             </a:r>
             <a:endParaRPr lang="en-US" sz="1600" dirty="0"/>
           </a:p>
@@ -4422,7 +4506,7 @@
                 <a:ea typeface="Tajawal" pitchFamily="34" charset="-122"/>
                 <a:cs typeface="Tajawal" pitchFamily="34" charset="-120"/>
               </a:rPr>
-              <a:t>ويتعلم داخل جهازك</a:t>
+              <a:t>ويتعلّم داخل جهازك</a:t>
             </a:r>
             <a:endParaRPr lang="en-US" sz="3800" dirty="0"/>
           </a:p>
@@ -4467,44 +4551,20 @@
           </a:p>
         </p:txBody>
       </p:sp>
-      <p:pic>
-        <p:nvPicPr>
-          <p:cNvPr id="4" name="Image 0" descr="preencoded.png">    </p:cNvPr>
-          <p:cNvPicPr>
-            <a:picLocks noChangeAspect="1"/>
-          </p:cNvPicPr>
-          <p:nvPr/>
-        </p:nvPicPr>
-        <p:blipFill>
-          <a:blip r:embed="rId1"/>
-          <a:stretch>
-            <a:fillRect/>
-          </a:stretch>
-        </p:blipFill>
-        <p:spPr>
-          <a:xfrm>
-            <a:off x="868680" y="1810512"/>
-            <a:ext cx="1106424" cy="1682496"/>
-          </a:xfrm>
-          <a:prstGeom prst="rect">
-            <a:avLst/>
-          </a:prstGeom>
-        </p:spPr>
-      </p:pic>
-      <p:sp>
-        <p:nvSpPr>
-          <p:cNvPr id="5" name="Shape 2"/>
-          <p:cNvSpPr/>
-          <p:nvPr/>
-        </p:nvSpPr>
-        <p:spPr>
-          <a:xfrm>
-            <a:off x="9402775" y="1965960"/>
-            <a:ext cx="2103120" cy="1417320"/>
+      <p:sp>
+        <p:nvSpPr>
+          <p:cNvPr id="4" name="Shape 2"/>
+          <p:cNvSpPr/>
+          <p:nvPr/>
+        </p:nvSpPr>
+        <p:spPr>
+          <a:xfrm>
+            <a:off x="8973007" y="2011680"/>
+            <a:ext cx="2532888" cy="1463040"/>
           </a:xfrm>
           <a:prstGeom prst="roundRect">
             <a:avLst>
-              <a:gd name="adj" fmla="val 6452"/>
+              <a:gd name="adj" fmla="val 6250"/>
             </a:avLst>
           </a:prstGeom>
           <a:solidFill>
@@ -4520,30 +4580,30 @@
       </p:sp>
       <p:sp>
         <p:nvSpPr>
-          <p:cNvPr id="6" name="Text 3"/>
-          <p:cNvSpPr/>
-          <p:nvPr/>
-        </p:nvSpPr>
-        <p:spPr>
-          <a:xfrm>
-            <a:off x="9603943" y="2176272"/>
-            <a:ext cx="1700784" cy="411480"/>
-          </a:xfrm>
-          <a:prstGeom prst="rect">
-            <a:avLst/>
-          </a:prstGeom>
-          <a:noFill/>
-          <a:ln/>
-        </p:spPr>
-        <p:txBody>
-          <a:bodyPr wrap="square" lIns="0" tIns="0" rIns="0" bIns="0" rtlCol="0" anchor="ctr"/>
-          <a:lstStyle/>
-          <a:p>
-            <a:pPr rtl="1" algn="r" indent="0" marL="0">
-              <a:buNone/>
-            </a:pPr>
-            <a:r>
-              <a:rPr lang="en-US" sz="1900" b="1" dirty="0">
+          <p:cNvPr id="5" name="Text 3"/>
+          <p:cNvSpPr/>
+          <p:nvPr/>
+        </p:nvSpPr>
+        <p:spPr>
+          <a:xfrm>
+            <a:off x="9229039" y="2240280"/>
+            <a:ext cx="2020824" cy="411480"/>
+          </a:xfrm>
+          <a:prstGeom prst="rect">
+            <a:avLst/>
+          </a:prstGeom>
+          <a:noFill/>
+          <a:ln/>
+        </p:spPr>
+        <p:txBody>
+          <a:bodyPr wrap="square" lIns="0" tIns="0" rIns="0" bIns="0" rtlCol="0" anchor="ctr"/>
+          <a:lstStyle/>
+          <a:p>
+            <a:pPr rtl="1" algn="r" indent="0" marL="0">
+              <a:buNone/>
+            </a:pPr>
+            <a:r>
+              <a:rPr lang="en-US" sz="2000" b="1" dirty="0">
                 <a:solidFill>
                   <a:srgbClr val="DD8C58"/>
                 </a:solidFill>
@@ -4553,20 +4613,20 @@
               </a:rPr>
               <a:t>يمسح</a:t>
             </a:r>
-            <a:endParaRPr lang="en-US" sz="1900" dirty="0"/>
-          </a:p>
-        </p:txBody>
-      </p:sp>
-      <p:sp>
-        <p:nvSpPr>
-          <p:cNvPr id="7" name="Text 4"/>
-          <p:cNvSpPr/>
-          <p:nvPr/>
-        </p:nvSpPr>
-        <p:spPr>
-          <a:xfrm>
-            <a:off x="9603943" y="2670048"/>
-            <a:ext cx="1700784" cy="548640"/>
+            <a:endParaRPr lang="en-US" sz="2000" dirty="0"/>
+          </a:p>
+        </p:txBody>
+      </p:sp>
+      <p:sp>
+        <p:nvSpPr>
+          <p:cNvPr id="6" name="Text 4"/>
+          <p:cNvSpPr/>
+          <p:nvPr/>
+        </p:nvSpPr>
+        <p:spPr>
+          <a:xfrm>
+            <a:off x="9229039" y="2743200"/>
+            <a:ext cx="2020824" cy="548640"/>
           </a:xfrm>
           <a:prstGeom prst="rect">
             <a:avLst/>
@@ -4585,7 +4645,7 @@
               <a:buNone/>
             </a:pPr>
             <a:r>
-              <a:rPr lang="en-US" sz="1250" dirty="0">
+              <a:rPr lang="en-US" sz="1300" dirty="0">
                 <a:solidFill>
                   <a:srgbClr val="A2977F"/>
                 </a:solidFill>
@@ -4595,24 +4655,24 @@
               </a:rPr>
               <a:t>فيسمي اللوحة</a:t>
             </a:r>
-            <a:endParaRPr lang="en-US" sz="1250" dirty="0"/>
-          </a:p>
-        </p:txBody>
-      </p:sp>
-      <p:sp>
-        <p:nvSpPr>
-          <p:cNvPr id="8" name="Shape 5"/>
-          <p:cNvSpPr/>
-          <p:nvPr/>
-        </p:nvSpPr>
-        <p:spPr>
-          <a:xfrm>
-            <a:off x="7162495" y="1965960"/>
-            <a:ext cx="2103120" cy="1417320"/>
+            <a:endParaRPr lang="en-US" sz="1300" dirty="0"/>
+          </a:p>
+        </p:txBody>
+      </p:sp>
+      <p:sp>
+        <p:nvSpPr>
+          <p:cNvPr id="7" name="Shape 5"/>
+          <p:cNvSpPr/>
+          <p:nvPr/>
+        </p:nvSpPr>
+        <p:spPr>
+          <a:xfrm>
+            <a:off x="6211519" y="2011680"/>
+            <a:ext cx="2532888" cy="1463040"/>
           </a:xfrm>
           <a:prstGeom prst="roundRect">
             <a:avLst>
-              <a:gd name="adj" fmla="val 6452"/>
+              <a:gd name="adj" fmla="val 6250"/>
             </a:avLst>
           </a:prstGeom>
           <a:solidFill>
@@ -4628,30 +4688,30 @@
       </p:sp>
       <p:sp>
         <p:nvSpPr>
-          <p:cNvPr id="9" name="Text 6"/>
-          <p:cNvSpPr/>
-          <p:nvPr/>
-        </p:nvSpPr>
-        <p:spPr>
-          <a:xfrm>
-            <a:off x="7363663" y="2176272"/>
-            <a:ext cx="1700784" cy="411480"/>
-          </a:xfrm>
-          <a:prstGeom prst="rect">
-            <a:avLst/>
-          </a:prstGeom>
-          <a:noFill/>
-          <a:ln/>
-        </p:spPr>
-        <p:txBody>
-          <a:bodyPr wrap="square" lIns="0" tIns="0" rIns="0" bIns="0" rtlCol="0" anchor="ctr"/>
-          <a:lstStyle/>
-          <a:p>
-            <a:pPr rtl="1" algn="r" indent="0" marL="0">
-              <a:buNone/>
-            </a:pPr>
-            <a:r>
-              <a:rPr lang="en-US" sz="1900" b="1" dirty="0">
+          <p:cNvPr id="8" name="Text 6"/>
+          <p:cNvSpPr/>
+          <p:nvPr/>
+        </p:nvSpPr>
+        <p:spPr>
+          <a:xfrm>
+            <a:off x="6467551" y="2240280"/>
+            <a:ext cx="2020824" cy="411480"/>
+          </a:xfrm>
+          <a:prstGeom prst="rect">
+            <a:avLst/>
+          </a:prstGeom>
+          <a:noFill/>
+          <a:ln/>
+        </p:spPr>
+        <p:txBody>
+          <a:bodyPr wrap="square" lIns="0" tIns="0" rIns="0" bIns="0" rtlCol="0" anchor="ctr"/>
+          <a:lstStyle/>
+          <a:p>
+            <a:pPr rtl="1" algn="r" indent="0" marL="0">
+              <a:buNone/>
+            </a:pPr>
+            <a:r>
+              <a:rPr lang="en-US" sz="2000" b="1" dirty="0">
                 <a:solidFill>
                   <a:srgbClr val="DD8C58"/>
                 </a:solidFill>
@@ -4659,22 +4719,22 @@
                 <a:ea typeface="Tajawal" pitchFamily="34" charset="-122"/>
                 <a:cs typeface="Tajawal" pitchFamily="34" charset="-120"/>
               </a:rPr>
-              <a:t>تصحح</a:t>
-            </a:r>
-            <a:endParaRPr lang="en-US" sz="1900" dirty="0"/>
-          </a:p>
-        </p:txBody>
-      </p:sp>
-      <p:sp>
-        <p:nvSpPr>
-          <p:cNvPr id="10" name="Text 7"/>
-          <p:cNvSpPr/>
-          <p:nvPr/>
-        </p:nvSpPr>
-        <p:spPr>
-          <a:xfrm>
-            <a:off x="7363663" y="2670048"/>
-            <a:ext cx="1700784" cy="548640"/>
+              <a:t>تصحّح</a:t>
+            </a:r>
+            <a:endParaRPr lang="en-US" sz="2000" dirty="0"/>
+          </a:p>
+        </p:txBody>
+      </p:sp>
+      <p:sp>
+        <p:nvSpPr>
+          <p:cNvPr id="9" name="Text 7"/>
+          <p:cNvSpPr/>
+          <p:nvPr/>
+        </p:nvSpPr>
+        <p:spPr>
+          <a:xfrm>
+            <a:off x="6467551" y="2743200"/>
+            <a:ext cx="2020824" cy="548640"/>
           </a:xfrm>
           <a:prstGeom prst="rect">
             <a:avLst/>
@@ -4693,7 +4753,7 @@
               <a:buNone/>
             </a:pPr>
             <a:r>
-              <a:rPr lang="en-US" sz="1250" dirty="0">
+              <a:rPr lang="en-US" sz="1300" dirty="0">
                 <a:solidFill>
                   <a:srgbClr val="A2977F"/>
                 </a:solidFill>
@@ -4701,26 +4761,26 @@
                 <a:ea typeface="Tajawal" pitchFamily="34" charset="-122"/>
                 <a:cs typeface="Tajawal" pitchFamily="34" charset="-120"/>
               </a:rPr>
-              <a:t>تضغط «ليست هذه»</a:t>
-            </a:r>
-            <a:endParaRPr lang="en-US" sz="1250" dirty="0"/>
-          </a:p>
-        </p:txBody>
-      </p:sp>
-      <p:sp>
-        <p:nvSpPr>
-          <p:cNvPr id="11" name="Shape 8"/>
-          <p:cNvSpPr/>
-          <p:nvPr/>
-        </p:nvSpPr>
-        <p:spPr>
-          <a:xfrm>
-            <a:off x="4922215" y="1965960"/>
-            <a:ext cx="2103120" cy="1417320"/>
+              <a:t>تضغط: ليست هذه</a:t>
+            </a:r>
+            <a:endParaRPr lang="en-US" sz="1300" dirty="0"/>
+          </a:p>
+        </p:txBody>
+      </p:sp>
+      <p:sp>
+        <p:nvSpPr>
+          <p:cNvPr id="10" name="Shape 8"/>
+          <p:cNvSpPr/>
+          <p:nvPr/>
+        </p:nvSpPr>
+        <p:spPr>
+          <a:xfrm>
+            <a:off x="3450031" y="2011680"/>
+            <a:ext cx="2532888" cy="1463040"/>
           </a:xfrm>
           <a:prstGeom prst="roundRect">
             <a:avLst>
-              <a:gd name="adj" fmla="val 6452"/>
+              <a:gd name="adj" fmla="val 6250"/>
             </a:avLst>
           </a:prstGeom>
           <a:solidFill>
@@ -4736,30 +4796,30 @@
       </p:sp>
       <p:sp>
         <p:nvSpPr>
-          <p:cNvPr id="12" name="Text 9"/>
-          <p:cNvSpPr/>
-          <p:nvPr/>
-        </p:nvSpPr>
-        <p:spPr>
-          <a:xfrm>
-            <a:off x="5123383" y="2176272"/>
-            <a:ext cx="1700784" cy="411480"/>
-          </a:xfrm>
-          <a:prstGeom prst="rect">
-            <a:avLst/>
-          </a:prstGeom>
-          <a:noFill/>
-          <a:ln/>
-        </p:spPr>
-        <p:txBody>
-          <a:bodyPr wrap="square" lIns="0" tIns="0" rIns="0" bIns="0" rtlCol="0" anchor="ctr"/>
-          <a:lstStyle/>
-          <a:p>
-            <a:pPr rtl="1" algn="r" indent="0" marL="0">
-              <a:buNone/>
-            </a:pPr>
-            <a:r>
-              <a:rPr lang="en-US" sz="1900" b="1" dirty="0">
+          <p:cNvPr id="11" name="Text 9"/>
+          <p:cNvSpPr/>
+          <p:nvPr/>
+        </p:nvSpPr>
+        <p:spPr>
+          <a:xfrm>
+            <a:off x="3706063" y="2240280"/>
+            <a:ext cx="2020824" cy="411480"/>
+          </a:xfrm>
+          <a:prstGeom prst="rect">
+            <a:avLst/>
+          </a:prstGeom>
+          <a:noFill/>
+          <a:ln/>
+        </p:spPr>
+        <p:txBody>
+          <a:bodyPr wrap="square" lIns="0" tIns="0" rIns="0" bIns="0" rtlCol="0" anchor="ctr"/>
+          <a:lstStyle/>
+          <a:p>
+            <a:pPr rtl="1" algn="r" indent="0" marL="0">
+              <a:buNone/>
+            </a:pPr>
+            <a:r>
+              <a:rPr lang="en-US" sz="2000" b="1" dirty="0">
                 <a:solidFill>
                   <a:srgbClr val="DD8C58"/>
                 </a:solidFill>
@@ -4767,22 +4827,22 @@
                 <a:ea typeface="Tajawal" pitchFamily="34" charset="-122"/>
                 <a:cs typeface="Tajawal" pitchFamily="34" charset="-120"/>
               </a:rPr>
-              <a:t>يتعلم</a:t>
-            </a:r>
-            <a:endParaRPr lang="en-US" sz="1900" dirty="0"/>
-          </a:p>
-        </p:txBody>
-      </p:sp>
-      <p:sp>
-        <p:nvSpPr>
-          <p:cNvPr id="13" name="Text 10"/>
-          <p:cNvSpPr/>
-          <p:nvPr/>
-        </p:nvSpPr>
-        <p:spPr>
-          <a:xfrm>
-            <a:off x="5123383" y="2670048"/>
-            <a:ext cx="1700784" cy="548640"/>
+              <a:t>يتعلّم</a:t>
+            </a:r>
+            <a:endParaRPr lang="en-US" sz="2000" dirty="0"/>
+          </a:p>
+        </p:txBody>
+      </p:sp>
+      <p:sp>
+        <p:nvSpPr>
+          <p:cNvPr id="12" name="Text 10"/>
+          <p:cNvSpPr/>
+          <p:nvPr/>
+        </p:nvSpPr>
+        <p:spPr>
+          <a:xfrm>
+            <a:off x="3706063" y="2743200"/>
+            <a:ext cx="2020824" cy="548640"/>
           </a:xfrm>
           <a:prstGeom prst="rect">
             <a:avLst/>
@@ -4801,7 +4861,7 @@
               <a:buNone/>
             </a:pPr>
             <a:r>
-              <a:rPr lang="en-US" sz="1250" dirty="0">
+              <a:rPr lang="en-US" sz="1300" dirty="0">
                 <a:solidFill>
                   <a:srgbClr val="A2977F"/>
                 </a:solidFill>
@@ -4811,24 +4871,24 @@
               </a:rPr>
               <a:t>يبقى في جوالك</a:t>
             </a:r>
-            <a:endParaRPr lang="en-US" sz="1250" dirty="0"/>
-          </a:p>
-        </p:txBody>
-      </p:sp>
-      <p:sp>
-        <p:nvSpPr>
-          <p:cNvPr id="14" name="Shape 11"/>
-          <p:cNvSpPr/>
-          <p:nvPr/>
-        </p:nvSpPr>
-        <p:spPr>
-          <a:xfrm>
-            <a:off x="2681935" y="1965960"/>
-            <a:ext cx="2103120" cy="1417320"/>
+            <a:endParaRPr lang="en-US" sz="1300" dirty="0"/>
+          </a:p>
+        </p:txBody>
+      </p:sp>
+      <p:sp>
+        <p:nvSpPr>
+          <p:cNvPr id="13" name="Shape 11"/>
+          <p:cNvSpPr/>
+          <p:nvPr/>
+        </p:nvSpPr>
+        <p:spPr>
+          <a:xfrm>
+            <a:off x="688543" y="2011680"/>
+            <a:ext cx="2532888" cy="1463040"/>
           </a:xfrm>
           <a:prstGeom prst="roundRect">
             <a:avLst>
-              <a:gd name="adj" fmla="val 6452"/>
+              <a:gd name="adj" fmla="val 6250"/>
             </a:avLst>
           </a:prstGeom>
           <a:solidFill>
@@ -4844,30 +4904,30 @@
       </p:sp>
       <p:sp>
         <p:nvSpPr>
-          <p:cNvPr id="15" name="Text 12"/>
-          <p:cNvSpPr/>
-          <p:nvPr/>
-        </p:nvSpPr>
-        <p:spPr>
-          <a:xfrm>
-            <a:off x="2883103" y="2176272"/>
-            <a:ext cx="1700784" cy="411480"/>
-          </a:xfrm>
-          <a:prstGeom prst="rect">
-            <a:avLst/>
-          </a:prstGeom>
-          <a:noFill/>
-          <a:ln/>
-        </p:spPr>
-        <p:txBody>
-          <a:bodyPr wrap="square" lIns="0" tIns="0" rIns="0" bIns="0" rtlCol="0" anchor="ctr"/>
-          <a:lstStyle/>
-          <a:p>
-            <a:pPr rtl="1" algn="r" indent="0" marL="0">
-              <a:buNone/>
-            </a:pPr>
-            <a:r>
-              <a:rPr lang="en-US" sz="1900" b="1" dirty="0">
+          <p:cNvPr id="14" name="Text 12"/>
+          <p:cNvSpPr/>
+          <p:nvPr/>
+        </p:nvSpPr>
+        <p:spPr>
+          <a:xfrm>
+            <a:off x="944575" y="2240280"/>
+            <a:ext cx="2020824" cy="411480"/>
+          </a:xfrm>
+          <a:prstGeom prst="rect">
+            <a:avLst/>
+          </a:prstGeom>
+          <a:noFill/>
+          <a:ln/>
+        </p:spPr>
+        <p:txBody>
+          <a:bodyPr wrap="square" lIns="0" tIns="0" rIns="0" bIns="0" rtlCol="0" anchor="ctr"/>
+          <a:lstStyle/>
+          <a:p>
+            <a:pPr rtl="1" algn="r" indent="0" marL="0">
+              <a:buNone/>
+            </a:pPr>
+            <a:r>
+              <a:rPr lang="en-US" sz="2000" b="1" dirty="0">
                 <a:solidFill>
                   <a:srgbClr val="DD8C58"/>
                 </a:solidFill>
@@ -4877,20 +4937,20 @@
               </a:rPr>
               <a:t>يصيب</a:t>
             </a:r>
-            <a:endParaRPr lang="en-US" sz="1900" dirty="0"/>
-          </a:p>
-        </p:txBody>
-      </p:sp>
-      <p:sp>
-        <p:nvSpPr>
-          <p:cNvPr id="16" name="Text 13"/>
-          <p:cNvSpPr/>
-          <p:nvPr/>
-        </p:nvSpPr>
-        <p:spPr>
-          <a:xfrm>
-            <a:off x="2883103" y="2670048"/>
-            <a:ext cx="1700784" cy="548640"/>
+            <a:endParaRPr lang="en-US" sz="2000" dirty="0"/>
+          </a:p>
+        </p:txBody>
+      </p:sp>
+      <p:sp>
+        <p:nvSpPr>
+          <p:cNvPr id="15" name="Text 13"/>
+          <p:cNvSpPr/>
+          <p:nvPr/>
+        </p:nvSpPr>
+        <p:spPr>
+          <a:xfrm>
+            <a:off x="944575" y="2743200"/>
+            <a:ext cx="2020824" cy="548640"/>
           </a:xfrm>
           <a:prstGeom prst="rect">
             <a:avLst/>
@@ -4909,7 +4969,7 @@
               <a:buNone/>
             </a:pPr>
             <a:r>
-              <a:rPr lang="en-US" sz="1250" dirty="0">
+              <a:rPr lang="en-US" sz="1300" dirty="0">
                 <a:solidFill>
                   <a:srgbClr val="A2977F"/>
                 </a:solidFill>
@@ -4919,24 +4979,24 @@
               </a:rPr>
               <a:t>في المسح التالي</a:t>
             </a:r>
-            <a:endParaRPr lang="en-US" sz="1250" dirty="0"/>
-          </a:p>
-        </p:txBody>
-      </p:sp>
-      <p:sp>
-        <p:nvSpPr>
-          <p:cNvPr id="17" name="Shape 14"/>
-          <p:cNvSpPr/>
-          <p:nvPr/>
-        </p:nvSpPr>
-        <p:spPr>
-          <a:xfrm>
-            <a:off x="6355080" y="3657600"/>
-            <a:ext cx="5166360" cy="2148840"/>
+            <a:endParaRPr lang="en-US" sz="1300" dirty="0"/>
+          </a:p>
+        </p:txBody>
+      </p:sp>
+      <p:sp>
+        <p:nvSpPr>
+          <p:cNvPr id="16" name="Shape 14"/>
+          <p:cNvSpPr/>
+          <p:nvPr/>
+        </p:nvSpPr>
+        <p:spPr>
+          <a:xfrm>
+            <a:off x="6355080" y="3749040"/>
+            <a:ext cx="5166360" cy="2103120"/>
           </a:xfrm>
           <a:prstGeom prst="roundRect">
             <a:avLst>
-              <a:gd name="adj" fmla="val 4255"/>
+              <a:gd name="adj" fmla="val 4348"/>
             </a:avLst>
           </a:prstGeom>
           <a:solidFill>
@@ -4952,13 +5012,13 @@
       </p:sp>
       <p:sp>
         <p:nvSpPr>
-          <p:cNvPr id="18" name="Text 15"/>
-          <p:cNvSpPr/>
-          <p:nvPr/>
-        </p:nvSpPr>
-        <p:spPr>
-          <a:xfrm>
-            <a:off x="6675120" y="3886200"/>
+          <p:cNvPr id="17" name="Text 15"/>
+          <p:cNvSpPr/>
+          <p:nvPr/>
+        </p:nvSpPr>
+        <p:spPr>
+          <a:xfrm>
+            <a:off x="6675120" y="3977640"/>
             <a:ext cx="4526280" cy="411480"/>
           </a:xfrm>
           <a:prstGeom prst="rect">
@@ -4991,14 +5051,14 @@
       </p:sp>
       <p:sp>
         <p:nvSpPr>
-          <p:cNvPr id="19" name="Text 16"/>
-          <p:cNvSpPr/>
-          <p:nvPr/>
-        </p:nvSpPr>
-        <p:spPr>
-          <a:xfrm>
-            <a:off x="6675120" y="4389120"/>
-            <a:ext cx="4526280" cy="1280160"/>
+          <p:cNvPr id="18" name="Text 16"/>
+          <p:cNvSpPr/>
+          <p:nvPr/>
+        </p:nvSpPr>
+        <p:spPr>
+          <a:xfrm>
+            <a:off x="6675120" y="4480560"/>
+            <a:ext cx="4526280" cy="1234440"/>
           </a:xfrm>
           <a:prstGeom prst="rect">
             <a:avLst/>
@@ -5033,18 +5093,18 @@
       </p:sp>
       <p:sp>
         <p:nvSpPr>
-          <p:cNvPr id="20" name="Shape 17"/>
-          <p:cNvSpPr/>
-          <p:nvPr/>
-        </p:nvSpPr>
-        <p:spPr>
-          <a:xfrm>
-            <a:off x="685800" y="3657600"/>
-            <a:ext cx="5166360" cy="2148840"/>
+          <p:cNvPr id="19" name="Shape 17"/>
+          <p:cNvSpPr/>
+          <p:nvPr/>
+        </p:nvSpPr>
+        <p:spPr>
+          <a:xfrm>
+            <a:off x="685800" y="3749040"/>
+            <a:ext cx="5166360" cy="2103120"/>
           </a:xfrm>
           <a:prstGeom prst="roundRect">
             <a:avLst>
-              <a:gd name="adj" fmla="val 4255"/>
+              <a:gd name="adj" fmla="val 4348"/>
             </a:avLst>
           </a:prstGeom>
           <a:solidFill>
@@ -5060,13 +5120,13 @@
       </p:sp>
       <p:sp>
         <p:nvSpPr>
-          <p:cNvPr id="21" name="Text 18"/>
-          <p:cNvSpPr/>
-          <p:nvPr/>
-        </p:nvSpPr>
-        <p:spPr>
-          <a:xfrm>
-            <a:off x="1005840" y="3886200"/>
+          <p:cNvPr id="20" name="Text 18"/>
+          <p:cNvSpPr/>
+          <p:nvPr/>
+        </p:nvSpPr>
+        <p:spPr>
+          <a:xfrm>
+            <a:off x="1005840" y="3977640"/>
             <a:ext cx="4526280" cy="411480"/>
           </a:xfrm>
           <a:prstGeom prst="rect">
@@ -5091,7 +5151,7 @@
                 <a:ea typeface="Tajawal" pitchFamily="34" charset="-122"/>
                 <a:cs typeface="Tajawal" pitchFamily="34" charset="-120"/>
               </a:rPr>
-              <a:t>ويتعلم ما ليس نقشا</a:t>
+              <a:t>ويتعلّم ما ليس نقشا</a:t>
             </a:r>
             <a:endParaRPr lang="en-US" sz="1900" dirty="0"/>
           </a:p>
@@ -5099,14 +5159,14 @@
       </p:sp>
       <p:sp>
         <p:nvSpPr>
-          <p:cNvPr id="22" name="Text 19"/>
-          <p:cNvSpPr/>
-          <p:nvPr/>
-        </p:nvSpPr>
-        <p:spPr>
-          <a:xfrm>
-            <a:off x="1005840" y="4389120"/>
-            <a:ext cx="4526280" cy="1280160"/>
+          <p:cNvPr id="21" name="Text 19"/>
+          <p:cNvSpPr/>
+          <p:nvPr/>
+        </p:nvSpPr>
+        <p:spPr>
+          <a:xfrm>
+            <a:off x="1005840" y="4480560"/>
+            <a:ext cx="4526280" cy="1234440"/>
           </a:xfrm>
           <a:prstGeom prst="rect">
             <a:avLst/>
@@ -5133,7 +5193,7 @@
                 <a:ea typeface="Tajawal" pitchFamily="34" charset="-122"/>
                 <a:cs typeface="Tajawal" pitchFamily="34" charset="-120"/>
               </a:rPr>
-              <a:t>صوب على حاسوبك واضغط «ليست نقشا». فيصبح الرفض جوابا تعلمه من إنسان، لا مجرد فشل في تجاوز عتبة.</a:t>
+              <a:t>صوّب الكاميرا على حاسوبك واضغط: ليست نقشا. فيصير الرفض جوابا تعلّمه منك، لا مجرد فشل في المطابقة.</a:t>
             </a:r>
             <a:endParaRPr lang="en-US" sz="1400" dirty="0"/>
           </a:p>
@@ -5216,7 +5276,7 @@
                 <a:ea typeface="Tajawal" pitchFamily="34" charset="-122"/>
                 <a:cs typeface="Tajawal" pitchFamily="34" charset="-120"/>
               </a:rPr>
-              <a:t>أول قياس كذب علينا</a:t>
+              <a:t>كيف بنينا أثر</a:t>
             </a:r>
             <a:endParaRPr lang="en-US" sz="3800" dirty="0"/>
           </a:p>
@@ -5247,7 +5307,7 @@
               <a:buNone/>
             </a:pPr>
             <a:r>
-              <a:rPr lang="en-US" sz="1700" dirty="0">
+              <a:rPr lang="en-US" sz="1800" dirty="0">
                 <a:solidFill>
                   <a:srgbClr val="A2977F"/>
                 </a:solidFill>
@@ -5255,9 +5315,9 @@
                 <a:ea typeface="Tajawal" pitchFamily="34" charset="-122"/>
                 <a:cs typeface="Tajawal" pitchFamily="34" charset="-120"/>
               </a:rPr>
-              <a:t>قال ٩٦٫٥٪، والصحيح ٧٩٫٣٪ — واكتشاف السبب أهم ما أنجزناه.</a:t>
-            </a:r>
-            <a:endParaRPr lang="en-US" sz="1700" dirty="0"/>
+              <a:t>من زيارة ميدانية إلى تطبيق يعمل في يد الزائر</a:t>
+            </a:r>
+            <a:endParaRPr lang="en-US" sz="1800" dirty="0"/>
           </a:p>
         </p:txBody>
       </p:sp>
@@ -5269,12 +5329,343 @@
         </p:nvSpPr>
         <p:spPr>
           <a:xfrm>
-            <a:off x="5349240" y="2057400"/>
-            <a:ext cx="6172200" cy="3657600"/>
+            <a:off x="621792" y="1993392"/>
+            <a:ext cx="3419856" cy="2596896"/>
           </a:xfrm>
           <a:prstGeom prst="roundRect">
             <a:avLst>
-              <a:gd name="adj" fmla="val 2500"/>
+              <a:gd name="adj" fmla="val 4225"/>
+            </a:avLst>
+          </a:prstGeom>
+          <a:solidFill>
+            <a:srgbClr val="2A3244"/>
+          </a:solidFill>
+          <a:ln w="12700">
+            <a:solidFill>
+              <a:srgbClr val="333333"/>
+            </a:solidFill>
+            <a:prstDash val="solid"/>
+          </a:ln>
+          <a:effectLst>
+            <a:outerShdw sx="100000" sy="100000" kx="0" ky="0" algn="bl" rotWithShape="0" blurRad="279400" dist="76200" dir="5400000">
+              <a:srgbClr val="000000">
+                <a:alpha val="60000"/>
+              </a:srgbClr>
+            </a:outerShdw>
+          </a:effectLst>
+        </p:spPr>
+      </p:sp>
+      <p:pic>
+        <p:nvPicPr>
+          <p:cNvPr id="5" name="Image 0" descr="preencoded.png">    </p:cNvPr>
+          <p:cNvPicPr>
+            <a:picLocks noChangeAspect="1"/>
+          </p:cNvPicPr>
+          <p:nvPr/>
+        </p:nvPicPr>
+        <p:blipFill>
+          <a:blip r:embed="rId1"/>
+          <a:stretch>
+            <a:fillRect/>
+          </a:stretch>
+        </p:blipFill>
+        <p:spPr>
+          <a:xfrm>
+            <a:off x="685800" y="2057400"/>
+            <a:ext cx="3291840" cy="2468880"/>
+          </a:xfrm>
+          <a:prstGeom prst="rect">
+            <a:avLst/>
+          </a:prstGeom>
+        </p:spPr>
+      </p:pic>
+      <p:sp>
+        <p:nvSpPr>
+          <p:cNvPr id="6" name="Text 3"/>
+          <p:cNvSpPr/>
+          <p:nvPr/>
+        </p:nvSpPr>
+        <p:spPr>
+          <a:xfrm>
+            <a:off x="685800" y="4709160"/>
+            <a:ext cx="3291840" cy="365760"/>
+          </a:xfrm>
+          <a:prstGeom prst="rect">
+            <a:avLst/>
+          </a:prstGeom>
+          <a:noFill/>
+          <a:ln/>
+        </p:spPr>
+        <p:txBody>
+          <a:bodyPr wrap="square" lIns="0" tIns="0" rIns="0" bIns="0" rtlCol="0" anchor="ctr"/>
+          <a:lstStyle/>
+          <a:p>
+            <a:pPr rtl="1" algn="ctr" indent="0" marL="0">
+              <a:buNone/>
+            </a:pPr>
+            <a:r>
+              <a:rPr lang="en-US" sz="1200" dirty="0">
+                <a:solidFill>
+                  <a:srgbClr val="6E6757"/>
+                </a:solidFill>
+                <a:latin typeface="Tajawal" pitchFamily="34" charset="0"/>
+                <a:ea typeface="Tajawal" pitchFamily="34" charset="-122"/>
+                <a:cs typeface="Tajawal" pitchFamily="34" charset="-120"/>
+              </a:rPr>
+              <a:t>جبة: من هنا جاءت كل صورة في الفهرس</a:t>
+            </a:r>
+            <a:endParaRPr lang="en-US" sz="1200" dirty="0"/>
+          </a:p>
+        </p:txBody>
+      </p:sp>
+      <p:sp>
+        <p:nvSpPr>
+          <p:cNvPr id="7" name="Text 4"/>
+          <p:cNvSpPr/>
+          <p:nvPr/>
+        </p:nvSpPr>
+        <p:spPr>
+          <a:xfrm>
+            <a:off x="3063240" y="5166360"/>
+            <a:ext cx="914400" cy="329184"/>
+          </a:xfrm>
+          <a:prstGeom prst="rect">
+            <a:avLst/>
+          </a:prstGeom>
+          <a:noFill/>
+          <a:ln/>
+        </p:spPr>
+        <p:txBody>
+          <a:bodyPr wrap="square" lIns="0" tIns="0" rIns="0" bIns="0" rtlCol="0" anchor="ctr"/>
+          <a:lstStyle/>
+          <a:p>
+            <a:pPr rtl="1" algn="r" indent="0" marL="0">
+              <a:buNone/>
+            </a:pPr>
+            <a:r>
+              <a:rPr lang="en-US" sz="1600" b="1" dirty="0">
+                <a:solidFill>
+                  <a:srgbClr val="DD8C58"/>
+                </a:solidFill>
+                <a:latin typeface="Tajawal" pitchFamily="34" charset="0"/>
+                <a:ea typeface="Tajawal" pitchFamily="34" charset="-122"/>
+                <a:cs typeface="Tajawal" pitchFamily="34" charset="-120"/>
+              </a:rPr>
+              <a:t>٢٠١</a:t>
+            </a:r>
+            <a:endParaRPr lang="en-US" sz="1600" dirty="0"/>
+          </a:p>
+        </p:txBody>
+      </p:sp>
+      <p:sp>
+        <p:nvSpPr>
+          <p:cNvPr id="8" name="Text 5"/>
+          <p:cNvSpPr/>
+          <p:nvPr/>
+        </p:nvSpPr>
+        <p:spPr>
+          <a:xfrm>
+            <a:off x="685800" y="5193792"/>
+            <a:ext cx="2286000" cy="292608"/>
+          </a:xfrm>
+          <a:prstGeom prst="rect">
+            <a:avLst/>
+          </a:prstGeom>
+          <a:noFill/>
+          <a:ln/>
+        </p:spPr>
+        <p:txBody>
+          <a:bodyPr wrap="square" lIns="0" tIns="0" rIns="0" bIns="0" rtlCol="0" anchor="ctr"/>
+          <a:lstStyle/>
+          <a:p>
+            <a:pPr rtl="1" algn="r" indent="0" marL="0">
+              <a:buNone/>
+            </a:pPr>
+            <a:r>
+              <a:rPr lang="en-US" sz="1250" dirty="0">
+                <a:solidFill>
+                  <a:srgbClr val="A2977F"/>
+                </a:solidFill>
+                <a:latin typeface="Tajawal" pitchFamily="34" charset="0"/>
+                <a:ea typeface="Tajawal" pitchFamily="34" charset="-122"/>
+                <a:cs typeface="Tajawal" pitchFamily="34" charset="-120"/>
+              </a:rPr>
+              <a:t>صورة مرجعية من الموقع</a:t>
+            </a:r>
+            <a:endParaRPr lang="en-US" sz="1250" dirty="0"/>
+          </a:p>
+        </p:txBody>
+      </p:sp>
+      <p:sp>
+        <p:nvSpPr>
+          <p:cNvPr id="9" name="Text 6"/>
+          <p:cNvSpPr/>
+          <p:nvPr/>
+        </p:nvSpPr>
+        <p:spPr>
+          <a:xfrm>
+            <a:off x="3063240" y="5550408"/>
+            <a:ext cx="914400" cy="329184"/>
+          </a:xfrm>
+          <a:prstGeom prst="rect">
+            <a:avLst/>
+          </a:prstGeom>
+          <a:noFill/>
+          <a:ln/>
+        </p:spPr>
+        <p:txBody>
+          <a:bodyPr wrap="square" lIns="0" tIns="0" rIns="0" bIns="0" rtlCol="0" anchor="ctr"/>
+          <a:lstStyle/>
+          <a:p>
+            <a:pPr rtl="1" algn="r" indent="0" marL="0">
+              <a:buNone/>
+            </a:pPr>
+            <a:r>
+              <a:rPr lang="en-US" sz="1600" b="1" dirty="0">
+                <a:solidFill>
+                  <a:srgbClr val="DD8C58"/>
+                </a:solidFill>
+                <a:latin typeface="Tajawal" pitchFamily="34" charset="0"/>
+                <a:ea typeface="Tajawal" pitchFamily="34" charset="-122"/>
+                <a:cs typeface="Tajawal" pitchFamily="34" charset="-120"/>
+              </a:rPr>
+              <a:t>٦٥٨</a:t>
+            </a:r>
+            <a:endParaRPr lang="en-US" sz="1600" dirty="0"/>
+          </a:p>
+        </p:txBody>
+      </p:sp>
+      <p:sp>
+        <p:nvSpPr>
+          <p:cNvPr id="10" name="Text 7"/>
+          <p:cNvSpPr/>
+          <p:nvPr/>
+        </p:nvSpPr>
+        <p:spPr>
+          <a:xfrm>
+            <a:off x="685800" y="5577840"/>
+            <a:ext cx="2286000" cy="292608"/>
+          </a:xfrm>
+          <a:prstGeom prst="rect">
+            <a:avLst/>
+          </a:prstGeom>
+          <a:noFill/>
+          <a:ln/>
+        </p:spPr>
+        <p:txBody>
+          <a:bodyPr wrap="square" lIns="0" tIns="0" rIns="0" bIns="0" rtlCol="0" anchor="ctr"/>
+          <a:lstStyle/>
+          <a:p>
+            <a:pPr rtl="1" algn="r" indent="0" marL="0">
+              <a:buNone/>
+            </a:pPr>
+            <a:r>
+              <a:rPr lang="en-US" sz="1250" dirty="0">
+                <a:solidFill>
+                  <a:srgbClr val="A2977F"/>
+                </a:solidFill>
+                <a:latin typeface="Tajawal" pitchFamily="34" charset="0"/>
+                <a:ea typeface="Tajawal" pitchFamily="34" charset="-122"/>
+                <a:cs typeface="Tajawal" pitchFamily="34" charset="-120"/>
+              </a:rPr>
+              <a:t>اختبارا آليا يعمل مع كل تعديل</a:t>
+            </a:r>
+            <a:endParaRPr lang="en-US" sz="1250" dirty="0"/>
+          </a:p>
+        </p:txBody>
+      </p:sp>
+      <p:sp>
+        <p:nvSpPr>
+          <p:cNvPr id="11" name="Text 8"/>
+          <p:cNvSpPr/>
+          <p:nvPr/>
+        </p:nvSpPr>
+        <p:spPr>
+          <a:xfrm>
+            <a:off x="3063240" y="5934456"/>
+            <a:ext cx="914400" cy="329184"/>
+          </a:xfrm>
+          <a:prstGeom prst="rect">
+            <a:avLst/>
+          </a:prstGeom>
+          <a:noFill/>
+          <a:ln/>
+        </p:spPr>
+        <p:txBody>
+          <a:bodyPr wrap="square" lIns="0" tIns="0" rIns="0" bIns="0" rtlCol="0" anchor="ctr"/>
+          <a:lstStyle/>
+          <a:p>
+            <a:pPr rtl="1" algn="r" indent="0" marL="0">
+              <a:buNone/>
+            </a:pPr>
+            <a:r>
+              <a:rPr lang="en-US" sz="1600" b="1" dirty="0">
+                <a:solidFill>
+                  <a:srgbClr val="DD8C58"/>
+                </a:solidFill>
+                <a:latin typeface="Tajawal" pitchFamily="34" charset="0"/>
+                <a:ea typeface="Tajawal" pitchFamily="34" charset="-122"/>
+                <a:cs typeface="Tajawal" pitchFamily="34" charset="-120"/>
+              </a:rPr>
+              <a:t>٢٩</a:t>
+            </a:r>
+            <a:endParaRPr lang="en-US" sz="1600" dirty="0"/>
+          </a:p>
+        </p:txBody>
+      </p:sp>
+      <p:sp>
+        <p:nvSpPr>
+          <p:cNvPr id="12" name="Text 9"/>
+          <p:cNvSpPr/>
+          <p:nvPr/>
+        </p:nvSpPr>
+        <p:spPr>
+          <a:xfrm>
+            <a:off x="685800" y="5961888"/>
+            <a:ext cx="2286000" cy="292608"/>
+          </a:xfrm>
+          <a:prstGeom prst="rect">
+            <a:avLst/>
+          </a:prstGeom>
+          <a:noFill/>
+          <a:ln/>
+        </p:spPr>
+        <p:txBody>
+          <a:bodyPr wrap="square" lIns="0" tIns="0" rIns="0" bIns="0" rtlCol="0" anchor="ctr"/>
+          <a:lstStyle/>
+          <a:p>
+            <a:pPr rtl="1" algn="r" indent="0" marL="0">
+              <a:buNone/>
+            </a:pPr>
+            <a:r>
+              <a:rPr lang="en-US" sz="1250" dirty="0">
+                <a:solidFill>
+                  <a:srgbClr val="A2977F"/>
+                </a:solidFill>
+                <a:latin typeface="Tajawal" pitchFamily="34" charset="0"/>
+                <a:ea typeface="Tajawal" pitchFamily="34" charset="-122"/>
+                <a:cs typeface="Tajawal" pitchFamily="34" charset="-120"/>
+              </a:rPr>
+              <a:t>لغة، وصوت لكل قصة</a:t>
+            </a:r>
+            <a:endParaRPr lang="en-US" sz="1250" dirty="0"/>
+          </a:p>
+        </p:txBody>
+      </p:sp>
+      <p:sp>
+        <p:nvSpPr>
+          <p:cNvPr id="13" name="Shape 10"/>
+          <p:cNvSpPr/>
+          <p:nvPr/>
+        </p:nvSpPr>
+        <p:spPr>
+          <a:xfrm>
+            <a:off x="4343400" y="2057400"/>
+            <a:ext cx="7159752" cy="841248"/>
+          </a:xfrm>
+          <a:prstGeom prst="roundRect">
+            <a:avLst>
+              <a:gd name="adj" fmla="val 10870"/>
             </a:avLst>
           </a:prstGeom>
           <a:solidFill>
@@ -5290,69 +5681,69 @@
       </p:sp>
       <p:sp>
         <p:nvSpPr>
-          <p:cNvPr id="5" name="Text 3"/>
-          <p:cNvSpPr/>
-          <p:nvPr/>
-        </p:nvSpPr>
-        <p:spPr>
-          <a:xfrm>
-            <a:off x="5715000" y="2286000"/>
-            <a:ext cx="5440680" cy="411480"/>
-          </a:xfrm>
-          <a:prstGeom prst="rect">
-            <a:avLst/>
-          </a:prstGeom>
-          <a:noFill/>
-          <a:ln/>
-        </p:spPr>
-        <p:txBody>
-          <a:bodyPr wrap="square" lIns="0" tIns="0" rIns="0" bIns="0" rtlCol="0" anchor="ctr"/>
-          <a:lstStyle/>
-          <a:p>
-            <a:pPr rtl="1" algn="r" indent="0" marL="0">
-              <a:buNone/>
-            </a:pPr>
-            <a:r>
-              <a:rPr lang="en-US" sz="1900" b="1" dirty="0">
-                <a:solidFill>
-                  <a:srgbClr val="E8DCC8"/>
-                </a:solidFill>
-                <a:latin typeface="Tajawal" pitchFamily="34" charset="0"/>
-                <a:ea typeface="Tajawal" pitchFamily="34" charset="-122"/>
-                <a:cs typeface="Tajawal" pitchFamily="34" charset="-120"/>
-              </a:rPr>
-              <a:t>ما قسناه</a:t>
-            </a:r>
-            <a:endParaRPr lang="en-US" sz="1900" dirty="0"/>
-          </a:p>
-        </p:txBody>
-      </p:sp>
-      <p:sp>
-        <p:nvSpPr>
-          <p:cNvPr id="6" name="Text 4"/>
-          <p:cNvSpPr/>
-          <p:nvPr/>
-        </p:nvSpPr>
-        <p:spPr>
-          <a:xfrm>
-            <a:off x="7589520" y="3063240"/>
-            <a:ext cx="3566160" cy="347472"/>
-          </a:xfrm>
-          <a:prstGeom prst="rect">
-            <a:avLst/>
-          </a:prstGeom>
-          <a:noFill/>
-          <a:ln/>
-        </p:spPr>
-        <p:txBody>
-          <a:bodyPr wrap="square" lIns="0" tIns="0" rIns="0" bIns="0" rtlCol="0" anchor="ctr"/>
-          <a:lstStyle/>
-          <a:p>
-            <a:pPr rtl="1" algn="r" indent="0" marL="0">
-              <a:buNone/>
-            </a:pPr>
-            <a:r>
-              <a:rPr lang="en-US" sz="1300" dirty="0">
+          <p:cNvPr id="14" name="Text 11"/>
+          <p:cNvSpPr/>
+          <p:nvPr/>
+        </p:nvSpPr>
+        <p:spPr>
+          <a:xfrm>
+            <a:off x="9372600" y="2295144"/>
+            <a:ext cx="1965960" cy="365760"/>
+          </a:xfrm>
+          <a:prstGeom prst="rect">
+            <a:avLst/>
+          </a:prstGeom>
+          <a:noFill/>
+          <a:ln/>
+        </p:spPr>
+        <p:txBody>
+          <a:bodyPr wrap="square" lIns="0" tIns="0" rIns="0" bIns="0" rtlCol="0" anchor="ctr"/>
+          <a:lstStyle/>
+          <a:p>
+            <a:pPr rtl="1" algn="r" indent="0" marL="0">
+              <a:buNone/>
+            </a:pPr>
+            <a:r>
+              <a:rPr lang="en-US" sz="1800" b="1" dirty="0">
+                <a:solidFill>
+                  <a:srgbClr val="DD8C58"/>
+                </a:solidFill>
+                <a:latin typeface="Tajawal" pitchFamily="34" charset="0"/>
+                <a:ea typeface="Tajawal" pitchFamily="34" charset="-122"/>
+                <a:cs typeface="Tajawal" pitchFamily="34" charset="-120"/>
+              </a:rPr>
+              <a:t>الميدان</a:t>
+            </a:r>
+            <a:endParaRPr lang="en-US" sz="1800" dirty="0"/>
+          </a:p>
+        </p:txBody>
+      </p:sp>
+      <p:sp>
+        <p:nvSpPr>
+          <p:cNvPr id="15" name="Text 12"/>
+          <p:cNvSpPr/>
+          <p:nvPr/>
+        </p:nvSpPr>
+        <p:spPr>
+          <a:xfrm>
+            <a:off x="4553712" y="2322576"/>
+            <a:ext cx="4617720" cy="329184"/>
+          </a:xfrm>
+          <a:prstGeom prst="rect">
+            <a:avLst/>
+          </a:prstGeom>
+          <a:noFill/>
+          <a:ln/>
+        </p:spPr>
+        <p:txBody>
+          <a:bodyPr wrap="square" lIns="0" tIns="0" rIns="0" bIns="0" rtlCol="0" anchor="ctr"/>
+          <a:lstStyle/>
+          <a:p>
+            <a:pPr rtl="1" algn="r" indent="0" marL="0">
+              <a:buNone/>
+            </a:pPr>
+            <a:r>
+              <a:rPr lang="en-US" sz="1350" dirty="0">
                 <a:solidFill>
                   <a:srgbClr val="A2977F"/>
                 </a:solidFill>
@@ -5360,255 +5751,30 @@
                 <a:ea typeface="Tajawal" pitchFamily="34" charset="-122"/>
                 <a:cs typeface="Tajawal" pitchFamily="34" charset="-120"/>
               </a:rPr>
-              <a:t>حين نختبره بصورة من المجموعة نفسها</a:t>
-            </a:r>
-            <a:endParaRPr lang="en-US" sz="1300" dirty="0"/>
-          </a:p>
-        </p:txBody>
-      </p:sp>
-      <p:sp>
-        <p:nvSpPr>
-          <p:cNvPr id="7" name="Shape 5"/>
-          <p:cNvSpPr/>
-          <p:nvPr/>
-        </p:nvSpPr>
-        <p:spPr>
-          <a:xfrm>
-            <a:off x="5715000" y="3465576"/>
-            <a:ext cx="5074920" cy="329184"/>
+              <a:t>زرنا جبة، وصوّرنا لوحاتها، وسجّلنا قصصها بأصواتنا.</a:t>
+            </a:r>
+            <a:endParaRPr lang="en-US" sz="1350" dirty="0"/>
+          </a:p>
+        </p:txBody>
+      </p:sp>
+      <p:sp>
+        <p:nvSpPr>
+          <p:cNvPr id="16" name="Shape 13"/>
+          <p:cNvSpPr/>
+          <p:nvPr/>
+        </p:nvSpPr>
+        <p:spPr>
+          <a:xfrm>
+            <a:off x="4343400" y="3063240"/>
+            <a:ext cx="7159752" cy="841248"/>
           </a:xfrm>
           <a:prstGeom prst="roundRect">
             <a:avLst>
-              <a:gd name="adj" fmla="val 19444"/>
+              <a:gd name="adj" fmla="val 10870"/>
             </a:avLst>
           </a:prstGeom>
           <a:solidFill>
-            <a:srgbClr val="232D42"/>
-          </a:solidFill>
-          <a:ln w="12700">
-            <a:solidFill>
-              <a:srgbClr val="333333"/>
-            </a:solidFill>
-            <a:prstDash val="solid"/>
-          </a:ln>
-        </p:spPr>
-      </p:sp>
-      <p:sp>
-        <p:nvSpPr>
-          <p:cNvPr id="8" name="Shape 6"/>
-          <p:cNvSpPr/>
-          <p:nvPr/>
-        </p:nvSpPr>
-        <p:spPr>
-          <a:xfrm>
-            <a:off x="5892622" y="3465576"/>
-            <a:ext cx="4897298" cy="329184"/>
-          </a:xfrm>
-          <a:prstGeom prst="roundRect">
-            <a:avLst>
-              <a:gd name="adj" fmla="val 19444"/>
-            </a:avLst>
-          </a:prstGeom>
-          <a:solidFill>
-            <a:srgbClr val="6E6757"/>
-          </a:solidFill>
-          <a:ln w="12700">
-            <a:solidFill>
-              <a:srgbClr val="333333"/>
-            </a:solidFill>
-            <a:prstDash val="solid"/>
-          </a:ln>
-        </p:spPr>
-      </p:sp>
-      <p:sp>
-        <p:nvSpPr>
-          <p:cNvPr id="9" name="Text 7"/>
-          <p:cNvSpPr/>
-          <p:nvPr/>
-        </p:nvSpPr>
-        <p:spPr>
-          <a:xfrm>
-            <a:off x="5715000" y="3063240"/>
-            <a:ext cx="1554480" cy="347472"/>
-          </a:xfrm>
-          <a:prstGeom prst="rect">
-            <a:avLst/>
-          </a:prstGeom>
-          <a:noFill/>
-          <a:ln/>
-        </p:spPr>
-        <p:txBody>
-          <a:bodyPr wrap="square" lIns="0" tIns="0" rIns="0" bIns="0" rtlCol="0" anchor="ctr"/>
-          <a:lstStyle/>
-          <a:p>
-            <a:pPr rtl="1" algn="l" indent="0" marL="0">
-              <a:buNone/>
-            </a:pPr>
-            <a:r>
-              <a:rPr lang="en-US" sz="1700" b="1" dirty="0">
-                <a:solidFill>
-                  <a:srgbClr val="6E6757"/>
-                </a:solidFill>
-                <a:latin typeface="Tajawal" pitchFamily="34" charset="0"/>
-                <a:ea typeface="Tajawal" pitchFamily="34" charset="-122"/>
-                <a:cs typeface="Tajawal" pitchFamily="34" charset="-120"/>
-              </a:rPr>
-              <a:t>٩٦٫٥٪</a:t>
-            </a:r>
-            <a:endParaRPr lang="en-US" sz="1700" dirty="0"/>
-          </a:p>
-        </p:txBody>
-      </p:sp>
-      <p:sp>
-        <p:nvSpPr>
-          <p:cNvPr id="10" name="Text 8"/>
-          <p:cNvSpPr/>
-          <p:nvPr/>
-        </p:nvSpPr>
-        <p:spPr>
-          <a:xfrm>
-            <a:off x="7589520" y="4251960"/>
-            <a:ext cx="3566160" cy="347472"/>
-          </a:xfrm>
-          <a:prstGeom prst="rect">
-            <a:avLst/>
-          </a:prstGeom>
-          <a:noFill/>
-          <a:ln/>
-        </p:spPr>
-        <p:txBody>
-          <a:bodyPr wrap="square" lIns="0" tIns="0" rIns="0" bIns="0" rtlCol="0" anchor="ctr"/>
-          <a:lstStyle/>
-          <a:p>
-            <a:pPr rtl="1" algn="r" indent="0" marL="0">
-              <a:buNone/>
-            </a:pPr>
-            <a:r>
-              <a:rPr lang="en-US" sz="1300" dirty="0">
-                <a:solidFill>
-                  <a:srgbClr val="A2977F"/>
-                </a:solidFill>
-                <a:latin typeface="Tajawal" pitchFamily="34" charset="0"/>
-                <a:ea typeface="Tajawal" pitchFamily="34" charset="-122"/>
-                <a:cs typeface="Tajawal" pitchFamily="34" charset="-120"/>
-              </a:rPr>
-              <a:t>حين نختبره بصورة جديدة تماما</a:t>
-            </a:r>
-            <a:endParaRPr lang="en-US" sz="1300" dirty="0"/>
-          </a:p>
-        </p:txBody>
-      </p:sp>
-      <p:sp>
-        <p:nvSpPr>
-          <p:cNvPr id="11" name="Shape 9"/>
-          <p:cNvSpPr/>
-          <p:nvPr/>
-        </p:nvSpPr>
-        <p:spPr>
-          <a:xfrm>
-            <a:off x="5715000" y="4654296"/>
-            <a:ext cx="5074920" cy="329184"/>
-          </a:xfrm>
-          <a:prstGeom prst="roundRect">
-            <a:avLst>
-              <a:gd name="adj" fmla="val 19444"/>
-            </a:avLst>
-          </a:prstGeom>
-          <a:solidFill>
-            <a:srgbClr val="232D42"/>
-          </a:solidFill>
-          <a:ln w="12700">
-            <a:solidFill>
-              <a:srgbClr val="333333"/>
-            </a:solidFill>
-            <a:prstDash val="solid"/>
-          </a:ln>
-        </p:spPr>
-      </p:sp>
-      <p:sp>
-        <p:nvSpPr>
-          <p:cNvPr id="12" name="Shape 10"/>
-          <p:cNvSpPr/>
-          <p:nvPr/>
-        </p:nvSpPr>
-        <p:spPr>
-          <a:xfrm>
-            <a:off x="6765508" y="4654296"/>
-            <a:ext cx="4024412" cy="329184"/>
-          </a:xfrm>
-          <a:prstGeom prst="roundRect">
-            <a:avLst>
-              <a:gd name="adj" fmla="val 19444"/>
-            </a:avLst>
-          </a:prstGeom>
-          <a:solidFill>
-            <a:srgbClr val="C97A4A"/>
-          </a:solidFill>
-          <a:ln w="12700">
-            <a:solidFill>
-              <a:srgbClr val="333333"/>
-            </a:solidFill>
-            <a:prstDash val="solid"/>
-          </a:ln>
-        </p:spPr>
-      </p:sp>
-      <p:sp>
-        <p:nvSpPr>
-          <p:cNvPr id="13" name="Text 11"/>
-          <p:cNvSpPr/>
-          <p:nvPr/>
-        </p:nvSpPr>
-        <p:spPr>
-          <a:xfrm>
-            <a:off x="5715000" y="4251960"/>
-            <a:ext cx="1554480" cy="347472"/>
-          </a:xfrm>
-          <a:prstGeom prst="rect">
-            <a:avLst/>
-          </a:prstGeom>
-          <a:noFill/>
-          <a:ln/>
-        </p:spPr>
-        <p:txBody>
-          <a:bodyPr wrap="square" lIns="0" tIns="0" rIns="0" bIns="0" rtlCol="0" anchor="ctr"/>
-          <a:lstStyle/>
-          <a:p>
-            <a:pPr rtl="1" algn="l" indent="0" marL="0">
-              <a:buNone/>
-            </a:pPr>
-            <a:r>
-              <a:rPr lang="en-US" sz="1700" b="1" dirty="0">
-                <a:solidFill>
-                  <a:srgbClr val="C97A4A"/>
-                </a:solidFill>
-                <a:latin typeface="Tajawal" pitchFamily="34" charset="0"/>
-                <a:ea typeface="Tajawal" pitchFamily="34" charset="-122"/>
-                <a:cs typeface="Tajawal" pitchFamily="34" charset="-120"/>
-              </a:rPr>
-              <a:t>٧٩٫٣٪</a:t>
-            </a:r>
-            <a:endParaRPr lang="en-US" sz="1700" dirty="0"/>
-          </a:p>
-        </p:txBody>
-      </p:sp>
-      <p:sp>
-        <p:nvSpPr>
-          <p:cNvPr id="14" name="Shape 12"/>
-          <p:cNvSpPr/>
-          <p:nvPr/>
-        </p:nvSpPr>
-        <p:spPr>
-          <a:xfrm>
-            <a:off x="685800" y="2057400"/>
-            <a:ext cx="4434840" cy="3657600"/>
-          </a:xfrm>
-          <a:prstGeom prst="roundRect">
-            <a:avLst>
-              <a:gd name="adj" fmla="val 2500"/>
-            </a:avLst>
-          </a:prstGeom>
-          <a:solidFill>
-            <a:srgbClr val="232D42"/>
+            <a:srgbClr val="151D2C"/>
           </a:solidFill>
           <a:ln w="12700">
             <a:solidFill>
@@ -5618,163 +5784,71 @@
           </a:ln>
         </p:spPr>
       </p:sp>
-      <p:pic>
-        <p:nvPicPr>
-          <p:cNvPr id="15" name="Image 0" descr="preencoded.png">    </p:cNvPr>
-          <p:cNvPicPr>
-            <a:picLocks noChangeAspect="1"/>
-          </p:cNvPicPr>
-          <p:nvPr/>
-        </p:nvPicPr>
-        <p:blipFill>
-          <a:blip r:embed="rId1">
-            <a:alphaModFix amt="45000"/>
-          </a:blip>
-          <a:stretch>
-            <a:fillRect/>
-          </a:stretch>
-        </p:blipFill>
-        <p:spPr>
-          <a:xfrm>
-            <a:off x="1234440" y="2331720"/>
-            <a:ext cx="2286000" cy="1453896"/>
-          </a:xfrm>
-          <a:prstGeom prst="rect">
-            <a:avLst/>
-          </a:prstGeom>
-        </p:spPr>
-      </p:pic>
-      <p:pic>
-        <p:nvPicPr>
-          <p:cNvPr id="16" name="Image 1" descr="preencoded.png">    </p:cNvPr>
-          <p:cNvPicPr>
-            <a:picLocks noChangeAspect="1"/>
-          </p:cNvPicPr>
-          <p:nvPr/>
-        </p:nvPicPr>
-        <p:blipFill>
-          <a:blip r:embed="rId2"/>
-          <a:stretch>
-            <a:fillRect/>
-          </a:stretch>
-        </p:blipFill>
-        <p:spPr>
-          <a:xfrm>
-            <a:off x="1463040" y="2450592"/>
-            <a:ext cx="2286000" cy="1453896"/>
-          </a:xfrm>
-          <a:prstGeom prst="rect">
-            <a:avLst/>
-          </a:prstGeom>
-        </p:spPr>
-      </p:pic>
-      <p:sp>
-        <p:nvSpPr>
-          <p:cNvPr id="17" name="Text 13"/>
-          <p:cNvSpPr/>
-          <p:nvPr/>
-        </p:nvSpPr>
-        <p:spPr>
-          <a:xfrm>
-            <a:off x="960120" y="3886200"/>
-            <a:ext cx="3886200" cy="347472"/>
-          </a:xfrm>
-          <a:prstGeom prst="rect">
-            <a:avLst/>
-          </a:prstGeom>
-          <a:noFill/>
-          <a:ln/>
-        </p:spPr>
-        <p:txBody>
-          <a:bodyPr wrap="square" lIns="0" tIns="0" rIns="0" bIns="0" rtlCol="0" anchor="ctr"/>
-          <a:lstStyle/>
-          <a:p>
-            <a:pPr rtl="1" algn="ctr" indent="0" marL="0">
-              <a:buNone/>
-            </a:pPr>
-            <a:r>
-              <a:rPr lang="en-US" sz="1200" dirty="0">
-                <a:solidFill>
-                  <a:srgbClr val="6E6757"/>
-                </a:solidFill>
-                <a:latin typeface="Tajawal" pitchFamily="34" charset="0"/>
-                <a:ea typeface="Tajawal" pitchFamily="34" charset="-122"/>
-                <a:cs typeface="Tajawal" pitchFamily="34" charset="-120"/>
-              </a:rPr>
-              <a:t>لقطتان من اللحظة نفسها</a:t>
-            </a:r>
-            <a:endParaRPr lang="en-US" sz="1200" dirty="0"/>
-          </a:p>
-        </p:txBody>
-      </p:sp>
-      <p:sp>
-        <p:nvSpPr>
-          <p:cNvPr id="18" name="Text 14"/>
-          <p:cNvSpPr/>
-          <p:nvPr/>
-        </p:nvSpPr>
-        <p:spPr>
-          <a:xfrm>
-            <a:off x="960120" y="4343400"/>
-            <a:ext cx="3886200" cy="411480"/>
-          </a:xfrm>
-          <a:prstGeom prst="rect">
-            <a:avLst/>
-          </a:prstGeom>
-          <a:noFill/>
-          <a:ln/>
-        </p:spPr>
-        <p:txBody>
-          <a:bodyPr wrap="square" lIns="0" tIns="0" rIns="0" bIns="0" rtlCol="0" anchor="ctr"/>
-          <a:lstStyle/>
-          <a:p>
-            <a:pPr rtl="1" algn="r" indent="0" marL="0">
-              <a:buNone/>
-            </a:pPr>
-            <a:r>
-              <a:rPr lang="en-US" sz="1900" b="1" dirty="0">
-                <a:solidFill>
-                  <a:srgbClr val="EFAE6E"/>
-                </a:solidFill>
-                <a:latin typeface="Tajawal" pitchFamily="34" charset="0"/>
-                <a:ea typeface="Tajawal" pitchFamily="34" charset="-122"/>
-                <a:cs typeface="Tajawal" pitchFamily="34" charset="-120"/>
-              </a:rPr>
-              <a:t>العلة التي وجدناها</a:t>
-            </a:r>
-            <a:endParaRPr lang="en-US" sz="1900" dirty="0"/>
-          </a:p>
-        </p:txBody>
-      </p:sp>
-      <p:sp>
-        <p:nvSpPr>
-          <p:cNvPr id="19" name="Text 15"/>
-          <p:cNvSpPr/>
-          <p:nvPr/>
-        </p:nvSpPr>
-        <p:spPr>
-          <a:xfrm>
-            <a:off x="960120" y="4846320"/>
-            <a:ext cx="3886200" cy="777240"/>
-          </a:xfrm>
-          <a:prstGeom prst="rect">
-            <a:avLst/>
-          </a:prstGeom>
-          <a:noFill/>
-          <a:ln/>
-        </p:spPr>
-        <p:txBody>
-          <a:bodyPr wrap="square" lIns="0" tIns="0" rIns="0" bIns="0" rtlCol="0" anchor="ctr"/>
-          <a:lstStyle/>
-          <a:p>
-            <a:pPr rtl="1" algn="r" indent="0" marL="0">
-              <a:lnSpc>
-                <a:spcPts val="2000"/>
-              </a:lnSpc>
-              <a:buNone/>
-            </a:pPr>
-            <a:r>
-              <a:rPr lang="en-US" sz="1250" dirty="0">
+      <p:sp>
+        <p:nvSpPr>
+          <p:cNvPr id="17" name="Text 14"/>
+          <p:cNvSpPr/>
+          <p:nvPr/>
+        </p:nvSpPr>
+        <p:spPr>
+          <a:xfrm>
+            <a:off x="9372600" y="3300984"/>
+            <a:ext cx="1965960" cy="365760"/>
+          </a:xfrm>
+          <a:prstGeom prst="rect">
+            <a:avLst/>
+          </a:prstGeom>
+          <a:noFill/>
+          <a:ln/>
+        </p:spPr>
+        <p:txBody>
+          <a:bodyPr wrap="square" lIns="0" tIns="0" rIns="0" bIns="0" rtlCol="0" anchor="ctr"/>
+          <a:lstStyle/>
+          <a:p>
+            <a:pPr rtl="1" algn="r" indent="0" marL="0">
+              <a:buNone/>
+            </a:pPr>
+            <a:r>
+              <a:rPr lang="en-US" sz="1800" b="1" dirty="0">
+                <a:solidFill>
+                  <a:srgbClr val="DD8C58"/>
+                </a:solidFill>
+                <a:latin typeface="Tajawal" pitchFamily="34" charset="0"/>
+                <a:ea typeface="Tajawal" pitchFamily="34" charset="-122"/>
+                <a:cs typeface="Tajawal" pitchFamily="34" charset="-120"/>
+              </a:rPr>
+              <a:t>النموذج</a:t>
+            </a:r>
+            <a:endParaRPr lang="en-US" sz="1800" dirty="0"/>
+          </a:p>
+        </p:txBody>
+      </p:sp>
+      <p:sp>
+        <p:nvSpPr>
+          <p:cNvPr id="18" name="Text 15"/>
+          <p:cNvSpPr/>
+          <p:nvPr/>
+        </p:nvSpPr>
+        <p:spPr>
+          <a:xfrm>
+            <a:off x="4553712" y="3328416"/>
+            <a:ext cx="4617720" cy="329184"/>
+          </a:xfrm>
+          <a:prstGeom prst="rect">
+            <a:avLst/>
+          </a:prstGeom>
+          <a:noFill/>
+          <a:ln/>
+        </p:spPr>
+        <p:txBody>
+          <a:bodyPr wrap="square" lIns="0" tIns="0" rIns="0" bIns="0" rtlCol="0" anchor="ctr"/>
+          <a:lstStyle/>
+          <a:p>
+            <a:pPr rtl="1" algn="r" indent="0" marL="0">
+              <a:buNone/>
+            </a:pPr>
+            <a:r>
+              <a:rPr lang="en-US" sz="1350" dirty="0">
                 <a:solidFill>
                   <a:srgbClr val="A2977F"/>
                 </a:solidFill>
@@ -5782,48 +5856,219 @@
                 <a:ea typeface="Tajawal" pitchFamily="34" charset="-122"/>
                 <a:cs typeface="Tajawal" pitchFamily="34" charset="-120"/>
               </a:rPr>
-              <a:t>صورنا المرجعية كلها من زيارة واحدة، فكل صورتين متتاليتين شبه متطابقتين. فكان الاختبار يسأل: هل تشبه الصورة أختها الملتقطة قبل ثانيتين؟ وهذا تسرب بيانات.</a:t>
-            </a:r>
-            <a:endParaRPr lang="en-US" sz="1250" dirty="0"/>
-          </a:p>
-        </p:txBody>
-      </p:sp>
-      <p:sp>
-        <p:nvSpPr>
-          <p:cNvPr id="20" name="Text 16"/>
-          <p:cNvSpPr/>
-          <p:nvPr/>
-        </p:nvSpPr>
-        <p:spPr>
-          <a:xfrm>
-            <a:off x="685800" y="5943600"/>
-            <a:ext cx="10820095" cy="457200"/>
-          </a:xfrm>
-          <a:prstGeom prst="rect">
-            <a:avLst/>
-          </a:prstGeom>
-          <a:noFill/>
-          <a:ln/>
-        </p:spPr>
-        <p:txBody>
-          <a:bodyPr wrap="square" lIns="0" tIns="0" rIns="0" bIns="0" rtlCol="0" anchor="ctr"/>
-          <a:lstStyle/>
-          <a:p>
-            <a:pPr rtl="1" algn="r" indent="0" marL="0">
-              <a:buNone/>
-            </a:pPr>
-            <a:r>
-              <a:rPr lang="en-US" sz="1550" i="1" dirty="0">
-                <a:solidFill>
-                  <a:srgbClr val="EFAE6E"/>
-                </a:solidFill>
-                <a:latin typeface="Tajawal" pitchFamily="34" charset="0"/>
-                <a:ea typeface="Tajawal" pitchFamily="34" charset="-122"/>
-                <a:cs typeface="Tajawal" pitchFamily="34" charset="-120"/>
-              </a:rPr>
-              <a:t>صفر إجابة خاطئة على ٥٣ صورة رمل وسماء، و١٢٢ صورة لنقوش أخرى في جبة.</a:t>
-            </a:r>
-            <a:endParaRPr lang="en-US" sz="1550" dirty="0"/>
+              <a:t>شغّلنا التعرّف داخل المتصفح نفسه: لا خادم ولا إنترنت.</a:t>
+            </a:r>
+            <a:endParaRPr lang="en-US" sz="1350" dirty="0"/>
+          </a:p>
+        </p:txBody>
+      </p:sp>
+      <p:sp>
+        <p:nvSpPr>
+          <p:cNvPr id="19" name="Shape 16"/>
+          <p:cNvSpPr/>
+          <p:nvPr/>
+        </p:nvSpPr>
+        <p:spPr>
+          <a:xfrm>
+            <a:off x="4343400" y="4069080"/>
+            <a:ext cx="7159752" cy="841248"/>
+          </a:xfrm>
+          <a:prstGeom prst="roundRect">
+            <a:avLst>
+              <a:gd name="adj" fmla="val 10870"/>
+            </a:avLst>
+          </a:prstGeom>
+          <a:solidFill>
+            <a:srgbClr val="151D2C"/>
+          </a:solidFill>
+          <a:ln w="12700">
+            <a:solidFill>
+              <a:srgbClr val="232D42"/>
+            </a:solidFill>
+            <a:prstDash val="solid"/>
+          </a:ln>
+        </p:spPr>
+      </p:sp>
+      <p:sp>
+        <p:nvSpPr>
+          <p:cNvPr id="20" name="Text 17"/>
+          <p:cNvSpPr/>
+          <p:nvPr/>
+        </p:nvSpPr>
+        <p:spPr>
+          <a:xfrm>
+            <a:off x="9372600" y="4306824"/>
+            <a:ext cx="1965960" cy="365760"/>
+          </a:xfrm>
+          <a:prstGeom prst="rect">
+            <a:avLst/>
+          </a:prstGeom>
+          <a:noFill/>
+          <a:ln/>
+        </p:spPr>
+        <p:txBody>
+          <a:bodyPr wrap="square" lIns="0" tIns="0" rIns="0" bIns="0" rtlCol="0" anchor="ctr"/>
+          <a:lstStyle/>
+          <a:p>
+            <a:pPr rtl="1" algn="r" indent="0" marL="0">
+              <a:buNone/>
+            </a:pPr>
+            <a:r>
+              <a:rPr lang="en-US" sz="1800" b="1" dirty="0">
+                <a:solidFill>
+                  <a:srgbClr val="DD8C58"/>
+                </a:solidFill>
+                <a:latin typeface="Tajawal" pitchFamily="34" charset="0"/>
+                <a:ea typeface="Tajawal" pitchFamily="34" charset="-122"/>
+                <a:cs typeface="Tajawal" pitchFamily="34" charset="-120"/>
+              </a:rPr>
+              <a:t>الميزان</a:t>
+            </a:r>
+            <a:endParaRPr lang="en-US" sz="1800" dirty="0"/>
+          </a:p>
+        </p:txBody>
+      </p:sp>
+      <p:sp>
+        <p:nvSpPr>
+          <p:cNvPr id="21" name="Text 18"/>
+          <p:cNvSpPr/>
+          <p:nvPr/>
+        </p:nvSpPr>
+        <p:spPr>
+          <a:xfrm>
+            <a:off x="4553712" y="4334256"/>
+            <a:ext cx="4617720" cy="329184"/>
+          </a:xfrm>
+          <a:prstGeom prst="rect">
+            <a:avLst/>
+          </a:prstGeom>
+          <a:noFill/>
+          <a:ln/>
+        </p:spPr>
+        <p:txBody>
+          <a:bodyPr wrap="square" lIns="0" tIns="0" rIns="0" bIns="0" rtlCol="0" anchor="ctr"/>
+          <a:lstStyle/>
+          <a:p>
+            <a:pPr rtl="1" algn="r" indent="0" marL="0">
+              <a:buNone/>
+            </a:pPr>
+            <a:r>
+              <a:rPr lang="en-US" sz="1350" dirty="0">
+                <a:solidFill>
+                  <a:srgbClr val="A2977F"/>
+                </a:solidFill>
+                <a:latin typeface="Tajawal" pitchFamily="34" charset="0"/>
+                <a:ea typeface="Tajawal" pitchFamily="34" charset="-122"/>
+                <a:cs typeface="Tajawal" pitchFamily="34" charset="-120"/>
+              </a:rPr>
+              <a:t>بنينا اختبارا يقيس الدقة على صور جديدة، لا على صور التدريب.</a:t>
+            </a:r>
+            <a:endParaRPr lang="en-US" sz="1350" dirty="0"/>
+          </a:p>
+        </p:txBody>
+      </p:sp>
+      <p:sp>
+        <p:nvSpPr>
+          <p:cNvPr id="22" name="Shape 19"/>
+          <p:cNvSpPr/>
+          <p:nvPr/>
+        </p:nvSpPr>
+        <p:spPr>
+          <a:xfrm>
+            <a:off x="4343400" y="5074920"/>
+            <a:ext cx="7159752" cy="841248"/>
+          </a:xfrm>
+          <a:prstGeom prst="roundRect">
+            <a:avLst>
+              <a:gd name="adj" fmla="val 10870"/>
+            </a:avLst>
+          </a:prstGeom>
+          <a:solidFill>
+            <a:srgbClr val="151D2C"/>
+          </a:solidFill>
+          <a:ln w="12700">
+            <a:solidFill>
+              <a:srgbClr val="232D42"/>
+            </a:solidFill>
+            <a:prstDash val="solid"/>
+          </a:ln>
+        </p:spPr>
+      </p:sp>
+      <p:sp>
+        <p:nvSpPr>
+          <p:cNvPr id="23" name="Text 20"/>
+          <p:cNvSpPr/>
+          <p:nvPr/>
+        </p:nvSpPr>
+        <p:spPr>
+          <a:xfrm>
+            <a:off x="9372600" y="5312664"/>
+            <a:ext cx="1965960" cy="365760"/>
+          </a:xfrm>
+          <a:prstGeom prst="rect">
+            <a:avLst/>
+          </a:prstGeom>
+          <a:noFill/>
+          <a:ln/>
+        </p:spPr>
+        <p:txBody>
+          <a:bodyPr wrap="square" lIns="0" tIns="0" rIns="0" bIns="0" rtlCol="0" anchor="ctr"/>
+          <a:lstStyle/>
+          <a:p>
+            <a:pPr rtl="1" algn="r" indent="0" marL="0">
+              <a:buNone/>
+            </a:pPr>
+            <a:r>
+              <a:rPr lang="en-US" sz="1800" b="1" dirty="0">
+                <a:solidFill>
+                  <a:srgbClr val="DD8C58"/>
+                </a:solidFill>
+                <a:latin typeface="Tajawal" pitchFamily="34" charset="0"/>
+                <a:ea typeface="Tajawal" pitchFamily="34" charset="-122"/>
+                <a:cs typeface="Tajawal" pitchFamily="34" charset="-120"/>
+              </a:rPr>
+              <a:t>التعلّم</a:t>
+            </a:r>
+            <a:endParaRPr lang="en-US" sz="1800" dirty="0"/>
+          </a:p>
+        </p:txBody>
+      </p:sp>
+      <p:sp>
+        <p:nvSpPr>
+          <p:cNvPr id="24" name="Text 21"/>
+          <p:cNvSpPr/>
+          <p:nvPr/>
+        </p:nvSpPr>
+        <p:spPr>
+          <a:xfrm>
+            <a:off x="4553712" y="5340096"/>
+            <a:ext cx="4617720" cy="329184"/>
+          </a:xfrm>
+          <a:prstGeom prst="rect">
+            <a:avLst/>
+          </a:prstGeom>
+          <a:noFill/>
+          <a:ln/>
+        </p:spPr>
+        <p:txBody>
+          <a:bodyPr wrap="square" lIns="0" tIns="0" rIns="0" bIns="0" rtlCol="0" anchor="ctr"/>
+          <a:lstStyle/>
+          <a:p>
+            <a:pPr rtl="1" algn="r" indent="0" marL="0">
+              <a:buNone/>
+            </a:pPr>
+            <a:r>
+              <a:rPr lang="en-US" sz="1350" dirty="0">
+                <a:solidFill>
+                  <a:srgbClr val="A2977F"/>
+                </a:solidFill>
+                <a:latin typeface="Tajawal" pitchFamily="34" charset="0"/>
+                <a:ea typeface="Tajawal" pitchFamily="34" charset="-122"/>
+                <a:cs typeface="Tajawal" pitchFamily="34" charset="-120"/>
+              </a:rPr>
+              <a:t>أضفنا تصحيح الزائر، فصار يتحسن كلما استعمله أحد.</a:t>
+            </a:r>
+            <a:endParaRPr lang="en-US" sz="1350" dirty="0"/>
           </a:p>
         </p:txBody>
       </p:sp>
@@ -5943,7 +6188,7 @@
                 <a:ea typeface="Tajawal" pitchFamily="34" charset="-122"/>
                 <a:cs typeface="Tajawal" pitchFamily="34" charset="-120"/>
               </a:rPr>
-              <a:t>جربه على جوالك</a:t>
+              <a:t>جرّبه على جوالك</a:t>
             </a:r>
             <a:endParaRPr lang="en-US" sz="3200" dirty="0"/>
           </a:p>
@@ -5957,7 +6202,7 @@
         </p:nvSpPr>
         <p:spPr>
           <a:xfrm>
-            <a:off x="4480560" y="3108960"/>
+            <a:off x="4480560" y="3200400"/>
             <a:ext cx="7068312" cy="502920"/>
           </a:xfrm>
           <a:prstGeom prst="rect">
@@ -5996,7 +6241,7 @@
         </p:nvSpPr>
         <p:spPr>
           <a:xfrm>
-            <a:off x="4480560" y="3657600"/>
+            <a:off x="4480560" y="3749040"/>
             <a:ext cx="7068312" cy="457200"/>
           </a:xfrm>
           <a:prstGeom prst="rect">
@@ -6035,7 +6280,7 @@
         </p:nvSpPr>
         <p:spPr>
           <a:xfrm>
-            <a:off x="9265615" y="4389120"/>
+            <a:off x="9265615" y="4434840"/>
             <a:ext cx="2240280" cy="1234440"/>
           </a:xfrm>
           <a:prstGeom prst="roundRect">
@@ -6062,7 +6307,7 @@
         </p:nvSpPr>
         <p:spPr>
           <a:xfrm>
-            <a:off x="9466783" y="4572000"/>
+            <a:off x="9466783" y="4617720"/>
             <a:ext cx="1828800" cy="384048"/>
           </a:xfrm>
           <a:prstGeom prst="rect">
@@ -6101,7 +6346,7 @@
         </p:nvSpPr>
         <p:spPr>
           <a:xfrm>
-            <a:off x="9466783" y="4992624"/>
+            <a:off x="9466783" y="5038344"/>
             <a:ext cx="1828800" cy="457200"/>
           </a:xfrm>
           <a:prstGeom prst="rect">
@@ -6143,7 +6388,7 @@
         </p:nvSpPr>
         <p:spPr>
           <a:xfrm>
-            <a:off x="6851599" y="4389120"/>
+            <a:off x="6851599" y="4434840"/>
             <a:ext cx="2240280" cy="1234440"/>
           </a:xfrm>
           <a:prstGeom prst="roundRect">
@@ -6170,7 +6415,7 @@
         </p:nvSpPr>
         <p:spPr>
           <a:xfrm>
-            <a:off x="7052767" y="4572000"/>
+            <a:off x="7052767" y="4617720"/>
             <a:ext cx="1828800" cy="384048"/>
           </a:xfrm>
           <a:prstGeom prst="rect">
@@ -6209,7 +6454,7 @@
         </p:nvSpPr>
         <p:spPr>
           <a:xfrm>
-            <a:off x="7052767" y="4992624"/>
+            <a:off x="7052767" y="5038344"/>
             <a:ext cx="1828800" cy="457200"/>
           </a:xfrm>
           <a:prstGeom prst="rect">
@@ -6251,7 +6496,7 @@
         </p:nvSpPr>
         <p:spPr>
           <a:xfrm>
-            <a:off x="4437583" y="4389120"/>
+            <a:off x="4437583" y="4434840"/>
             <a:ext cx="2240280" cy="1234440"/>
           </a:xfrm>
           <a:prstGeom prst="roundRect">
@@ -6278,7 +6523,7 @@
         </p:nvSpPr>
         <p:spPr>
           <a:xfrm>
-            <a:off x="4638751" y="4572000"/>
+            <a:off x="4638751" y="4617720"/>
             <a:ext cx="1828800" cy="384048"/>
           </a:xfrm>
           <a:prstGeom prst="rect">
@@ -6303,7 +6548,7 @@
                 <a:ea typeface="Tajawal" pitchFamily="34" charset="-122"/>
                 <a:cs typeface="Tajawal" pitchFamily="34" charset="-120"/>
               </a:rPr>
-              <a:t>يتعلم</a:t>
+              <a:t>يتعلّم</a:t>
             </a:r>
             <a:endParaRPr lang="en-US" sz="1600" dirty="0"/>
           </a:p>
@@ -6317,7 +6562,7 @@
         </p:nvSpPr>
         <p:spPr>
           <a:xfrm>
-            <a:off x="4638751" y="4992624"/>
+            <a:off x="4638751" y="5038344"/>
             <a:ext cx="1828800" cy="457200"/>
           </a:xfrm>
           <a:prstGeom prst="rect">
@@ -6438,45 +6683,6 @@
               <a:t>امسح الرمز</a:t>
             </a:r>
             <a:endParaRPr lang="en-US" sz="1400" dirty="0"/>
-          </a:p>
-        </p:txBody>
-      </p:sp>
-      <p:sp>
-        <p:nvSpPr>
-          <p:cNvPr id="18" name="Text 15"/>
-          <p:cNvSpPr/>
-          <p:nvPr/>
-        </p:nvSpPr>
-        <p:spPr>
-          <a:xfrm>
-            <a:off x="4480560" y="5852160"/>
-            <a:ext cx="7068312" cy="365760"/>
-          </a:xfrm>
-          <a:prstGeom prst="rect">
-            <a:avLst/>
-          </a:prstGeom>
-          <a:noFill/>
-          <a:ln/>
-        </p:spPr>
-        <p:txBody>
-          <a:bodyPr wrap="square" lIns="0" tIns="0" rIns="0" bIns="0" rtlCol="0" anchor="ctr"/>
-          <a:lstStyle/>
-          <a:p>
-            <a:pPr rtl="1" algn="r" indent="0" marL="0">
-              <a:buNone/>
-            </a:pPr>
-            <a:r>
-              <a:rPr lang="en-US" sz="1250" dirty="0">
-                <a:solidFill>
-                  <a:srgbClr val="6E6757"/>
-                </a:solidFill>
-                <a:latin typeface="Tajawal" pitchFamily="34" charset="0"/>
-                <a:ea typeface="Tajawal" pitchFamily="34" charset="-122"/>
-                <a:cs typeface="Tajawal" pitchFamily="34" charset="-120"/>
-              </a:rPr>
-              <a:t>مشروع هاكاثون أجا للذكاء الاصطناعي — حائل</a:t>
-            </a:r>
-            <a:endParaRPr lang="en-US" sz="1250" dirty="0"/>
           </a:p>
         </p:txBody>
       </p:sp>

--- a/athr-pitch-ar.pptx
+++ b/athr-pitch-ar.pptx
@@ -597,7 +597,7 @@
           <a:p>
             <a:r>
               <a:rPr lang="en-US" dirty="0"/>
-              <a:t>لا تقل إن الموقع مهمل — فيه لافتات ومرشدون. القيد الحقيقي أن التعريف عام، والمرشد بموعد، والشبكة غائبة.</a:t>
+              <a:t>ثلاثة أسئلة يحملها الزائر، وثلاثتها تُجاب في الشريحة التالية: أي لوحة، وبأي لغة، وبلا شبكة.</a:t>
             </a:r>
             <a:endParaRPr lang="en-US" dirty="0"/>
           </a:p>
@@ -1794,7 +1794,7 @@
                 <a:ea typeface="Tajawal" pitchFamily="34" charset="-122"/>
                 <a:cs typeface="Tajawal" pitchFamily="34" charset="-120"/>
               </a:rPr>
-              <a:t>الموقع مجهّز، لكن الزائر ما زال وحده أمام الصخرة</a:t>
+              <a:t>ويريد أن يعرف: ما هذا؟ وكم عمره؟ ولماذا يختلف عن جاره؟</a:t>
             </a:r>
             <a:endParaRPr lang="en-US" sz="1900" dirty="0"/>
           </a:p>
@@ -1843,8 +1843,8 @@
         </p:blipFill>
         <p:spPr>
           <a:xfrm>
-            <a:off x="10090125" y="2377440"/>
-            <a:ext cx="1004290" cy="1097280"/>
+            <a:off x="9749578" y="2377440"/>
+            <a:ext cx="1344837" cy="1097280"/>
           </a:xfrm>
           <a:prstGeom prst="rect">
             <a:avLst/>
@@ -1884,7 +1884,7 @@
                 <a:ea typeface="Tajawal" pitchFamily="34" charset="-122"/>
                 <a:cs typeface="Tajawal" pitchFamily="34" charset="-120"/>
               </a:rPr>
-              <a:t>اللافتة تعرّف بالموقع</a:t>
+              <a:t>أي لوحة هذه؟</a:t>
             </a:r>
             <a:endParaRPr lang="en-US" sz="2100" dirty="0"/>
           </a:p>
@@ -1926,7 +1926,7 @@
                 <a:ea typeface="Tajawal" pitchFamily="34" charset="-122"/>
                 <a:cs typeface="Tajawal" pitchFamily="34" charset="-120"/>
               </a:rPr>
-              <a:t>لافتة عند المدخل تشرح الموقع كله، وأمامك مئات اللوحات لكل واحدة قصتها.</a:t>
+              <a:t>جدار واحد يحمل مئات اللوحات، ولكل واحدة قصتها وزمنها.</a:t>
             </a:r>
             <a:endParaRPr lang="en-US" sz="1400" dirty="0"/>
           </a:p>
@@ -1975,8 +1975,8 @@
         </p:blipFill>
         <p:spPr>
           <a:xfrm>
-            <a:off x="6329792" y="2377440"/>
-            <a:ext cx="1061304" cy="1097280"/>
+            <a:off x="6205528" y="2377440"/>
+            <a:ext cx="1185567" cy="1097280"/>
           </a:xfrm>
           <a:prstGeom prst="rect">
             <a:avLst/>
@@ -2016,7 +2016,7 @@
                 <a:ea typeface="Tajawal" pitchFamily="34" charset="-122"/>
                 <a:cs typeface="Tajawal" pitchFamily="34" charset="-120"/>
               </a:rPr>
-              <a:t>المرشد بموعد</a:t>
+              <a:t>وبأي لغة؟</a:t>
             </a:r>
             <a:endParaRPr lang="en-US" sz="2100" dirty="0"/>
           </a:p>
@@ -2058,7 +2058,7 @@
                 <a:ea typeface="Tajawal" pitchFamily="34" charset="-122"/>
                 <a:cs typeface="Tajawal" pitchFamily="34" charset="-120"/>
               </a:rPr>
-              <a:t>المرشدون موجودون، لكن بحجز مسبق وبعدد محدود من اللغات.</a:t>
+              <a:t>زوار جبة من كل مكان، والقصة تصل حين يسمعها الزائر بلغته.</a:t>
             </a:r>
             <a:endParaRPr lang="en-US" sz="1400" dirty="0"/>
           </a:p>
@@ -2148,7 +2148,7 @@
                 <a:ea typeface="Tajawal" pitchFamily="34" charset="-122"/>
                 <a:cs typeface="Tajawal" pitchFamily="34" charset="-120"/>
               </a:rPr>
-              <a:t>والشبكة تنقطع</a:t>
+              <a:t>وبلا شبكة</a:t>
             </a:r>
             <a:endParaRPr lang="en-US" sz="2100" dirty="0"/>
           </a:p>

--- a/athr-pitch-ar.pptx
+++ b/athr-pitch-ar.pptx
@@ -2978,8 +2978,8 @@
         </p:nvSpPr>
         <p:spPr>
           <a:xfrm>
-            <a:off x="5349240" y="1810512"/>
-            <a:ext cx="5806440" cy="457200"/>
+            <a:off x="6172200" y="1810512"/>
+            <a:ext cx="4983480" cy="457200"/>
           </a:xfrm>
           <a:prstGeom prst="rect">
             <a:avLst/>
@@ -3017,8 +3017,8 @@
         </p:nvSpPr>
         <p:spPr>
           <a:xfrm>
-            <a:off x="5349240" y="2395728"/>
-            <a:ext cx="5806440" cy="347472"/>
+            <a:off x="6172200" y="2395728"/>
+            <a:ext cx="4983480" cy="347472"/>
           </a:xfrm>
           <a:prstGeom prst="rect">
             <a:avLst/>
@@ -3056,8 +3056,8 @@
         </p:nvSpPr>
         <p:spPr>
           <a:xfrm>
-            <a:off x="5349240" y="2779776"/>
-            <a:ext cx="5806440" cy="658368"/>
+            <a:off x="6172200" y="2779776"/>
+            <a:ext cx="4983480" cy="658368"/>
           </a:xfrm>
           <a:prstGeom prst="rect">
             <a:avLst/>
@@ -3071,12 +3071,12 @@
           <a:p>
             <a:pPr rtl="1" algn="r" indent="0" marL="0">
               <a:lnSpc>
-                <a:spcPts val="2400"/>
+                <a:spcPts val="2300"/>
               </a:lnSpc>
               <a:buNone/>
             </a:pPr>
             <a:r>
-              <a:rPr lang="en-US" sz="1450" dirty="0">
+              <a:rPr lang="en-US" sz="1400" dirty="0">
                 <a:solidFill>
                   <a:srgbClr val="A2977F"/>
                 </a:solidFill>
@@ -3086,7 +3086,7 @@
               </a:rPr>
               <a:t>نموذج رؤية مفتوح من Meta. نظر إلى ملايين الصور وتعلّم أشكال الأشياء بنفسه، دون أن يسمّيها له أحد.</a:t>
             </a:r>
-            <a:endParaRPr lang="en-US" sz="1450" dirty="0"/>
+            <a:endParaRPr lang="en-US" sz="1400" dirty="0"/>
           </a:p>
         </p:txBody>
       </p:sp>
@@ -3098,8 +3098,8 @@
         </p:nvSpPr>
         <p:spPr>
           <a:xfrm>
-            <a:off x="5349240" y="3511296"/>
-            <a:ext cx="5806440" cy="347472"/>
+            <a:off x="6172200" y="3511296"/>
+            <a:ext cx="4983480" cy="347472"/>
           </a:xfrm>
           <a:prstGeom prst="rect">
             <a:avLst/>
@@ -3137,8 +3137,8 @@
         </p:nvSpPr>
         <p:spPr>
           <a:xfrm>
-            <a:off x="5349240" y="3895344"/>
-            <a:ext cx="5806440" cy="658368"/>
+            <a:off x="6172200" y="3895344"/>
+            <a:ext cx="4983480" cy="658368"/>
           </a:xfrm>
           <a:prstGeom prst="rect">
             <a:avLst/>
@@ -3152,12 +3152,12 @@
           <a:p>
             <a:pPr rtl="1" algn="r" indent="0" marL="0">
               <a:lnSpc>
-                <a:spcPts val="2400"/>
+                <a:spcPts val="2300"/>
               </a:lnSpc>
               <a:buNone/>
             </a:pPr>
             <a:r>
-              <a:rPr lang="en-US" sz="1450" dirty="0">
+              <a:rPr lang="en-US" sz="1400" dirty="0">
                 <a:solidFill>
                   <a:srgbClr val="A2977F"/>
                 </a:solidFill>
@@ -3167,7 +3167,7 @@
               </a:rPr>
               <a:t>يحوّل أي صورة إلى بصمة رقمية. والصورتان المتشابهتان تعطيان بصمتين متقاربتين.</a:t>
             </a:r>
-            <a:endParaRPr lang="en-US" sz="1450" dirty="0"/>
+            <a:endParaRPr lang="en-US" sz="1400" dirty="0"/>
           </a:p>
         </p:txBody>
       </p:sp>
@@ -3179,8 +3179,8 @@
         </p:nvSpPr>
         <p:spPr>
           <a:xfrm>
-            <a:off x="5349240" y="4626864"/>
-            <a:ext cx="5806440" cy="347472"/>
+            <a:off x="6172200" y="4626864"/>
+            <a:ext cx="4983480" cy="347472"/>
           </a:xfrm>
           <a:prstGeom prst="rect">
             <a:avLst/>
@@ -3218,8 +3218,8 @@
         </p:nvSpPr>
         <p:spPr>
           <a:xfrm>
-            <a:off x="5349240" y="5010912"/>
-            <a:ext cx="5806440" cy="658368"/>
+            <a:off x="6172200" y="5010912"/>
+            <a:ext cx="4983480" cy="658368"/>
           </a:xfrm>
           <a:prstGeom prst="rect">
             <a:avLst/>
@@ -3233,12 +3233,12 @@
           <a:p>
             <a:pPr rtl="1" algn="r" indent="0" marL="0">
               <a:lnSpc>
-                <a:spcPts val="2400"/>
+                <a:spcPts val="2300"/>
               </a:lnSpc>
               <a:buNone/>
             </a:pPr>
             <a:r>
-              <a:rPr lang="en-US" sz="1450" dirty="0">
+              <a:rPr lang="en-US" sz="1400" dirty="0">
                 <a:solidFill>
                   <a:srgbClr val="A2977F"/>
                 </a:solidFill>
@@ -3248,7 +3248,7 @@
               </a:rPr>
               <a:t>صوّرنا لوحات جبة وحفظنا بصماتها. وعند كل مسح نقارن بصمة الكاميرا بها ونختار الأقرب.</a:t>
             </a:r>
-            <a:endParaRPr lang="en-US" sz="1450" dirty="0"/>
+            <a:endParaRPr lang="en-US" sz="1400" dirty="0"/>
           </a:p>
         </p:txBody>
       </p:sp>
@@ -3268,8 +3268,8 @@
         </p:blipFill>
         <p:spPr>
           <a:xfrm>
-            <a:off x="4462272" y="3246120"/>
-            <a:ext cx="722376" cy="1261872"/>
+            <a:off x="4279392" y="2999232"/>
+            <a:ext cx="1737360" cy="1289304"/>
           </a:xfrm>
           <a:prstGeom prst="rect">
             <a:avLst/>
@@ -3278,7 +3278,46 @@
       </p:pic>
       <p:sp>
         <p:nvSpPr>
-          <p:cNvPr id="12" name="Shape 9"/>
+          <p:cNvPr id="12" name="Text 9"/>
+          <p:cNvSpPr/>
+          <p:nvPr/>
+        </p:nvSpPr>
+        <p:spPr>
+          <a:xfrm>
+            <a:off x="4233672" y="4407408"/>
+            <a:ext cx="1828800" cy="365760"/>
+          </a:xfrm>
+          <a:prstGeom prst="rect">
+            <a:avLst/>
+          </a:prstGeom>
+          <a:noFill/>
+          <a:ln/>
+        </p:spPr>
+        <p:txBody>
+          <a:bodyPr wrap="square" lIns="0" tIns="0" rIns="0" bIns="0" rtlCol="0" anchor="ctr"/>
+          <a:lstStyle/>
+          <a:p>
+            <a:pPr rtl="1" algn="ctr" indent="0" marL="0">
+              <a:buNone/>
+            </a:pPr>
+            <a:r>
+              <a:rPr lang="en-US" sz="1300" i="1" dirty="0">
+                <a:solidFill>
+                  <a:srgbClr val="EFAE6E"/>
+                </a:solidFill>
+                <a:latin typeface="Tajawal" pitchFamily="34" charset="0"/>
+                <a:ea typeface="Tajawal" pitchFamily="34" charset="-122"/>
+                <a:cs typeface="Tajawal" pitchFamily="34" charset="-120"/>
+              </a:rPr>
+              <a:t>يرى، فيتعرف</a:t>
+            </a:r>
+            <a:endParaRPr lang="en-US" sz="1300" dirty="0"/>
+          </a:p>
+        </p:txBody>
+      </p:sp>
+      <p:sp>
+        <p:nvSpPr>
+          <p:cNvPr id="13" name="Shape 10"/>
           <p:cNvSpPr/>
           <p:nvPr/>
         </p:nvSpPr>
@@ -3305,7 +3344,7 @@
       </p:sp>
       <p:sp>
         <p:nvSpPr>
-          <p:cNvPr id="13" name="Text 10"/>
+          <p:cNvPr id="14" name="Text 11"/>
           <p:cNvSpPr/>
           <p:nvPr/>
         </p:nvSpPr>
@@ -3344,7 +3383,7 @@
       </p:sp>
       <p:sp>
         <p:nvSpPr>
-          <p:cNvPr id="14" name="Text 11"/>
+          <p:cNvPr id="15" name="Text 12"/>
           <p:cNvSpPr/>
           <p:nvPr/>
         </p:nvSpPr>
@@ -3383,7 +3422,7 @@
       </p:sp>
       <p:sp>
         <p:nvSpPr>
-          <p:cNvPr id="15" name="Shape 12"/>
+          <p:cNvPr id="16" name="Shape 13"/>
           <p:cNvSpPr/>
           <p:nvPr/>
         </p:nvSpPr>
@@ -3410,7 +3449,7 @@
       </p:sp>
       <p:sp>
         <p:nvSpPr>
-          <p:cNvPr id="16" name="Text 13"/>
+          <p:cNvPr id="17" name="Text 14"/>
           <p:cNvSpPr/>
           <p:nvPr/>
         </p:nvSpPr>
@@ -3449,7 +3488,7 @@
       </p:sp>
       <p:sp>
         <p:nvSpPr>
-          <p:cNvPr id="17" name="Text 14"/>
+          <p:cNvPr id="18" name="Text 15"/>
           <p:cNvSpPr/>
           <p:nvPr/>
         </p:nvSpPr>
@@ -3488,7 +3527,7 @@
       </p:sp>
       <p:sp>
         <p:nvSpPr>
-          <p:cNvPr id="18" name="Shape 15"/>
+          <p:cNvPr id="19" name="Shape 16"/>
           <p:cNvSpPr/>
           <p:nvPr/>
         </p:nvSpPr>
@@ -3515,7 +3554,7 @@
       </p:sp>
       <p:sp>
         <p:nvSpPr>
-          <p:cNvPr id="19" name="Text 16"/>
+          <p:cNvPr id="20" name="Text 17"/>
           <p:cNvSpPr/>
           <p:nvPr/>
         </p:nvSpPr>
@@ -3554,7 +3593,7 @@
       </p:sp>
       <p:sp>
         <p:nvSpPr>
-          <p:cNvPr id="20" name="Text 17"/>
+          <p:cNvPr id="21" name="Text 18"/>
           <p:cNvSpPr/>
           <p:nvPr/>
         </p:nvSpPr>
@@ -3593,7 +3632,7 @@
       </p:sp>
       <p:sp>
         <p:nvSpPr>
-          <p:cNvPr id="21" name="Shape 18"/>
+          <p:cNvPr id="22" name="Shape 19"/>
           <p:cNvSpPr/>
           <p:nvPr/>
         </p:nvSpPr>
@@ -3620,7 +3659,7 @@
       </p:sp>
       <p:sp>
         <p:nvSpPr>
-          <p:cNvPr id="22" name="Text 19"/>
+          <p:cNvPr id="23" name="Text 20"/>
           <p:cNvSpPr/>
           <p:nvPr/>
         </p:nvSpPr>
@@ -3659,7 +3698,7 @@
       </p:sp>
       <p:sp>
         <p:nvSpPr>
-          <p:cNvPr id="23" name="Text 20"/>
+          <p:cNvPr id="24" name="Text 21"/>
           <p:cNvSpPr/>
           <p:nvPr/>
         </p:nvSpPr>

--- a/athr-pitch-ar.pptx
+++ b/athr-pitch-ar.pptx
@@ -3252,9 +3252,36 @@
           </a:p>
         </p:txBody>
       </p:sp>
+      <p:sp>
+        <p:nvSpPr>
+          <p:cNvPr id="11" name="Shape 9"/>
+          <p:cNvSpPr/>
+          <p:nvPr/>
+        </p:nvSpPr>
+        <p:spPr>
+          <a:xfrm>
+            <a:off x="4494276" y="1737360"/>
+            <a:ext cx="1325880" cy="1014984"/>
+          </a:xfrm>
+          <a:prstGeom prst="roundRect">
+            <a:avLst>
+              <a:gd name="adj" fmla="val 7207"/>
+            </a:avLst>
+          </a:prstGeom>
+          <a:solidFill>
+            <a:srgbClr val="2A3244"/>
+          </a:solidFill>
+          <a:ln w="12700">
+            <a:solidFill>
+              <a:srgbClr val="333333"/>
+            </a:solidFill>
+            <a:prstDash val="solid"/>
+          </a:ln>
+        </p:spPr>
+      </p:sp>
       <p:pic>
         <p:nvPicPr>
-          <p:cNvPr id="11" name="Image 0" descr="preencoded.png">    </p:cNvPr>
+          <p:cNvPr id="12" name="Image 0" descr="preencoded.png">    </p:cNvPr>
           <p:cNvPicPr>
             <a:picLocks noChangeAspect="1"/>
           </p:cNvPicPr>
@@ -3268,8 +3295,8 @@
         </p:blipFill>
         <p:spPr>
           <a:xfrm>
-            <a:off x="4279392" y="2999232"/>
-            <a:ext cx="1737360" cy="1289304"/>
+            <a:off x="4539996" y="1783080"/>
+            <a:ext cx="1234440" cy="923544"/>
           </a:xfrm>
           <a:prstGeom prst="rect">
             <a:avLst/>
@@ -3278,14 +3305,14 @@
       </p:pic>
       <p:sp>
         <p:nvSpPr>
-          <p:cNvPr id="12" name="Text 9"/>
-          <p:cNvSpPr/>
-          <p:nvPr/>
-        </p:nvSpPr>
-        <p:spPr>
-          <a:xfrm>
-            <a:off x="4233672" y="4407408"/>
-            <a:ext cx="1828800" cy="365760"/>
+          <p:cNvPr id="13" name="Text 10"/>
+          <p:cNvSpPr/>
+          <p:nvPr/>
+        </p:nvSpPr>
+        <p:spPr>
+          <a:xfrm>
+            <a:off x="4224528" y="2743200"/>
+            <a:ext cx="1865376" cy="219456"/>
           </a:xfrm>
           <a:prstGeom prst="rect">
             <a:avLst/>
@@ -3301,23 +3328,339 @@
               <a:buNone/>
             </a:pPr>
             <a:r>
-              <a:rPr lang="en-US" sz="1300" i="1" dirty="0">
+              <a:rPr lang="en-US" sz="950" dirty="0">
+                <a:solidFill>
+                  <a:srgbClr val="6E6757"/>
+                </a:solidFill>
+                <a:latin typeface="Tajawal" pitchFamily="34" charset="0"/>
+                <a:ea typeface="Tajawal" pitchFamily="34" charset="-122"/>
+                <a:cs typeface="Tajawal" pitchFamily="34" charset="-120"/>
+              </a:rPr>
+              <a:t>ما تراه الكاميرا</a:t>
+            </a:r>
+            <a:endParaRPr lang="en-US" sz="950" dirty="0"/>
+          </a:p>
+        </p:txBody>
+      </p:sp>
+      <p:sp>
+        <p:nvSpPr>
+          <p:cNvPr id="14" name="Text 11"/>
+          <p:cNvSpPr/>
+          <p:nvPr/>
+        </p:nvSpPr>
+        <p:spPr>
+          <a:xfrm>
+            <a:off x="4279392" y="2980944"/>
+            <a:ext cx="1755648" cy="201168"/>
+          </a:xfrm>
+          <a:prstGeom prst="rect">
+            <a:avLst/>
+          </a:prstGeom>
+          <a:noFill/>
+          <a:ln/>
+        </p:spPr>
+        <p:txBody>
+          <a:bodyPr wrap="square" lIns="0" tIns="0" rIns="0" bIns="0" rtlCol="0" anchor="ctr"/>
+          <a:lstStyle/>
+          <a:p>
+            <a:pPr algn="ctr" indent="0" marL="0">
+              <a:buNone/>
+            </a:pPr>
+            <a:r>
+              <a:rPr lang="en-US" sz="1100" dirty="0">
+                <a:solidFill>
+                  <a:srgbClr val="C97A4A"/>
+                </a:solidFill>
+                <a:latin typeface="Calibri" pitchFamily="34" charset="0"/>
+                <a:ea typeface="Calibri" pitchFamily="34" charset="-122"/>
+                <a:cs typeface="Calibri" pitchFamily="34" charset="-120"/>
+              </a:rPr>
+              <a:t>▼</a:t>
+            </a:r>
+            <a:endParaRPr lang="en-US" sz="1100" dirty="0"/>
+          </a:p>
+        </p:txBody>
+      </p:sp>
+      <p:sp>
+        <p:nvSpPr>
+          <p:cNvPr id="15" name="Shape 12"/>
+          <p:cNvSpPr/>
+          <p:nvPr/>
+        </p:nvSpPr>
+        <p:spPr>
+          <a:xfrm>
+            <a:off x="4494276" y="3218688"/>
+            <a:ext cx="1325880" cy="658368"/>
+          </a:xfrm>
+          <a:prstGeom prst="roundRect">
+            <a:avLst>
+              <a:gd name="adj" fmla="val 11111"/>
+            </a:avLst>
+          </a:prstGeom>
+          <a:solidFill>
+            <a:srgbClr val="232D42"/>
+          </a:solidFill>
+          <a:ln w="12700">
+            <a:solidFill>
+              <a:srgbClr val="333333"/>
+            </a:solidFill>
+            <a:prstDash val="solid"/>
+          </a:ln>
+        </p:spPr>
+      </p:sp>
+      <p:sp>
+        <p:nvSpPr>
+          <p:cNvPr id="16" name="Text 13"/>
+          <p:cNvSpPr/>
+          <p:nvPr/>
+        </p:nvSpPr>
+        <p:spPr>
+          <a:xfrm>
+            <a:off x="4539996" y="3291840"/>
+            <a:ext cx="1234440" cy="530352"/>
+          </a:xfrm>
+          <a:prstGeom prst="rect">
+            <a:avLst/>
+          </a:prstGeom>
+          <a:noFill/>
+          <a:ln/>
+        </p:spPr>
+        <p:txBody>
+          <a:bodyPr wrap="square" lIns="0" tIns="0" rIns="0" bIns="0" rtlCol="0" anchor="ctr"/>
+          <a:lstStyle/>
+          <a:p>
+            <a:pPr algn="ctr" indent="0" marL="0">
+              <a:lnSpc>
+                <a:spcPts val="1200"/>
+              </a:lnSpc>
+              <a:buNone/>
+            </a:pPr>
+            <a:r>
+              <a:rPr lang="en-US" sz="950" dirty="0">
                 <a:solidFill>
                   <a:srgbClr val="EFAE6E"/>
                 </a:solidFill>
-                <a:latin typeface="Tajawal" pitchFamily="34" charset="0"/>
-                <a:ea typeface="Tajawal" pitchFamily="34" charset="-122"/>
-                <a:cs typeface="Tajawal" pitchFamily="34" charset="-120"/>
-              </a:rPr>
-              <a:t>يرى، فيتعرف</a:t>
-            </a:r>
-            <a:endParaRPr lang="en-US" sz="1300" dirty="0"/>
-          </a:p>
-        </p:txBody>
-      </p:sp>
-      <p:sp>
-        <p:nvSpPr>
-          <p:cNvPr id="13" name="Shape 10"/>
+                <a:latin typeface="Courier New" pitchFamily="34" charset="0"/>
+                <a:ea typeface="Courier New" pitchFamily="34" charset="-122"/>
+                <a:cs typeface="Courier New" pitchFamily="34" charset="-120"/>
+              </a:rPr>
+              <a:t>0.417  0.902</a:t>
+            </a:r>
+            <a:endParaRPr lang="en-US" sz="950" dirty="0"/>
+          </a:p>
+          <a:p>
+            <a:pPr algn="ctr" indent="0" marL="0">
+              <a:lnSpc>
+                <a:spcPts val="1200"/>
+              </a:lnSpc>
+              <a:buNone/>
+            </a:pPr>
+            <a:r>
+              <a:rPr lang="en-US" sz="950" dirty="0">
+                <a:solidFill>
+                  <a:srgbClr val="EFAE6E"/>
+                </a:solidFill>
+                <a:latin typeface="Courier New" pitchFamily="34" charset="0"/>
+                <a:ea typeface="Courier New" pitchFamily="34" charset="-122"/>
+                <a:cs typeface="Courier New" pitchFamily="34" charset="-120"/>
+              </a:rPr>
+              <a:t>0.773  0.264</a:t>
+            </a:r>
+            <a:endParaRPr lang="en-US" sz="950" dirty="0"/>
+          </a:p>
+          <a:p>
+            <a:pPr algn="ctr" indent="0" marL="0">
+              <a:lnSpc>
+                <a:spcPts val="1200"/>
+              </a:lnSpc>
+              <a:buNone/>
+            </a:pPr>
+            <a:r>
+              <a:rPr lang="en-US" sz="950" dirty="0">
+                <a:solidFill>
+                  <a:srgbClr val="EFAE6E"/>
+                </a:solidFill>
+                <a:latin typeface="Courier New" pitchFamily="34" charset="0"/>
+                <a:ea typeface="Courier New" pitchFamily="34" charset="-122"/>
+                <a:cs typeface="Courier New" pitchFamily="34" charset="-120"/>
+              </a:rPr>
+              <a:t>0.115  0.658</a:t>
+            </a:r>
+            <a:endParaRPr lang="en-US" sz="950" dirty="0"/>
+          </a:p>
+        </p:txBody>
+      </p:sp>
+      <p:sp>
+        <p:nvSpPr>
+          <p:cNvPr id="17" name="Text 14"/>
+          <p:cNvSpPr/>
+          <p:nvPr/>
+        </p:nvSpPr>
+        <p:spPr>
+          <a:xfrm>
+            <a:off x="4224528" y="3913632"/>
+            <a:ext cx="1865376" cy="219456"/>
+          </a:xfrm>
+          <a:prstGeom prst="rect">
+            <a:avLst/>
+          </a:prstGeom>
+          <a:noFill/>
+          <a:ln/>
+        </p:spPr>
+        <p:txBody>
+          <a:bodyPr wrap="square" lIns="0" tIns="0" rIns="0" bIns="0" rtlCol="0" anchor="ctr"/>
+          <a:lstStyle/>
+          <a:p>
+            <a:pPr rtl="1" algn="ctr" indent="0" marL="0">
+              <a:buNone/>
+            </a:pPr>
+            <a:r>
+              <a:rPr lang="en-US" sz="950" dirty="0">
+                <a:solidFill>
+                  <a:srgbClr val="6E6757"/>
+                </a:solidFill>
+                <a:latin typeface="Tajawal" pitchFamily="34" charset="0"/>
+                <a:ea typeface="Tajawal" pitchFamily="34" charset="-122"/>
+                <a:cs typeface="Tajawal" pitchFamily="34" charset="-120"/>
+              </a:rPr>
+              <a:t>٣٨٤ رقما — بصمة الصورة</a:t>
+            </a:r>
+            <a:endParaRPr lang="en-US" sz="950" dirty="0"/>
+          </a:p>
+        </p:txBody>
+      </p:sp>
+      <p:sp>
+        <p:nvSpPr>
+          <p:cNvPr id="18" name="Text 15"/>
+          <p:cNvSpPr/>
+          <p:nvPr/>
+        </p:nvSpPr>
+        <p:spPr>
+          <a:xfrm>
+            <a:off x="4279392" y="4151376"/>
+            <a:ext cx="1755648" cy="201168"/>
+          </a:xfrm>
+          <a:prstGeom prst="rect">
+            <a:avLst/>
+          </a:prstGeom>
+          <a:noFill/>
+          <a:ln/>
+        </p:spPr>
+        <p:txBody>
+          <a:bodyPr wrap="square" lIns="0" tIns="0" rIns="0" bIns="0" rtlCol="0" anchor="ctr"/>
+          <a:lstStyle/>
+          <a:p>
+            <a:pPr algn="ctr" indent="0" marL="0">
+              <a:buNone/>
+            </a:pPr>
+            <a:r>
+              <a:rPr lang="en-US" sz="1100" dirty="0">
+                <a:solidFill>
+                  <a:srgbClr val="C97A4A"/>
+                </a:solidFill>
+                <a:latin typeface="Calibri" pitchFamily="34" charset="0"/>
+                <a:ea typeface="Calibri" pitchFamily="34" charset="-122"/>
+                <a:cs typeface="Calibri" pitchFamily="34" charset="-120"/>
+              </a:rPr>
+              <a:t>▼</a:t>
+            </a:r>
+            <a:endParaRPr lang="en-US" sz="1100" dirty="0"/>
+          </a:p>
+        </p:txBody>
+      </p:sp>
+      <p:sp>
+        <p:nvSpPr>
+          <p:cNvPr id="19" name="Shape 16"/>
+          <p:cNvSpPr/>
+          <p:nvPr/>
+        </p:nvSpPr>
+        <p:spPr>
+          <a:xfrm>
+            <a:off x="4494276" y="4361688"/>
+            <a:ext cx="1325880" cy="1014984"/>
+          </a:xfrm>
+          <a:prstGeom prst="roundRect">
+            <a:avLst>
+              <a:gd name="adj" fmla="val 7207"/>
+            </a:avLst>
+          </a:prstGeom>
+          <a:solidFill>
+            <a:srgbClr val="C97A4A"/>
+          </a:solidFill>
+          <a:ln w="12700">
+            <a:solidFill>
+              <a:srgbClr val="333333"/>
+            </a:solidFill>
+            <a:prstDash val="solid"/>
+          </a:ln>
+        </p:spPr>
+      </p:sp>
+      <p:pic>
+        <p:nvPicPr>
+          <p:cNvPr id="20" name="Image 1" descr="preencoded.png">    </p:cNvPr>
+          <p:cNvPicPr>
+            <a:picLocks noChangeAspect="1"/>
+          </p:cNvPicPr>
+          <p:nvPr/>
+        </p:nvPicPr>
+        <p:blipFill>
+          <a:blip r:embed="rId2"/>
+          <a:stretch>
+            <a:fillRect/>
+          </a:stretch>
+        </p:blipFill>
+        <p:spPr>
+          <a:xfrm>
+            <a:off x="4539996" y="4407408"/>
+            <a:ext cx="1234440" cy="923544"/>
+          </a:xfrm>
+          <a:prstGeom prst="rect">
+            <a:avLst/>
+          </a:prstGeom>
+        </p:spPr>
+      </p:pic>
+      <p:sp>
+        <p:nvSpPr>
+          <p:cNvPr id="21" name="Text 17"/>
+          <p:cNvSpPr/>
+          <p:nvPr/>
+        </p:nvSpPr>
+        <p:spPr>
+          <a:xfrm>
+            <a:off x="4224528" y="5367528"/>
+            <a:ext cx="1865376" cy="219456"/>
+          </a:xfrm>
+          <a:prstGeom prst="rect">
+            <a:avLst/>
+          </a:prstGeom>
+          <a:noFill/>
+          <a:ln/>
+        </p:spPr>
+        <p:txBody>
+          <a:bodyPr wrap="square" lIns="0" tIns="0" rIns="0" bIns="0" rtlCol="0" anchor="ctr"/>
+          <a:lstStyle/>
+          <a:p>
+            <a:pPr rtl="1" algn="ctr" indent="0" marL="0">
+              <a:buNone/>
+            </a:pPr>
+            <a:r>
+              <a:rPr lang="en-US" sz="950" dirty="0">
+                <a:solidFill>
+                  <a:srgbClr val="6E6757"/>
+                </a:solidFill>
+                <a:latin typeface="Tajawal" pitchFamily="34" charset="0"/>
+                <a:ea typeface="Tajawal" pitchFamily="34" charset="-122"/>
+                <a:cs typeface="Tajawal" pitchFamily="34" charset="-120"/>
+              </a:rPr>
+              <a:t>أقرب لوحة في الفهرس</a:t>
+            </a:r>
+            <a:endParaRPr lang="en-US" sz="950" dirty="0"/>
+          </a:p>
+        </p:txBody>
+      </p:sp>
+      <p:sp>
+        <p:nvSpPr>
+          <p:cNvPr id="22" name="Shape 18"/>
           <p:cNvSpPr/>
           <p:nvPr/>
         </p:nvSpPr>
@@ -3344,7 +3687,7 @@
       </p:sp>
       <p:sp>
         <p:nvSpPr>
-          <p:cNvPr id="14" name="Text 11"/>
+          <p:cNvPr id="23" name="Text 19"/>
           <p:cNvSpPr/>
           <p:nvPr/>
         </p:nvSpPr>
@@ -3383,7 +3726,7 @@
       </p:sp>
       <p:sp>
         <p:nvSpPr>
-          <p:cNvPr id="15" name="Text 12"/>
+          <p:cNvPr id="24" name="Text 20"/>
           <p:cNvSpPr/>
           <p:nvPr/>
         </p:nvSpPr>
@@ -3422,7 +3765,7 @@
       </p:sp>
       <p:sp>
         <p:nvSpPr>
-          <p:cNvPr id="16" name="Shape 13"/>
+          <p:cNvPr id="25" name="Shape 21"/>
           <p:cNvSpPr/>
           <p:nvPr/>
         </p:nvSpPr>
@@ -3449,7 +3792,7 @@
       </p:sp>
       <p:sp>
         <p:nvSpPr>
-          <p:cNvPr id="17" name="Text 14"/>
+          <p:cNvPr id="26" name="Text 22"/>
           <p:cNvSpPr/>
           <p:nvPr/>
         </p:nvSpPr>
@@ -3488,7 +3831,7 @@
       </p:sp>
       <p:sp>
         <p:nvSpPr>
-          <p:cNvPr id="18" name="Text 15"/>
+          <p:cNvPr id="27" name="Text 23"/>
           <p:cNvSpPr/>
           <p:nvPr/>
         </p:nvSpPr>
@@ -3527,7 +3870,7 @@
       </p:sp>
       <p:sp>
         <p:nvSpPr>
-          <p:cNvPr id="19" name="Shape 16"/>
+          <p:cNvPr id="28" name="Shape 24"/>
           <p:cNvSpPr/>
           <p:nvPr/>
         </p:nvSpPr>
@@ -3554,7 +3897,7 @@
       </p:sp>
       <p:sp>
         <p:nvSpPr>
-          <p:cNvPr id="20" name="Text 17"/>
+          <p:cNvPr id="29" name="Text 25"/>
           <p:cNvSpPr/>
           <p:nvPr/>
         </p:nvSpPr>
@@ -3593,7 +3936,7 @@
       </p:sp>
       <p:sp>
         <p:nvSpPr>
-          <p:cNvPr id="21" name="Text 18"/>
+          <p:cNvPr id="30" name="Text 26"/>
           <p:cNvSpPr/>
           <p:nvPr/>
         </p:nvSpPr>
@@ -3632,7 +3975,7 @@
       </p:sp>
       <p:sp>
         <p:nvSpPr>
-          <p:cNvPr id="22" name="Shape 19"/>
+          <p:cNvPr id="31" name="Shape 27"/>
           <p:cNvSpPr/>
           <p:nvPr/>
         </p:nvSpPr>
@@ -3659,7 +4002,7 @@
       </p:sp>
       <p:sp>
         <p:nvSpPr>
-          <p:cNvPr id="23" name="Text 20"/>
+          <p:cNvPr id="32" name="Text 28"/>
           <p:cNvSpPr/>
           <p:nvPr/>
         </p:nvSpPr>
@@ -3698,7 +4041,7 @@
       </p:sp>
       <p:sp>
         <p:nvSpPr>
-          <p:cNvPr id="24" name="Text 21"/>
+          <p:cNvPr id="33" name="Text 29"/>
           <p:cNvSpPr/>
           <p:nvPr/>
         </p:nvSpPr>

--- a/athr-pitch-ar.pptx
+++ b/athr-pitch-ar.pptx
@@ -773,7 +773,7 @@
           <a:p>
             <a:r>
               <a:rPr lang="en-US" dirty="0"/>
-              <a:t>لو سُئلت: لم ندرّب الشبكة ولم نغيّر أوزانها. نستخدم تمثيلات نموذج جاهز ونبحث فيها — وهو ما تفعله محركات البحث بالصور.</a:t>
+              <a:t>النموذج DINOv3 من Meta، مفتوح المصدر. وكن دقيقا لو سُئلت: لم نضبط أوزان الشبكة (no fine-tuning). ما بنيناه هو طبقة التعرّف فوقها: الفهرس الميداني، وسلّم القصّ الذي يعالج اختلاف الإطار، وطبقة العتبة والهامش المعايرة على ٥٣ صورة سالبة، وجمع أدلة اللقطات في المسح الحي، والتعلّم من تصحيح الزائر. وهذا هو التعلّم الانتقالي بالأمثلة، وهو ما تفعله محركات البحث بالصور.</a:t>
             </a:r>
             <a:endParaRPr lang="en-US" dirty="0"/>
           </a:p>
@@ -2937,7 +2937,7 @@
                 <a:ea typeface="Tajawal" pitchFamily="34" charset="-122"/>
                 <a:cs typeface="Tajawal" pitchFamily="34" charset="-120"/>
               </a:rPr>
-              <a:t>النموذج: DINOv3</a:t>
+              <a:t>كيف طوّعنا DINOv3 لنقوش جبة</a:t>
             </a:r>
             <a:endParaRPr lang="en-US" sz="3800" dirty="0"/>
           </a:p>
@@ -3042,7 +3042,7 @@
                 <a:ea typeface="Tajawal" pitchFamily="34" charset="-122"/>
                 <a:cs typeface="Tajawal" pitchFamily="34" charset="-120"/>
               </a:rPr>
-              <a:t>ما هو؟</a:t>
+              <a:t>الأساس</a:t>
             </a:r>
             <a:endParaRPr lang="en-US" sz="1700" dirty="0"/>
           </a:p>
@@ -3084,7 +3084,7 @@
                 <a:ea typeface="Tajawal" pitchFamily="34" charset="-122"/>
                 <a:cs typeface="Tajawal" pitchFamily="34" charset="-120"/>
               </a:rPr>
-              <a:t>نموذج رؤية مفتوح من Meta. نظر إلى ملايين الصور وتعلّم أشكال الأشياء بنفسه، دون أن يسمّيها له أحد.</a:t>
+              <a:t>شبكة رؤية مفتوحة تعلّمت الأشكال والملمس من ملايين الصور دون وسوم بشرية — تعلّم ذاتي الإشراف.</a:t>
             </a:r>
             <a:endParaRPr lang="en-US" sz="1400" dirty="0"/>
           </a:p>
@@ -3123,7 +3123,7 @@
                 <a:ea typeface="Tajawal" pitchFamily="34" charset="-122"/>
                 <a:cs typeface="Tajawal" pitchFamily="34" charset="-120"/>
               </a:rPr>
-              <a:t>ماذا يفعل؟</a:t>
+              <a:t>ما بنيناه فوقه</a:t>
             </a:r>
             <a:endParaRPr lang="en-US" sz="1700" dirty="0"/>
           </a:p>
@@ -3165,7 +3165,7 @@
                 <a:ea typeface="Tajawal" pitchFamily="34" charset="-122"/>
                 <a:cs typeface="Tajawal" pitchFamily="34" charset="-120"/>
               </a:rPr>
-              <a:t>يحوّل أي صورة إلى بصمة رقمية. والصورتان المتشابهتان تعطيان بصمتين متقاربتين.</a:t>
+              <a:t>فهرس بصمات من تصويرنا الميداني، وعليه طبقة قرار تقارن وتحكم — تعلّم انتقالي بالأمثلة.</a:t>
             </a:r>
             <a:endParaRPr lang="en-US" sz="1400" dirty="0"/>
           </a:p>
@@ -3204,7 +3204,7 @@
                 <a:ea typeface="Tajawal" pitchFamily="34" charset="-122"/>
                 <a:cs typeface="Tajawal" pitchFamily="34" charset="-120"/>
               </a:rPr>
-              <a:t>كيف نستخدمه؟</a:t>
+              <a:t>والفرق</a:t>
             </a:r>
             <a:endParaRPr lang="en-US" sz="1700" dirty="0"/>
           </a:p>
@@ -3246,7 +3246,7 @@
                 <a:ea typeface="Tajawal" pitchFamily="34" charset="-122"/>
                 <a:cs typeface="Tajawal" pitchFamily="34" charset="-120"/>
               </a:rPr>
-              <a:t>صوّرنا لوحات جبة وحفظنا بصماتها. وعند كل مسح نقارن بصمة الكاميرا بها ونختار الأقرب.</a:t>
+              <a:t>لم نغيّر أوزان الشبكة، بل غيّرنا ما تعرفه. فصار النموذج العام خبيرا بلوحات جبة.</a:t>
             </a:r>
             <a:endParaRPr lang="en-US" sz="1400" dirty="0"/>
           </a:p>
@@ -3718,7 +3718,7 @@
                 <a:ea typeface="Tajawal" pitchFamily="34" charset="-122"/>
                 <a:cs typeface="Tajawal" pitchFamily="34" charset="-120"/>
               </a:rPr>
-              <a:t>يميّز الشيء نفسه</a:t>
+              <a:t>فهرس من الميدان</a:t>
             </a:r>
             <a:endParaRPr lang="en-US" sz="1600" dirty="0"/>
           </a:p>
@@ -3757,7 +3757,7 @@
                 <a:ea typeface="Tajawal" pitchFamily="34" charset="-122"/>
                 <a:cs typeface="Tajawal" pitchFamily="34" charset="-120"/>
               </a:rPr>
-              <a:t>هذه الصخرة بالذات، لا أي صخرة</a:t>
+              <a:t>٢٠١ صورة من جبة، صارت بصمات</a:t>
             </a:r>
             <a:endParaRPr lang="en-US" sz="1200" dirty="0"/>
           </a:p>
@@ -3823,7 +3823,7 @@
                 <a:ea typeface="Tajawal" pitchFamily="34" charset="-122"/>
                 <a:cs typeface="Tajawal" pitchFamily="34" charset="-120"/>
               </a:rPr>
-              <a:t>تعلّم بلا معلّم</a:t>
+              <a:t>سلّم القصّ</a:t>
             </a:r>
             <a:endParaRPr lang="en-US" sz="1600" dirty="0"/>
           </a:p>
@@ -3862,7 +3862,7 @@
                 <a:ea typeface="Tajawal" pitchFamily="34" charset="-122"/>
                 <a:cs typeface="Tajawal" pitchFamily="34" charset="-120"/>
               </a:rPr>
-              <a:t>لم يخبره أحد ما في الصور</a:t>
+              <a:t>نجرّب كل لقطة بثلاثة مقاسات</a:t>
             </a:r>
             <a:endParaRPr lang="en-US" sz="1200" dirty="0"/>
           </a:p>
@@ -3928,7 +3928,7 @@
                 <a:ea typeface="Tajawal" pitchFamily="34" charset="-122"/>
                 <a:cs typeface="Tajawal" pitchFamily="34" charset="-120"/>
               </a:rPr>
-              <a:t>صغير</a:t>
+              <a:t>طبقة القرار</a:t>
             </a:r>
             <a:endParaRPr lang="en-US" sz="1600" dirty="0"/>
           </a:p>
@@ -3967,7 +3967,7 @@
                 <a:ea typeface="Tajawal" pitchFamily="34" charset="-122"/>
                 <a:cs typeface="Tajawal" pitchFamily="34" charset="-120"/>
               </a:rPr>
-              <a:t>يسع جوالك: ٢٢ ميغابايت</a:t>
+              <a:t>يقول: لا أعرف، بدل أن يخمّن</a:t>
             </a:r>
             <a:endParaRPr lang="en-US" sz="1200" dirty="0"/>
           </a:p>
@@ -4033,7 +4033,7 @@
                 <a:ea typeface="Tajawal" pitchFamily="34" charset="-122"/>
                 <a:cs typeface="Tajawal" pitchFamily="34" charset="-120"/>
               </a:rPr>
-              <a:t>بلا تدريب إضافي</a:t>
+              <a:t>مسح حيّ</a:t>
             </a:r>
             <a:endParaRPr lang="en-US" sz="1600" dirty="0"/>
           </a:p>
@@ -4072,7 +4072,7 @@
                 <a:ea typeface="Tajawal" pitchFamily="34" charset="-122"/>
                 <a:cs typeface="Tajawal" pitchFamily="34" charset="-120"/>
               </a:rPr>
-              <a:t>لم ير جبة من قبل، ويعرف لوحاتها</a:t>
+              <a:t>يجمع أدلة من عدة لقطات قبل الحكم</a:t>
             </a:r>
             <a:endParaRPr lang="en-US" sz="1200" dirty="0"/>
           </a:p>

--- a/athr-pitch-ar.pptx
+++ b/athr-pitch-ar.pptx
@@ -1037,7 +1037,7 @@
           <a:p>
             <a:r>
               <a:rPr lang="en-US" dirty="0"/>
-              <a:t>هذه شريحة الرحلة. اذكر أن الترتيب مقصود: الميدان أولا، ثم النموذج، ثم مقياس أمين، ثم التعلم من الزائر. ولو سأل محكّم عن الأرقام الحقيقية للدقة، فالجواب جاهز عندك شفهيا.</a:t>
+              <a:t>شريحة الرحلة، والترتيب مقصود: الميدان أولا ثم المحتوى ثم التقنية. والصوت مولّد لا مسجّل — بنماذج نطق مفتوحة: Supertonic لثماني عشرة لغة، وKokoro للصينية، وMMS-TTS لتسع. قُل ذلك صراحة إن سُئلت، فهو عمل ذكاء اصطناعي آخر لا عيب فيه. ولو سأل محكّم عن أرقام الدقة فالجواب جاهز عندك شفهيا.</a:t>
             </a:r>
             <a:endParaRPr lang="en-US" dirty="0"/>
           </a:p>
@@ -6028,7 +6028,7 @@
                 <a:ea typeface="Tajawal" pitchFamily="34" charset="-122"/>
                 <a:cs typeface="Tajawal" pitchFamily="34" charset="-120"/>
               </a:rPr>
-              <a:t>لغة، وصوت لكل قصة</a:t>
+              <a:t>لغة، ولكل لغة صوتها</a:t>
             </a:r>
             <a:endParaRPr lang="en-US" sz="1250" dirty="0"/>
           </a:p>
@@ -6043,11 +6043,11 @@
         <p:spPr>
           <a:xfrm>
             <a:off x="4343400" y="2057400"/>
-            <a:ext cx="7159752" cy="841248"/>
+            <a:ext cx="7159752" cy="685800"/>
           </a:xfrm>
           <a:prstGeom prst="roundRect">
             <a:avLst>
-              <a:gd name="adj" fmla="val 10870"/>
+              <a:gd name="adj" fmla="val 13333"/>
             </a:avLst>
           </a:prstGeom>
           <a:solidFill>
@@ -6069,24 +6069,24 @@
         </p:nvSpPr>
         <p:spPr>
           <a:xfrm>
-            <a:off x="9372600" y="2295144"/>
-            <a:ext cx="1965960" cy="365760"/>
-          </a:xfrm>
-          <a:prstGeom prst="rect">
-            <a:avLst/>
-          </a:prstGeom>
-          <a:noFill/>
-          <a:ln/>
-        </p:spPr>
-        <p:txBody>
-          <a:bodyPr wrap="square" lIns="0" tIns="0" rIns="0" bIns="0" rtlCol="0" anchor="ctr"/>
-          <a:lstStyle/>
-          <a:p>
-            <a:pPr rtl="1" algn="r" indent="0" marL="0">
-              <a:buNone/>
-            </a:pPr>
-            <a:r>
-              <a:rPr lang="en-US" sz="1800" b="1" dirty="0">
+            <a:off x="9464040" y="2231136"/>
+            <a:ext cx="1874520" cy="338328"/>
+          </a:xfrm>
+          <a:prstGeom prst="rect">
+            <a:avLst/>
+          </a:prstGeom>
+          <a:noFill/>
+          <a:ln/>
+        </p:spPr>
+        <p:txBody>
+          <a:bodyPr wrap="square" lIns="0" tIns="0" rIns="0" bIns="0" rtlCol="0" anchor="ctr"/>
+          <a:lstStyle/>
+          <a:p>
+            <a:pPr rtl="1" algn="r" indent="0" marL="0">
+              <a:buNone/>
+            </a:pPr>
+            <a:r>
+              <a:rPr lang="en-US" sz="1600" b="1" dirty="0">
                 <a:solidFill>
                   <a:srgbClr val="DD8C58"/>
                 </a:solidFill>
@@ -6096,7 +6096,7 @@
               </a:rPr>
               <a:t>الميدان</a:t>
             </a:r>
-            <a:endParaRPr lang="en-US" sz="1800" dirty="0"/>
+            <a:endParaRPr lang="en-US" sz="1600" dirty="0"/>
           </a:p>
         </p:txBody>
       </p:sp>
@@ -6108,24 +6108,24 @@
         </p:nvSpPr>
         <p:spPr>
           <a:xfrm>
-            <a:off x="4553712" y="2322576"/>
-            <a:ext cx="4617720" cy="329184"/>
-          </a:xfrm>
-          <a:prstGeom prst="rect">
-            <a:avLst/>
-          </a:prstGeom>
-          <a:noFill/>
-          <a:ln/>
-        </p:spPr>
-        <p:txBody>
-          <a:bodyPr wrap="square" lIns="0" tIns="0" rIns="0" bIns="0" rtlCol="0" anchor="ctr"/>
-          <a:lstStyle/>
-          <a:p>
-            <a:pPr rtl="1" algn="r" indent="0" marL="0">
-              <a:buNone/>
-            </a:pPr>
-            <a:r>
-              <a:rPr lang="en-US" sz="1350" dirty="0">
+            <a:off x="4553712" y="2249424"/>
+            <a:ext cx="4709160" cy="310896"/>
+          </a:xfrm>
+          <a:prstGeom prst="rect">
+            <a:avLst/>
+          </a:prstGeom>
+          <a:noFill/>
+          <a:ln/>
+        </p:spPr>
+        <p:txBody>
+          <a:bodyPr wrap="square" lIns="0" tIns="0" rIns="0" bIns="0" rtlCol="0" anchor="ctr"/>
+          <a:lstStyle/>
+          <a:p>
+            <a:pPr rtl="1" algn="r" indent="0" marL="0">
+              <a:buNone/>
+            </a:pPr>
+            <a:r>
+              <a:rPr lang="en-US" sz="1250" dirty="0">
                 <a:solidFill>
                   <a:srgbClr val="A2977F"/>
                 </a:solidFill>
@@ -6133,9 +6133,9 @@
                 <a:ea typeface="Tajawal" pitchFamily="34" charset="-122"/>
                 <a:cs typeface="Tajawal" pitchFamily="34" charset="-120"/>
               </a:rPr>
-              <a:t>زرنا جبة، وصوّرنا لوحاتها، وسجّلنا قصصها بأصواتنا.</a:t>
-            </a:r>
-            <a:endParaRPr lang="en-US" sz="1350" dirty="0"/>
+              <a:t>زرنا جبة، وصوّرنا لوحاتها، وكتبنا قصصها.</a:t>
+            </a:r>
+            <a:endParaRPr lang="en-US" sz="1250" dirty="0"/>
           </a:p>
         </p:txBody>
       </p:sp>
@@ -6147,12 +6147,12 @@
         </p:nvSpPr>
         <p:spPr>
           <a:xfrm>
-            <a:off x="4343400" y="3063240"/>
-            <a:ext cx="7159752" cy="841248"/>
+            <a:off x="4343400" y="2852928"/>
+            <a:ext cx="7159752" cy="685800"/>
           </a:xfrm>
           <a:prstGeom prst="roundRect">
             <a:avLst>
-              <a:gd name="adj" fmla="val 10870"/>
+              <a:gd name="adj" fmla="val 13333"/>
             </a:avLst>
           </a:prstGeom>
           <a:solidFill>
@@ -6174,24 +6174,24 @@
         </p:nvSpPr>
         <p:spPr>
           <a:xfrm>
-            <a:off x="9372600" y="3300984"/>
-            <a:ext cx="1965960" cy="365760"/>
-          </a:xfrm>
-          <a:prstGeom prst="rect">
-            <a:avLst/>
-          </a:prstGeom>
-          <a:noFill/>
-          <a:ln/>
-        </p:spPr>
-        <p:txBody>
-          <a:bodyPr wrap="square" lIns="0" tIns="0" rIns="0" bIns="0" rtlCol="0" anchor="ctr"/>
-          <a:lstStyle/>
-          <a:p>
-            <a:pPr rtl="1" algn="r" indent="0" marL="0">
-              <a:buNone/>
-            </a:pPr>
-            <a:r>
-              <a:rPr lang="en-US" sz="1800" b="1" dirty="0">
+            <a:off x="9464040" y="3026664"/>
+            <a:ext cx="1874520" cy="338328"/>
+          </a:xfrm>
+          <a:prstGeom prst="rect">
+            <a:avLst/>
+          </a:prstGeom>
+          <a:noFill/>
+          <a:ln/>
+        </p:spPr>
+        <p:txBody>
+          <a:bodyPr wrap="square" lIns="0" tIns="0" rIns="0" bIns="0" rtlCol="0" anchor="ctr"/>
+          <a:lstStyle/>
+          <a:p>
+            <a:pPr rtl="1" algn="r" indent="0" marL="0">
+              <a:buNone/>
+            </a:pPr>
+            <a:r>
+              <a:rPr lang="en-US" sz="1600" b="1" dirty="0">
                 <a:solidFill>
                   <a:srgbClr val="DD8C58"/>
                 </a:solidFill>
@@ -6199,9 +6199,9 @@
                 <a:ea typeface="Tajawal" pitchFamily="34" charset="-122"/>
                 <a:cs typeface="Tajawal" pitchFamily="34" charset="-120"/>
               </a:rPr>
-              <a:t>النموذج</a:t>
-            </a:r>
-            <a:endParaRPr lang="en-US" sz="1800" dirty="0"/>
+              <a:t>الترجمة</a:t>
+            </a:r>
+            <a:endParaRPr lang="en-US" sz="1600" dirty="0"/>
           </a:p>
         </p:txBody>
       </p:sp>
@@ -6213,24 +6213,24 @@
         </p:nvSpPr>
         <p:spPr>
           <a:xfrm>
-            <a:off x="4553712" y="3328416"/>
-            <a:ext cx="4617720" cy="329184"/>
-          </a:xfrm>
-          <a:prstGeom prst="rect">
-            <a:avLst/>
-          </a:prstGeom>
-          <a:noFill/>
-          <a:ln/>
-        </p:spPr>
-        <p:txBody>
-          <a:bodyPr wrap="square" lIns="0" tIns="0" rIns="0" bIns="0" rtlCol="0" anchor="ctr"/>
-          <a:lstStyle/>
-          <a:p>
-            <a:pPr rtl="1" algn="r" indent="0" marL="0">
-              <a:buNone/>
-            </a:pPr>
-            <a:r>
-              <a:rPr lang="en-US" sz="1350" dirty="0">
+            <a:off x="4553712" y="3044952"/>
+            <a:ext cx="4709160" cy="310896"/>
+          </a:xfrm>
+          <a:prstGeom prst="rect">
+            <a:avLst/>
+          </a:prstGeom>
+          <a:noFill/>
+          <a:ln/>
+        </p:spPr>
+        <p:txBody>
+          <a:bodyPr wrap="square" lIns="0" tIns="0" rIns="0" bIns="0" rtlCol="0" anchor="ctr"/>
+          <a:lstStyle/>
+          <a:p>
+            <a:pPr rtl="1" algn="r" indent="0" marL="0">
+              <a:buNone/>
+            </a:pPr>
+            <a:r>
+              <a:rPr lang="en-US" sz="1250" dirty="0">
                 <a:solidFill>
                   <a:srgbClr val="A2977F"/>
                 </a:solidFill>
@@ -6238,9 +6238,9 @@
                 <a:ea typeface="Tajawal" pitchFamily="34" charset="-122"/>
                 <a:cs typeface="Tajawal" pitchFamily="34" charset="-120"/>
               </a:rPr>
-              <a:t>شغّلنا التعرّف داخل المتصفح نفسه: لا خادم ولا إنترنت.</a:t>
-            </a:r>
-            <a:endParaRPr lang="en-US" sz="1350" dirty="0"/>
+              <a:t>نقلنا كل قصة إلى تسع وعشرين لغة.</a:t>
+            </a:r>
+            <a:endParaRPr lang="en-US" sz="1250" dirty="0"/>
           </a:p>
         </p:txBody>
       </p:sp>
@@ -6252,12 +6252,12 @@
         </p:nvSpPr>
         <p:spPr>
           <a:xfrm>
-            <a:off x="4343400" y="4069080"/>
-            <a:ext cx="7159752" cy="841248"/>
+            <a:off x="4343400" y="3648456"/>
+            <a:ext cx="7159752" cy="685800"/>
           </a:xfrm>
           <a:prstGeom prst="roundRect">
             <a:avLst>
-              <a:gd name="adj" fmla="val 10870"/>
+              <a:gd name="adj" fmla="val 13333"/>
             </a:avLst>
           </a:prstGeom>
           <a:solidFill>
@@ -6279,24 +6279,24 @@
         </p:nvSpPr>
         <p:spPr>
           <a:xfrm>
-            <a:off x="9372600" y="4306824"/>
-            <a:ext cx="1965960" cy="365760"/>
-          </a:xfrm>
-          <a:prstGeom prst="rect">
-            <a:avLst/>
-          </a:prstGeom>
-          <a:noFill/>
-          <a:ln/>
-        </p:spPr>
-        <p:txBody>
-          <a:bodyPr wrap="square" lIns="0" tIns="0" rIns="0" bIns="0" rtlCol="0" anchor="ctr"/>
-          <a:lstStyle/>
-          <a:p>
-            <a:pPr rtl="1" algn="r" indent="0" marL="0">
-              <a:buNone/>
-            </a:pPr>
-            <a:r>
-              <a:rPr lang="en-US" sz="1800" b="1" dirty="0">
+            <a:off x="9464040" y="3822192"/>
+            <a:ext cx="1874520" cy="338328"/>
+          </a:xfrm>
+          <a:prstGeom prst="rect">
+            <a:avLst/>
+          </a:prstGeom>
+          <a:noFill/>
+          <a:ln/>
+        </p:spPr>
+        <p:txBody>
+          <a:bodyPr wrap="square" lIns="0" tIns="0" rIns="0" bIns="0" rtlCol="0" anchor="ctr"/>
+          <a:lstStyle/>
+          <a:p>
+            <a:pPr rtl="1" algn="r" indent="0" marL="0">
+              <a:buNone/>
+            </a:pPr>
+            <a:r>
+              <a:rPr lang="en-US" sz="1600" b="1" dirty="0">
                 <a:solidFill>
                   <a:srgbClr val="DD8C58"/>
                 </a:solidFill>
@@ -6304,9 +6304,9 @@
                 <a:ea typeface="Tajawal" pitchFamily="34" charset="-122"/>
                 <a:cs typeface="Tajawal" pitchFamily="34" charset="-120"/>
               </a:rPr>
-              <a:t>الميزان</a:t>
-            </a:r>
-            <a:endParaRPr lang="en-US" sz="1800" dirty="0"/>
+              <a:t>الصوت</a:t>
+            </a:r>
+            <a:endParaRPr lang="en-US" sz="1600" dirty="0"/>
           </a:p>
         </p:txBody>
       </p:sp>
@@ -6318,24 +6318,24 @@
         </p:nvSpPr>
         <p:spPr>
           <a:xfrm>
-            <a:off x="4553712" y="4334256"/>
-            <a:ext cx="4617720" cy="329184"/>
-          </a:xfrm>
-          <a:prstGeom prst="rect">
-            <a:avLst/>
-          </a:prstGeom>
-          <a:noFill/>
-          <a:ln/>
-        </p:spPr>
-        <p:txBody>
-          <a:bodyPr wrap="square" lIns="0" tIns="0" rIns="0" bIns="0" rtlCol="0" anchor="ctr"/>
-          <a:lstStyle/>
-          <a:p>
-            <a:pPr rtl="1" algn="r" indent="0" marL="0">
-              <a:buNone/>
-            </a:pPr>
-            <a:r>
-              <a:rPr lang="en-US" sz="1350" dirty="0">
+            <a:off x="4553712" y="3840480"/>
+            <a:ext cx="4709160" cy="310896"/>
+          </a:xfrm>
+          <a:prstGeom prst="rect">
+            <a:avLst/>
+          </a:prstGeom>
+          <a:noFill/>
+          <a:ln/>
+        </p:spPr>
+        <p:txBody>
+          <a:bodyPr wrap="square" lIns="0" tIns="0" rIns="0" bIns="0" rtlCol="0" anchor="ctr"/>
+          <a:lstStyle/>
+          <a:p>
+            <a:pPr rtl="1" algn="r" indent="0" marL="0">
+              <a:buNone/>
+            </a:pPr>
+            <a:r>
+              <a:rPr lang="en-US" sz="1250" dirty="0">
                 <a:solidFill>
                   <a:srgbClr val="A2977F"/>
                 </a:solidFill>
@@ -6343,9 +6343,9 @@
                 <a:ea typeface="Tajawal" pitchFamily="34" charset="-122"/>
                 <a:cs typeface="Tajawal" pitchFamily="34" charset="-120"/>
               </a:rPr>
-              <a:t>بنينا اختبارا يقيس الدقة على صور جديدة، لا على صور التدريب.</a:t>
-            </a:r>
-            <a:endParaRPr lang="en-US" sz="1350" dirty="0"/>
+              <a:t>ولّدنا الرواية المسموعة بنماذج نطق مفتوحة، لكل لغة صوتها.</a:t>
+            </a:r>
+            <a:endParaRPr lang="en-US" sz="1250" dirty="0"/>
           </a:p>
         </p:txBody>
       </p:sp>
@@ -6357,12 +6357,12 @@
         </p:nvSpPr>
         <p:spPr>
           <a:xfrm>
-            <a:off x="4343400" y="5074920"/>
-            <a:ext cx="7159752" cy="841248"/>
+            <a:off x="4343400" y="4443984"/>
+            <a:ext cx="7159752" cy="685800"/>
           </a:xfrm>
           <a:prstGeom prst="roundRect">
             <a:avLst>
-              <a:gd name="adj" fmla="val 10870"/>
+              <a:gd name="adj" fmla="val 13333"/>
             </a:avLst>
           </a:prstGeom>
           <a:solidFill>
@@ -6384,24 +6384,24 @@
         </p:nvSpPr>
         <p:spPr>
           <a:xfrm>
-            <a:off x="9372600" y="5312664"/>
-            <a:ext cx="1965960" cy="365760"/>
-          </a:xfrm>
-          <a:prstGeom prst="rect">
-            <a:avLst/>
-          </a:prstGeom>
-          <a:noFill/>
-          <a:ln/>
-        </p:spPr>
-        <p:txBody>
-          <a:bodyPr wrap="square" lIns="0" tIns="0" rIns="0" bIns="0" rtlCol="0" anchor="ctr"/>
-          <a:lstStyle/>
-          <a:p>
-            <a:pPr rtl="1" algn="r" indent="0" marL="0">
-              <a:buNone/>
-            </a:pPr>
-            <a:r>
-              <a:rPr lang="en-US" sz="1800" b="1" dirty="0">
+            <a:off x="9464040" y="4617720"/>
+            <a:ext cx="1874520" cy="338328"/>
+          </a:xfrm>
+          <a:prstGeom prst="rect">
+            <a:avLst/>
+          </a:prstGeom>
+          <a:noFill/>
+          <a:ln/>
+        </p:spPr>
+        <p:txBody>
+          <a:bodyPr wrap="square" lIns="0" tIns="0" rIns="0" bIns="0" rtlCol="0" anchor="ctr"/>
+          <a:lstStyle/>
+          <a:p>
+            <a:pPr rtl="1" algn="r" indent="0" marL="0">
+              <a:buNone/>
+            </a:pPr>
+            <a:r>
+              <a:rPr lang="en-US" sz="1600" b="1" dirty="0">
                 <a:solidFill>
                   <a:srgbClr val="DD8C58"/>
                 </a:solidFill>
@@ -6409,38 +6409,143 @@
                 <a:ea typeface="Tajawal" pitchFamily="34" charset="-122"/>
                 <a:cs typeface="Tajawal" pitchFamily="34" charset="-120"/>
               </a:rPr>
+              <a:t>التعرّف</a:t>
+            </a:r>
+            <a:endParaRPr lang="en-US" sz="1600" dirty="0"/>
+          </a:p>
+        </p:txBody>
+      </p:sp>
+      <p:sp>
+        <p:nvSpPr>
+          <p:cNvPr id="24" name="Text 21"/>
+          <p:cNvSpPr/>
+          <p:nvPr/>
+        </p:nvSpPr>
+        <p:spPr>
+          <a:xfrm>
+            <a:off x="4553712" y="4636008"/>
+            <a:ext cx="4709160" cy="310896"/>
+          </a:xfrm>
+          <a:prstGeom prst="rect">
+            <a:avLst/>
+          </a:prstGeom>
+          <a:noFill/>
+          <a:ln/>
+        </p:spPr>
+        <p:txBody>
+          <a:bodyPr wrap="square" lIns="0" tIns="0" rIns="0" bIns="0" rtlCol="0" anchor="ctr"/>
+          <a:lstStyle/>
+          <a:p>
+            <a:pPr rtl="1" algn="r" indent="0" marL="0">
+              <a:buNone/>
+            </a:pPr>
+            <a:r>
+              <a:rPr lang="en-US" sz="1250" dirty="0">
+                <a:solidFill>
+                  <a:srgbClr val="A2977F"/>
+                </a:solidFill>
+                <a:latin typeface="Tajawal" pitchFamily="34" charset="0"/>
+                <a:ea typeface="Tajawal" pitchFamily="34" charset="-122"/>
+                <a:cs typeface="Tajawal" pitchFamily="34" charset="-120"/>
+              </a:rPr>
+              <a:t>شغّلنا المسح داخل المتصفح نفسه: لا خادم ولا إنترنت.</a:t>
+            </a:r>
+            <a:endParaRPr lang="en-US" sz="1250" dirty="0"/>
+          </a:p>
+        </p:txBody>
+      </p:sp>
+      <p:sp>
+        <p:nvSpPr>
+          <p:cNvPr id="25" name="Shape 22"/>
+          <p:cNvSpPr/>
+          <p:nvPr/>
+        </p:nvSpPr>
+        <p:spPr>
+          <a:xfrm>
+            <a:off x="4343400" y="5239512"/>
+            <a:ext cx="7159752" cy="685800"/>
+          </a:xfrm>
+          <a:prstGeom prst="roundRect">
+            <a:avLst>
+              <a:gd name="adj" fmla="val 13333"/>
+            </a:avLst>
+          </a:prstGeom>
+          <a:solidFill>
+            <a:srgbClr val="151D2C"/>
+          </a:solidFill>
+          <a:ln w="12700">
+            <a:solidFill>
+              <a:srgbClr val="232D42"/>
+            </a:solidFill>
+            <a:prstDash val="solid"/>
+          </a:ln>
+        </p:spPr>
+      </p:sp>
+      <p:sp>
+        <p:nvSpPr>
+          <p:cNvPr id="26" name="Text 23"/>
+          <p:cNvSpPr/>
+          <p:nvPr/>
+        </p:nvSpPr>
+        <p:spPr>
+          <a:xfrm>
+            <a:off x="9464040" y="5413248"/>
+            <a:ext cx="1874520" cy="338328"/>
+          </a:xfrm>
+          <a:prstGeom prst="rect">
+            <a:avLst/>
+          </a:prstGeom>
+          <a:noFill/>
+          <a:ln/>
+        </p:spPr>
+        <p:txBody>
+          <a:bodyPr wrap="square" lIns="0" tIns="0" rIns="0" bIns="0" rtlCol="0" anchor="ctr"/>
+          <a:lstStyle/>
+          <a:p>
+            <a:pPr rtl="1" algn="r" indent="0" marL="0">
+              <a:buNone/>
+            </a:pPr>
+            <a:r>
+              <a:rPr lang="en-US" sz="1600" b="1" dirty="0">
+                <a:solidFill>
+                  <a:srgbClr val="DD8C58"/>
+                </a:solidFill>
+                <a:latin typeface="Tajawal" pitchFamily="34" charset="0"/>
+                <a:ea typeface="Tajawal" pitchFamily="34" charset="-122"/>
+                <a:cs typeface="Tajawal" pitchFamily="34" charset="-120"/>
+              </a:rPr>
               <a:t>التعلّم</a:t>
             </a:r>
-            <a:endParaRPr lang="en-US" sz="1800" dirty="0"/>
-          </a:p>
-        </p:txBody>
-      </p:sp>
-      <p:sp>
-        <p:nvSpPr>
-          <p:cNvPr id="24" name="Text 21"/>
-          <p:cNvSpPr/>
-          <p:nvPr/>
-        </p:nvSpPr>
-        <p:spPr>
-          <a:xfrm>
-            <a:off x="4553712" y="5340096"/>
-            <a:ext cx="4617720" cy="329184"/>
-          </a:xfrm>
-          <a:prstGeom prst="rect">
-            <a:avLst/>
-          </a:prstGeom>
-          <a:noFill/>
-          <a:ln/>
-        </p:spPr>
-        <p:txBody>
-          <a:bodyPr wrap="square" lIns="0" tIns="0" rIns="0" bIns="0" rtlCol="0" anchor="ctr"/>
-          <a:lstStyle/>
-          <a:p>
-            <a:pPr rtl="1" algn="r" indent="0" marL="0">
-              <a:buNone/>
-            </a:pPr>
-            <a:r>
-              <a:rPr lang="en-US" sz="1350" dirty="0">
+            <a:endParaRPr lang="en-US" sz="1600" dirty="0"/>
+          </a:p>
+        </p:txBody>
+      </p:sp>
+      <p:sp>
+        <p:nvSpPr>
+          <p:cNvPr id="27" name="Text 24"/>
+          <p:cNvSpPr/>
+          <p:nvPr/>
+        </p:nvSpPr>
+        <p:spPr>
+          <a:xfrm>
+            <a:off x="4553712" y="5431536"/>
+            <a:ext cx="4709160" cy="310896"/>
+          </a:xfrm>
+          <a:prstGeom prst="rect">
+            <a:avLst/>
+          </a:prstGeom>
+          <a:noFill/>
+          <a:ln/>
+        </p:spPr>
+        <p:txBody>
+          <a:bodyPr wrap="square" lIns="0" tIns="0" rIns="0" bIns="0" rtlCol="0" anchor="ctr"/>
+          <a:lstStyle/>
+          <a:p>
+            <a:pPr rtl="1" algn="r" indent="0" marL="0">
+              <a:buNone/>
+            </a:pPr>
+            <a:r>
+              <a:rPr lang="en-US" sz="1250" dirty="0">
                 <a:solidFill>
                   <a:srgbClr val="A2977F"/>
                 </a:solidFill>
@@ -6450,7 +6555,7 @@
               </a:rPr>
               <a:t>أضفنا تصحيح الزائر، فصار يتحسن كلما استعمله أحد.</a:t>
             </a:r>
-            <a:endParaRPr lang="en-US" sz="1350" dirty="0"/>
+            <a:endParaRPr lang="en-US" sz="1250" dirty="0"/>
           </a:p>
         </p:txBody>
       </p:sp>

--- a/athr-pitch-ar.pptx
+++ b/athr-pitch-ar.pptx
@@ -597,7 +597,7 @@
           <a:p>
             <a:r>
               <a:rPr lang="en-US" dirty="0"/>
-              <a:t>ثلاثة أسئلة يحملها الزائر، وثلاثتها تُجاب في الشريحة التالية: أي لوحة، وبأي لغة، وبلا شبكة.</a:t>
+              <a:t>ثلاثة أسئلة يحملها الزائر، وثلاثتها تُجاب في الشريحة التالية: أي نقش، وبأي لغة، وبلا شبكة.</a:t>
             </a:r>
             <a:endParaRPr lang="en-US" dirty="0"/>
           </a:p>
@@ -949,7 +949,7 @@
           <a:p>
             <a:r>
               <a:rPr lang="en-US" dirty="0"/>
-              <a:t>اعرضه حيا: امسح، صحّح، امسح مرة أخرى. عشر ثوان يرون فيها التعلم يقع. وإن سُئلت: النموذج غير بارامتري (k-NN)، وأوزان الشبكة لا تتغير — الذي يتغير هو ما يعرفه عن لوحات جبة.</a:t>
+              <a:t>اعرضه حيا: امسح، صحّح، امسح مرة أخرى. عشر ثوان يرون فيها التعلم يقع. وإن سُئلت: النموذج غير بارامتري (k-NN)، وأوزان الشبكة لا تتغير — الذي يتغير هو ما يعرفه عن نقوش جبة.</a:t>
             </a:r>
             <a:endParaRPr lang="en-US" dirty="0"/>
           </a:p>
@@ -1884,7 +1884,7 @@
                 <a:ea typeface="Tajawal" pitchFamily="34" charset="-122"/>
                 <a:cs typeface="Tajawal" pitchFamily="34" charset="-120"/>
               </a:rPr>
-              <a:t>أي لوحة هذه؟</a:t>
+              <a:t>أي نقش هذا؟</a:t>
             </a:r>
             <a:endParaRPr lang="en-US" sz="2100" dirty="0"/>
           </a:p>
@@ -1926,7 +1926,7 @@
                 <a:ea typeface="Tajawal" pitchFamily="34" charset="-122"/>
                 <a:cs typeface="Tajawal" pitchFamily="34" charset="-120"/>
               </a:rPr>
-              <a:t>جدار واحد يحمل مئات اللوحات، ولكل واحدة قصتها وزمنها.</a:t>
+              <a:t>جدار واحد يحمل مئات النقوش، ولكل واحد منها قصته وزمنه.</a:t>
             </a:r>
             <a:endParaRPr lang="en-US" sz="1400" dirty="0"/>
           </a:p>
@@ -2590,7 +2590,7 @@
                 <a:ea typeface="Tajawal" pitchFamily="34" charset="-122"/>
                 <a:cs typeface="Tajawal" pitchFamily="34" charset="-120"/>
               </a:rPr>
-              <a:t>يقول لك اسم اللوحة التي أمامك بعينها، لا أنها نقوش صخرية فقط.</a:t>
+              <a:t>يقول لك اسم النقش الذي أمامك بعينه، لا أنه نقش صخري فحسب.</a:t>
             </a:r>
             <a:endParaRPr lang="en-US" sz="1350" dirty="0"/>
           </a:p>
@@ -2854,7 +2854,7 @@
                 <a:ea typeface="Tajawal" pitchFamily="34" charset="-122"/>
                 <a:cs typeface="Tajawal" pitchFamily="34" charset="-120"/>
               </a:rPr>
-              <a:t>لوحات موثقة</a:t>
+              <a:t>نقوش موثقة</a:t>
             </a:r>
             <a:endParaRPr lang="en-US" sz="1300" dirty="0"/>
           </a:p>
@@ -3246,7 +3246,7 @@
                 <a:ea typeface="Tajawal" pitchFamily="34" charset="-122"/>
                 <a:cs typeface="Tajawal" pitchFamily="34" charset="-120"/>
               </a:rPr>
-              <a:t>لم نغيّر أوزان الشبكة، بل غيّرنا ما تعرفه. فصار النموذج العام خبيرا بلوحات جبة.</a:t>
+              <a:t>لم نغيّر أوزان الشبكة، بل غيّرنا ما تعرفه. فصار النموذج العام خبيرا بنقوش جبة.</a:t>
             </a:r>
             <a:endParaRPr lang="en-US" sz="1400" dirty="0"/>
           </a:p>
@@ -3652,7 +3652,7 @@
                 <a:ea typeface="Tajawal" pitchFamily="34" charset="-122"/>
                 <a:cs typeface="Tajawal" pitchFamily="34" charset="-120"/>
               </a:rPr>
-              <a:t>أقرب لوحة في الفهرس</a:t>
+              <a:t>أقرب نقش في الفهرس</a:t>
             </a:r>
             <a:endParaRPr lang="en-US" sz="950" dirty="0"/>
           </a:p>
@@ -5035,7 +5035,7 @@
                 <a:ea typeface="Tajawal" pitchFamily="34" charset="-122"/>
                 <a:cs typeface="Tajawal" pitchFamily="34" charset="-120"/>
               </a:rPr>
-              <a:t>فيسمي اللوحة</a:t>
+              <a:t>فيسمي النقش</a:t>
             </a:r>
             <a:endParaRPr lang="en-US" sz="1300" dirty="0"/>
           </a:p>
@@ -6133,7 +6133,7 @@
                 <a:ea typeface="Tajawal" pitchFamily="34" charset="-122"/>
                 <a:cs typeface="Tajawal" pitchFamily="34" charset="-120"/>
               </a:rPr>
-              <a:t>زرنا جبة، وصوّرنا لوحاتها، وكتبنا قصصها.</a:t>
+              <a:t>زرنا جبة، وصوّرنا نقوشها، وكتبنا قصصها.</a:t>
             </a:r>
             <a:endParaRPr lang="en-US" sz="1250" dirty="0"/>
           </a:p>

--- a/athr-pitch-ar.pptx
+++ b/athr-pitch-ar.pptx
@@ -597,7 +597,7 @@
           <a:p>
             <a:r>
               <a:rPr lang="en-US" dirty="0"/>
-              <a:t>ثلاثة أسئلة يحملها الزائر، وثلاثتها تُجاب في الشريحة التالية: أي نقش، وبأي لغة، وبلا شبكة.</a:t>
+              <a:t>ثلاثة أسئلة يحملها السائح، وثلاثتها تُجاب في الشريحة التالية: أي نقش، وبأي لغة، وبلا شبكة.</a:t>
             </a:r>
             <a:endParaRPr lang="en-US" dirty="0"/>
           </a:p>
@@ -773,7 +773,7 @@
           <a:p>
             <a:r>
               <a:rPr lang="en-US" dirty="0"/>
-              <a:t>النموذج DINOv3 من Meta، مفتوح المصدر. وكن دقيقا لو سُئلت: لم نضبط أوزان الشبكة (no fine-tuning). ما بنيناه هو طبقة التعرّف فوقها: الفهرس الميداني، وسلّم القصّ الذي يعالج اختلاف الإطار، وطبقة العتبة والهامش المعايرة على ٥٣ صورة سالبة، وجمع أدلة اللقطات في المسح الحي، والتعلّم من تصحيح الزائر. وهذا هو التعلّم الانتقالي بالأمثلة، وهو ما تفعله محركات البحث بالصور.</a:t>
+              <a:t>النموذج DINOv3 من Meta، مفتوح المصدر. وكن دقيقا لو سُئلت: لم نضبط أوزان الشبكة (no fine-tuning). ما بنيناه هو طبقة التعرّف فوقها: الفهرس الميداني، وسلّم القصّ الذي يعالج اختلاف الإطار، وطبقة العتبة والهامش المعايرة على ٥٣ صورة سالبة، وجمع أدلة اللقطات في المسح الحي، والتعلّم من تصحيح السائح. وهذا هو التعلّم الانتقالي بالأمثلة، وهو ما تفعله محركات البحث بالصور.</a:t>
             </a:r>
             <a:endParaRPr lang="en-US" dirty="0"/>
           </a:p>
@@ -1755,7 +1755,7 @@
                 <a:ea typeface="Tajawal" pitchFamily="34" charset="-122"/>
                 <a:cs typeface="Tajawal" pitchFamily="34" charset="-120"/>
               </a:rPr>
-              <a:t>زائر يقف أمام نقش</a:t>
+              <a:t>سائح يقف أمام نقش</a:t>
             </a:r>
             <a:endParaRPr lang="en-US" sz="3800" dirty="0"/>
           </a:p>
@@ -2058,7 +2058,7 @@
                 <a:ea typeface="Tajawal" pitchFamily="34" charset="-122"/>
                 <a:cs typeface="Tajawal" pitchFamily="34" charset="-120"/>
               </a:rPr>
-              <a:t>زوار جبة من كل مكان، والقصة تصل حين يسمعها الزائر بلغته.</a:t>
+              <a:t>سياح جبة من كل مكان، والقصة تصل حين يسمعها السائح بلغته.</a:t>
             </a:r>
             <a:endParaRPr lang="en-US" sz="1400" dirty="0"/>
           </a:p>
@@ -3336,7 +3336,7 @@
                 <a:ea typeface="Tajawal" pitchFamily="34" charset="-122"/>
                 <a:cs typeface="Tajawal" pitchFamily="34" charset="-120"/>
               </a:rPr>
-              <a:t>ما تراه الكاميرا</a:t>
+              <a:t>السائح يصور النقش</a:t>
             </a:r>
             <a:endParaRPr lang="en-US" sz="950" dirty="0"/>
           </a:p>
@@ -3523,7 +3523,7 @@
                 <a:ea typeface="Tajawal" pitchFamily="34" charset="-122"/>
                 <a:cs typeface="Tajawal" pitchFamily="34" charset="-120"/>
               </a:rPr>
-              <a:t>٣٨٤ رقما — بصمة الصورة</a:t>
+              <a:t>النموذج يلخص شكله في أرقام</a:t>
             </a:r>
             <a:endParaRPr lang="en-US" sz="950" dirty="0"/>
           </a:p>
@@ -3652,7 +3652,7 @@
                 <a:ea typeface="Tajawal" pitchFamily="34" charset="-122"/>
                 <a:cs typeface="Tajawal" pitchFamily="34" charset="-120"/>
               </a:rPr>
-              <a:t>أقرب نقش في الفهرس</a:t>
+              <a:t>يطابقها بنقوش جبة فيعرف اسمه</a:t>
             </a:r>
             <a:endParaRPr lang="en-US" sz="950" dirty="0"/>
           </a:p>
@@ -4766,7 +4766,7 @@
                 <a:ea typeface="Tajawal" pitchFamily="34" charset="-122"/>
                 <a:cs typeface="Tajawal" pitchFamily="34" charset="-120"/>
               </a:rPr>
-              <a:t>تكلفة لكل زائر: واحد أو مليون</a:t>
+              <a:t>تكلفة لكل سائح: واحد أو مليون</a:t>
             </a:r>
             <a:endParaRPr lang="en-US" sz="1300" dirty="0"/>
           </a:p>
@@ -4927,7 +4927,7 @@
                 <a:ea typeface="Tajawal" pitchFamily="34" charset="-122"/>
                 <a:cs typeface="Tajawal" pitchFamily="34" charset="-120"/>
               </a:rPr>
-              <a:t>كل تصحيح من الزائر مثال جديد يدخل النموذج، فيتغير قراره فورا.</a:t>
+              <a:t>كل تصحيح من السائح مثال جديد يدخل النموذج، فيتغير قراره فورا.</a:t>
             </a:r>
             <a:endParaRPr lang="en-US" sz="1650" dirty="0"/>
           </a:p>
@@ -5467,7 +5467,7 @@
                 <a:ea typeface="Tajawal" pitchFamily="34" charset="-122"/>
                 <a:cs typeface="Tajawal" pitchFamily="34" charset="-120"/>
               </a:rPr>
-              <a:t>كل صورنا المرجعية من زيارة واحدة: يوم واحد، وجوال واحد، وإضاءة واحدة. وتصحيح الزائر صورة من يوم آخر وجهاز آخر، وهذا بالضبط ما ينقص الفهرس.</a:t>
+              <a:t>كل صورنا المرجعية من زيارة واحدة: يوم واحد، وجوال واحد، وإضاءة واحدة. وتصحيح السائح صورة من يوم آخر وجهاز آخر، وهذا بالضبط ما ينقص الفهرس.</a:t>
             </a:r>
             <a:endParaRPr lang="en-US" sz="1400" dirty="0"/>
           </a:p>
@@ -5697,7 +5697,7 @@
                 <a:ea typeface="Tajawal" pitchFamily="34" charset="-122"/>
                 <a:cs typeface="Tajawal" pitchFamily="34" charset="-120"/>
               </a:rPr>
-              <a:t>من زيارة ميدانية إلى تطبيق يعمل في يد الزائر</a:t>
+              <a:t>من زيارة ميدانية إلى تطبيق يعمل في يد السائح</a:t>
             </a:r>
             <a:endParaRPr lang="en-US" sz="1800" dirty="0"/>
           </a:p>
@@ -6553,7 +6553,7 @@
                 <a:ea typeface="Tajawal" pitchFamily="34" charset="-122"/>
                 <a:cs typeface="Tajawal" pitchFamily="34" charset="-120"/>
               </a:rPr>
-              <a:t>أضفنا تصحيح الزائر، فصار يتحسن كلما استعمله أحد.</a:t>
+              <a:t>أضفنا تصحيح السائح، فصار يتحسن كلما استعمله أحد.</a:t>
             </a:r>
             <a:endParaRPr lang="en-US" sz="1250" dirty="0"/>
           </a:p>
@@ -6969,7 +6969,7 @@
                 <a:ea typeface="Tajawal" pitchFamily="34" charset="-122"/>
                 <a:cs typeface="Tajawal" pitchFamily="34" charset="-120"/>
               </a:rPr>
-              <a:t>لكل زائر لغته</a:t>
+              <a:t>لكل سائح لغته</a:t>
             </a:r>
             <a:endParaRPr lang="en-US" sz="1200" dirty="0"/>
           </a:p>

--- a/athr-pitch-ar.pptx
+++ b/athr-pitch-ar.pptx
@@ -3084,7 +3084,7 @@
                 <a:ea typeface="Tajawal" pitchFamily="34" charset="-122"/>
                 <a:cs typeface="Tajawal" pitchFamily="34" charset="-120"/>
               </a:rPr>
-              <a:t>شبكة رؤية مفتوحة تعلّمت الأشكال والملمس من ملايين الصور دون وسوم بشرية — تعلّم ذاتي الإشراف.</a:t>
+              <a:t>شبكة رؤية مفتوحة تدرّبت على ملايين الصور حتى صارت تميّز الأشكال والتفاصيل وحدها.</a:t>
             </a:r>
             <a:endParaRPr lang="en-US" sz="1400" dirty="0"/>
           </a:p>
@@ -3652,7 +3652,7 @@
                 <a:ea typeface="Tajawal" pitchFamily="34" charset="-122"/>
                 <a:cs typeface="Tajawal" pitchFamily="34" charset="-120"/>
               </a:rPr>
-              <a:t>يطابقها بنقوش جبة فيعرف اسمه</a:t>
+              <a:t>يطابقها بالنقوش فيعرف اسمه</a:t>
             </a:r>
             <a:endParaRPr lang="en-US" sz="950" dirty="0"/>
           </a:p>
